--- a/Presentation1.pptx
+++ b/Presentation1.pptx
@@ -7,6 +7,7 @@
   <p:sldIdLst>
     <p:sldId id="256" r:id="rId2"/>
     <p:sldId id="257" r:id="rId3"/>
+    <p:sldId id="258" r:id="rId4"/>
   </p:sldIdLst>
   <p:sldSz cx="12192000" cy="6858000"/>
   <p:notesSz cx="6858000" cy="9144000"/>
@@ -105,6 +106,11 @@
       </a:defRPr>
     </a:lvl9pPr>
   </p:defaultTextStyle>
+  <p:extLst>
+    <p:ext uri="{EFAFB233-063F-42B5-8137-9DF3F51BA10A}">
+      <p15:sldGuideLst xmlns:p15="http://schemas.microsoft.com/office/powerpoint/2012/main"/>
+    </p:ext>
+  </p:extLst>
 </p:presentation>
 </file>
 
@@ -257,7 +263,7 @@
           <a:p>
             <a:fld id="{ED0FC01E-52E7-E248-9225-B6E184C589D0}" type="datetimeFigureOut">
               <a:rPr lang="en-US" smtClean="0"/>
-              <a:t>11/17/24</a:t>
+              <a:t>11/18/2024</a:t>
             </a:fld>
             <a:endParaRPr lang="en-US"/>
           </a:p>
@@ -457,7 +463,7 @@
           <a:p>
             <a:fld id="{ED0FC01E-52E7-E248-9225-B6E184C589D0}" type="datetimeFigureOut">
               <a:rPr lang="en-US" smtClean="0"/>
-              <a:t>11/17/24</a:t>
+              <a:t>11/18/2024</a:t>
             </a:fld>
             <a:endParaRPr lang="en-US"/>
           </a:p>
@@ -667,7 +673,7 @@
           <a:p>
             <a:fld id="{ED0FC01E-52E7-E248-9225-B6E184C589D0}" type="datetimeFigureOut">
               <a:rPr lang="en-US" smtClean="0"/>
-              <a:t>11/17/24</a:t>
+              <a:t>11/18/2024</a:t>
             </a:fld>
             <a:endParaRPr lang="en-US"/>
           </a:p>
@@ -867,7 +873,7 @@
           <a:p>
             <a:fld id="{ED0FC01E-52E7-E248-9225-B6E184C589D0}" type="datetimeFigureOut">
               <a:rPr lang="en-US" smtClean="0"/>
-              <a:t>11/17/24</a:t>
+              <a:t>11/18/2024</a:t>
             </a:fld>
             <a:endParaRPr lang="en-US"/>
           </a:p>
@@ -1143,7 +1149,7 @@
           <a:p>
             <a:fld id="{ED0FC01E-52E7-E248-9225-B6E184C589D0}" type="datetimeFigureOut">
               <a:rPr lang="en-US" smtClean="0"/>
-              <a:t>11/17/24</a:t>
+              <a:t>11/18/2024</a:t>
             </a:fld>
             <a:endParaRPr lang="en-US"/>
           </a:p>
@@ -1411,7 +1417,7 @@
           <a:p>
             <a:fld id="{ED0FC01E-52E7-E248-9225-B6E184C589D0}" type="datetimeFigureOut">
               <a:rPr lang="en-US" smtClean="0"/>
-              <a:t>11/17/24</a:t>
+              <a:t>11/18/2024</a:t>
             </a:fld>
             <a:endParaRPr lang="en-US"/>
           </a:p>
@@ -1826,7 +1832,7 @@
           <a:p>
             <a:fld id="{ED0FC01E-52E7-E248-9225-B6E184C589D0}" type="datetimeFigureOut">
               <a:rPr lang="en-US" smtClean="0"/>
-              <a:t>11/17/24</a:t>
+              <a:t>11/18/2024</a:t>
             </a:fld>
             <a:endParaRPr lang="en-US"/>
           </a:p>
@@ -1968,7 +1974,7 @@
           <a:p>
             <a:fld id="{ED0FC01E-52E7-E248-9225-B6E184C589D0}" type="datetimeFigureOut">
               <a:rPr lang="en-US" smtClean="0"/>
-              <a:t>11/17/24</a:t>
+              <a:t>11/18/2024</a:t>
             </a:fld>
             <a:endParaRPr lang="en-US"/>
           </a:p>
@@ -2081,7 +2087,7 @@
           <a:p>
             <a:fld id="{ED0FC01E-52E7-E248-9225-B6E184C589D0}" type="datetimeFigureOut">
               <a:rPr lang="en-US" smtClean="0"/>
-              <a:t>11/17/24</a:t>
+              <a:t>11/18/2024</a:t>
             </a:fld>
             <a:endParaRPr lang="en-US"/>
           </a:p>
@@ -2394,7 +2400,7 @@
           <a:p>
             <a:fld id="{ED0FC01E-52E7-E248-9225-B6E184C589D0}" type="datetimeFigureOut">
               <a:rPr lang="en-US" smtClean="0"/>
-              <a:t>11/17/24</a:t>
+              <a:t>11/18/2024</a:t>
             </a:fld>
             <a:endParaRPr lang="en-US"/>
           </a:p>
@@ -2683,7 +2689,7 @@
           <a:p>
             <a:fld id="{ED0FC01E-52E7-E248-9225-B6E184C589D0}" type="datetimeFigureOut">
               <a:rPr lang="en-US" smtClean="0"/>
-              <a:t>11/17/24</a:t>
+              <a:t>11/18/2024</a:t>
             </a:fld>
             <a:endParaRPr lang="en-US"/>
           </a:p>
@@ -2926,7 +2932,7 @@
           <a:p>
             <a:fld id="{ED0FC01E-52E7-E248-9225-B6E184C589D0}" type="datetimeFigureOut">
               <a:rPr lang="en-US" smtClean="0"/>
-              <a:t>11/17/24</a:t>
+              <a:t>11/18/2024</a:t>
             </a:fld>
             <a:endParaRPr lang="en-US"/>
           </a:p>
@@ -3817,6 +3823,2321 @@
     <p:extLst>
       <p:ext uri="{BB962C8B-B14F-4D97-AF65-F5344CB8AC3E}">
         <p14:creationId xmlns:p14="http://schemas.microsoft.com/office/powerpoint/2010/main" val="1768329562"/>
+      </p:ext>
+    </p:extLst>
+  </p:cSld>
+  <p:clrMapOvr>
+    <a:masterClrMapping/>
+  </p:clrMapOvr>
+</p:sld>
+</file>
+
+<file path=ppt/slides/slide3.xml><?xml version="1.0" encoding="utf-8"?>
+<p:sld xmlns:a="http://schemas.openxmlformats.org/drawingml/2006/main" xmlns:r="http://schemas.openxmlformats.org/officeDocument/2006/relationships" xmlns:p="http://schemas.openxmlformats.org/presentationml/2006/main">
+  <p:cSld>
+    <p:spTree>
+      <p:nvGrpSpPr>
+        <p:cNvPr id="1" name=""/>
+        <p:cNvGrpSpPr/>
+        <p:nvPr/>
+      </p:nvGrpSpPr>
+      <p:grpSpPr>
+        <a:xfrm>
+          <a:off x="0" y="0"/>
+          <a:ext cx="0" cy="0"/>
+          <a:chOff x="0" y="0"/>
+          <a:chExt cx="0" cy="0"/>
+        </a:xfrm>
+      </p:grpSpPr>
+      <p:pic>
+        <p:nvPicPr>
+          <p:cNvPr id="9" name="圖片 8">
+            <a:extLst>
+              <a:ext uri="{FF2B5EF4-FFF2-40B4-BE49-F238E27FC236}">
+                <a16:creationId xmlns:a16="http://schemas.microsoft.com/office/drawing/2014/main" id="{C93A6D5B-A69F-4656-B6B6-8AF0E1FC21A0}"/>
+              </a:ext>
+            </a:extLst>
+          </p:cNvPr>
+          <p:cNvPicPr preferRelativeResize="0">
+            <a:picLocks/>
+          </p:cNvPicPr>
+          <p:nvPr/>
+        </p:nvPicPr>
+        <p:blipFill>
+          <a:blip r:embed="rId2"/>
+          <a:stretch>
+            <a:fillRect/>
+          </a:stretch>
+        </p:blipFill>
+        <p:spPr>
+          <a:xfrm>
+            <a:off x="2142837" y="1224015"/>
+            <a:ext cx="1496152" cy="1475313"/>
+          </a:xfrm>
+          <a:prstGeom prst="rect">
+            <a:avLst/>
+          </a:prstGeom>
+        </p:spPr>
+      </p:pic>
+      <p:grpSp>
+        <p:nvGrpSpPr>
+          <p:cNvPr id="23" name="群組 22">
+            <a:extLst>
+              <a:ext uri="{FF2B5EF4-FFF2-40B4-BE49-F238E27FC236}">
+                <a16:creationId xmlns:a16="http://schemas.microsoft.com/office/drawing/2014/main" id="{2EC3CF09-606A-41E8-BDAD-BB4954084973}"/>
+              </a:ext>
+            </a:extLst>
+          </p:cNvPr>
+          <p:cNvGrpSpPr/>
+          <p:nvPr/>
+        </p:nvGrpSpPr>
+        <p:grpSpPr>
+          <a:xfrm>
+            <a:off x="4418666" y="1224015"/>
+            <a:ext cx="1524622" cy="1395536"/>
+            <a:chOff x="3648363" y="1953687"/>
+            <a:chExt cx="1524622" cy="1395536"/>
+          </a:xfrm>
+        </p:grpSpPr>
+        <p:pic>
+          <p:nvPicPr>
+            <p:cNvPr id="11" name="圖片 10">
+              <a:extLst>
+                <a:ext uri="{FF2B5EF4-FFF2-40B4-BE49-F238E27FC236}">
+                  <a16:creationId xmlns:a16="http://schemas.microsoft.com/office/drawing/2014/main" id="{9BE9D09C-2989-45A1-88F3-1DC4C236161C}"/>
+                </a:ext>
+              </a:extLst>
+            </p:cNvPr>
+            <p:cNvPicPr>
+              <a:picLocks noChangeAspect="1"/>
+            </p:cNvPicPr>
+            <p:nvPr/>
+          </p:nvPicPr>
+          <p:blipFill rotWithShape="1">
+            <a:blip r:embed="rId3"/>
+            <a:srcRect r="24697" b="25417"/>
+            <a:stretch/>
+          </p:blipFill>
+          <p:spPr>
+            <a:xfrm>
+              <a:off x="3648363" y="1953687"/>
+              <a:ext cx="979055" cy="969686"/>
+            </a:xfrm>
+            <a:prstGeom prst="rect">
+              <a:avLst/>
+            </a:prstGeom>
+          </p:spPr>
+        </p:pic>
+        <p:pic>
+          <p:nvPicPr>
+            <p:cNvPr id="13" name="圖片 12">
+              <a:extLst>
+                <a:ext uri="{FF2B5EF4-FFF2-40B4-BE49-F238E27FC236}">
+                  <a16:creationId xmlns:a16="http://schemas.microsoft.com/office/drawing/2014/main" id="{C281E78A-7E2E-4B24-A5DF-7EF7331F3177}"/>
+                </a:ext>
+              </a:extLst>
+            </p:cNvPr>
+            <p:cNvPicPr>
+              <a:picLocks noChangeAspect="1"/>
+            </p:cNvPicPr>
+            <p:nvPr/>
+          </p:nvPicPr>
+          <p:blipFill>
+            <a:blip r:embed="rId4"/>
+            <a:stretch>
+              <a:fillRect/>
+            </a:stretch>
+          </p:blipFill>
+          <p:spPr>
+            <a:xfrm>
+              <a:off x="3757956" y="2036114"/>
+              <a:ext cx="981541" cy="975445"/>
+            </a:xfrm>
+            <a:prstGeom prst="rect">
+              <a:avLst/>
+            </a:prstGeom>
+          </p:spPr>
+        </p:pic>
+        <p:pic>
+          <p:nvPicPr>
+            <p:cNvPr id="14" name="圖片 13">
+              <a:extLst>
+                <a:ext uri="{FF2B5EF4-FFF2-40B4-BE49-F238E27FC236}">
+                  <a16:creationId xmlns:a16="http://schemas.microsoft.com/office/drawing/2014/main" id="{655B1F52-A864-4570-993D-1E715A0C378B}"/>
+                </a:ext>
+              </a:extLst>
+            </p:cNvPr>
+            <p:cNvPicPr>
+              <a:picLocks noChangeAspect="1"/>
+            </p:cNvPicPr>
+            <p:nvPr/>
+          </p:nvPicPr>
+          <p:blipFill>
+            <a:blip r:embed="rId4"/>
+            <a:stretch>
+              <a:fillRect/>
+            </a:stretch>
+          </p:blipFill>
+          <p:spPr>
+            <a:xfrm>
+              <a:off x="3867549" y="2118541"/>
+              <a:ext cx="981541" cy="975445"/>
+            </a:xfrm>
+            <a:prstGeom prst="rect">
+              <a:avLst/>
+            </a:prstGeom>
+          </p:spPr>
+        </p:pic>
+        <p:pic>
+          <p:nvPicPr>
+            <p:cNvPr id="15" name="圖片 14">
+              <a:extLst>
+                <a:ext uri="{FF2B5EF4-FFF2-40B4-BE49-F238E27FC236}">
+                  <a16:creationId xmlns:a16="http://schemas.microsoft.com/office/drawing/2014/main" id="{6F81EE84-91D7-4528-B3AA-511137C55374}"/>
+                </a:ext>
+              </a:extLst>
+            </p:cNvPr>
+            <p:cNvPicPr>
+              <a:picLocks noChangeAspect="1"/>
+            </p:cNvPicPr>
+            <p:nvPr/>
+          </p:nvPicPr>
+          <p:blipFill>
+            <a:blip r:embed="rId4"/>
+            <a:stretch>
+              <a:fillRect/>
+            </a:stretch>
+          </p:blipFill>
+          <p:spPr>
+            <a:xfrm>
+              <a:off x="3977142" y="2203620"/>
+              <a:ext cx="981541" cy="975445"/>
+            </a:xfrm>
+            <a:prstGeom prst="rect">
+              <a:avLst/>
+            </a:prstGeom>
+          </p:spPr>
+        </p:pic>
+        <p:pic>
+          <p:nvPicPr>
+            <p:cNvPr id="16" name="圖片 15">
+              <a:extLst>
+                <a:ext uri="{FF2B5EF4-FFF2-40B4-BE49-F238E27FC236}">
+                  <a16:creationId xmlns:a16="http://schemas.microsoft.com/office/drawing/2014/main" id="{D15EDF46-8293-4253-BB12-FFDB0A2F8242}"/>
+                </a:ext>
+              </a:extLst>
+            </p:cNvPr>
+            <p:cNvPicPr>
+              <a:picLocks noChangeAspect="1"/>
+            </p:cNvPicPr>
+            <p:nvPr/>
+          </p:nvPicPr>
+          <p:blipFill>
+            <a:blip r:embed="rId4"/>
+            <a:stretch>
+              <a:fillRect/>
+            </a:stretch>
+          </p:blipFill>
+          <p:spPr>
+            <a:xfrm>
+              <a:off x="4086735" y="2288699"/>
+              <a:ext cx="981541" cy="975445"/>
+            </a:xfrm>
+            <a:prstGeom prst="rect">
+              <a:avLst/>
+            </a:prstGeom>
+          </p:spPr>
+        </p:pic>
+        <p:pic>
+          <p:nvPicPr>
+            <p:cNvPr id="17" name="圖片 16">
+              <a:extLst>
+                <a:ext uri="{FF2B5EF4-FFF2-40B4-BE49-F238E27FC236}">
+                  <a16:creationId xmlns:a16="http://schemas.microsoft.com/office/drawing/2014/main" id="{2842978E-0583-48ED-9822-36C5900F27F5}"/>
+                </a:ext>
+              </a:extLst>
+            </p:cNvPr>
+            <p:cNvPicPr>
+              <a:picLocks noChangeAspect="1"/>
+            </p:cNvPicPr>
+            <p:nvPr/>
+          </p:nvPicPr>
+          <p:blipFill>
+            <a:blip r:embed="rId4"/>
+            <a:stretch>
+              <a:fillRect/>
+            </a:stretch>
+          </p:blipFill>
+          <p:spPr>
+            <a:xfrm>
+              <a:off x="4191444" y="2373778"/>
+              <a:ext cx="981541" cy="975445"/>
+            </a:xfrm>
+            <a:prstGeom prst="rect">
+              <a:avLst/>
+            </a:prstGeom>
+          </p:spPr>
+        </p:pic>
+      </p:grpSp>
+      <p:grpSp>
+        <p:nvGrpSpPr>
+          <p:cNvPr id="24" name="群組 23">
+            <a:extLst>
+              <a:ext uri="{FF2B5EF4-FFF2-40B4-BE49-F238E27FC236}">
+                <a16:creationId xmlns:a16="http://schemas.microsoft.com/office/drawing/2014/main" id="{55294A14-C7A5-4C54-A992-B1EAE499BDA8}"/>
+              </a:ext>
+            </a:extLst>
+          </p:cNvPr>
+          <p:cNvGrpSpPr/>
+          <p:nvPr/>
+        </p:nvGrpSpPr>
+        <p:grpSpPr>
+          <a:xfrm>
+            <a:off x="6508492" y="1537362"/>
+            <a:ext cx="954812" cy="914741"/>
+            <a:chOff x="6642592" y="2425096"/>
+            <a:chExt cx="954812" cy="914741"/>
+          </a:xfrm>
+        </p:grpSpPr>
+        <p:pic>
+          <p:nvPicPr>
+            <p:cNvPr id="12" name="圖片 11">
+              <a:extLst>
+                <a:ext uri="{FF2B5EF4-FFF2-40B4-BE49-F238E27FC236}">
+                  <a16:creationId xmlns:a16="http://schemas.microsoft.com/office/drawing/2014/main" id="{914FACF0-54CE-437D-B834-837CFA2C31E8}"/>
+                </a:ext>
+              </a:extLst>
+            </p:cNvPr>
+            <p:cNvPicPr>
+              <a:picLocks noChangeAspect="1"/>
+            </p:cNvPicPr>
+            <p:nvPr/>
+          </p:nvPicPr>
+          <p:blipFill rotWithShape="1">
+            <a:blip r:embed="rId3"/>
+            <a:srcRect r="49679" b="50080"/>
+            <a:stretch/>
+          </p:blipFill>
+          <p:spPr>
+            <a:xfrm>
+              <a:off x="6642592" y="2425096"/>
+              <a:ext cx="674255" cy="668890"/>
+            </a:xfrm>
+            <a:prstGeom prst="rect">
+              <a:avLst/>
+            </a:prstGeom>
+          </p:spPr>
+        </p:pic>
+        <p:pic>
+          <p:nvPicPr>
+            <p:cNvPr id="19" name="圖片 18">
+              <a:extLst>
+                <a:ext uri="{FF2B5EF4-FFF2-40B4-BE49-F238E27FC236}">
+                  <a16:creationId xmlns:a16="http://schemas.microsoft.com/office/drawing/2014/main" id="{3A6CA27A-030A-42F8-B5B0-A37E4BE9065C}"/>
+                </a:ext>
+              </a:extLst>
+            </p:cNvPr>
+            <p:cNvPicPr>
+              <a:picLocks noChangeAspect="1"/>
+            </p:cNvPicPr>
+            <p:nvPr/>
+          </p:nvPicPr>
+          <p:blipFill>
+            <a:blip r:embed="rId5"/>
+            <a:stretch>
+              <a:fillRect/>
+            </a:stretch>
+          </p:blipFill>
+          <p:spPr>
+            <a:xfrm>
+              <a:off x="6705116" y="2483047"/>
+              <a:ext cx="670618" cy="670618"/>
+            </a:xfrm>
+            <a:prstGeom prst="rect">
+              <a:avLst/>
+            </a:prstGeom>
+          </p:spPr>
+        </p:pic>
+        <p:pic>
+          <p:nvPicPr>
+            <p:cNvPr id="20" name="圖片 19">
+              <a:extLst>
+                <a:ext uri="{FF2B5EF4-FFF2-40B4-BE49-F238E27FC236}">
+                  <a16:creationId xmlns:a16="http://schemas.microsoft.com/office/drawing/2014/main" id="{869B156A-B2EE-46C7-9329-00ABEFC237F2}"/>
+                </a:ext>
+              </a:extLst>
+            </p:cNvPr>
+            <p:cNvPicPr>
+              <a:picLocks noChangeAspect="1"/>
+            </p:cNvPicPr>
+            <p:nvPr/>
+          </p:nvPicPr>
+          <p:blipFill>
+            <a:blip r:embed="rId5"/>
+            <a:stretch>
+              <a:fillRect/>
+            </a:stretch>
+          </p:blipFill>
+          <p:spPr>
+            <a:xfrm>
+              <a:off x="6779006" y="2543307"/>
+              <a:ext cx="670618" cy="670618"/>
+            </a:xfrm>
+            <a:prstGeom prst="rect">
+              <a:avLst/>
+            </a:prstGeom>
+          </p:spPr>
+        </p:pic>
+        <p:pic>
+          <p:nvPicPr>
+            <p:cNvPr id="21" name="圖片 20">
+              <a:extLst>
+                <a:ext uri="{FF2B5EF4-FFF2-40B4-BE49-F238E27FC236}">
+                  <a16:creationId xmlns:a16="http://schemas.microsoft.com/office/drawing/2014/main" id="{DF11FD97-F2B3-48A8-A0D9-A61EE5C7E507}"/>
+                </a:ext>
+              </a:extLst>
+            </p:cNvPr>
+            <p:cNvPicPr>
+              <a:picLocks noChangeAspect="1"/>
+            </p:cNvPicPr>
+            <p:nvPr/>
+          </p:nvPicPr>
+          <p:blipFill>
+            <a:blip r:embed="rId5"/>
+            <a:stretch>
+              <a:fillRect/>
+            </a:stretch>
+          </p:blipFill>
+          <p:spPr>
+            <a:xfrm>
+              <a:off x="6852896" y="2606263"/>
+              <a:ext cx="670618" cy="670618"/>
+            </a:xfrm>
+            <a:prstGeom prst="rect">
+              <a:avLst/>
+            </a:prstGeom>
+          </p:spPr>
+        </p:pic>
+        <p:pic>
+          <p:nvPicPr>
+            <p:cNvPr id="22" name="圖片 21">
+              <a:extLst>
+                <a:ext uri="{FF2B5EF4-FFF2-40B4-BE49-F238E27FC236}">
+                  <a16:creationId xmlns:a16="http://schemas.microsoft.com/office/drawing/2014/main" id="{B295639C-F4F7-473F-91CD-F672D6A85391}"/>
+                </a:ext>
+              </a:extLst>
+            </p:cNvPr>
+            <p:cNvPicPr>
+              <a:picLocks noChangeAspect="1"/>
+            </p:cNvPicPr>
+            <p:nvPr/>
+          </p:nvPicPr>
+          <p:blipFill>
+            <a:blip r:embed="rId5"/>
+            <a:stretch>
+              <a:fillRect/>
+            </a:stretch>
+          </p:blipFill>
+          <p:spPr>
+            <a:xfrm>
+              <a:off x="6926786" y="2669219"/>
+              <a:ext cx="670618" cy="670618"/>
+            </a:xfrm>
+            <a:prstGeom prst="rect">
+              <a:avLst/>
+            </a:prstGeom>
+          </p:spPr>
+        </p:pic>
+      </p:grpSp>
+      <p:pic>
+        <p:nvPicPr>
+          <p:cNvPr id="25" name="圖片 24">
+            <a:extLst>
+              <a:ext uri="{FF2B5EF4-FFF2-40B4-BE49-F238E27FC236}">
+                <a16:creationId xmlns:a16="http://schemas.microsoft.com/office/drawing/2014/main" id="{4FF51D5A-1568-4717-9F95-759F375F2B37}"/>
+              </a:ext>
+            </a:extLst>
+          </p:cNvPr>
+          <p:cNvPicPr>
+            <a:picLocks noChangeAspect="1"/>
+          </p:cNvPicPr>
+          <p:nvPr/>
+        </p:nvPicPr>
+        <p:blipFill rotWithShape="1">
+          <a:blip r:embed="rId5"/>
+          <a:srcRect l="-1" r="75206"/>
+          <a:stretch/>
+        </p:blipFill>
+        <p:spPr>
+          <a:xfrm>
+            <a:off x="8238812" y="1038240"/>
+            <a:ext cx="166279" cy="670618"/>
+          </a:xfrm>
+          <a:prstGeom prst="rect">
+            <a:avLst/>
+          </a:prstGeom>
+        </p:spPr>
+      </p:pic>
+      <p:pic>
+        <p:nvPicPr>
+          <p:cNvPr id="26" name="圖片 25">
+            <a:extLst>
+              <a:ext uri="{FF2B5EF4-FFF2-40B4-BE49-F238E27FC236}">
+                <a16:creationId xmlns:a16="http://schemas.microsoft.com/office/drawing/2014/main" id="{0021B9F1-9128-450E-A3B8-A1DCCA3B9378}"/>
+              </a:ext>
+            </a:extLst>
+          </p:cNvPr>
+          <p:cNvPicPr>
+            <a:picLocks noChangeAspect="1"/>
+          </p:cNvPicPr>
+          <p:nvPr/>
+        </p:nvPicPr>
+        <p:blipFill>
+          <a:blip r:embed="rId6"/>
+          <a:stretch>
+            <a:fillRect/>
+          </a:stretch>
+        </p:blipFill>
+        <p:spPr>
+          <a:xfrm>
+            <a:off x="8239648" y="2174966"/>
+            <a:ext cx="164606" cy="670618"/>
+          </a:xfrm>
+          <a:prstGeom prst="rect">
+            <a:avLst/>
+          </a:prstGeom>
+        </p:spPr>
+      </p:pic>
+      <p:pic>
+        <p:nvPicPr>
+          <p:cNvPr id="27" name="圖片 26">
+            <a:extLst>
+              <a:ext uri="{FF2B5EF4-FFF2-40B4-BE49-F238E27FC236}">
+                <a16:creationId xmlns:a16="http://schemas.microsoft.com/office/drawing/2014/main" id="{5026C78D-450B-4131-9EA1-39CC3E5EF6A9}"/>
+              </a:ext>
+            </a:extLst>
+          </p:cNvPr>
+          <p:cNvPicPr>
+            <a:picLocks noChangeAspect="1"/>
+          </p:cNvPicPr>
+          <p:nvPr/>
+        </p:nvPicPr>
+        <p:blipFill>
+          <a:blip r:embed="rId6"/>
+          <a:stretch>
+            <a:fillRect/>
+          </a:stretch>
+        </p:blipFill>
+        <p:spPr>
+          <a:xfrm>
+            <a:off x="8858497" y="1584060"/>
+            <a:ext cx="164606" cy="670618"/>
+          </a:xfrm>
+          <a:prstGeom prst="rect">
+            <a:avLst/>
+          </a:prstGeom>
+        </p:spPr>
+      </p:pic>
+      <p:pic>
+        <p:nvPicPr>
+          <p:cNvPr id="28" name="圖片 27">
+            <a:extLst>
+              <a:ext uri="{FF2B5EF4-FFF2-40B4-BE49-F238E27FC236}">
+                <a16:creationId xmlns:a16="http://schemas.microsoft.com/office/drawing/2014/main" id="{B9555DB1-3FC6-4E92-911F-32126E949EDF}"/>
+              </a:ext>
+            </a:extLst>
+          </p:cNvPr>
+          <p:cNvPicPr>
+            <a:picLocks noChangeAspect="1"/>
+          </p:cNvPicPr>
+          <p:nvPr/>
+        </p:nvPicPr>
+        <p:blipFill rotWithShape="1">
+          <a:blip r:embed="rId6"/>
+          <a:srcRect b="48355"/>
+          <a:stretch/>
+        </p:blipFill>
+        <p:spPr>
+          <a:xfrm>
+            <a:off x="9426165" y="1757451"/>
+            <a:ext cx="164606" cy="346341"/>
+          </a:xfrm>
+          <a:prstGeom prst="rect">
+            <a:avLst/>
+          </a:prstGeom>
+        </p:spPr>
+      </p:pic>
+      <p:cxnSp>
+        <p:nvCxnSpPr>
+          <p:cNvPr id="30" name="直線單箭頭接點 29">
+            <a:extLst>
+              <a:ext uri="{FF2B5EF4-FFF2-40B4-BE49-F238E27FC236}">
+                <a16:creationId xmlns:a16="http://schemas.microsoft.com/office/drawing/2014/main" id="{6943ACD9-CCAB-49C0-8379-1D9F1C63BD5E}"/>
+              </a:ext>
+            </a:extLst>
+          </p:cNvPr>
+          <p:cNvCxnSpPr>
+            <a:cxnSpLocks/>
+            <a:stCxn id="9" idx="3"/>
+          </p:cNvCxnSpPr>
+          <p:nvPr/>
+        </p:nvCxnSpPr>
+        <p:spPr>
+          <a:xfrm flipV="1">
+            <a:off x="3638989" y="1961670"/>
+            <a:ext cx="779677" cy="2"/>
+          </a:xfrm>
+          <a:prstGeom prst="straightConnector1">
+            <a:avLst/>
+          </a:prstGeom>
+          <a:ln>
+            <a:solidFill>
+              <a:schemeClr val="accent1">
+                <a:lumMod val="20000"/>
+                <a:lumOff val="80000"/>
+              </a:schemeClr>
+            </a:solidFill>
+            <a:tailEnd type="triangle"/>
+          </a:ln>
+        </p:spPr>
+        <p:style>
+          <a:lnRef idx="2">
+            <a:schemeClr val="accent1"/>
+          </a:lnRef>
+          <a:fillRef idx="0">
+            <a:schemeClr val="accent1"/>
+          </a:fillRef>
+          <a:effectRef idx="1">
+            <a:schemeClr val="accent1"/>
+          </a:effectRef>
+          <a:fontRef idx="minor">
+            <a:schemeClr val="tx1"/>
+          </a:fontRef>
+        </p:style>
+      </p:cxnSp>
+      <p:cxnSp>
+        <p:nvCxnSpPr>
+          <p:cNvPr id="32" name="直線單箭頭接點 31">
+            <a:extLst>
+              <a:ext uri="{FF2B5EF4-FFF2-40B4-BE49-F238E27FC236}">
+                <a16:creationId xmlns:a16="http://schemas.microsoft.com/office/drawing/2014/main" id="{76D55E2E-2E9D-45DA-A4B5-258D1A6E663B}"/>
+              </a:ext>
+            </a:extLst>
+          </p:cNvPr>
+          <p:cNvCxnSpPr/>
+          <p:nvPr/>
+        </p:nvCxnSpPr>
+        <p:spPr>
+          <a:xfrm>
+            <a:off x="5943288" y="1961670"/>
+            <a:ext cx="565204" cy="0"/>
+          </a:xfrm>
+          <a:prstGeom prst="straightConnector1">
+            <a:avLst/>
+          </a:prstGeom>
+          <a:ln>
+            <a:solidFill>
+              <a:schemeClr val="accent1">
+                <a:lumMod val="20000"/>
+                <a:lumOff val="80000"/>
+              </a:schemeClr>
+            </a:solidFill>
+            <a:tailEnd type="triangle"/>
+          </a:ln>
+        </p:spPr>
+        <p:style>
+          <a:lnRef idx="2">
+            <a:schemeClr val="accent1"/>
+          </a:lnRef>
+          <a:fillRef idx="0">
+            <a:schemeClr val="accent1"/>
+          </a:fillRef>
+          <a:effectRef idx="1">
+            <a:schemeClr val="accent1"/>
+          </a:effectRef>
+          <a:fontRef idx="minor">
+            <a:schemeClr val="tx1"/>
+          </a:fontRef>
+        </p:style>
+      </p:cxnSp>
+      <p:cxnSp>
+        <p:nvCxnSpPr>
+          <p:cNvPr id="34" name="直線單箭頭接點 33">
+            <a:extLst>
+              <a:ext uri="{FF2B5EF4-FFF2-40B4-BE49-F238E27FC236}">
+                <a16:creationId xmlns:a16="http://schemas.microsoft.com/office/drawing/2014/main" id="{5214CB30-B388-405F-B222-19049A4D92BF}"/>
+              </a:ext>
+            </a:extLst>
+          </p:cNvPr>
+          <p:cNvCxnSpPr>
+            <a:cxnSpLocks/>
+          </p:cNvCxnSpPr>
+          <p:nvPr/>
+        </p:nvCxnSpPr>
+        <p:spPr>
+          <a:xfrm flipV="1">
+            <a:off x="7233772" y="1136073"/>
+            <a:ext cx="931174" cy="337875"/>
+          </a:xfrm>
+          <a:prstGeom prst="straightConnector1">
+            <a:avLst/>
+          </a:prstGeom>
+          <a:ln>
+            <a:solidFill>
+              <a:schemeClr val="accent1">
+                <a:lumMod val="20000"/>
+                <a:lumOff val="80000"/>
+              </a:schemeClr>
+            </a:solidFill>
+            <a:tailEnd type="triangle"/>
+          </a:ln>
+        </p:spPr>
+        <p:style>
+          <a:lnRef idx="2">
+            <a:schemeClr val="accent1"/>
+          </a:lnRef>
+          <a:fillRef idx="0">
+            <a:schemeClr val="accent1"/>
+          </a:fillRef>
+          <a:effectRef idx="1">
+            <a:schemeClr val="accent1"/>
+          </a:effectRef>
+          <a:fontRef idx="minor">
+            <a:schemeClr val="tx1"/>
+          </a:fontRef>
+        </p:style>
+      </p:cxnSp>
+      <p:cxnSp>
+        <p:nvCxnSpPr>
+          <p:cNvPr id="36" name="直線單箭頭接點 35">
+            <a:extLst>
+              <a:ext uri="{FF2B5EF4-FFF2-40B4-BE49-F238E27FC236}">
+                <a16:creationId xmlns:a16="http://schemas.microsoft.com/office/drawing/2014/main" id="{92DF8390-AC72-402B-A0FA-3FBD10D770CD}"/>
+              </a:ext>
+            </a:extLst>
+          </p:cNvPr>
+          <p:cNvCxnSpPr>
+            <a:cxnSpLocks/>
+          </p:cNvCxnSpPr>
+          <p:nvPr/>
+        </p:nvCxnSpPr>
+        <p:spPr>
+          <a:xfrm>
+            <a:off x="6845619" y="2493199"/>
+            <a:ext cx="1393193" cy="286947"/>
+          </a:xfrm>
+          <a:prstGeom prst="straightConnector1">
+            <a:avLst/>
+          </a:prstGeom>
+          <a:ln>
+            <a:solidFill>
+              <a:schemeClr val="accent1">
+                <a:lumMod val="20000"/>
+                <a:lumOff val="80000"/>
+              </a:schemeClr>
+            </a:solidFill>
+            <a:tailEnd type="triangle"/>
+          </a:ln>
+        </p:spPr>
+        <p:style>
+          <a:lnRef idx="2">
+            <a:schemeClr val="accent1"/>
+          </a:lnRef>
+          <a:fillRef idx="0">
+            <a:schemeClr val="accent1"/>
+          </a:fillRef>
+          <a:effectRef idx="1">
+            <a:schemeClr val="accent1"/>
+          </a:effectRef>
+          <a:fontRef idx="minor">
+            <a:schemeClr val="tx1"/>
+          </a:fontRef>
+        </p:style>
+      </p:cxnSp>
+      <p:cxnSp>
+        <p:nvCxnSpPr>
+          <p:cNvPr id="38" name="直線單箭頭接點 37">
+            <a:extLst>
+              <a:ext uri="{FF2B5EF4-FFF2-40B4-BE49-F238E27FC236}">
+                <a16:creationId xmlns:a16="http://schemas.microsoft.com/office/drawing/2014/main" id="{A692F329-BDD2-4739-8249-BCB5BB407D8A}"/>
+              </a:ext>
+            </a:extLst>
+          </p:cNvPr>
+          <p:cNvCxnSpPr/>
+          <p:nvPr/>
+        </p:nvCxnSpPr>
+        <p:spPr>
+          <a:xfrm>
+            <a:off x="8404254" y="1136073"/>
+            <a:ext cx="454243" cy="519500"/>
+          </a:xfrm>
+          <a:prstGeom prst="straightConnector1">
+            <a:avLst/>
+          </a:prstGeom>
+          <a:ln>
+            <a:solidFill>
+              <a:schemeClr val="accent1">
+                <a:lumMod val="20000"/>
+                <a:lumOff val="80000"/>
+              </a:schemeClr>
+            </a:solidFill>
+            <a:tailEnd type="triangle"/>
+          </a:ln>
+        </p:spPr>
+        <p:style>
+          <a:lnRef idx="2">
+            <a:schemeClr val="accent1"/>
+          </a:lnRef>
+          <a:fillRef idx="0">
+            <a:schemeClr val="accent1"/>
+          </a:fillRef>
+          <a:effectRef idx="1">
+            <a:schemeClr val="accent1"/>
+          </a:effectRef>
+          <a:fontRef idx="minor">
+            <a:schemeClr val="tx1"/>
+          </a:fontRef>
+        </p:style>
+      </p:cxnSp>
+      <p:cxnSp>
+        <p:nvCxnSpPr>
+          <p:cNvPr id="40" name="直線單箭頭接點 39">
+            <a:extLst>
+              <a:ext uri="{FF2B5EF4-FFF2-40B4-BE49-F238E27FC236}">
+                <a16:creationId xmlns:a16="http://schemas.microsoft.com/office/drawing/2014/main" id="{BA8DB398-918F-490A-AC29-8D0C01A0DED8}"/>
+              </a:ext>
+            </a:extLst>
+          </p:cNvPr>
+          <p:cNvCxnSpPr>
+            <a:cxnSpLocks/>
+          </p:cNvCxnSpPr>
+          <p:nvPr/>
+        </p:nvCxnSpPr>
+        <p:spPr>
+          <a:xfrm flipV="1">
+            <a:off x="8404254" y="2206252"/>
+            <a:ext cx="454243" cy="573894"/>
+          </a:xfrm>
+          <a:prstGeom prst="straightConnector1">
+            <a:avLst/>
+          </a:prstGeom>
+          <a:ln>
+            <a:solidFill>
+              <a:schemeClr val="accent1">
+                <a:lumMod val="20000"/>
+                <a:lumOff val="80000"/>
+              </a:schemeClr>
+            </a:solidFill>
+            <a:tailEnd type="triangle"/>
+          </a:ln>
+        </p:spPr>
+        <p:style>
+          <a:lnRef idx="2">
+            <a:schemeClr val="accent1"/>
+          </a:lnRef>
+          <a:fillRef idx="0">
+            <a:schemeClr val="accent1"/>
+          </a:fillRef>
+          <a:effectRef idx="1">
+            <a:schemeClr val="accent1"/>
+          </a:effectRef>
+          <a:fontRef idx="minor">
+            <a:schemeClr val="tx1"/>
+          </a:fontRef>
+        </p:style>
+      </p:cxnSp>
+      <p:cxnSp>
+        <p:nvCxnSpPr>
+          <p:cNvPr id="43" name="直線單箭頭接點 42">
+            <a:extLst>
+              <a:ext uri="{FF2B5EF4-FFF2-40B4-BE49-F238E27FC236}">
+                <a16:creationId xmlns:a16="http://schemas.microsoft.com/office/drawing/2014/main" id="{7BBA1143-BD4E-4143-A71C-F2C0E5F7F4DC}"/>
+              </a:ext>
+            </a:extLst>
+          </p:cNvPr>
+          <p:cNvCxnSpPr/>
+          <p:nvPr/>
+        </p:nvCxnSpPr>
+        <p:spPr>
+          <a:xfrm>
+            <a:off x="9023103" y="1708858"/>
+            <a:ext cx="403062" cy="85306"/>
+          </a:xfrm>
+          <a:prstGeom prst="straightConnector1">
+            <a:avLst/>
+          </a:prstGeom>
+          <a:ln>
+            <a:solidFill>
+              <a:schemeClr val="accent1">
+                <a:lumMod val="20000"/>
+                <a:lumOff val="80000"/>
+              </a:schemeClr>
+            </a:solidFill>
+            <a:tailEnd type="triangle"/>
+          </a:ln>
+        </p:spPr>
+        <p:style>
+          <a:lnRef idx="2">
+            <a:schemeClr val="accent1"/>
+          </a:lnRef>
+          <a:fillRef idx="0">
+            <a:schemeClr val="accent1"/>
+          </a:fillRef>
+          <a:effectRef idx="1">
+            <a:schemeClr val="accent1"/>
+          </a:effectRef>
+          <a:fontRef idx="minor">
+            <a:schemeClr val="tx1"/>
+          </a:fontRef>
+        </p:style>
+      </p:cxnSp>
+      <p:cxnSp>
+        <p:nvCxnSpPr>
+          <p:cNvPr id="45" name="直線單箭頭接點 44">
+            <a:extLst>
+              <a:ext uri="{FF2B5EF4-FFF2-40B4-BE49-F238E27FC236}">
+                <a16:creationId xmlns:a16="http://schemas.microsoft.com/office/drawing/2014/main" id="{A2627054-7607-469E-BD6E-3199A1697217}"/>
+              </a:ext>
+            </a:extLst>
+          </p:cNvPr>
+          <p:cNvCxnSpPr>
+            <a:cxnSpLocks/>
+          </p:cNvCxnSpPr>
+          <p:nvPr/>
+        </p:nvCxnSpPr>
+        <p:spPr>
+          <a:xfrm flipV="1">
+            <a:off x="9049842" y="2053838"/>
+            <a:ext cx="376323" cy="121129"/>
+          </a:xfrm>
+          <a:prstGeom prst="straightConnector1">
+            <a:avLst/>
+          </a:prstGeom>
+          <a:ln>
+            <a:solidFill>
+              <a:schemeClr val="accent1">
+                <a:lumMod val="20000"/>
+                <a:lumOff val="80000"/>
+              </a:schemeClr>
+            </a:solidFill>
+            <a:tailEnd type="triangle"/>
+          </a:ln>
+        </p:spPr>
+        <p:style>
+          <a:lnRef idx="2">
+            <a:schemeClr val="accent1"/>
+          </a:lnRef>
+          <a:fillRef idx="0">
+            <a:schemeClr val="accent1"/>
+          </a:fillRef>
+          <a:effectRef idx="1">
+            <a:schemeClr val="accent1"/>
+          </a:effectRef>
+          <a:fontRef idx="minor">
+            <a:schemeClr val="tx1"/>
+          </a:fontRef>
+        </p:style>
+      </p:cxnSp>
+      <p:cxnSp>
+        <p:nvCxnSpPr>
+          <p:cNvPr id="50" name="直線單箭頭接點 49">
+            <a:extLst>
+              <a:ext uri="{FF2B5EF4-FFF2-40B4-BE49-F238E27FC236}">
+                <a16:creationId xmlns:a16="http://schemas.microsoft.com/office/drawing/2014/main" id="{EDAAC9F9-CDFD-4958-8514-E4FADD87582A}"/>
+              </a:ext>
+            </a:extLst>
+          </p:cNvPr>
+          <p:cNvCxnSpPr/>
+          <p:nvPr/>
+        </p:nvCxnSpPr>
+        <p:spPr>
+          <a:xfrm>
+            <a:off x="7463304" y="1961670"/>
+            <a:ext cx="701642" cy="0"/>
+          </a:xfrm>
+          <a:prstGeom prst="straightConnector1">
+            <a:avLst/>
+          </a:prstGeom>
+          <a:ln>
+            <a:solidFill>
+              <a:schemeClr val="accent1">
+                <a:lumMod val="20000"/>
+                <a:lumOff val="80000"/>
+              </a:schemeClr>
+            </a:solidFill>
+            <a:tailEnd type="triangle"/>
+          </a:ln>
+        </p:spPr>
+        <p:style>
+          <a:lnRef idx="2">
+            <a:schemeClr val="accent1"/>
+          </a:lnRef>
+          <a:fillRef idx="0">
+            <a:schemeClr val="accent1"/>
+          </a:fillRef>
+          <a:effectRef idx="1">
+            <a:schemeClr val="accent1"/>
+          </a:effectRef>
+          <a:fontRef idx="minor">
+            <a:schemeClr val="tx1"/>
+          </a:fontRef>
+        </p:style>
+      </p:cxnSp>
+      <p:cxnSp>
+        <p:nvCxnSpPr>
+          <p:cNvPr id="52" name="直線接點 51">
+            <a:extLst>
+              <a:ext uri="{FF2B5EF4-FFF2-40B4-BE49-F238E27FC236}">
+                <a16:creationId xmlns:a16="http://schemas.microsoft.com/office/drawing/2014/main" id="{4B50FD37-6118-46DB-809D-4310DA977521}"/>
+              </a:ext>
+            </a:extLst>
+          </p:cNvPr>
+          <p:cNvCxnSpPr/>
+          <p:nvPr/>
+        </p:nvCxnSpPr>
+        <p:spPr>
+          <a:xfrm>
+            <a:off x="8321951" y="1762351"/>
+            <a:ext cx="0" cy="323273"/>
+          </a:xfrm>
+          <a:prstGeom prst="line">
+            <a:avLst/>
+          </a:prstGeom>
+          <a:ln>
+            <a:solidFill>
+              <a:schemeClr val="bg2"/>
+            </a:solidFill>
+            <a:prstDash val="sysDash"/>
+          </a:ln>
+        </p:spPr>
+        <p:style>
+          <a:lnRef idx="2">
+            <a:schemeClr val="accent1"/>
+          </a:lnRef>
+          <a:fillRef idx="0">
+            <a:schemeClr val="accent1"/>
+          </a:fillRef>
+          <a:effectRef idx="1">
+            <a:schemeClr val="accent1"/>
+          </a:effectRef>
+          <a:fontRef idx="minor">
+            <a:schemeClr val="tx1"/>
+          </a:fontRef>
+        </p:style>
+      </p:cxnSp>
+      <p:cxnSp>
+        <p:nvCxnSpPr>
+          <p:cNvPr id="55" name="直線接點 54">
+            <a:extLst>
+              <a:ext uri="{FF2B5EF4-FFF2-40B4-BE49-F238E27FC236}">
+                <a16:creationId xmlns:a16="http://schemas.microsoft.com/office/drawing/2014/main" id="{55125779-A9DA-4EF8-92A8-B3990C505561}"/>
+              </a:ext>
+            </a:extLst>
+          </p:cNvPr>
+          <p:cNvCxnSpPr>
+            <a:cxnSpLocks/>
+          </p:cNvCxnSpPr>
+          <p:nvPr/>
+        </p:nvCxnSpPr>
+        <p:spPr>
+          <a:xfrm flipH="1">
+            <a:off x="8631375" y="1556892"/>
+            <a:ext cx="4605" cy="697786"/>
+          </a:xfrm>
+          <a:prstGeom prst="line">
+            <a:avLst/>
+          </a:prstGeom>
+          <a:ln>
+            <a:solidFill>
+              <a:schemeClr val="accent1">
+                <a:lumMod val="20000"/>
+                <a:lumOff val="80000"/>
+              </a:schemeClr>
+            </a:solidFill>
+            <a:prstDash val="sysDash"/>
+          </a:ln>
+        </p:spPr>
+        <p:style>
+          <a:lnRef idx="2">
+            <a:schemeClr val="accent1"/>
+          </a:lnRef>
+          <a:fillRef idx="0">
+            <a:schemeClr val="accent1"/>
+          </a:fillRef>
+          <a:effectRef idx="1">
+            <a:schemeClr val="accent1"/>
+          </a:effectRef>
+          <a:fontRef idx="minor">
+            <a:schemeClr val="tx1"/>
+          </a:fontRef>
+        </p:style>
+      </p:cxnSp>
+      <p:cxnSp>
+        <p:nvCxnSpPr>
+          <p:cNvPr id="58" name="直線接點 57">
+            <a:extLst>
+              <a:ext uri="{FF2B5EF4-FFF2-40B4-BE49-F238E27FC236}">
+                <a16:creationId xmlns:a16="http://schemas.microsoft.com/office/drawing/2014/main" id="{909104CF-AC02-48BA-B218-344963BFB7DA}"/>
+              </a:ext>
+            </a:extLst>
+          </p:cNvPr>
+          <p:cNvCxnSpPr>
+            <a:cxnSpLocks/>
+          </p:cNvCxnSpPr>
+          <p:nvPr/>
+        </p:nvCxnSpPr>
+        <p:spPr>
+          <a:xfrm>
+            <a:off x="9224634" y="1816391"/>
+            <a:ext cx="0" cy="223715"/>
+          </a:xfrm>
+          <a:prstGeom prst="line">
+            <a:avLst/>
+          </a:prstGeom>
+          <a:ln>
+            <a:solidFill>
+              <a:schemeClr val="accent1">
+                <a:lumMod val="20000"/>
+                <a:lumOff val="80000"/>
+              </a:schemeClr>
+            </a:solidFill>
+            <a:prstDash val="sysDash"/>
+          </a:ln>
+        </p:spPr>
+        <p:style>
+          <a:lnRef idx="2">
+            <a:schemeClr val="accent1"/>
+          </a:lnRef>
+          <a:fillRef idx="0">
+            <a:schemeClr val="accent1"/>
+          </a:fillRef>
+          <a:effectRef idx="1">
+            <a:schemeClr val="accent1"/>
+          </a:effectRef>
+          <a:fontRef idx="minor">
+            <a:schemeClr val="tx1"/>
+          </a:fontRef>
+        </p:style>
+      </p:cxnSp>
+      <p:sp>
+        <p:nvSpPr>
+          <p:cNvPr id="60" name="矩形 59">
+            <a:extLst>
+              <a:ext uri="{FF2B5EF4-FFF2-40B4-BE49-F238E27FC236}">
+                <a16:creationId xmlns:a16="http://schemas.microsoft.com/office/drawing/2014/main" id="{8999171D-1D72-4928-A13A-ED1449677D37}"/>
+              </a:ext>
+            </a:extLst>
+          </p:cNvPr>
+          <p:cNvSpPr/>
+          <p:nvPr/>
+        </p:nvSpPr>
+        <p:spPr>
+          <a:xfrm>
+            <a:off x="3663292" y="1631725"/>
+            <a:ext cx="652102" cy="369332"/>
+          </a:xfrm>
+          <a:prstGeom prst="rect">
+            <a:avLst/>
+          </a:prstGeom>
+        </p:spPr>
+        <p:txBody>
+          <a:bodyPr wrap="none">
+            <a:spAutoFit/>
+          </a:bodyPr>
+          <a:lstStyle/>
+          <a:p>
+            <a:r>
+              <a:rPr lang="en-US" altLang="zh-HK" dirty="0"/>
+              <a:t>Conv</a:t>
+            </a:r>
+            <a:endParaRPr lang="zh-HK" altLang="en-US" dirty="0"/>
+          </a:p>
+        </p:txBody>
+      </p:sp>
+      <p:sp>
+        <p:nvSpPr>
+          <p:cNvPr id="61" name="矩形 60">
+            <a:extLst>
+              <a:ext uri="{FF2B5EF4-FFF2-40B4-BE49-F238E27FC236}">
+                <a16:creationId xmlns:a16="http://schemas.microsoft.com/office/drawing/2014/main" id="{C4177E60-FF9A-4D56-9CC1-D588C4CD3168}"/>
+              </a:ext>
+            </a:extLst>
+          </p:cNvPr>
+          <p:cNvSpPr/>
+          <p:nvPr/>
+        </p:nvSpPr>
+        <p:spPr>
+          <a:xfrm>
+            <a:off x="5867481" y="1647427"/>
+            <a:ext cx="595228" cy="369332"/>
+          </a:xfrm>
+          <a:prstGeom prst="rect">
+            <a:avLst/>
+          </a:prstGeom>
+        </p:spPr>
+        <p:txBody>
+          <a:bodyPr wrap="none">
+            <a:spAutoFit/>
+          </a:bodyPr>
+          <a:lstStyle/>
+          <a:p>
+            <a:r>
+              <a:rPr lang="en-US" altLang="zh-HK" dirty="0"/>
+              <a:t>Pool</a:t>
+            </a:r>
+            <a:endParaRPr lang="zh-HK" altLang="en-US" dirty="0"/>
+          </a:p>
+        </p:txBody>
+      </p:sp>
+      <p:sp>
+        <p:nvSpPr>
+          <p:cNvPr id="62" name="矩形 61">
+            <a:extLst>
+              <a:ext uri="{FF2B5EF4-FFF2-40B4-BE49-F238E27FC236}">
+                <a16:creationId xmlns:a16="http://schemas.microsoft.com/office/drawing/2014/main" id="{B611DBAE-DFCB-43B7-8590-2C8B19B7187D}"/>
+              </a:ext>
+            </a:extLst>
+          </p:cNvPr>
+          <p:cNvSpPr/>
+          <p:nvPr/>
+        </p:nvSpPr>
+        <p:spPr>
+          <a:xfrm>
+            <a:off x="7392664" y="1647427"/>
+            <a:ext cx="837217" cy="369332"/>
+          </a:xfrm>
+          <a:prstGeom prst="rect">
+            <a:avLst/>
+          </a:prstGeom>
+        </p:spPr>
+        <p:txBody>
+          <a:bodyPr wrap="none">
+            <a:spAutoFit/>
+          </a:bodyPr>
+          <a:lstStyle/>
+          <a:p>
+            <a:r>
+              <a:rPr lang="en-US" altLang="zh-HK" dirty="0"/>
+              <a:t>Flatten</a:t>
+            </a:r>
+            <a:endParaRPr lang="zh-HK" altLang="en-US" dirty="0"/>
+          </a:p>
+        </p:txBody>
+      </p:sp>
+      <p:sp>
+        <p:nvSpPr>
+          <p:cNvPr id="63" name="矩形 62">
+            <a:extLst>
+              <a:ext uri="{FF2B5EF4-FFF2-40B4-BE49-F238E27FC236}">
+                <a16:creationId xmlns:a16="http://schemas.microsoft.com/office/drawing/2014/main" id="{00DAABA6-A061-4621-B471-03582849849B}"/>
+              </a:ext>
+            </a:extLst>
+          </p:cNvPr>
+          <p:cNvSpPr/>
+          <p:nvPr/>
+        </p:nvSpPr>
+        <p:spPr>
+          <a:xfrm>
+            <a:off x="8940800" y="1214728"/>
+            <a:ext cx="587020" cy="369332"/>
+          </a:xfrm>
+          <a:prstGeom prst="rect">
+            <a:avLst/>
+          </a:prstGeom>
+        </p:spPr>
+        <p:txBody>
+          <a:bodyPr wrap="none">
+            <a:spAutoFit/>
+          </a:bodyPr>
+          <a:lstStyle/>
+          <a:p>
+            <a:r>
+              <a:rPr lang="en-US" altLang="zh-HK" dirty="0"/>
+              <a:t>fully</a:t>
+            </a:r>
+            <a:endParaRPr lang="zh-HK" altLang="en-US" dirty="0"/>
+          </a:p>
+        </p:txBody>
+      </p:sp>
+      <p:sp>
+        <p:nvSpPr>
+          <p:cNvPr id="64" name="矩形 63">
+            <a:extLst>
+              <a:ext uri="{FF2B5EF4-FFF2-40B4-BE49-F238E27FC236}">
+                <a16:creationId xmlns:a16="http://schemas.microsoft.com/office/drawing/2014/main" id="{2E8E738F-70A4-47DC-99BE-30E1C345C15E}"/>
+              </a:ext>
+            </a:extLst>
+          </p:cNvPr>
+          <p:cNvSpPr/>
+          <p:nvPr/>
+        </p:nvSpPr>
+        <p:spPr>
+          <a:xfrm>
+            <a:off x="8639185" y="2325609"/>
+            <a:ext cx="1170898" cy="369332"/>
+          </a:xfrm>
+          <a:prstGeom prst="rect">
+            <a:avLst/>
+          </a:prstGeom>
+        </p:spPr>
+        <p:txBody>
+          <a:bodyPr wrap="none">
+            <a:spAutoFit/>
+          </a:bodyPr>
+          <a:lstStyle/>
+          <a:p>
+            <a:r>
+              <a:rPr lang="en-US" altLang="zh-HK" dirty="0"/>
+              <a:t>connected</a:t>
+            </a:r>
+            <a:endParaRPr lang="zh-HK" altLang="en-US" dirty="0"/>
+          </a:p>
+        </p:txBody>
+      </p:sp>
+      <p:grpSp>
+        <p:nvGrpSpPr>
+          <p:cNvPr id="96" name="群組 95">
+            <a:extLst>
+              <a:ext uri="{FF2B5EF4-FFF2-40B4-BE49-F238E27FC236}">
+                <a16:creationId xmlns:a16="http://schemas.microsoft.com/office/drawing/2014/main" id="{ABA1D5BD-2153-49B8-B370-22E555210ACF}"/>
+              </a:ext>
+            </a:extLst>
+          </p:cNvPr>
+          <p:cNvGrpSpPr/>
+          <p:nvPr/>
+        </p:nvGrpSpPr>
+        <p:grpSpPr>
+          <a:xfrm>
+            <a:off x="2119568" y="3198587"/>
+            <a:ext cx="5312604" cy="1807344"/>
+            <a:chOff x="2119568" y="3198587"/>
+            <a:chExt cx="5312604" cy="1807344"/>
+          </a:xfrm>
+        </p:grpSpPr>
+        <p:pic>
+          <p:nvPicPr>
+            <p:cNvPr id="66" name="圖片 65">
+              <a:extLst>
+                <a:ext uri="{FF2B5EF4-FFF2-40B4-BE49-F238E27FC236}">
+                  <a16:creationId xmlns:a16="http://schemas.microsoft.com/office/drawing/2014/main" id="{064EEE21-82DF-4DA7-B064-C7D9B1647588}"/>
+                </a:ext>
+              </a:extLst>
+            </p:cNvPr>
+            <p:cNvPicPr>
+              <a:picLocks noChangeAspect="1"/>
+            </p:cNvPicPr>
+            <p:nvPr/>
+          </p:nvPicPr>
+          <p:blipFill rotWithShape="1">
+            <a:blip r:embed="rId7"/>
+            <a:srcRect r="87311"/>
+            <a:stretch/>
+          </p:blipFill>
+          <p:spPr>
+            <a:xfrm>
+              <a:off x="2119568" y="3420993"/>
+              <a:ext cx="189523" cy="1475360"/>
+            </a:xfrm>
+            <a:prstGeom prst="rect">
+              <a:avLst/>
+            </a:prstGeom>
+          </p:spPr>
+        </p:pic>
+        <p:pic>
+          <p:nvPicPr>
+            <p:cNvPr id="67" name="圖片 66">
+              <a:extLst>
+                <a:ext uri="{FF2B5EF4-FFF2-40B4-BE49-F238E27FC236}">
+                  <a16:creationId xmlns:a16="http://schemas.microsoft.com/office/drawing/2014/main" id="{4E6727BC-F0D1-4315-8149-9824F1E11B3A}"/>
+                </a:ext>
+              </a:extLst>
+            </p:cNvPr>
+            <p:cNvPicPr>
+              <a:picLocks noChangeAspect="1"/>
+            </p:cNvPicPr>
+            <p:nvPr/>
+          </p:nvPicPr>
+          <p:blipFill rotWithShape="1">
+            <a:blip r:embed="rId8"/>
+            <a:srcRect r="-281" b="25115"/>
+            <a:stretch/>
+          </p:blipFill>
+          <p:spPr>
+            <a:xfrm>
+              <a:off x="3196467" y="3420993"/>
+              <a:ext cx="189522" cy="1104825"/>
+            </a:xfrm>
+            <a:prstGeom prst="rect">
+              <a:avLst/>
+            </a:prstGeom>
+          </p:spPr>
+        </p:pic>
+        <p:pic>
+          <p:nvPicPr>
+            <p:cNvPr id="68" name="圖片 67">
+              <a:extLst>
+                <a:ext uri="{FF2B5EF4-FFF2-40B4-BE49-F238E27FC236}">
+                  <a16:creationId xmlns:a16="http://schemas.microsoft.com/office/drawing/2014/main" id="{D7098F38-042D-4646-BA07-54B8DB84A6DA}"/>
+                </a:ext>
+              </a:extLst>
+            </p:cNvPr>
+            <p:cNvPicPr>
+              <a:picLocks noChangeAspect="1"/>
+            </p:cNvPicPr>
+            <p:nvPr/>
+          </p:nvPicPr>
+          <p:blipFill>
+            <a:blip r:embed="rId9"/>
+            <a:stretch>
+              <a:fillRect/>
+            </a:stretch>
+          </p:blipFill>
+          <p:spPr>
+            <a:xfrm>
+              <a:off x="3258459" y="3533046"/>
+              <a:ext cx="188992" cy="1103472"/>
+            </a:xfrm>
+            <a:prstGeom prst="rect">
+              <a:avLst/>
+            </a:prstGeom>
+          </p:spPr>
+        </p:pic>
+        <p:pic>
+          <p:nvPicPr>
+            <p:cNvPr id="69" name="圖片 68">
+              <a:extLst>
+                <a:ext uri="{FF2B5EF4-FFF2-40B4-BE49-F238E27FC236}">
+                  <a16:creationId xmlns:a16="http://schemas.microsoft.com/office/drawing/2014/main" id="{A5508669-C0C1-4045-93CB-E239140B53EA}"/>
+                </a:ext>
+              </a:extLst>
+            </p:cNvPr>
+            <p:cNvPicPr>
+              <a:picLocks noChangeAspect="1"/>
+            </p:cNvPicPr>
+            <p:nvPr/>
+          </p:nvPicPr>
+          <p:blipFill>
+            <a:blip r:embed="rId9"/>
+            <a:stretch>
+              <a:fillRect/>
+            </a:stretch>
+          </p:blipFill>
+          <p:spPr>
+            <a:xfrm>
+              <a:off x="3305746" y="3645099"/>
+              <a:ext cx="188992" cy="1103472"/>
+            </a:xfrm>
+            <a:prstGeom prst="rect">
+              <a:avLst/>
+            </a:prstGeom>
+          </p:spPr>
+        </p:pic>
+        <p:pic>
+          <p:nvPicPr>
+            <p:cNvPr id="70" name="圖片 69">
+              <a:extLst>
+                <a:ext uri="{FF2B5EF4-FFF2-40B4-BE49-F238E27FC236}">
+                  <a16:creationId xmlns:a16="http://schemas.microsoft.com/office/drawing/2014/main" id="{289CD3B2-28E6-4F19-9CCF-5EADC2BAC3D9}"/>
+                </a:ext>
+              </a:extLst>
+            </p:cNvPr>
+            <p:cNvPicPr>
+              <a:picLocks noChangeAspect="1"/>
+            </p:cNvPicPr>
+            <p:nvPr/>
+          </p:nvPicPr>
+          <p:blipFill>
+            <a:blip r:embed="rId9"/>
+            <a:stretch>
+              <a:fillRect/>
+            </a:stretch>
+          </p:blipFill>
+          <p:spPr>
+            <a:xfrm>
+              <a:off x="3371506" y="3808089"/>
+              <a:ext cx="188992" cy="1103472"/>
+            </a:xfrm>
+            <a:prstGeom prst="rect">
+              <a:avLst/>
+            </a:prstGeom>
+          </p:spPr>
+        </p:pic>
+        <p:pic>
+          <p:nvPicPr>
+            <p:cNvPr id="71" name="圖片 70">
+              <a:extLst>
+                <a:ext uri="{FF2B5EF4-FFF2-40B4-BE49-F238E27FC236}">
+                  <a16:creationId xmlns:a16="http://schemas.microsoft.com/office/drawing/2014/main" id="{97680E30-4CC9-426A-A5A8-3D6472F1C868}"/>
+                </a:ext>
+              </a:extLst>
+            </p:cNvPr>
+            <p:cNvPicPr>
+              <a:picLocks noChangeAspect="1"/>
+            </p:cNvPicPr>
+            <p:nvPr/>
+          </p:nvPicPr>
+          <p:blipFill rotWithShape="1">
+            <a:blip r:embed="rId9"/>
+            <a:srcRect b="33093"/>
+            <a:stretch/>
+          </p:blipFill>
+          <p:spPr>
+            <a:xfrm>
+              <a:off x="4624291" y="3420993"/>
+              <a:ext cx="188992" cy="738290"/>
+            </a:xfrm>
+            <a:prstGeom prst="rect">
+              <a:avLst/>
+            </a:prstGeom>
+          </p:spPr>
+        </p:pic>
+        <p:pic>
+          <p:nvPicPr>
+            <p:cNvPr id="73" name="圖片 72">
+              <a:extLst>
+                <a:ext uri="{FF2B5EF4-FFF2-40B4-BE49-F238E27FC236}">
+                  <a16:creationId xmlns:a16="http://schemas.microsoft.com/office/drawing/2014/main" id="{382F1F2A-D8D0-4D63-A3D5-368333531D7F}"/>
+                </a:ext>
+              </a:extLst>
+            </p:cNvPr>
+            <p:cNvPicPr>
+              <a:picLocks noChangeAspect="1"/>
+            </p:cNvPicPr>
+            <p:nvPr/>
+          </p:nvPicPr>
+          <p:blipFill>
+            <a:blip r:embed="rId10"/>
+            <a:stretch>
+              <a:fillRect/>
+            </a:stretch>
+          </p:blipFill>
+          <p:spPr>
+            <a:xfrm>
+              <a:off x="4688357" y="3645099"/>
+              <a:ext cx="188992" cy="737680"/>
+            </a:xfrm>
+            <a:prstGeom prst="rect">
+              <a:avLst/>
+            </a:prstGeom>
+          </p:spPr>
+        </p:pic>
+        <p:pic>
+          <p:nvPicPr>
+            <p:cNvPr id="74" name="圖片 73">
+              <a:extLst>
+                <a:ext uri="{FF2B5EF4-FFF2-40B4-BE49-F238E27FC236}">
+                  <a16:creationId xmlns:a16="http://schemas.microsoft.com/office/drawing/2014/main" id="{7ED84936-7DB9-4A70-8474-FA997C118BF6}"/>
+                </a:ext>
+              </a:extLst>
+            </p:cNvPr>
+            <p:cNvPicPr>
+              <a:picLocks noChangeAspect="1"/>
+            </p:cNvPicPr>
+            <p:nvPr/>
+          </p:nvPicPr>
+          <p:blipFill>
+            <a:blip r:embed="rId10"/>
+            <a:stretch>
+              <a:fillRect/>
+            </a:stretch>
+          </p:blipFill>
+          <p:spPr>
+            <a:xfrm>
+              <a:off x="4750820" y="3869205"/>
+              <a:ext cx="188992" cy="737680"/>
+            </a:xfrm>
+            <a:prstGeom prst="rect">
+              <a:avLst/>
+            </a:prstGeom>
+          </p:spPr>
+        </p:pic>
+        <p:pic>
+          <p:nvPicPr>
+            <p:cNvPr id="75" name="圖片 74">
+              <a:extLst>
+                <a:ext uri="{FF2B5EF4-FFF2-40B4-BE49-F238E27FC236}">
+                  <a16:creationId xmlns:a16="http://schemas.microsoft.com/office/drawing/2014/main" id="{D3F4F655-40BE-4D51-97E3-6A404D403A1E}"/>
+                </a:ext>
+              </a:extLst>
+            </p:cNvPr>
+            <p:cNvPicPr>
+              <a:picLocks noChangeAspect="1"/>
+            </p:cNvPicPr>
+            <p:nvPr/>
+          </p:nvPicPr>
+          <p:blipFill>
+            <a:blip r:embed="rId10"/>
+            <a:stretch>
+              <a:fillRect/>
+            </a:stretch>
+          </p:blipFill>
+          <p:spPr>
+            <a:xfrm>
+              <a:off x="4819247" y="4093311"/>
+              <a:ext cx="188992" cy="737680"/>
+            </a:xfrm>
+            <a:prstGeom prst="rect">
+              <a:avLst/>
+            </a:prstGeom>
+          </p:spPr>
+        </p:pic>
+        <p:pic>
+          <p:nvPicPr>
+            <p:cNvPr id="77" name="圖片 76">
+              <a:extLst>
+                <a:ext uri="{FF2B5EF4-FFF2-40B4-BE49-F238E27FC236}">
+                  <a16:creationId xmlns:a16="http://schemas.microsoft.com/office/drawing/2014/main" id="{48708E81-43A7-449D-9D95-EA6E541713AF}"/>
+                </a:ext>
+              </a:extLst>
+            </p:cNvPr>
+            <p:cNvPicPr>
+              <a:picLocks noChangeAspect="1"/>
+            </p:cNvPicPr>
+            <p:nvPr/>
+          </p:nvPicPr>
+          <p:blipFill rotWithShape="1">
+            <a:blip r:embed="rId5"/>
+            <a:srcRect l="-1" r="75206"/>
+            <a:stretch/>
+          </p:blipFill>
+          <p:spPr>
+            <a:xfrm>
+              <a:off x="5860901" y="3198587"/>
+              <a:ext cx="166279" cy="670618"/>
+            </a:xfrm>
+            <a:prstGeom prst="rect">
+              <a:avLst/>
+            </a:prstGeom>
+          </p:spPr>
+        </p:pic>
+        <p:pic>
+          <p:nvPicPr>
+            <p:cNvPr id="78" name="圖片 77">
+              <a:extLst>
+                <a:ext uri="{FF2B5EF4-FFF2-40B4-BE49-F238E27FC236}">
+                  <a16:creationId xmlns:a16="http://schemas.microsoft.com/office/drawing/2014/main" id="{781F2840-D17F-4E2B-9E62-6DFAA379DA17}"/>
+                </a:ext>
+              </a:extLst>
+            </p:cNvPr>
+            <p:cNvPicPr>
+              <a:picLocks noChangeAspect="1"/>
+            </p:cNvPicPr>
+            <p:nvPr/>
+          </p:nvPicPr>
+          <p:blipFill>
+            <a:blip r:embed="rId6"/>
+            <a:stretch>
+              <a:fillRect/>
+            </a:stretch>
+          </p:blipFill>
+          <p:spPr>
+            <a:xfrm>
+              <a:off x="5861737" y="4335313"/>
+              <a:ext cx="164606" cy="670618"/>
+            </a:xfrm>
+            <a:prstGeom prst="rect">
+              <a:avLst/>
+            </a:prstGeom>
+          </p:spPr>
+        </p:pic>
+        <p:pic>
+          <p:nvPicPr>
+            <p:cNvPr id="79" name="圖片 78">
+              <a:extLst>
+                <a:ext uri="{FF2B5EF4-FFF2-40B4-BE49-F238E27FC236}">
+                  <a16:creationId xmlns:a16="http://schemas.microsoft.com/office/drawing/2014/main" id="{78E9275D-1F84-4E0F-AD51-8071C1013A8B}"/>
+                </a:ext>
+              </a:extLst>
+            </p:cNvPr>
+            <p:cNvPicPr>
+              <a:picLocks noChangeAspect="1"/>
+            </p:cNvPicPr>
+            <p:nvPr/>
+          </p:nvPicPr>
+          <p:blipFill>
+            <a:blip r:embed="rId6"/>
+            <a:stretch>
+              <a:fillRect/>
+            </a:stretch>
+          </p:blipFill>
+          <p:spPr>
+            <a:xfrm>
+              <a:off x="6480586" y="3744407"/>
+              <a:ext cx="164606" cy="670618"/>
+            </a:xfrm>
+            <a:prstGeom prst="rect">
+              <a:avLst/>
+            </a:prstGeom>
+          </p:spPr>
+        </p:pic>
+        <p:pic>
+          <p:nvPicPr>
+            <p:cNvPr id="80" name="圖片 79">
+              <a:extLst>
+                <a:ext uri="{FF2B5EF4-FFF2-40B4-BE49-F238E27FC236}">
+                  <a16:creationId xmlns:a16="http://schemas.microsoft.com/office/drawing/2014/main" id="{C5AA5BE9-D39D-4DA9-80EF-AD332246757A}"/>
+                </a:ext>
+              </a:extLst>
+            </p:cNvPr>
+            <p:cNvPicPr>
+              <a:picLocks noChangeAspect="1"/>
+            </p:cNvPicPr>
+            <p:nvPr/>
+          </p:nvPicPr>
+          <p:blipFill rotWithShape="1">
+            <a:blip r:embed="rId6"/>
+            <a:srcRect b="48355"/>
+            <a:stretch/>
+          </p:blipFill>
+          <p:spPr>
+            <a:xfrm>
+              <a:off x="7048254" y="3917798"/>
+              <a:ext cx="164606" cy="346341"/>
+            </a:xfrm>
+            <a:prstGeom prst="rect">
+              <a:avLst/>
+            </a:prstGeom>
+          </p:spPr>
+        </p:pic>
+        <p:cxnSp>
+          <p:nvCxnSpPr>
+            <p:cNvPr id="81" name="直線單箭頭接點 80">
+              <a:extLst>
+                <a:ext uri="{FF2B5EF4-FFF2-40B4-BE49-F238E27FC236}">
+                  <a16:creationId xmlns:a16="http://schemas.microsoft.com/office/drawing/2014/main" id="{C4ABE148-97C4-43D2-BE0A-F977827405DA}"/>
+                </a:ext>
+              </a:extLst>
+            </p:cNvPr>
+            <p:cNvCxnSpPr/>
+            <p:nvPr/>
+          </p:nvCxnSpPr>
+          <p:spPr>
+            <a:xfrm>
+              <a:off x="6026343" y="3296420"/>
+              <a:ext cx="454243" cy="519500"/>
+            </a:xfrm>
+            <a:prstGeom prst="straightConnector1">
+              <a:avLst/>
+            </a:prstGeom>
+            <a:ln>
+              <a:solidFill>
+                <a:schemeClr val="accent1">
+                  <a:lumMod val="20000"/>
+                  <a:lumOff val="80000"/>
+                </a:schemeClr>
+              </a:solidFill>
+              <a:tailEnd type="triangle"/>
+            </a:ln>
+          </p:spPr>
+          <p:style>
+            <a:lnRef idx="2">
+              <a:schemeClr val="accent1"/>
+            </a:lnRef>
+            <a:fillRef idx="0">
+              <a:schemeClr val="accent1"/>
+            </a:fillRef>
+            <a:effectRef idx="1">
+              <a:schemeClr val="accent1"/>
+            </a:effectRef>
+            <a:fontRef idx="minor">
+              <a:schemeClr val="tx1"/>
+            </a:fontRef>
+          </p:style>
+        </p:cxnSp>
+        <p:cxnSp>
+          <p:nvCxnSpPr>
+            <p:cNvPr id="82" name="直線單箭頭接點 81">
+              <a:extLst>
+                <a:ext uri="{FF2B5EF4-FFF2-40B4-BE49-F238E27FC236}">
+                  <a16:creationId xmlns:a16="http://schemas.microsoft.com/office/drawing/2014/main" id="{F7DD7FC2-33BC-4DAE-B1DD-335C6CEF4335}"/>
+                </a:ext>
+              </a:extLst>
+            </p:cNvPr>
+            <p:cNvCxnSpPr>
+              <a:cxnSpLocks/>
+            </p:cNvCxnSpPr>
+            <p:nvPr/>
+          </p:nvCxnSpPr>
+          <p:spPr>
+            <a:xfrm flipV="1">
+              <a:off x="6026343" y="4366599"/>
+              <a:ext cx="454243" cy="573894"/>
+            </a:xfrm>
+            <a:prstGeom prst="straightConnector1">
+              <a:avLst/>
+            </a:prstGeom>
+            <a:ln>
+              <a:solidFill>
+                <a:schemeClr val="accent1">
+                  <a:lumMod val="20000"/>
+                  <a:lumOff val="80000"/>
+                </a:schemeClr>
+              </a:solidFill>
+              <a:tailEnd type="triangle"/>
+            </a:ln>
+          </p:spPr>
+          <p:style>
+            <a:lnRef idx="2">
+              <a:schemeClr val="accent1"/>
+            </a:lnRef>
+            <a:fillRef idx="0">
+              <a:schemeClr val="accent1"/>
+            </a:fillRef>
+            <a:effectRef idx="1">
+              <a:schemeClr val="accent1"/>
+            </a:effectRef>
+            <a:fontRef idx="minor">
+              <a:schemeClr val="tx1"/>
+            </a:fontRef>
+          </p:style>
+        </p:cxnSp>
+        <p:cxnSp>
+          <p:nvCxnSpPr>
+            <p:cNvPr id="83" name="直線單箭頭接點 82">
+              <a:extLst>
+                <a:ext uri="{FF2B5EF4-FFF2-40B4-BE49-F238E27FC236}">
+                  <a16:creationId xmlns:a16="http://schemas.microsoft.com/office/drawing/2014/main" id="{5634C37C-BDB6-48D6-AB6F-A2D5A1739E3D}"/>
+                </a:ext>
+              </a:extLst>
+            </p:cNvPr>
+            <p:cNvCxnSpPr/>
+            <p:nvPr/>
+          </p:nvCxnSpPr>
+          <p:spPr>
+            <a:xfrm>
+              <a:off x="6645192" y="3869205"/>
+              <a:ext cx="403062" cy="85306"/>
+            </a:xfrm>
+            <a:prstGeom prst="straightConnector1">
+              <a:avLst/>
+            </a:prstGeom>
+            <a:ln>
+              <a:solidFill>
+                <a:schemeClr val="accent1">
+                  <a:lumMod val="20000"/>
+                  <a:lumOff val="80000"/>
+                </a:schemeClr>
+              </a:solidFill>
+              <a:tailEnd type="triangle"/>
+            </a:ln>
+          </p:spPr>
+          <p:style>
+            <a:lnRef idx="2">
+              <a:schemeClr val="accent1"/>
+            </a:lnRef>
+            <a:fillRef idx="0">
+              <a:schemeClr val="accent1"/>
+            </a:fillRef>
+            <a:effectRef idx="1">
+              <a:schemeClr val="accent1"/>
+            </a:effectRef>
+            <a:fontRef idx="minor">
+              <a:schemeClr val="tx1"/>
+            </a:fontRef>
+          </p:style>
+        </p:cxnSp>
+        <p:cxnSp>
+          <p:nvCxnSpPr>
+            <p:cNvPr id="84" name="直線單箭頭接點 83">
+              <a:extLst>
+                <a:ext uri="{FF2B5EF4-FFF2-40B4-BE49-F238E27FC236}">
+                  <a16:creationId xmlns:a16="http://schemas.microsoft.com/office/drawing/2014/main" id="{D19FB2C8-3B49-4DE7-9EDD-600633F56253}"/>
+                </a:ext>
+              </a:extLst>
+            </p:cNvPr>
+            <p:cNvCxnSpPr>
+              <a:cxnSpLocks/>
+            </p:cNvCxnSpPr>
+            <p:nvPr/>
+          </p:nvCxnSpPr>
+          <p:spPr>
+            <a:xfrm flipV="1">
+              <a:off x="6671931" y="4214185"/>
+              <a:ext cx="376323" cy="121129"/>
+            </a:xfrm>
+            <a:prstGeom prst="straightConnector1">
+              <a:avLst/>
+            </a:prstGeom>
+            <a:ln>
+              <a:solidFill>
+                <a:schemeClr val="accent1">
+                  <a:lumMod val="20000"/>
+                  <a:lumOff val="80000"/>
+                </a:schemeClr>
+              </a:solidFill>
+              <a:tailEnd type="triangle"/>
+            </a:ln>
+          </p:spPr>
+          <p:style>
+            <a:lnRef idx="2">
+              <a:schemeClr val="accent1"/>
+            </a:lnRef>
+            <a:fillRef idx="0">
+              <a:schemeClr val="accent1"/>
+            </a:fillRef>
+            <a:effectRef idx="1">
+              <a:schemeClr val="accent1"/>
+            </a:effectRef>
+            <a:fontRef idx="minor">
+              <a:schemeClr val="tx1"/>
+            </a:fontRef>
+          </p:style>
+        </p:cxnSp>
+        <p:cxnSp>
+          <p:nvCxnSpPr>
+            <p:cNvPr id="85" name="直線接點 84">
+              <a:extLst>
+                <a:ext uri="{FF2B5EF4-FFF2-40B4-BE49-F238E27FC236}">
+                  <a16:creationId xmlns:a16="http://schemas.microsoft.com/office/drawing/2014/main" id="{306E025A-E129-419E-ABBC-15CCDB929DAF}"/>
+                </a:ext>
+              </a:extLst>
+            </p:cNvPr>
+            <p:cNvCxnSpPr/>
+            <p:nvPr/>
+          </p:nvCxnSpPr>
+          <p:spPr>
+            <a:xfrm>
+              <a:off x="5944040" y="3922698"/>
+              <a:ext cx="0" cy="323273"/>
+            </a:xfrm>
+            <a:prstGeom prst="line">
+              <a:avLst/>
+            </a:prstGeom>
+            <a:ln>
+              <a:solidFill>
+                <a:schemeClr val="bg2"/>
+              </a:solidFill>
+              <a:prstDash val="sysDash"/>
+            </a:ln>
+          </p:spPr>
+          <p:style>
+            <a:lnRef idx="2">
+              <a:schemeClr val="accent1"/>
+            </a:lnRef>
+            <a:fillRef idx="0">
+              <a:schemeClr val="accent1"/>
+            </a:fillRef>
+            <a:effectRef idx="1">
+              <a:schemeClr val="accent1"/>
+            </a:effectRef>
+            <a:fontRef idx="minor">
+              <a:schemeClr val="tx1"/>
+            </a:fontRef>
+          </p:style>
+        </p:cxnSp>
+        <p:cxnSp>
+          <p:nvCxnSpPr>
+            <p:cNvPr id="86" name="直線接點 85">
+              <a:extLst>
+                <a:ext uri="{FF2B5EF4-FFF2-40B4-BE49-F238E27FC236}">
+                  <a16:creationId xmlns:a16="http://schemas.microsoft.com/office/drawing/2014/main" id="{F09DE4FF-293C-4B87-9922-46803D638595}"/>
+                </a:ext>
+              </a:extLst>
+            </p:cNvPr>
+            <p:cNvCxnSpPr>
+              <a:cxnSpLocks/>
+            </p:cNvCxnSpPr>
+            <p:nvPr/>
+          </p:nvCxnSpPr>
+          <p:spPr>
+            <a:xfrm flipH="1">
+              <a:off x="6253464" y="3717239"/>
+              <a:ext cx="4605" cy="697786"/>
+            </a:xfrm>
+            <a:prstGeom prst="line">
+              <a:avLst/>
+            </a:prstGeom>
+            <a:ln>
+              <a:solidFill>
+                <a:schemeClr val="accent1">
+                  <a:lumMod val="20000"/>
+                  <a:lumOff val="80000"/>
+                </a:schemeClr>
+              </a:solidFill>
+              <a:prstDash val="sysDash"/>
+            </a:ln>
+          </p:spPr>
+          <p:style>
+            <a:lnRef idx="2">
+              <a:schemeClr val="accent1"/>
+            </a:lnRef>
+            <a:fillRef idx="0">
+              <a:schemeClr val="accent1"/>
+            </a:fillRef>
+            <a:effectRef idx="1">
+              <a:schemeClr val="accent1"/>
+            </a:effectRef>
+            <a:fontRef idx="minor">
+              <a:schemeClr val="tx1"/>
+            </a:fontRef>
+          </p:style>
+        </p:cxnSp>
+        <p:cxnSp>
+          <p:nvCxnSpPr>
+            <p:cNvPr id="87" name="直線接點 86">
+              <a:extLst>
+                <a:ext uri="{FF2B5EF4-FFF2-40B4-BE49-F238E27FC236}">
+                  <a16:creationId xmlns:a16="http://schemas.microsoft.com/office/drawing/2014/main" id="{729212E7-58EF-4CFC-8E73-97719B7C4E1B}"/>
+                </a:ext>
+              </a:extLst>
+            </p:cNvPr>
+            <p:cNvCxnSpPr>
+              <a:cxnSpLocks/>
+            </p:cNvCxnSpPr>
+            <p:nvPr/>
+          </p:nvCxnSpPr>
+          <p:spPr>
+            <a:xfrm>
+              <a:off x="6846723" y="3976738"/>
+              <a:ext cx="0" cy="223715"/>
+            </a:xfrm>
+            <a:prstGeom prst="line">
+              <a:avLst/>
+            </a:prstGeom>
+            <a:ln>
+              <a:solidFill>
+                <a:schemeClr val="accent1">
+                  <a:lumMod val="20000"/>
+                  <a:lumOff val="80000"/>
+                </a:schemeClr>
+              </a:solidFill>
+              <a:prstDash val="sysDash"/>
+            </a:ln>
+          </p:spPr>
+          <p:style>
+            <a:lnRef idx="2">
+              <a:schemeClr val="accent1"/>
+            </a:lnRef>
+            <a:fillRef idx="0">
+              <a:schemeClr val="accent1"/>
+            </a:fillRef>
+            <a:effectRef idx="1">
+              <a:schemeClr val="accent1"/>
+            </a:effectRef>
+            <a:fontRef idx="minor">
+              <a:schemeClr val="tx1"/>
+            </a:fontRef>
+          </p:style>
+        </p:cxnSp>
+        <p:sp>
+          <p:nvSpPr>
+            <p:cNvPr id="88" name="矩形 87">
+              <a:extLst>
+                <a:ext uri="{FF2B5EF4-FFF2-40B4-BE49-F238E27FC236}">
+                  <a16:creationId xmlns:a16="http://schemas.microsoft.com/office/drawing/2014/main" id="{B73B5256-11EE-4609-B353-278514AD69B0}"/>
+                </a:ext>
+              </a:extLst>
+            </p:cNvPr>
+            <p:cNvSpPr/>
+            <p:nvPr/>
+          </p:nvSpPr>
+          <p:spPr>
+            <a:xfrm>
+              <a:off x="6562889" y="3375075"/>
+              <a:ext cx="587020" cy="369332"/>
+            </a:xfrm>
+            <a:prstGeom prst="rect">
+              <a:avLst/>
+            </a:prstGeom>
+          </p:spPr>
+          <p:txBody>
+            <a:bodyPr wrap="none">
+              <a:spAutoFit/>
+            </a:bodyPr>
+            <a:lstStyle/>
+            <a:p>
+              <a:r>
+                <a:rPr lang="en-US" altLang="zh-HK" dirty="0"/>
+                <a:t>fully</a:t>
+              </a:r>
+              <a:endParaRPr lang="zh-HK" altLang="en-US" dirty="0"/>
+            </a:p>
+          </p:txBody>
+        </p:sp>
+        <p:sp>
+          <p:nvSpPr>
+            <p:cNvPr id="89" name="矩形 88">
+              <a:extLst>
+                <a:ext uri="{FF2B5EF4-FFF2-40B4-BE49-F238E27FC236}">
+                  <a16:creationId xmlns:a16="http://schemas.microsoft.com/office/drawing/2014/main" id="{84E12A9B-C860-4A82-880C-51E9DF73BA1C}"/>
+                </a:ext>
+              </a:extLst>
+            </p:cNvPr>
+            <p:cNvSpPr/>
+            <p:nvPr/>
+          </p:nvSpPr>
+          <p:spPr>
+            <a:xfrm>
+              <a:off x="6261274" y="4485956"/>
+              <a:ext cx="1170898" cy="369332"/>
+            </a:xfrm>
+            <a:prstGeom prst="rect">
+              <a:avLst/>
+            </a:prstGeom>
+          </p:spPr>
+          <p:txBody>
+            <a:bodyPr wrap="none">
+              <a:spAutoFit/>
+            </a:bodyPr>
+            <a:lstStyle/>
+            <a:p>
+              <a:r>
+                <a:rPr lang="en-US" altLang="zh-HK" dirty="0"/>
+                <a:t>connected</a:t>
+              </a:r>
+              <a:endParaRPr lang="zh-HK" altLang="en-US" dirty="0"/>
+            </a:p>
+          </p:txBody>
+        </p:sp>
+        <p:cxnSp>
+          <p:nvCxnSpPr>
+            <p:cNvPr id="90" name="直線單箭頭接點 89">
+              <a:extLst>
+                <a:ext uri="{FF2B5EF4-FFF2-40B4-BE49-F238E27FC236}">
+                  <a16:creationId xmlns:a16="http://schemas.microsoft.com/office/drawing/2014/main" id="{AA2395BC-C42D-4058-9C5C-EED1CB4A0ACD}"/>
+                </a:ext>
+              </a:extLst>
+            </p:cNvPr>
+            <p:cNvCxnSpPr>
+              <a:cxnSpLocks/>
+            </p:cNvCxnSpPr>
+            <p:nvPr/>
+          </p:nvCxnSpPr>
+          <p:spPr>
+            <a:xfrm flipV="1">
+              <a:off x="2381218" y="4161066"/>
+              <a:ext cx="779677" cy="2"/>
+            </a:xfrm>
+            <a:prstGeom prst="straightConnector1">
+              <a:avLst/>
+            </a:prstGeom>
+            <a:ln>
+              <a:solidFill>
+                <a:schemeClr val="accent1">
+                  <a:lumMod val="20000"/>
+                  <a:lumOff val="80000"/>
+                </a:schemeClr>
+              </a:solidFill>
+              <a:tailEnd type="triangle"/>
+            </a:ln>
+          </p:spPr>
+          <p:style>
+            <a:lnRef idx="2">
+              <a:schemeClr val="accent1"/>
+            </a:lnRef>
+            <a:fillRef idx="0">
+              <a:schemeClr val="accent1"/>
+            </a:fillRef>
+            <a:effectRef idx="1">
+              <a:schemeClr val="accent1"/>
+            </a:effectRef>
+            <a:fontRef idx="minor">
+              <a:schemeClr val="tx1"/>
+            </a:fontRef>
+          </p:style>
+        </p:cxnSp>
+        <p:sp>
+          <p:nvSpPr>
+            <p:cNvPr id="91" name="矩形 90">
+              <a:extLst>
+                <a:ext uri="{FF2B5EF4-FFF2-40B4-BE49-F238E27FC236}">
+                  <a16:creationId xmlns:a16="http://schemas.microsoft.com/office/drawing/2014/main" id="{9F1EE8DE-F43B-4F1A-AE83-F317A17191C6}"/>
+                </a:ext>
+              </a:extLst>
+            </p:cNvPr>
+            <p:cNvSpPr/>
+            <p:nvPr/>
+          </p:nvSpPr>
+          <p:spPr>
+            <a:xfrm>
+              <a:off x="2405521" y="3831121"/>
+              <a:ext cx="652102" cy="369332"/>
+            </a:xfrm>
+            <a:prstGeom prst="rect">
+              <a:avLst/>
+            </a:prstGeom>
+          </p:spPr>
+          <p:txBody>
+            <a:bodyPr wrap="none">
+              <a:spAutoFit/>
+            </a:bodyPr>
+            <a:lstStyle/>
+            <a:p>
+              <a:r>
+                <a:rPr lang="en-US" altLang="zh-HK" dirty="0"/>
+                <a:t>Conv</a:t>
+              </a:r>
+              <a:endParaRPr lang="zh-HK" altLang="en-US" dirty="0"/>
+            </a:p>
+          </p:txBody>
+        </p:sp>
+        <p:cxnSp>
+          <p:nvCxnSpPr>
+            <p:cNvPr id="92" name="直線單箭頭接點 91">
+              <a:extLst>
+                <a:ext uri="{FF2B5EF4-FFF2-40B4-BE49-F238E27FC236}">
+                  <a16:creationId xmlns:a16="http://schemas.microsoft.com/office/drawing/2014/main" id="{C6CA8F68-640F-4BBF-862E-905F6D02848F}"/>
+                </a:ext>
+              </a:extLst>
+            </p:cNvPr>
+            <p:cNvCxnSpPr/>
+            <p:nvPr/>
+          </p:nvCxnSpPr>
+          <p:spPr>
+            <a:xfrm>
+              <a:off x="3794077" y="4158673"/>
+              <a:ext cx="565204" cy="0"/>
+            </a:xfrm>
+            <a:prstGeom prst="straightConnector1">
+              <a:avLst/>
+            </a:prstGeom>
+            <a:ln>
+              <a:solidFill>
+                <a:schemeClr val="accent1">
+                  <a:lumMod val="20000"/>
+                  <a:lumOff val="80000"/>
+                </a:schemeClr>
+              </a:solidFill>
+              <a:tailEnd type="triangle"/>
+            </a:ln>
+          </p:spPr>
+          <p:style>
+            <a:lnRef idx="2">
+              <a:schemeClr val="accent1"/>
+            </a:lnRef>
+            <a:fillRef idx="0">
+              <a:schemeClr val="accent1"/>
+            </a:fillRef>
+            <a:effectRef idx="1">
+              <a:schemeClr val="accent1"/>
+            </a:effectRef>
+            <a:fontRef idx="minor">
+              <a:schemeClr val="tx1"/>
+            </a:fontRef>
+          </p:style>
+        </p:cxnSp>
+        <p:sp>
+          <p:nvSpPr>
+            <p:cNvPr id="93" name="矩形 92">
+              <a:extLst>
+                <a:ext uri="{FF2B5EF4-FFF2-40B4-BE49-F238E27FC236}">
+                  <a16:creationId xmlns:a16="http://schemas.microsoft.com/office/drawing/2014/main" id="{D42F1C50-4785-4C50-9DB6-63B1E50DD838}"/>
+                </a:ext>
+              </a:extLst>
+            </p:cNvPr>
+            <p:cNvSpPr/>
+            <p:nvPr/>
+          </p:nvSpPr>
+          <p:spPr>
+            <a:xfrm>
+              <a:off x="3763475" y="3862652"/>
+              <a:ext cx="595228" cy="369332"/>
+            </a:xfrm>
+            <a:prstGeom prst="rect">
+              <a:avLst/>
+            </a:prstGeom>
+          </p:spPr>
+          <p:txBody>
+            <a:bodyPr wrap="none">
+              <a:spAutoFit/>
+            </a:bodyPr>
+            <a:lstStyle/>
+            <a:p>
+              <a:r>
+                <a:rPr lang="en-US" altLang="zh-HK" dirty="0"/>
+                <a:t>Pool</a:t>
+              </a:r>
+              <a:endParaRPr lang="zh-HK" altLang="en-US" dirty="0"/>
+            </a:p>
+          </p:txBody>
+        </p:sp>
+        <p:sp>
+          <p:nvSpPr>
+            <p:cNvPr id="94" name="矩形 93">
+              <a:extLst>
+                <a:ext uri="{FF2B5EF4-FFF2-40B4-BE49-F238E27FC236}">
+                  <a16:creationId xmlns:a16="http://schemas.microsoft.com/office/drawing/2014/main" id="{47933097-73DC-439A-AD64-A3807C4F190E}"/>
+                </a:ext>
+              </a:extLst>
+            </p:cNvPr>
+            <p:cNvSpPr/>
+            <p:nvPr/>
+          </p:nvSpPr>
+          <p:spPr>
+            <a:xfrm>
+              <a:off x="5067792" y="3808089"/>
+              <a:ext cx="837217" cy="369332"/>
+            </a:xfrm>
+            <a:prstGeom prst="rect">
+              <a:avLst/>
+            </a:prstGeom>
+          </p:spPr>
+          <p:txBody>
+            <a:bodyPr wrap="none">
+              <a:spAutoFit/>
+            </a:bodyPr>
+            <a:lstStyle/>
+            <a:p>
+              <a:r>
+                <a:rPr lang="en-US" altLang="zh-HK" dirty="0"/>
+                <a:t>Flatten</a:t>
+              </a:r>
+              <a:endParaRPr lang="zh-HK" altLang="en-US" dirty="0"/>
+            </a:p>
+          </p:txBody>
+        </p:sp>
+        <p:cxnSp>
+          <p:nvCxnSpPr>
+            <p:cNvPr id="95" name="直線單箭頭接點 94">
+              <a:extLst>
+                <a:ext uri="{FF2B5EF4-FFF2-40B4-BE49-F238E27FC236}">
+                  <a16:creationId xmlns:a16="http://schemas.microsoft.com/office/drawing/2014/main" id="{6472FCDF-FD48-447F-81F4-42D28B46214A}"/>
+                </a:ext>
+              </a:extLst>
+            </p:cNvPr>
+            <p:cNvCxnSpPr>
+              <a:cxnSpLocks/>
+            </p:cNvCxnSpPr>
+            <p:nvPr/>
+          </p:nvCxnSpPr>
+          <p:spPr>
+            <a:xfrm flipV="1">
+              <a:off x="5086301" y="4134545"/>
+              <a:ext cx="779677" cy="2"/>
+            </a:xfrm>
+            <a:prstGeom prst="straightConnector1">
+              <a:avLst/>
+            </a:prstGeom>
+            <a:ln>
+              <a:solidFill>
+                <a:schemeClr val="accent1">
+                  <a:lumMod val="20000"/>
+                  <a:lumOff val="80000"/>
+                </a:schemeClr>
+              </a:solidFill>
+              <a:tailEnd type="triangle"/>
+            </a:ln>
+          </p:spPr>
+          <p:style>
+            <a:lnRef idx="2">
+              <a:schemeClr val="accent1"/>
+            </a:lnRef>
+            <a:fillRef idx="0">
+              <a:schemeClr val="accent1"/>
+            </a:fillRef>
+            <a:effectRef idx="1">
+              <a:schemeClr val="accent1"/>
+            </a:effectRef>
+            <a:fontRef idx="minor">
+              <a:schemeClr val="tx1"/>
+            </a:fontRef>
+          </p:style>
+        </p:cxnSp>
+      </p:grpSp>
+    </p:spTree>
+    <p:extLst>
+      <p:ext uri="{BB962C8B-B14F-4D97-AF65-F5344CB8AC3E}">
+        <p14:creationId xmlns:p14="http://schemas.microsoft.com/office/powerpoint/2010/main" val="2813082791"/>
       </p:ext>
     </p:extLst>
   </p:cSld>

--- a/Presentation1.pptx
+++ b/Presentation1.pptx
@@ -263,7 +263,7 @@
           <a:p>
             <a:fld id="{ED0FC01E-52E7-E248-9225-B6E184C589D0}" type="datetimeFigureOut">
               <a:rPr lang="en-US" smtClean="0"/>
-              <a:t>11/18/2024</a:t>
+              <a:t>11/19/2024</a:t>
             </a:fld>
             <a:endParaRPr lang="en-US"/>
           </a:p>
@@ -463,7 +463,7 @@
           <a:p>
             <a:fld id="{ED0FC01E-52E7-E248-9225-B6E184C589D0}" type="datetimeFigureOut">
               <a:rPr lang="en-US" smtClean="0"/>
-              <a:t>11/18/2024</a:t>
+              <a:t>11/19/2024</a:t>
             </a:fld>
             <a:endParaRPr lang="en-US"/>
           </a:p>
@@ -673,7 +673,7 @@
           <a:p>
             <a:fld id="{ED0FC01E-52E7-E248-9225-B6E184C589D0}" type="datetimeFigureOut">
               <a:rPr lang="en-US" smtClean="0"/>
-              <a:t>11/18/2024</a:t>
+              <a:t>11/19/2024</a:t>
             </a:fld>
             <a:endParaRPr lang="en-US"/>
           </a:p>
@@ -873,7 +873,7 @@
           <a:p>
             <a:fld id="{ED0FC01E-52E7-E248-9225-B6E184C589D0}" type="datetimeFigureOut">
               <a:rPr lang="en-US" smtClean="0"/>
-              <a:t>11/18/2024</a:t>
+              <a:t>11/19/2024</a:t>
             </a:fld>
             <a:endParaRPr lang="en-US"/>
           </a:p>
@@ -1149,7 +1149,7 @@
           <a:p>
             <a:fld id="{ED0FC01E-52E7-E248-9225-B6E184C589D0}" type="datetimeFigureOut">
               <a:rPr lang="en-US" smtClean="0"/>
-              <a:t>11/18/2024</a:t>
+              <a:t>11/19/2024</a:t>
             </a:fld>
             <a:endParaRPr lang="en-US"/>
           </a:p>
@@ -1417,7 +1417,7 @@
           <a:p>
             <a:fld id="{ED0FC01E-52E7-E248-9225-B6E184C589D0}" type="datetimeFigureOut">
               <a:rPr lang="en-US" smtClean="0"/>
-              <a:t>11/18/2024</a:t>
+              <a:t>11/19/2024</a:t>
             </a:fld>
             <a:endParaRPr lang="en-US"/>
           </a:p>
@@ -1832,7 +1832,7 @@
           <a:p>
             <a:fld id="{ED0FC01E-52E7-E248-9225-B6E184C589D0}" type="datetimeFigureOut">
               <a:rPr lang="en-US" smtClean="0"/>
-              <a:t>11/18/2024</a:t>
+              <a:t>11/19/2024</a:t>
             </a:fld>
             <a:endParaRPr lang="en-US"/>
           </a:p>
@@ -1974,7 +1974,7 @@
           <a:p>
             <a:fld id="{ED0FC01E-52E7-E248-9225-B6E184C589D0}" type="datetimeFigureOut">
               <a:rPr lang="en-US" smtClean="0"/>
-              <a:t>11/18/2024</a:t>
+              <a:t>11/19/2024</a:t>
             </a:fld>
             <a:endParaRPr lang="en-US"/>
           </a:p>
@@ -2087,7 +2087,7 @@
           <a:p>
             <a:fld id="{ED0FC01E-52E7-E248-9225-B6E184C589D0}" type="datetimeFigureOut">
               <a:rPr lang="en-US" smtClean="0"/>
-              <a:t>11/18/2024</a:t>
+              <a:t>11/19/2024</a:t>
             </a:fld>
             <a:endParaRPr lang="en-US"/>
           </a:p>
@@ -2400,7 +2400,7 @@
           <a:p>
             <a:fld id="{ED0FC01E-52E7-E248-9225-B6E184C589D0}" type="datetimeFigureOut">
               <a:rPr lang="en-US" smtClean="0"/>
-              <a:t>11/18/2024</a:t>
+              <a:t>11/19/2024</a:t>
             </a:fld>
             <a:endParaRPr lang="en-US"/>
           </a:p>
@@ -2689,7 +2689,7 @@
           <a:p>
             <a:fld id="{ED0FC01E-52E7-E248-9225-B6E184C589D0}" type="datetimeFigureOut">
               <a:rPr lang="en-US" smtClean="0"/>
-              <a:t>11/18/2024</a:t>
+              <a:t>11/19/2024</a:t>
             </a:fld>
             <a:endParaRPr lang="en-US"/>
           </a:p>
@@ -2932,7 +2932,7 @@
           <a:p>
             <a:fld id="{ED0FC01E-52E7-E248-9225-B6E184C589D0}" type="datetimeFigureOut">
               <a:rPr lang="en-US" smtClean="0"/>
-              <a:t>11/18/2024</a:t>
+              <a:t>11/19/2024</a:t>
             </a:fld>
             <a:endParaRPr lang="en-US"/>
           </a:p>
@@ -3849,42 +3849,12 @@
           <a:chExt cx="0" cy="0"/>
         </a:xfrm>
       </p:grpSpPr>
-      <p:pic>
-        <p:nvPicPr>
-          <p:cNvPr id="9" name="圖片 8">
+      <p:grpSp>
+        <p:nvGrpSpPr>
+          <p:cNvPr id="2" name="群組 1">
             <a:extLst>
               <a:ext uri="{FF2B5EF4-FFF2-40B4-BE49-F238E27FC236}">
-                <a16:creationId xmlns:a16="http://schemas.microsoft.com/office/drawing/2014/main" id="{C93A6D5B-A69F-4656-B6B6-8AF0E1FC21A0}"/>
-              </a:ext>
-            </a:extLst>
-          </p:cNvPr>
-          <p:cNvPicPr preferRelativeResize="0">
-            <a:picLocks/>
-          </p:cNvPicPr>
-          <p:nvPr/>
-        </p:nvPicPr>
-        <p:blipFill>
-          <a:blip r:embed="rId2"/>
-          <a:stretch>
-            <a:fillRect/>
-          </a:stretch>
-        </p:blipFill>
-        <p:spPr>
-          <a:xfrm>
-            <a:off x="2142837" y="1224015"/>
-            <a:ext cx="1496152" cy="1475313"/>
-          </a:xfrm>
-          <a:prstGeom prst="rect">
-            <a:avLst/>
-          </a:prstGeom>
-        </p:spPr>
-      </p:pic>
-      <p:grpSp>
-        <p:nvGrpSpPr>
-          <p:cNvPr id="23" name="群組 22">
-            <a:extLst>
-              <a:ext uri="{FF2B5EF4-FFF2-40B4-BE49-F238E27FC236}">
-                <a16:creationId xmlns:a16="http://schemas.microsoft.com/office/drawing/2014/main" id="{2EC3CF09-606A-41E8-BDAD-BB4954084973}"/>
+                <a16:creationId xmlns:a16="http://schemas.microsoft.com/office/drawing/2014/main" id="{AA649827-8E97-4DFF-A661-1C3C42A34F44}"/>
               </a:ext>
             </a:extLst>
           </p:cNvPr>
@@ -3893,65 +3863,435 @@
         </p:nvGrpSpPr>
         <p:grpSpPr>
           <a:xfrm>
-            <a:off x="4418666" y="1224015"/>
-            <a:ext cx="1524622" cy="1395536"/>
-            <a:chOff x="3648363" y="1953687"/>
-            <a:chExt cx="1524622" cy="1395536"/>
+            <a:off x="551703" y="159350"/>
+            <a:ext cx="7667246" cy="1807344"/>
+            <a:chOff x="2142837" y="1038240"/>
+            <a:chExt cx="7667246" cy="1807344"/>
           </a:xfrm>
         </p:grpSpPr>
         <p:pic>
           <p:nvPicPr>
-            <p:cNvPr id="11" name="圖片 10">
-              <a:extLst>
-                <a:ext uri="{FF2B5EF4-FFF2-40B4-BE49-F238E27FC236}">
-                  <a16:creationId xmlns:a16="http://schemas.microsoft.com/office/drawing/2014/main" id="{9BE9D09C-2989-45A1-88F3-1DC4C236161C}"/>
-                </a:ext>
-              </a:extLst>
-            </p:cNvPr>
-            <p:cNvPicPr>
-              <a:picLocks noChangeAspect="1"/>
-            </p:cNvPicPr>
-            <p:nvPr/>
-          </p:nvPicPr>
-          <p:blipFill rotWithShape="1">
-            <a:blip r:embed="rId3"/>
-            <a:srcRect r="24697" b="25417"/>
-            <a:stretch/>
-          </p:blipFill>
-          <p:spPr>
-            <a:xfrm>
-              <a:off x="3648363" y="1953687"/>
-              <a:ext cx="979055" cy="969686"/>
-            </a:xfrm>
-            <a:prstGeom prst="rect">
-              <a:avLst/>
-            </a:prstGeom>
-          </p:spPr>
-        </p:pic>
-        <p:pic>
-          <p:nvPicPr>
-            <p:cNvPr id="13" name="圖片 12">
-              <a:extLst>
-                <a:ext uri="{FF2B5EF4-FFF2-40B4-BE49-F238E27FC236}">
-                  <a16:creationId xmlns:a16="http://schemas.microsoft.com/office/drawing/2014/main" id="{C281E78A-7E2E-4B24-A5DF-7EF7331F3177}"/>
-                </a:ext>
-              </a:extLst>
-            </p:cNvPr>
-            <p:cNvPicPr>
-              <a:picLocks noChangeAspect="1"/>
+            <p:cNvPr id="9" name="圖片 8">
+              <a:extLst>
+                <a:ext uri="{FF2B5EF4-FFF2-40B4-BE49-F238E27FC236}">
+                  <a16:creationId xmlns:a16="http://schemas.microsoft.com/office/drawing/2014/main" id="{C93A6D5B-A69F-4656-B6B6-8AF0E1FC21A0}"/>
+                </a:ext>
+              </a:extLst>
+            </p:cNvPr>
+            <p:cNvPicPr preferRelativeResize="0">
+              <a:picLocks/>
             </p:cNvPicPr>
             <p:nvPr/>
           </p:nvPicPr>
           <p:blipFill>
-            <a:blip r:embed="rId4"/>
+            <a:blip r:embed="rId2"/>
             <a:stretch>
               <a:fillRect/>
             </a:stretch>
           </p:blipFill>
           <p:spPr>
             <a:xfrm>
-              <a:off x="3757956" y="2036114"/>
-              <a:ext cx="981541" cy="975445"/>
+              <a:off x="2142837" y="1224015"/>
+              <a:ext cx="1496152" cy="1475313"/>
+            </a:xfrm>
+            <a:prstGeom prst="rect">
+              <a:avLst/>
+            </a:prstGeom>
+          </p:spPr>
+        </p:pic>
+        <p:grpSp>
+          <p:nvGrpSpPr>
+            <p:cNvPr id="23" name="群組 22">
+              <a:extLst>
+                <a:ext uri="{FF2B5EF4-FFF2-40B4-BE49-F238E27FC236}">
+                  <a16:creationId xmlns:a16="http://schemas.microsoft.com/office/drawing/2014/main" id="{2EC3CF09-606A-41E8-BDAD-BB4954084973}"/>
+                </a:ext>
+              </a:extLst>
+            </p:cNvPr>
+            <p:cNvGrpSpPr/>
+            <p:nvPr/>
+          </p:nvGrpSpPr>
+          <p:grpSpPr>
+            <a:xfrm>
+              <a:off x="4418666" y="1224015"/>
+              <a:ext cx="1524622" cy="1395536"/>
+              <a:chOff x="3648363" y="1953687"/>
+              <a:chExt cx="1524622" cy="1395536"/>
+            </a:xfrm>
+          </p:grpSpPr>
+          <p:pic>
+            <p:nvPicPr>
+              <p:cNvPr id="11" name="圖片 10">
+                <a:extLst>
+                  <a:ext uri="{FF2B5EF4-FFF2-40B4-BE49-F238E27FC236}">
+                    <a16:creationId xmlns:a16="http://schemas.microsoft.com/office/drawing/2014/main" id="{9BE9D09C-2989-45A1-88F3-1DC4C236161C}"/>
+                  </a:ext>
+                </a:extLst>
+              </p:cNvPr>
+              <p:cNvPicPr>
+                <a:picLocks noChangeAspect="1"/>
+              </p:cNvPicPr>
+              <p:nvPr/>
+            </p:nvPicPr>
+            <p:blipFill rotWithShape="1">
+              <a:blip r:embed="rId3"/>
+              <a:srcRect r="24697" b="25417"/>
+              <a:stretch/>
+            </p:blipFill>
+            <p:spPr>
+              <a:xfrm>
+                <a:off x="3648363" y="1953687"/>
+                <a:ext cx="979055" cy="969686"/>
+              </a:xfrm>
+              <a:prstGeom prst="rect">
+                <a:avLst/>
+              </a:prstGeom>
+            </p:spPr>
+          </p:pic>
+          <p:pic>
+            <p:nvPicPr>
+              <p:cNvPr id="13" name="圖片 12">
+                <a:extLst>
+                  <a:ext uri="{FF2B5EF4-FFF2-40B4-BE49-F238E27FC236}">
+                    <a16:creationId xmlns:a16="http://schemas.microsoft.com/office/drawing/2014/main" id="{C281E78A-7E2E-4B24-A5DF-7EF7331F3177}"/>
+                  </a:ext>
+                </a:extLst>
+              </p:cNvPr>
+              <p:cNvPicPr>
+                <a:picLocks noChangeAspect="1"/>
+              </p:cNvPicPr>
+              <p:nvPr/>
+            </p:nvPicPr>
+            <p:blipFill>
+              <a:blip r:embed="rId4"/>
+              <a:stretch>
+                <a:fillRect/>
+              </a:stretch>
+            </p:blipFill>
+            <p:spPr>
+              <a:xfrm>
+                <a:off x="3757956" y="2036114"/>
+                <a:ext cx="981541" cy="975445"/>
+              </a:xfrm>
+              <a:prstGeom prst="rect">
+                <a:avLst/>
+              </a:prstGeom>
+            </p:spPr>
+          </p:pic>
+          <p:pic>
+            <p:nvPicPr>
+              <p:cNvPr id="14" name="圖片 13">
+                <a:extLst>
+                  <a:ext uri="{FF2B5EF4-FFF2-40B4-BE49-F238E27FC236}">
+                    <a16:creationId xmlns:a16="http://schemas.microsoft.com/office/drawing/2014/main" id="{655B1F52-A864-4570-993D-1E715A0C378B}"/>
+                  </a:ext>
+                </a:extLst>
+              </p:cNvPr>
+              <p:cNvPicPr>
+                <a:picLocks noChangeAspect="1"/>
+              </p:cNvPicPr>
+              <p:nvPr/>
+            </p:nvPicPr>
+            <p:blipFill>
+              <a:blip r:embed="rId4"/>
+              <a:stretch>
+                <a:fillRect/>
+              </a:stretch>
+            </p:blipFill>
+            <p:spPr>
+              <a:xfrm>
+                <a:off x="3867549" y="2118541"/>
+                <a:ext cx="981541" cy="975445"/>
+              </a:xfrm>
+              <a:prstGeom prst="rect">
+                <a:avLst/>
+              </a:prstGeom>
+            </p:spPr>
+          </p:pic>
+          <p:pic>
+            <p:nvPicPr>
+              <p:cNvPr id="15" name="圖片 14">
+                <a:extLst>
+                  <a:ext uri="{FF2B5EF4-FFF2-40B4-BE49-F238E27FC236}">
+                    <a16:creationId xmlns:a16="http://schemas.microsoft.com/office/drawing/2014/main" id="{6F81EE84-91D7-4528-B3AA-511137C55374}"/>
+                  </a:ext>
+                </a:extLst>
+              </p:cNvPr>
+              <p:cNvPicPr>
+                <a:picLocks noChangeAspect="1"/>
+              </p:cNvPicPr>
+              <p:nvPr/>
+            </p:nvPicPr>
+            <p:blipFill>
+              <a:blip r:embed="rId4"/>
+              <a:stretch>
+                <a:fillRect/>
+              </a:stretch>
+            </p:blipFill>
+            <p:spPr>
+              <a:xfrm>
+                <a:off x="3977142" y="2203620"/>
+                <a:ext cx="981541" cy="975445"/>
+              </a:xfrm>
+              <a:prstGeom prst="rect">
+                <a:avLst/>
+              </a:prstGeom>
+            </p:spPr>
+          </p:pic>
+          <p:pic>
+            <p:nvPicPr>
+              <p:cNvPr id="16" name="圖片 15">
+                <a:extLst>
+                  <a:ext uri="{FF2B5EF4-FFF2-40B4-BE49-F238E27FC236}">
+                    <a16:creationId xmlns:a16="http://schemas.microsoft.com/office/drawing/2014/main" id="{D15EDF46-8293-4253-BB12-FFDB0A2F8242}"/>
+                  </a:ext>
+                </a:extLst>
+              </p:cNvPr>
+              <p:cNvPicPr>
+                <a:picLocks noChangeAspect="1"/>
+              </p:cNvPicPr>
+              <p:nvPr/>
+            </p:nvPicPr>
+            <p:blipFill>
+              <a:blip r:embed="rId4"/>
+              <a:stretch>
+                <a:fillRect/>
+              </a:stretch>
+            </p:blipFill>
+            <p:spPr>
+              <a:xfrm>
+                <a:off x="4086735" y="2288699"/>
+                <a:ext cx="981541" cy="975445"/>
+              </a:xfrm>
+              <a:prstGeom prst="rect">
+                <a:avLst/>
+              </a:prstGeom>
+            </p:spPr>
+          </p:pic>
+          <p:pic>
+            <p:nvPicPr>
+              <p:cNvPr id="17" name="圖片 16">
+                <a:extLst>
+                  <a:ext uri="{FF2B5EF4-FFF2-40B4-BE49-F238E27FC236}">
+                    <a16:creationId xmlns:a16="http://schemas.microsoft.com/office/drawing/2014/main" id="{2842978E-0583-48ED-9822-36C5900F27F5}"/>
+                  </a:ext>
+                </a:extLst>
+              </p:cNvPr>
+              <p:cNvPicPr>
+                <a:picLocks noChangeAspect="1"/>
+              </p:cNvPicPr>
+              <p:nvPr/>
+            </p:nvPicPr>
+            <p:blipFill>
+              <a:blip r:embed="rId4"/>
+              <a:stretch>
+                <a:fillRect/>
+              </a:stretch>
+            </p:blipFill>
+            <p:spPr>
+              <a:xfrm>
+                <a:off x="4191444" y="2373778"/>
+                <a:ext cx="981541" cy="975445"/>
+              </a:xfrm>
+              <a:prstGeom prst="rect">
+                <a:avLst/>
+              </a:prstGeom>
+            </p:spPr>
+          </p:pic>
+        </p:grpSp>
+        <p:grpSp>
+          <p:nvGrpSpPr>
+            <p:cNvPr id="24" name="群組 23">
+              <a:extLst>
+                <a:ext uri="{FF2B5EF4-FFF2-40B4-BE49-F238E27FC236}">
+                  <a16:creationId xmlns:a16="http://schemas.microsoft.com/office/drawing/2014/main" id="{55294A14-C7A5-4C54-A992-B1EAE499BDA8}"/>
+                </a:ext>
+              </a:extLst>
+            </p:cNvPr>
+            <p:cNvGrpSpPr/>
+            <p:nvPr/>
+          </p:nvGrpSpPr>
+          <p:grpSpPr>
+            <a:xfrm>
+              <a:off x="6508492" y="1537362"/>
+              <a:ext cx="954812" cy="914741"/>
+              <a:chOff x="6642592" y="2425096"/>
+              <a:chExt cx="954812" cy="914741"/>
+            </a:xfrm>
+          </p:grpSpPr>
+          <p:pic>
+            <p:nvPicPr>
+              <p:cNvPr id="12" name="圖片 11">
+                <a:extLst>
+                  <a:ext uri="{FF2B5EF4-FFF2-40B4-BE49-F238E27FC236}">
+                    <a16:creationId xmlns:a16="http://schemas.microsoft.com/office/drawing/2014/main" id="{914FACF0-54CE-437D-B834-837CFA2C31E8}"/>
+                  </a:ext>
+                </a:extLst>
+              </p:cNvPr>
+              <p:cNvPicPr>
+                <a:picLocks noChangeAspect="1"/>
+              </p:cNvPicPr>
+              <p:nvPr/>
+            </p:nvPicPr>
+            <p:blipFill rotWithShape="1">
+              <a:blip r:embed="rId3"/>
+              <a:srcRect r="49679" b="50080"/>
+              <a:stretch/>
+            </p:blipFill>
+            <p:spPr>
+              <a:xfrm>
+                <a:off x="6642592" y="2425096"/>
+                <a:ext cx="674255" cy="668890"/>
+              </a:xfrm>
+              <a:prstGeom prst="rect">
+                <a:avLst/>
+              </a:prstGeom>
+            </p:spPr>
+          </p:pic>
+          <p:pic>
+            <p:nvPicPr>
+              <p:cNvPr id="19" name="圖片 18">
+                <a:extLst>
+                  <a:ext uri="{FF2B5EF4-FFF2-40B4-BE49-F238E27FC236}">
+                    <a16:creationId xmlns:a16="http://schemas.microsoft.com/office/drawing/2014/main" id="{3A6CA27A-030A-42F8-B5B0-A37E4BE9065C}"/>
+                  </a:ext>
+                </a:extLst>
+              </p:cNvPr>
+              <p:cNvPicPr>
+                <a:picLocks noChangeAspect="1"/>
+              </p:cNvPicPr>
+              <p:nvPr/>
+            </p:nvPicPr>
+            <p:blipFill>
+              <a:blip r:embed="rId5"/>
+              <a:stretch>
+                <a:fillRect/>
+              </a:stretch>
+            </p:blipFill>
+            <p:spPr>
+              <a:xfrm>
+                <a:off x="6705116" y="2483047"/>
+                <a:ext cx="670618" cy="670618"/>
+              </a:xfrm>
+              <a:prstGeom prst="rect">
+                <a:avLst/>
+              </a:prstGeom>
+            </p:spPr>
+          </p:pic>
+          <p:pic>
+            <p:nvPicPr>
+              <p:cNvPr id="20" name="圖片 19">
+                <a:extLst>
+                  <a:ext uri="{FF2B5EF4-FFF2-40B4-BE49-F238E27FC236}">
+                    <a16:creationId xmlns:a16="http://schemas.microsoft.com/office/drawing/2014/main" id="{869B156A-B2EE-46C7-9329-00ABEFC237F2}"/>
+                  </a:ext>
+                </a:extLst>
+              </p:cNvPr>
+              <p:cNvPicPr>
+                <a:picLocks noChangeAspect="1"/>
+              </p:cNvPicPr>
+              <p:nvPr/>
+            </p:nvPicPr>
+            <p:blipFill>
+              <a:blip r:embed="rId5"/>
+              <a:stretch>
+                <a:fillRect/>
+              </a:stretch>
+            </p:blipFill>
+            <p:spPr>
+              <a:xfrm>
+                <a:off x="6779006" y="2543307"/>
+                <a:ext cx="670618" cy="670618"/>
+              </a:xfrm>
+              <a:prstGeom prst="rect">
+                <a:avLst/>
+              </a:prstGeom>
+            </p:spPr>
+          </p:pic>
+          <p:pic>
+            <p:nvPicPr>
+              <p:cNvPr id="21" name="圖片 20">
+                <a:extLst>
+                  <a:ext uri="{FF2B5EF4-FFF2-40B4-BE49-F238E27FC236}">
+                    <a16:creationId xmlns:a16="http://schemas.microsoft.com/office/drawing/2014/main" id="{DF11FD97-F2B3-48A8-A0D9-A61EE5C7E507}"/>
+                  </a:ext>
+                </a:extLst>
+              </p:cNvPr>
+              <p:cNvPicPr>
+                <a:picLocks noChangeAspect="1"/>
+              </p:cNvPicPr>
+              <p:nvPr/>
+            </p:nvPicPr>
+            <p:blipFill>
+              <a:blip r:embed="rId5"/>
+              <a:stretch>
+                <a:fillRect/>
+              </a:stretch>
+            </p:blipFill>
+            <p:spPr>
+              <a:xfrm>
+                <a:off x="6852896" y="2606263"/>
+                <a:ext cx="670618" cy="670618"/>
+              </a:xfrm>
+              <a:prstGeom prst="rect">
+                <a:avLst/>
+              </a:prstGeom>
+            </p:spPr>
+          </p:pic>
+          <p:pic>
+            <p:nvPicPr>
+              <p:cNvPr id="22" name="圖片 21">
+                <a:extLst>
+                  <a:ext uri="{FF2B5EF4-FFF2-40B4-BE49-F238E27FC236}">
+                    <a16:creationId xmlns:a16="http://schemas.microsoft.com/office/drawing/2014/main" id="{B295639C-F4F7-473F-91CD-F672D6A85391}"/>
+                  </a:ext>
+                </a:extLst>
+              </p:cNvPr>
+              <p:cNvPicPr>
+                <a:picLocks noChangeAspect="1"/>
+              </p:cNvPicPr>
+              <p:nvPr/>
+            </p:nvPicPr>
+            <p:blipFill>
+              <a:blip r:embed="rId5"/>
+              <a:stretch>
+                <a:fillRect/>
+              </a:stretch>
+            </p:blipFill>
+            <p:spPr>
+              <a:xfrm>
+                <a:off x="6926786" y="2669219"/>
+                <a:ext cx="670618" cy="670618"/>
+              </a:xfrm>
+              <a:prstGeom prst="rect">
+                <a:avLst/>
+              </a:prstGeom>
+            </p:spPr>
+          </p:pic>
+        </p:grpSp>
+        <p:pic>
+          <p:nvPicPr>
+            <p:cNvPr id="25" name="圖片 24">
+              <a:extLst>
+                <a:ext uri="{FF2B5EF4-FFF2-40B4-BE49-F238E27FC236}">
+                  <a16:creationId xmlns:a16="http://schemas.microsoft.com/office/drawing/2014/main" id="{4FF51D5A-1568-4717-9F95-759F375F2B37}"/>
+                </a:ext>
+              </a:extLst>
+            </p:cNvPr>
+            <p:cNvPicPr>
+              <a:picLocks noChangeAspect="1"/>
+            </p:cNvPicPr>
+            <p:nvPr/>
+          </p:nvPicPr>
+          <p:blipFill rotWithShape="1">
+            <a:blip r:embed="rId5"/>
+            <a:srcRect l="-1" r="75206"/>
+            <a:stretch/>
+          </p:blipFill>
+          <p:spPr>
+            <a:xfrm>
+              <a:off x="8238812" y="1038240"/>
+              <a:ext cx="166279" cy="670618"/>
             </a:xfrm>
             <a:prstGeom prst="rect">
               <a:avLst/>
@@ -3960,10 +4300,10 @@
         </p:pic>
         <p:pic>
           <p:nvPicPr>
-            <p:cNvPr id="14" name="圖片 13">
-              <a:extLst>
-                <a:ext uri="{FF2B5EF4-FFF2-40B4-BE49-F238E27FC236}">
-                  <a16:creationId xmlns:a16="http://schemas.microsoft.com/office/drawing/2014/main" id="{655B1F52-A864-4570-993D-1E715A0C378B}"/>
+            <p:cNvPr id="26" name="圖片 25">
+              <a:extLst>
+                <a:ext uri="{FF2B5EF4-FFF2-40B4-BE49-F238E27FC236}">
+                  <a16:creationId xmlns:a16="http://schemas.microsoft.com/office/drawing/2014/main" id="{0021B9F1-9128-450E-A3B8-A1DCCA3B9378}"/>
                 </a:ext>
               </a:extLst>
             </p:cNvPr>
@@ -3973,15 +4313,15 @@
             <p:nvPr/>
           </p:nvPicPr>
           <p:blipFill>
-            <a:blip r:embed="rId4"/>
+            <a:blip r:embed="rId6"/>
             <a:stretch>
               <a:fillRect/>
             </a:stretch>
           </p:blipFill>
           <p:spPr>
             <a:xfrm>
-              <a:off x="3867549" y="2118541"/>
-              <a:ext cx="981541" cy="975445"/>
+              <a:off x="8239648" y="2174966"/>
+              <a:ext cx="164606" cy="670618"/>
             </a:xfrm>
             <a:prstGeom prst="rect">
               <a:avLst/>
@@ -3990,10 +4330,10 @@
         </p:pic>
         <p:pic>
           <p:nvPicPr>
-            <p:cNvPr id="15" name="圖片 14">
-              <a:extLst>
-                <a:ext uri="{FF2B5EF4-FFF2-40B4-BE49-F238E27FC236}">
-                  <a16:creationId xmlns:a16="http://schemas.microsoft.com/office/drawing/2014/main" id="{6F81EE84-91D7-4528-B3AA-511137C55374}"/>
+            <p:cNvPr id="27" name="圖片 26">
+              <a:extLst>
+                <a:ext uri="{FF2B5EF4-FFF2-40B4-BE49-F238E27FC236}">
+                  <a16:creationId xmlns:a16="http://schemas.microsoft.com/office/drawing/2014/main" id="{5026C78D-450B-4131-9EA1-39CC3E5EF6A9}"/>
                 </a:ext>
               </a:extLst>
             </p:cNvPr>
@@ -4003,15 +4343,15 @@
             <p:nvPr/>
           </p:nvPicPr>
           <p:blipFill>
-            <a:blip r:embed="rId4"/>
+            <a:blip r:embed="rId6"/>
             <a:stretch>
               <a:fillRect/>
             </a:stretch>
           </p:blipFill>
           <p:spPr>
             <a:xfrm>
-              <a:off x="3977142" y="2203620"/>
-              <a:ext cx="981541" cy="975445"/>
+              <a:off x="8858497" y="1584060"/>
+              <a:ext cx="164606" cy="670618"/>
             </a:xfrm>
             <a:prstGeom prst="rect">
               <a:avLst/>
@@ -4020,10 +4360,10 @@
         </p:pic>
         <p:pic>
           <p:nvPicPr>
-            <p:cNvPr id="16" name="圖片 15">
-              <a:extLst>
-                <a:ext uri="{FF2B5EF4-FFF2-40B4-BE49-F238E27FC236}">
-                  <a16:creationId xmlns:a16="http://schemas.microsoft.com/office/drawing/2014/main" id="{D15EDF46-8293-4253-BB12-FFDB0A2F8242}"/>
+            <p:cNvPr id="28" name="圖片 27">
+              <a:extLst>
+                <a:ext uri="{FF2B5EF4-FFF2-40B4-BE49-F238E27FC236}">
+                  <a16:creationId xmlns:a16="http://schemas.microsoft.com/office/drawing/2014/main" id="{B9555DB1-3FC6-4E92-911F-32126E949EDF}"/>
                 </a:ext>
               </a:extLst>
             </p:cNvPr>
@@ -4032,1068 +4372,749 @@
             </p:cNvPicPr>
             <p:nvPr/>
           </p:nvPicPr>
-          <p:blipFill>
-            <a:blip r:embed="rId4"/>
-            <a:stretch>
-              <a:fillRect/>
-            </a:stretch>
-          </p:blipFill>
-          <p:spPr>
-            <a:xfrm>
-              <a:off x="4086735" y="2288699"/>
-              <a:ext cx="981541" cy="975445"/>
-            </a:xfrm>
-            <a:prstGeom prst="rect">
-              <a:avLst/>
-            </a:prstGeom>
-          </p:spPr>
-        </p:pic>
-        <p:pic>
-          <p:nvPicPr>
-            <p:cNvPr id="17" name="圖片 16">
-              <a:extLst>
-                <a:ext uri="{FF2B5EF4-FFF2-40B4-BE49-F238E27FC236}">
-                  <a16:creationId xmlns:a16="http://schemas.microsoft.com/office/drawing/2014/main" id="{2842978E-0583-48ED-9822-36C5900F27F5}"/>
-                </a:ext>
-              </a:extLst>
-            </p:cNvPr>
-            <p:cNvPicPr>
-              <a:picLocks noChangeAspect="1"/>
-            </p:cNvPicPr>
-            <p:nvPr/>
-          </p:nvPicPr>
-          <p:blipFill>
-            <a:blip r:embed="rId4"/>
-            <a:stretch>
-              <a:fillRect/>
-            </a:stretch>
-          </p:blipFill>
-          <p:spPr>
-            <a:xfrm>
-              <a:off x="4191444" y="2373778"/>
-              <a:ext cx="981541" cy="975445"/>
-            </a:xfrm>
-            <a:prstGeom prst="rect">
-              <a:avLst/>
-            </a:prstGeom>
-          </p:spPr>
-        </p:pic>
-      </p:grpSp>
-      <p:grpSp>
-        <p:nvGrpSpPr>
-          <p:cNvPr id="24" name="群組 23">
-            <a:extLst>
-              <a:ext uri="{FF2B5EF4-FFF2-40B4-BE49-F238E27FC236}">
-                <a16:creationId xmlns:a16="http://schemas.microsoft.com/office/drawing/2014/main" id="{55294A14-C7A5-4C54-A992-B1EAE499BDA8}"/>
-              </a:ext>
-            </a:extLst>
-          </p:cNvPr>
-          <p:cNvGrpSpPr/>
-          <p:nvPr/>
-        </p:nvGrpSpPr>
-        <p:grpSpPr>
-          <a:xfrm>
-            <a:off x="6508492" y="1537362"/>
-            <a:ext cx="954812" cy="914741"/>
-            <a:chOff x="6642592" y="2425096"/>
-            <a:chExt cx="954812" cy="914741"/>
-          </a:xfrm>
-        </p:grpSpPr>
-        <p:pic>
-          <p:nvPicPr>
-            <p:cNvPr id="12" name="圖片 11">
-              <a:extLst>
-                <a:ext uri="{FF2B5EF4-FFF2-40B4-BE49-F238E27FC236}">
-                  <a16:creationId xmlns:a16="http://schemas.microsoft.com/office/drawing/2014/main" id="{914FACF0-54CE-437D-B834-837CFA2C31E8}"/>
-                </a:ext>
-              </a:extLst>
-            </p:cNvPr>
-            <p:cNvPicPr>
-              <a:picLocks noChangeAspect="1"/>
-            </p:cNvPicPr>
-            <p:nvPr/>
-          </p:nvPicPr>
           <p:blipFill rotWithShape="1">
-            <a:blip r:embed="rId3"/>
-            <a:srcRect r="49679" b="50080"/>
+            <a:blip r:embed="rId6"/>
+            <a:srcRect b="48355"/>
             <a:stretch/>
           </p:blipFill>
           <p:spPr>
             <a:xfrm>
-              <a:off x="6642592" y="2425096"/>
-              <a:ext cx="674255" cy="668890"/>
+              <a:off x="9426165" y="1757451"/>
+              <a:ext cx="164606" cy="346341"/>
             </a:xfrm>
             <a:prstGeom prst="rect">
               <a:avLst/>
             </a:prstGeom>
           </p:spPr>
         </p:pic>
-        <p:pic>
-          <p:nvPicPr>
-            <p:cNvPr id="19" name="圖片 18">
-              <a:extLst>
-                <a:ext uri="{FF2B5EF4-FFF2-40B4-BE49-F238E27FC236}">
-                  <a16:creationId xmlns:a16="http://schemas.microsoft.com/office/drawing/2014/main" id="{3A6CA27A-030A-42F8-B5B0-A37E4BE9065C}"/>
-                </a:ext>
-              </a:extLst>
-            </p:cNvPr>
-            <p:cNvPicPr>
-              <a:picLocks noChangeAspect="1"/>
-            </p:cNvPicPr>
-            <p:nvPr/>
-          </p:nvPicPr>
-          <p:blipFill>
-            <a:blip r:embed="rId5"/>
-            <a:stretch>
-              <a:fillRect/>
-            </a:stretch>
-          </p:blipFill>
+        <p:cxnSp>
+          <p:nvCxnSpPr>
+            <p:cNvPr id="30" name="直線單箭頭接點 29">
+              <a:extLst>
+                <a:ext uri="{FF2B5EF4-FFF2-40B4-BE49-F238E27FC236}">
+                  <a16:creationId xmlns:a16="http://schemas.microsoft.com/office/drawing/2014/main" id="{6943ACD9-CCAB-49C0-8379-1D9F1C63BD5E}"/>
+                </a:ext>
+              </a:extLst>
+            </p:cNvPr>
+            <p:cNvCxnSpPr>
+              <a:cxnSpLocks/>
+              <a:stCxn id="9" idx="3"/>
+            </p:cNvCxnSpPr>
+            <p:nvPr/>
+          </p:nvCxnSpPr>
+          <p:spPr>
+            <a:xfrm flipV="1">
+              <a:off x="3638989" y="1961670"/>
+              <a:ext cx="779677" cy="2"/>
+            </a:xfrm>
+            <a:prstGeom prst="straightConnector1">
+              <a:avLst/>
+            </a:prstGeom>
+            <a:ln>
+              <a:solidFill>
+                <a:schemeClr val="accent1">
+                  <a:lumMod val="20000"/>
+                  <a:lumOff val="80000"/>
+                </a:schemeClr>
+              </a:solidFill>
+              <a:tailEnd type="triangle"/>
+            </a:ln>
+          </p:spPr>
+          <p:style>
+            <a:lnRef idx="2">
+              <a:schemeClr val="accent1"/>
+            </a:lnRef>
+            <a:fillRef idx="0">
+              <a:schemeClr val="accent1"/>
+            </a:fillRef>
+            <a:effectRef idx="1">
+              <a:schemeClr val="accent1"/>
+            </a:effectRef>
+            <a:fontRef idx="minor">
+              <a:schemeClr val="tx1"/>
+            </a:fontRef>
+          </p:style>
+        </p:cxnSp>
+        <p:cxnSp>
+          <p:nvCxnSpPr>
+            <p:cNvPr id="32" name="直線單箭頭接點 31">
+              <a:extLst>
+                <a:ext uri="{FF2B5EF4-FFF2-40B4-BE49-F238E27FC236}">
+                  <a16:creationId xmlns:a16="http://schemas.microsoft.com/office/drawing/2014/main" id="{76D55E2E-2E9D-45DA-A4B5-258D1A6E663B}"/>
+                </a:ext>
+              </a:extLst>
+            </p:cNvPr>
+            <p:cNvCxnSpPr/>
+            <p:nvPr/>
+          </p:nvCxnSpPr>
           <p:spPr>
             <a:xfrm>
-              <a:off x="6705116" y="2483047"/>
-              <a:ext cx="670618" cy="670618"/>
+              <a:off x="5943288" y="1961670"/>
+              <a:ext cx="565204" cy="0"/>
+            </a:xfrm>
+            <a:prstGeom prst="straightConnector1">
+              <a:avLst/>
+            </a:prstGeom>
+            <a:ln>
+              <a:solidFill>
+                <a:schemeClr val="accent1">
+                  <a:lumMod val="20000"/>
+                  <a:lumOff val="80000"/>
+                </a:schemeClr>
+              </a:solidFill>
+              <a:tailEnd type="triangle"/>
+            </a:ln>
+          </p:spPr>
+          <p:style>
+            <a:lnRef idx="2">
+              <a:schemeClr val="accent1"/>
+            </a:lnRef>
+            <a:fillRef idx="0">
+              <a:schemeClr val="accent1"/>
+            </a:fillRef>
+            <a:effectRef idx="1">
+              <a:schemeClr val="accent1"/>
+            </a:effectRef>
+            <a:fontRef idx="minor">
+              <a:schemeClr val="tx1"/>
+            </a:fontRef>
+          </p:style>
+        </p:cxnSp>
+        <p:cxnSp>
+          <p:nvCxnSpPr>
+            <p:cNvPr id="34" name="直線單箭頭接點 33">
+              <a:extLst>
+                <a:ext uri="{FF2B5EF4-FFF2-40B4-BE49-F238E27FC236}">
+                  <a16:creationId xmlns:a16="http://schemas.microsoft.com/office/drawing/2014/main" id="{5214CB30-B388-405F-B222-19049A4D92BF}"/>
+                </a:ext>
+              </a:extLst>
+            </p:cNvPr>
+            <p:cNvCxnSpPr>
+              <a:cxnSpLocks/>
+            </p:cNvCxnSpPr>
+            <p:nvPr/>
+          </p:nvCxnSpPr>
+          <p:spPr>
+            <a:xfrm flipV="1">
+              <a:off x="7233772" y="1136073"/>
+              <a:ext cx="931174" cy="337875"/>
+            </a:xfrm>
+            <a:prstGeom prst="straightConnector1">
+              <a:avLst/>
+            </a:prstGeom>
+            <a:ln>
+              <a:solidFill>
+                <a:schemeClr val="accent1">
+                  <a:lumMod val="20000"/>
+                  <a:lumOff val="80000"/>
+                </a:schemeClr>
+              </a:solidFill>
+              <a:tailEnd type="triangle"/>
+            </a:ln>
+          </p:spPr>
+          <p:style>
+            <a:lnRef idx="2">
+              <a:schemeClr val="accent1"/>
+            </a:lnRef>
+            <a:fillRef idx="0">
+              <a:schemeClr val="accent1"/>
+            </a:fillRef>
+            <a:effectRef idx="1">
+              <a:schemeClr val="accent1"/>
+            </a:effectRef>
+            <a:fontRef idx="minor">
+              <a:schemeClr val="tx1"/>
+            </a:fontRef>
+          </p:style>
+        </p:cxnSp>
+        <p:cxnSp>
+          <p:nvCxnSpPr>
+            <p:cNvPr id="36" name="直線單箭頭接點 35">
+              <a:extLst>
+                <a:ext uri="{FF2B5EF4-FFF2-40B4-BE49-F238E27FC236}">
+                  <a16:creationId xmlns:a16="http://schemas.microsoft.com/office/drawing/2014/main" id="{92DF8390-AC72-402B-A0FA-3FBD10D770CD}"/>
+                </a:ext>
+              </a:extLst>
+            </p:cNvPr>
+            <p:cNvCxnSpPr>
+              <a:cxnSpLocks/>
+            </p:cNvCxnSpPr>
+            <p:nvPr/>
+          </p:nvCxnSpPr>
+          <p:spPr>
+            <a:xfrm>
+              <a:off x="6845619" y="2493199"/>
+              <a:ext cx="1393193" cy="286947"/>
+            </a:xfrm>
+            <a:prstGeom prst="straightConnector1">
+              <a:avLst/>
+            </a:prstGeom>
+            <a:ln>
+              <a:solidFill>
+                <a:schemeClr val="accent1">
+                  <a:lumMod val="20000"/>
+                  <a:lumOff val="80000"/>
+                </a:schemeClr>
+              </a:solidFill>
+              <a:tailEnd type="triangle"/>
+            </a:ln>
+          </p:spPr>
+          <p:style>
+            <a:lnRef idx="2">
+              <a:schemeClr val="accent1"/>
+            </a:lnRef>
+            <a:fillRef idx="0">
+              <a:schemeClr val="accent1"/>
+            </a:fillRef>
+            <a:effectRef idx="1">
+              <a:schemeClr val="accent1"/>
+            </a:effectRef>
+            <a:fontRef idx="minor">
+              <a:schemeClr val="tx1"/>
+            </a:fontRef>
+          </p:style>
+        </p:cxnSp>
+        <p:cxnSp>
+          <p:nvCxnSpPr>
+            <p:cNvPr id="38" name="直線單箭頭接點 37">
+              <a:extLst>
+                <a:ext uri="{FF2B5EF4-FFF2-40B4-BE49-F238E27FC236}">
+                  <a16:creationId xmlns:a16="http://schemas.microsoft.com/office/drawing/2014/main" id="{A692F329-BDD2-4739-8249-BCB5BB407D8A}"/>
+                </a:ext>
+              </a:extLst>
+            </p:cNvPr>
+            <p:cNvCxnSpPr/>
+            <p:nvPr/>
+          </p:nvCxnSpPr>
+          <p:spPr>
+            <a:xfrm>
+              <a:off x="8404254" y="1136073"/>
+              <a:ext cx="454243" cy="519500"/>
+            </a:xfrm>
+            <a:prstGeom prst="straightConnector1">
+              <a:avLst/>
+            </a:prstGeom>
+            <a:ln>
+              <a:solidFill>
+                <a:schemeClr val="accent1">
+                  <a:lumMod val="20000"/>
+                  <a:lumOff val="80000"/>
+                </a:schemeClr>
+              </a:solidFill>
+              <a:tailEnd type="triangle"/>
+            </a:ln>
+          </p:spPr>
+          <p:style>
+            <a:lnRef idx="2">
+              <a:schemeClr val="accent1"/>
+            </a:lnRef>
+            <a:fillRef idx="0">
+              <a:schemeClr val="accent1"/>
+            </a:fillRef>
+            <a:effectRef idx="1">
+              <a:schemeClr val="accent1"/>
+            </a:effectRef>
+            <a:fontRef idx="minor">
+              <a:schemeClr val="tx1"/>
+            </a:fontRef>
+          </p:style>
+        </p:cxnSp>
+        <p:cxnSp>
+          <p:nvCxnSpPr>
+            <p:cNvPr id="40" name="直線單箭頭接點 39">
+              <a:extLst>
+                <a:ext uri="{FF2B5EF4-FFF2-40B4-BE49-F238E27FC236}">
+                  <a16:creationId xmlns:a16="http://schemas.microsoft.com/office/drawing/2014/main" id="{BA8DB398-918F-490A-AC29-8D0C01A0DED8}"/>
+                </a:ext>
+              </a:extLst>
+            </p:cNvPr>
+            <p:cNvCxnSpPr>
+              <a:cxnSpLocks/>
+            </p:cNvCxnSpPr>
+            <p:nvPr/>
+          </p:nvCxnSpPr>
+          <p:spPr>
+            <a:xfrm flipV="1">
+              <a:off x="8404254" y="2206252"/>
+              <a:ext cx="454243" cy="573894"/>
+            </a:xfrm>
+            <a:prstGeom prst="straightConnector1">
+              <a:avLst/>
+            </a:prstGeom>
+            <a:ln>
+              <a:solidFill>
+                <a:schemeClr val="accent1">
+                  <a:lumMod val="20000"/>
+                  <a:lumOff val="80000"/>
+                </a:schemeClr>
+              </a:solidFill>
+              <a:tailEnd type="triangle"/>
+            </a:ln>
+          </p:spPr>
+          <p:style>
+            <a:lnRef idx="2">
+              <a:schemeClr val="accent1"/>
+            </a:lnRef>
+            <a:fillRef idx="0">
+              <a:schemeClr val="accent1"/>
+            </a:fillRef>
+            <a:effectRef idx="1">
+              <a:schemeClr val="accent1"/>
+            </a:effectRef>
+            <a:fontRef idx="minor">
+              <a:schemeClr val="tx1"/>
+            </a:fontRef>
+          </p:style>
+        </p:cxnSp>
+        <p:cxnSp>
+          <p:nvCxnSpPr>
+            <p:cNvPr id="43" name="直線單箭頭接點 42">
+              <a:extLst>
+                <a:ext uri="{FF2B5EF4-FFF2-40B4-BE49-F238E27FC236}">
+                  <a16:creationId xmlns:a16="http://schemas.microsoft.com/office/drawing/2014/main" id="{7BBA1143-BD4E-4143-A71C-F2C0E5F7F4DC}"/>
+                </a:ext>
+              </a:extLst>
+            </p:cNvPr>
+            <p:cNvCxnSpPr/>
+            <p:nvPr/>
+          </p:nvCxnSpPr>
+          <p:spPr>
+            <a:xfrm>
+              <a:off x="9023103" y="1708858"/>
+              <a:ext cx="403062" cy="85306"/>
+            </a:xfrm>
+            <a:prstGeom prst="straightConnector1">
+              <a:avLst/>
+            </a:prstGeom>
+            <a:ln>
+              <a:solidFill>
+                <a:schemeClr val="accent1">
+                  <a:lumMod val="20000"/>
+                  <a:lumOff val="80000"/>
+                </a:schemeClr>
+              </a:solidFill>
+              <a:tailEnd type="triangle"/>
+            </a:ln>
+          </p:spPr>
+          <p:style>
+            <a:lnRef idx="2">
+              <a:schemeClr val="accent1"/>
+            </a:lnRef>
+            <a:fillRef idx="0">
+              <a:schemeClr val="accent1"/>
+            </a:fillRef>
+            <a:effectRef idx="1">
+              <a:schemeClr val="accent1"/>
+            </a:effectRef>
+            <a:fontRef idx="minor">
+              <a:schemeClr val="tx1"/>
+            </a:fontRef>
+          </p:style>
+        </p:cxnSp>
+        <p:cxnSp>
+          <p:nvCxnSpPr>
+            <p:cNvPr id="45" name="直線單箭頭接點 44">
+              <a:extLst>
+                <a:ext uri="{FF2B5EF4-FFF2-40B4-BE49-F238E27FC236}">
+                  <a16:creationId xmlns:a16="http://schemas.microsoft.com/office/drawing/2014/main" id="{A2627054-7607-469E-BD6E-3199A1697217}"/>
+                </a:ext>
+              </a:extLst>
+            </p:cNvPr>
+            <p:cNvCxnSpPr>
+              <a:cxnSpLocks/>
+            </p:cNvCxnSpPr>
+            <p:nvPr/>
+          </p:nvCxnSpPr>
+          <p:spPr>
+            <a:xfrm flipV="1">
+              <a:off x="9049842" y="2053838"/>
+              <a:ext cx="376323" cy="121129"/>
+            </a:xfrm>
+            <a:prstGeom prst="straightConnector1">
+              <a:avLst/>
+            </a:prstGeom>
+            <a:ln>
+              <a:solidFill>
+                <a:schemeClr val="accent1">
+                  <a:lumMod val="20000"/>
+                  <a:lumOff val="80000"/>
+                </a:schemeClr>
+              </a:solidFill>
+              <a:tailEnd type="triangle"/>
+            </a:ln>
+          </p:spPr>
+          <p:style>
+            <a:lnRef idx="2">
+              <a:schemeClr val="accent1"/>
+            </a:lnRef>
+            <a:fillRef idx="0">
+              <a:schemeClr val="accent1"/>
+            </a:fillRef>
+            <a:effectRef idx="1">
+              <a:schemeClr val="accent1"/>
+            </a:effectRef>
+            <a:fontRef idx="minor">
+              <a:schemeClr val="tx1"/>
+            </a:fontRef>
+          </p:style>
+        </p:cxnSp>
+        <p:cxnSp>
+          <p:nvCxnSpPr>
+            <p:cNvPr id="50" name="直線單箭頭接點 49">
+              <a:extLst>
+                <a:ext uri="{FF2B5EF4-FFF2-40B4-BE49-F238E27FC236}">
+                  <a16:creationId xmlns:a16="http://schemas.microsoft.com/office/drawing/2014/main" id="{EDAAC9F9-CDFD-4958-8514-E4FADD87582A}"/>
+                </a:ext>
+              </a:extLst>
+            </p:cNvPr>
+            <p:cNvCxnSpPr/>
+            <p:nvPr/>
+          </p:nvCxnSpPr>
+          <p:spPr>
+            <a:xfrm>
+              <a:off x="7463304" y="1961670"/>
+              <a:ext cx="701642" cy="0"/>
+            </a:xfrm>
+            <a:prstGeom prst="straightConnector1">
+              <a:avLst/>
+            </a:prstGeom>
+            <a:ln>
+              <a:solidFill>
+                <a:schemeClr val="accent1">
+                  <a:lumMod val="20000"/>
+                  <a:lumOff val="80000"/>
+                </a:schemeClr>
+              </a:solidFill>
+              <a:tailEnd type="triangle"/>
+            </a:ln>
+          </p:spPr>
+          <p:style>
+            <a:lnRef idx="2">
+              <a:schemeClr val="accent1"/>
+            </a:lnRef>
+            <a:fillRef idx="0">
+              <a:schemeClr val="accent1"/>
+            </a:fillRef>
+            <a:effectRef idx="1">
+              <a:schemeClr val="accent1"/>
+            </a:effectRef>
+            <a:fontRef idx="minor">
+              <a:schemeClr val="tx1"/>
+            </a:fontRef>
+          </p:style>
+        </p:cxnSp>
+        <p:cxnSp>
+          <p:nvCxnSpPr>
+            <p:cNvPr id="52" name="直線接點 51">
+              <a:extLst>
+                <a:ext uri="{FF2B5EF4-FFF2-40B4-BE49-F238E27FC236}">
+                  <a16:creationId xmlns:a16="http://schemas.microsoft.com/office/drawing/2014/main" id="{4B50FD37-6118-46DB-809D-4310DA977521}"/>
+                </a:ext>
+              </a:extLst>
+            </p:cNvPr>
+            <p:cNvCxnSpPr/>
+            <p:nvPr/>
+          </p:nvCxnSpPr>
+          <p:spPr>
+            <a:xfrm>
+              <a:off x="8321951" y="1762351"/>
+              <a:ext cx="0" cy="323273"/>
+            </a:xfrm>
+            <a:prstGeom prst="line">
+              <a:avLst/>
+            </a:prstGeom>
+            <a:ln>
+              <a:solidFill>
+                <a:schemeClr val="bg2"/>
+              </a:solidFill>
+              <a:prstDash val="sysDash"/>
+            </a:ln>
+          </p:spPr>
+          <p:style>
+            <a:lnRef idx="2">
+              <a:schemeClr val="accent1"/>
+            </a:lnRef>
+            <a:fillRef idx="0">
+              <a:schemeClr val="accent1"/>
+            </a:fillRef>
+            <a:effectRef idx="1">
+              <a:schemeClr val="accent1"/>
+            </a:effectRef>
+            <a:fontRef idx="minor">
+              <a:schemeClr val="tx1"/>
+            </a:fontRef>
+          </p:style>
+        </p:cxnSp>
+        <p:cxnSp>
+          <p:nvCxnSpPr>
+            <p:cNvPr id="55" name="直線接點 54">
+              <a:extLst>
+                <a:ext uri="{FF2B5EF4-FFF2-40B4-BE49-F238E27FC236}">
+                  <a16:creationId xmlns:a16="http://schemas.microsoft.com/office/drawing/2014/main" id="{55125779-A9DA-4EF8-92A8-B3990C505561}"/>
+                </a:ext>
+              </a:extLst>
+            </p:cNvPr>
+            <p:cNvCxnSpPr>
+              <a:cxnSpLocks/>
+            </p:cNvCxnSpPr>
+            <p:nvPr/>
+          </p:nvCxnSpPr>
+          <p:spPr>
+            <a:xfrm flipH="1">
+              <a:off x="8631375" y="1556892"/>
+              <a:ext cx="4605" cy="697786"/>
+            </a:xfrm>
+            <a:prstGeom prst="line">
+              <a:avLst/>
+            </a:prstGeom>
+            <a:ln>
+              <a:solidFill>
+                <a:schemeClr val="accent1">
+                  <a:lumMod val="20000"/>
+                  <a:lumOff val="80000"/>
+                </a:schemeClr>
+              </a:solidFill>
+              <a:prstDash val="sysDash"/>
+            </a:ln>
+          </p:spPr>
+          <p:style>
+            <a:lnRef idx="2">
+              <a:schemeClr val="accent1"/>
+            </a:lnRef>
+            <a:fillRef idx="0">
+              <a:schemeClr val="accent1"/>
+            </a:fillRef>
+            <a:effectRef idx="1">
+              <a:schemeClr val="accent1"/>
+            </a:effectRef>
+            <a:fontRef idx="minor">
+              <a:schemeClr val="tx1"/>
+            </a:fontRef>
+          </p:style>
+        </p:cxnSp>
+        <p:cxnSp>
+          <p:nvCxnSpPr>
+            <p:cNvPr id="58" name="直線接點 57">
+              <a:extLst>
+                <a:ext uri="{FF2B5EF4-FFF2-40B4-BE49-F238E27FC236}">
+                  <a16:creationId xmlns:a16="http://schemas.microsoft.com/office/drawing/2014/main" id="{909104CF-AC02-48BA-B218-344963BFB7DA}"/>
+                </a:ext>
+              </a:extLst>
+            </p:cNvPr>
+            <p:cNvCxnSpPr>
+              <a:cxnSpLocks/>
+            </p:cNvCxnSpPr>
+            <p:nvPr/>
+          </p:nvCxnSpPr>
+          <p:spPr>
+            <a:xfrm>
+              <a:off x="9224634" y="1816391"/>
+              <a:ext cx="0" cy="223715"/>
+            </a:xfrm>
+            <a:prstGeom prst="line">
+              <a:avLst/>
+            </a:prstGeom>
+            <a:ln>
+              <a:solidFill>
+                <a:schemeClr val="accent1">
+                  <a:lumMod val="20000"/>
+                  <a:lumOff val="80000"/>
+                </a:schemeClr>
+              </a:solidFill>
+              <a:prstDash val="sysDash"/>
+            </a:ln>
+          </p:spPr>
+          <p:style>
+            <a:lnRef idx="2">
+              <a:schemeClr val="accent1"/>
+            </a:lnRef>
+            <a:fillRef idx="0">
+              <a:schemeClr val="accent1"/>
+            </a:fillRef>
+            <a:effectRef idx="1">
+              <a:schemeClr val="accent1"/>
+            </a:effectRef>
+            <a:fontRef idx="minor">
+              <a:schemeClr val="tx1"/>
+            </a:fontRef>
+          </p:style>
+        </p:cxnSp>
+        <p:sp>
+          <p:nvSpPr>
+            <p:cNvPr id="60" name="矩形 59">
+              <a:extLst>
+                <a:ext uri="{FF2B5EF4-FFF2-40B4-BE49-F238E27FC236}">
+                  <a16:creationId xmlns:a16="http://schemas.microsoft.com/office/drawing/2014/main" id="{8999171D-1D72-4928-A13A-ED1449677D37}"/>
+                </a:ext>
+              </a:extLst>
+            </p:cNvPr>
+            <p:cNvSpPr/>
+            <p:nvPr/>
+          </p:nvSpPr>
+          <p:spPr>
+            <a:xfrm>
+              <a:off x="3663292" y="1631725"/>
+              <a:ext cx="652102" cy="369332"/>
             </a:xfrm>
             <a:prstGeom prst="rect">
               <a:avLst/>
             </a:prstGeom>
           </p:spPr>
-        </p:pic>
-        <p:pic>
-          <p:nvPicPr>
-            <p:cNvPr id="20" name="圖片 19">
-              <a:extLst>
-                <a:ext uri="{FF2B5EF4-FFF2-40B4-BE49-F238E27FC236}">
-                  <a16:creationId xmlns:a16="http://schemas.microsoft.com/office/drawing/2014/main" id="{869B156A-B2EE-46C7-9329-00ABEFC237F2}"/>
-                </a:ext>
-              </a:extLst>
-            </p:cNvPr>
-            <p:cNvPicPr>
-              <a:picLocks noChangeAspect="1"/>
-            </p:cNvPicPr>
-            <p:nvPr/>
-          </p:nvPicPr>
-          <p:blipFill>
-            <a:blip r:embed="rId5"/>
-            <a:stretch>
-              <a:fillRect/>
-            </a:stretch>
-          </p:blipFill>
+          <p:txBody>
+            <a:bodyPr wrap="none">
+              <a:spAutoFit/>
+            </a:bodyPr>
+            <a:lstStyle/>
+            <a:p>
+              <a:r>
+                <a:rPr lang="en-US" altLang="zh-HK" dirty="0"/>
+                <a:t>Conv</a:t>
+              </a:r>
+              <a:endParaRPr lang="zh-HK" altLang="en-US" dirty="0"/>
+            </a:p>
+          </p:txBody>
+        </p:sp>
+        <p:sp>
+          <p:nvSpPr>
+            <p:cNvPr id="61" name="矩形 60">
+              <a:extLst>
+                <a:ext uri="{FF2B5EF4-FFF2-40B4-BE49-F238E27FC236}">
+                  <a16:creationId xmlns:a16="http://schemas.microsoft.com/office/drawing/2014/main" id="{C4177E60-FF9A-4D56-9CC1-D588C4CD3168}"/>
+                </a:ext>
+              </a:extLst>
+            </p:cNvPr>
+            <p:cNvSpPr/>
+            <p:nvPr/>
+          </p:nvSpPr>
           <p:spPr>
             <a:xfrm>
-              <a:off x="6779006" y="2543307"/>
-              <a:ext cx="670618" cy="670618"/>
+              <a:off x="5867481" y="1647427"/>
+              <a:ext cx="595228" cy="369332"/>
             </a:xfrm>
             <a:prstGeom prst="rect">
               <a:avLst/>
             </a:prstGeom>
           </p:spPr>
-        </p:pic>
-        <p:pic>
-          <p:nvPicPr>
-            <p:cNvPr id="21" name="圖片 20">
-              <a:extLst>
-                <a:ext uri="{FF2B5EF4-FFF2-40B4-BE49-F238E27FC236}">
-                  <a16:creationId xmlns:a16="http://schemas.microsoft.com/office/drawing/2014/main" id="{DF11FD97-F2B3-48A8-A0D9-A61EE5C7E507}"/>
-                </a:ext>
-              </a:extLst>
-            </p:cNvPr>
-            <p:cNvPicPr>
-              <a:picLocks noChangeAspect="1"/>
-            </p:cNvPicPr>
-            <p:nvPr/>
-          </p:nvPicPr>
-          <p:blipFill>
-            <a:blip r:embed="rId5"/>
-            <a:stretch>
-              <a:fillRect/>
-            </a:stretch>
-          </p:blipFill>
+          <p:txBody>
+            <a:bodyPr wrap="none">
+              <a:spAutoFit/>
+            </a:bodyPr>
+            <a:lstStyle/>
+            <a:p>
+              <a:r>
+                <a:rPr lang="en-US" altLang="zh-HK" dirty="0"/>
+                <a:t>Pool</a:t>
+              </a:r>
+              <a:endParaRPr lang="zh-HK" altLang="en-US" dirty="0"/>
+            </a:p>
+          </p:txBody>
+        </p:sp>
+        <p:sp>
+          <p:nvSpPr>
+            <p:cNvPr id="62" name="矩形 61">
+              <a:extLst>
+                <a:ext uri="{FF2B5EF4-FFF2-40B4-BE49-F238E27FC236}">
+                  <a16:creationId xmlns:a16="http://schemas.microsoft.com/office/drawing/2014/main" id="{B611DBAE-DFCB-43B7-8590-2C8B19B7187D}"/>
+                </a:ext>
+              </a:extLst>
+            </p:cNvPr>
+            <p:cNvSpPr/>
+            <p:nvPr/>
+          </p:nvSpPr>
           <p:spPr>
             <a:xfrm>
-              <a:off x="6852896" y="2606263"/>
-              <a:ext cx="670618" cy="670618"/>
+              <a:off x="7392664" y="1647427"/>
+              <a:ext cx="837217" cy="369332"/>
             </a:xfrm>
             <a:prstGeom prst="rect">
               <a:avLst/>
             </a:prstGeom>
           </p:spPr>
-        </p:pic>
-        <p:pic>
-          <p:nvPicPr>
-            <p:cNvPr id="22" name="圖片 21">
-              <a:extLst>
-                <a:ext uri="{FF2B5EF4-FFF2-40B4-BE49-F238E27FC236}">
-                  <a16:creationId xmlns:a16="http://schemas.microsoft.com/office/drawing/2014/main" id="{B295639C-F4F7-473F-91CD-F672D6A85391}"/>
-                </a:ext>
-              </a:extLst>
-            </p:cNvPr>
-            <p:cNvPicPr>
-              <a:picLocks noChangeAspect="1"/>
-            </p:cNvPicPr>
-            <p:nvPr/>
-          </p:nvPicPr>
-          <p:blipFill>
-            <a:blip r:embed="rId5"/>
-            <a:stretch>
-              <a:fillRect/>
-            </a:stretch>
-          </p:blipFill>
+          <p:txBody>
+            <a:bodyPr wrap="none">
+              <a:spAutoFit/>
+            </a:bodyPr>
+            <a:lstStyle/>
+            <a:p>
+              <a:r>
+                <a:rPr lang="en-US" altLang="zh-HK" dirty="0"/>
+                <a:t>Flatten</a:t>
+              </a:r>
+              <a:endParaRPr lang="zh-HK" altLang="en-US" dirty="0"/>
+            </a:p>
+          </p:txBody>
+        </p:sp>
+        <p:sp>
+          <p:nvSpPr>
+            <p:cNvPr id="63" name="矩形 62">
+              <a:extLst>
+                <a:ext uri="{FF2B5EF4-FFF2-40B4-BE49-F238E27FC236}">
+                  <a16:creationId xmlns:a16="http://schemas.microsoft.com/office/drawing/2014/main" id="{00DAABA6-A061-4621-B471-03582849849B}"/>
+                </a:ext>
+              </a:extLst>
+            </p:cNvPr>
+            <p:cNvSpPr/>
+            <p:nvPr/>
+          </p:nvSpPr>
           <p:spPr>
             <a:xfrm>
-              <a:off x="6926786" y="2669219"/>
-              <a:ext cx="670618" cy="670618"/>
+              <a:off x="8940800" y="1214728"/>
+              <a:ext cx="587020" cy="369332"/>
             </a:xfrm>
             <a:prstGeom prst="rect">
               <a:avLst/>
             </a:prstGeom>
           </p:spPr>
-        </p:pic>
+          <p:txBody>
+            <a:bodyPr wrap="none">
+              <a:spAutoFit/>
+            </a:bodyPr>
+            <a:lstStyle/>
+            <a:p>
+              <a:r>
+                <a:rPr lang="en-US" altLang="zh-HK" dirty="0"/>
+                <a:t>fully</a:t>
+              </a:r>
+              <a:endParaRPr lang="zh-HK" altLang="en-US" dirty="0"/>
+            </a:p>
+          </p:txBody>
+        </p:sp>
+        <p:sp>
+          <p:nvSpPr>
+            <p:cNvPr id="64" name="矩形 63">
+              <a:extLst>
+                <a:ext uri="{FF2B5EF4-FFF2-40B4-BE49-F238E27FC236}">
+                  <a16:creationId xmlns:a16="http://schemas.microsoft.com/office/drawing/2014/main" id="{2E8E738F-70A4-47DC-99BE-30E1C345C15E}"/>
+                </a:ext>
+              </a:extLst>
+            </p:cNvPr>
+            <p:cNvSpPr/>
+            <p:nvPr/>
+          </p:nvSpPr>
+          <p:spPr>
+            <a:xfrm>
+              <a:off x="8639185" y="2325609"/>
+              <a:ext cx="1170898" cy="369332"/>
+            </a:xfrm>
+            <a:prstGeom prst="rect">
+              <a:avLst/>
+            </a:prstGeom>
+          </p:spPr>
+          <p:txBody>
+            <a:bodyPr wrap="none">
+              <a:spAutoFit/>
+            </a:bodyPr>
+            <a:lstStyle/>
+            <a:p>
+              <a:r>
+                <a:rPr lang="en-US" altLang="zh-HK" dirty="0"/>
+                <a:t>connected</a:t>
+              </a:r>
+              <a:endParaRPr lang="zh-HK" altLang="en-US" dirty="0"/>
+            </a:p>
+          </p:txBody>
+        </p:sp>
       </p:grpSp>
-      <p:pic>
-        <p:nvPicPr>
-          <p:cNvPr id="25" name="圖片 24">
-            <a:extLst>
-              <a:ext uri="{FF2B5EF4-FFF2-40B4-BE49-F238E27FC236}">
-                <a16:creationId xmlns:a16="http://schemas.microsoft.com/office/drawing/2014/main" id="{4FF51D5A-1568-4717-9F95-759F375F2B37}"/>
-              </a:ext>
-            </a:extLst>
-          </p:cNvPr>
-          <p:cNvPicPr>
-            <a:picLocks noChangeAspect="1"/>
-          </p:cNvPicPr>
-          <p:nvPr/>
-        </p:nvPicPr>
-        <p:blipFill rotWithShape="1">
-          <a:blip r:embed="rId5"/>
-          <a:srcRect l="-1" r="75206"/>
-          <a:stretch/>
-        </p:blipFill>
-        <p:spPr>
-          <a:xfrm>
-            <a:off x="8238812" y="1038240"/>
-            <a:ext cx="166279" cy="670618"/>
-          </a:xfrm>
-          <a:prstGeom prst="rect">
-            <a:avLst/>
-          </a:prstGeom>
-        </p:spPr>
-      </p:pic>
-      <p:pic>
-        <p:nvPicPr>
-          <p:cNvPr id="26" name="圖片 25">
-            <a:extLst>
-              <a:ext uri="{FF2B5EF4-FFF2-40B4-BE49-F238E27FC236}">
-                <a16:creationId xmlns:a16="http://schemas.microsoft.com/office/drawing/2014/main" id="{0021B9F1-9128-450E-A3B8-A1DCCA3B9378}"/>
-              </a:ext>
-            </a:extLst>
-          </p:cNvPr>
-          <p:cNvPicPr>
-            <a:picLocks noChangeAspect="1"/>
-          </p:cNvPicPr>
-          <p:nvPr/>
-        </p:nvPicPr>
-        <p:blipFill>
-          <a:blip r:embed="rId6"/>
-          <a:stretch>
-            <a:fillRect/>
-          </a:stretch>
-        </p:blipFill>
-        <p:spPr>
-          <a:xfrm>
-            <a:off x="8239648" y="2174966"/>
-            <a:ext cx="164606" cy="670618"/>
-          </a:xfrm>
-          <a:prstGeom prst="rect">
-            <a:avLst/>
-          </a:prstGeom>
-        </p:spPr>
-      </p:pic>
-      <p:pic>
-        <p:nvPicPr>
-          <p:cNvPr id="27" name="圖片 26">
-            <a:extLst>
-              <a:ext uri="{FF2B5EF4-FFF2-40B4-BE49-F238E27FC236}">
-                <a16:creationId xmlns:a16="http://schemas.microsoft.com/office/drawing/2014/main" id="{5026C78D-450B-4131-9EA1-39CC3E5EF6A9}"/>
-              </a:ext>
-            </a:extLst>
-          </p:cNvPr>
-          <p:cNvPicPr>
-            <a:picLocks noChangeAspect="1"/>
-          </p:cNvPicPr>
-          <p:nvPr/>
-        </p:nvPicPr>
-        <p:blipFill>
-          <a:blip r:embed="rId6"/>
-          <a:stretch>
-            <a:fillRect/>
-          </a:stretch>
-        </p:blipFill>
-        <p:spPr>
-          <a:xfrm>
-            <a:off x="8858497" y="1584060"/>
-            <a:ext cx="164606" cy="670618"/>
-          </a:xfrm>
-          <a:prstGeom prst="rect">
-            <a:avLst/>
-          </a:prstGeom>
-        </p:spPr>
-      </p:pic>
-      <p:pic>
-        <p:nvPicPr>
-          <p:cNvPr id="28" name="圖片 27">
-            <a:extLst>
-              <a:ext uri="{FF2B5EF4-FFF2-40B4-BE49-F238E27FC236}">
-                <a16:creationId xmlns:a16="http://schemas.microsoft.com/office/drawing/2014/main" id="{B9555DB1-3FC6-4E92-911F-32126E949EDF}"/>
-              </a:ext>
-            </a:extLst>
-          </p:cNvPr>
-          <p:cNvPicPr>
-            <a:picLocks noChangeAspect="1"/>
-          </p:cNvPicPr>
-          <p:nvPr/>
-        </p:nvPicPr>
-        <p:blipFill rotWithShape="1">
-          <a:blip r:embed="rId6"/>
-          <a:srcRect b="48355"/>
-          <a:stretch/>
-        </p:blipFill>
-        <p:spPr>
-          <a:xfrm>
-            <a:off x="9426165" y="1757451"/>
-            <a:ext cx="164606" cy="346341"/>
-          </a:xfrm>
-          <a:prstGeom prst="rect">
-            <a:avLst/>
-          </a:prstGeom>
-        </p:spPr>
-      </p:pic>
-      <p:cxnSp>
-        <p:nvCxnSpPr>
-          <p:cNvPr id="30" name="直線單箭頭接點 29">
-            <a:extLst>
-              <a:ext uri="{FF2B5EF4-FFF2-40B4-BE49-F238E27FC236}">
-                <a16:creationId xmlns:a16="http://schemas.microsoft.com/office/drawing/2014/main" id="{6943ACD9-CCAB-49C0-8379-1D9F1C63BD5E}"/>
-              </a:ext>
-            </a:extLst>
-          </p:cNvPr>
-          <p:cNvCxnSpPr>
-            <a:cxnSpLocks/>
-            <a:stCxn id="9" idx="3"/>
-          </p:cNvCxnSpPr>
-          <p:nvPr/>
-        </p:nvCxnSpPr>
-        <p:spPr>
-          <a:xfrm flipV="1">
-            <a:off x="3638989" y="1961670"/>
-            <a:ext cx="779677" cy="2"/>
-          </a:xfrm>
-          <a:prstGeom prst="straightConnector1">
-            <a:avLst/>
-          </a:prstGeom>
-          <a:ln>
-            <a:solidFill>
-              <a:schemeClr val="accent1">
-                <a:lumMod val="20000"/>
-                <a:lumOff val="80000"/>
-              </a:schemeClr>
-            </a:solidFill>
-            <a:tailEnd type="triangle"/>
-          </a:ln>
-        </p:spPr>
-        <p:style>
-          <a:lnRef idx="2">
-            <a:schemeClr val="accent1"/>
-          </a:lnRef>
-          <a:fillRef idx="0">
-            <a:schemeClr val="accent1"/>
-          </a:fillRef>
-          <a:effectRef idx="1">
-            <a:schemeClr val="accent1"/>
-          </a:effectRef>
-          <a:fontRef idx="minor">
-            <a:schemeClr val="tx1"/>
-          </a:fontRef>
-        </p:style>
-      </p:cxnSp>
-      <p:cxnSp>
-        <p:nvCxnSpPr>
-          <p:cNvPr id="32" name="直線單箭頭接點 31">
-            <a:extLst>
-              <a:ext uri="{FF2B5EF4-FFF2-40B4-BE49-F238E27FC236}">
-                <a16:creationId xmlns:a16="http://schemas.microsoft.com/office/drawing/2014/main" id="{76D55E2E-2E9D-45DA-A4B5-258D1A6E663B}"/>
-              </a:ext>
-            </a:extLst>
-          </p:cNvPr>
-          <p:cNvCxnSpPr/>
-          <p:nvPr/>
-        </p:nvCxnSpPr>
-        <p:spPr>
-          <a:xfrm>
-            <a:off x="5943288" y="1961670"/>
-            <a:ext cx="565204" cy="0"/>
-          </a:xfrm>
-          <a:prstGeom prst="straightConnector1">
-            <a:avLst/>
-          </a:prstGeom>
-          <a:ln>
-            <a:solidFill>
-              <a:schemeClr val="accent1">
-                <a:lumMod val="20000"/>
-                <a:lumOff val="80000"/>
-              </a:schemeClr>
-            </a:solidFill>
-            <a:tailEnd type="triangle"/>
-          </a:ln>
-        </p:spPr>
-        <p:style>
-          <a:lnRef idx="2">
-            <a:schemeClr val="accent1"/>
-          </a:lnRef>
-          <a:fillRef idx="0">
-            <a:schemeClr val="accent1"/>
-          </a:fillRef>
-          <a:effectRef idx="1">
-            <a:schemeClr val="accent1"/>
-          </a:effectRef>
-          <a:fontRef idx="minor">
-            <a:schemeClr val="tx1"/>
-          </a:fontRef>
-        </p:style>
-      </p:cxnSp>
-      <p:cxnSp>
-        <p:nvCxnSpPr>
-          <p:cNvPr id="34" name="直線單箭頭接點 33">
-            <a:extLst>
-              <a:ext uri="{FF2B5EF4-FFF2-40B4-BE49-F238E27FC236}">
-                <a16:creationId xmlns:a16="http://schemas.microsoft.com/office/drawing/2014/main" id="{5214CB30-B388-405F-B222-19049A4D92BF}"/>
-              </a:ext>
-            </a:extLst>
-          </p:cNvPr>
-          <p:cNvCxnSpPr>
-            <a:cxnSpLocks/>
-          </p:cNvCxnSpPr>
-          <p:nvPr/>
-        </p:nvCxnSpPr>
-        <p:spPr>
-          <a:xfrm flipV="1">
-            <a:off x="7233772" y="1136073"/>
-            <a:ext cx="931174" cy="337875"/>
-          </a:xfrm>
-          <a:prstGeom prst="straightConnector1">
-            <a:avLst/>
-          </a:prstGeom>
-          <a:ln>
-            <a:solidFill>
-              <a:schemeClr val="accent1">
-                <a:lumMod val="20000"/>
-                <a:lumOff val="80000"/>
-              </a:schemeClr>
-            </a:solidFill>
-            <a:tailEnd type="triangle"/>
-          </a:ln>
-        </p:spPr>
-        <p:style>
-          <a:lnRef idx="2">
-            <a:schemeClr val="accent1"/>
-          </a:lnRef>
-          <a:fillRef idx="0">
-            <a:schemeClr val="accent1"/>
-          </a:fillRef>
-          <a:effectRef idx="1">
-            <a:schemeClr val="accent1"/>
-          </a:effectRef>
-          <a:fontRef idx="minor">
-            <a:schemeClr val="tx1"/>
-          </a:fontRef>
-        </p:style>
-      </p:cxnSp>
-      <p:cxnSp>
-        <p:nvCxnSpPr>
-          <p:cNvPr id="36" name="直線單箭頭接點 35">
-            <a:extLst>
-              <a:ext uri="{FF2B5EF4-FFF2-40B4-BE49-F238E27FC236}">
-                <a16:creationId xmlns:a16="http://schemas.microsoft.com/office/drawing/2014/main" id="{92DF8390-AC72-402B-A0FA-3FBD10D770CD}"/>
-              </a:ext>
-            </a:extLst>
-          </p:cNvPr>
-          <p:cNvCxnSpPr>
-            <a:cxnSpLocks/>
-          </p:cNvCxnSpPr>
-          <p:nvPr/>
-        </p:nvCxnSpPr>
-        <p:spPr>
-          <a:xfrm>
-            <a:off x="6845619" y="2493199"/>
-            <a:ext cx="1393193" cy="286947"/>
-          </a:xfrm>
-          <a:prstGeom prst="straightConnector1">
-            <a:avLst/>
-          </a:prstGeom>
-          <a:ln>
-            <a:solidFill>
-              <a:schemeClr val="accent1">
-                <a:lumMod val="20000"/>
-                <a:lumOff val="80000"/>
-              </a:schemeClr>
-            </a:solidFill>
-            <a:tailEnd type="triangle"/>
-          </a:ln>
-        </p:spPr>
-        <p:style>
-          <a:lnRef idx="2">
-            <a:schemeClr val="accent1"/>
-          </a:lnRef>
-          <a:fillRef idx="0">
-            <a:schemeClr val="accent1"/>
-          </a:fillRef>
-          <a:effectRef idx="1">
-            <a:schemeClr val="accent1"/>
-          </a:effectRef>
-          <a:fontRef idx="minor">
-            <a:schemeClr val="tx1"/>
-          </a:fontRef>
-        </p:style>
-      </p:cxnSp>
-      <p:cxnSp>
-        <p:nvCxnSpPr>
-          <p:cNvPr id="38" name="直線單箭頭接點 37">
-            <a:extLst>
-              <a:ext uri="{FF2B5EF4-FFF2-40B4-BE49-F238E27FC236}">
-                <a16:creationId xmlns:a16="http://schemas.microsoft.com/office/drawing/2014/main" id="{A692F329-BDD2-4739-8249-BCB5BB407D8A}"/>
-              </a:ext>
-            </a:extLst>
-          </p:cNvPr>
-          <p:cNvCxnSpPr/>
-          <p:nvPr/>
-        </p:nvCxnSpPr>
-        <p:spPr>
-          <a:xfrm>
-            <a:off x="8404254" y="1136073"/>
-            <a:ext cx="454243" cy="519500"/>
-          </a:xfrm>
-          <a:prstGeom prst="straightConnector1">
-            <a:avLst/>
-          </a:prstGeom>
-          <a:ln>
-            <a:solidFill>
-              <a:schemeClr val="accent1">
-                <a:lumMod val="20000"/>
-                <a:lumOff val="80000"/>
-              </a:schemeClr>
-            </a:solidFill>
-            <a:tailEnd type="triangle"/>
-          </a:ln>
-        </p:spPr>
-        <p:style>
-          <a:lnRef idx="2">
-            <a:schemeClr val="accent1"/>
-          </a:lnRef>
-          <a:fillRef idx="0">
-            <a:schemeClr val="accent1"/>
-          </a:fillRef>
-          <a:effectRef idx="1">
-            <a:schemeClr val="accent1"/>
-          </a:effectRef>
-          <a:fontRef idx="minor">
-            <a:schemeClr val="tx1"/>
-          </a:fontRef>
-        </p:style>
-      </p:cxnSp>
-      <p:cxnSp>
-        <p:nvCxnSpPr>
-          <p:cNvPr id="40" name="直線單箭頭接點 39">
-            <a:extLst>
-              <a:ext uri="{FF2B5EF4-FFF2-40B4-BE49-F238E27FC236}">
-                <a16:creationId xmlns:a16="http://schemas.microsoft.com/office/drawing/2014/main" id="{BA8DB398-918F-490A-AC29-8D0C01A0DED8}"/>
-              </a:ext>
-            </a:extLst>
-          </p:cNvPr>
-          <p:cNvCxnSpPr>
-            <a:cxnSpLocks/>
-          </p:cNvCxnSpPr>
-          <p:nvPr/>
-        </p:nvCxnSpPr>
-        <p:spPr>
-          <a:xfrm flipV="1">
-            <a:off x="8404254" y="2206252"/>
-            <a:ext cx="454243" cy="573894"/>
-          </a:xfrm>
-          <a:prstGeom prst="straightConnector1">
-            <a:avLst/>
-          </a:prstGeom>
-          <a:ln>
-            <a:solidFill>
-              <a:schemeClr val="accent1">
-                <a:lumMod val="20000"/>
-                <a:lumOff val="80000"/>
-              </a:schemeClr>
-            </a:solidFill>
-            <a:tailEnd type="triangle"/>
-          </a:ln>
-        </p:spPr>
-        <p:style>
-          <a:lnRef idx="2">
-            <a:schemeClr val="accent1"/>
-          </a:lnRef>
-          <a:fillRef idx="0">
-            <a:schemeClr val="accent1"/>
-          </a:fillRef>
-          <a:effectRef idx="1">
-            <a:schemeClr val="accent1"/>
-          </a:effectRef>
-          <a:fontRef idx="minor">
-            <a:schemeClr val="tx1"/>
-          </a:fontRef>
-        </p:style>
-      </p:cxnSp>
-      <p:cxnSp>
-        <p:nvCxnSpPr>
-          <p:cNvPr id="43" name="直線單箭頭接點 42">
-            <a:extLst>
-              <a:ext uri="{FF2B5EF4-FFF2-40B4-BE49-F238E27FC236}">
-                <a16:creationId xmlns:a16="http://schemas.microsoft.com/office/drawing/2014/main" id="{7BBA1143-BD4E-4143-A71C-F2C0E5F7F4DC}"/>
-              </a:ext>
-            </a:extLst>
-          </p:cNvPr>
-          <p:cNvCxnSpPr/>
-          <p:nvPr/>
-        </p:nvCxnSpPr>
-        <p:spPr>
-          <a:xfrm>
-            <a:off x="9023103" y="1708858"/>
-            <a:ext cx="403062" cy="85306"/>
-          </a:xfrm>
-          <a:prstGeom prst="straightConnector1">
-            <a:avLst/>
-          </a:prstGeom>
-          <a:ln>
-            <a:solidFill>
-              <a:schemeClr val="accent1">
-                <a:lumMod val="20000"/>
-                <a:lumOff val="80000"/>
-              </a:schemeClr>
-            </a:solidFill>
-            <a:tailEnd type="triangle"/>
-          </a:ln>
-        </p:spPr>
-        <p:style>
-          <a:lnRef idx="2">
-            <a:schemeClr val="accent1"/>
-          </a:lnRef>
-          <a:fillRef idx="0">
-            <a:schemeClr val="accent1"/>
-          </a:fillRef>
-          <a:effectRef idx="1">
-            <a:schemeClr val="accent1"/>
-          </a:effectRef>
-          <a:fontRef idx="minor">
-            <a:schemeClr val="tx1"/>
-          </a:fontRef>
-        </p:style>
-      </p:cxnSp>
-      <p:cxnSp>
-        <p:nvCxnSpPr>
-          <p:cNvPr id="45" name="直線單箭頭接點 44">
-            <a:extLst>
-              <a:ext uri="{FF2B5EF4-FFF2-40B4-BE49-F238E27FC236}">
-                <a16:creationId xmlns:a16="http://schemas.microsoft.com/office/drawing/2014/main" id="{A2627054-7607-469E-BD6E-3199A1697217}"/>
-              </a:ext>
-            </a:extLst>
-          </p:cNvPr>
-          <p:cNvCxnSpPr>
-            <a:cxnSpLocks/>
-          </p:cNvCxnSpPr>
-          <p:nvPr/>
-        </p:nvCxnSpPr>
-        <p:spPr>
-          <a:xfrm flipV="1">
-            <a:off x="9049842" y="2053838"/>
-            <a:ext cx="376323" cy="121129"/>
-          </a:xfrm>
-          <a:prstGeom prst="straightConnector1">
-            <a:avLst/>
-          </a:prstGeom>
-          <a:ln>
-            <a:solidFill>
-              <a:schemeClr val="accent1">
-                <a:lumMod val="20000"/>
-                <a:lumOff val="80000"/>
-              </a:schemeClr>
-            </a:solidFill>
-            <a:tailEnd type="triangle"/>
-          </a:ln>
-        </p:spPr>
-        <p:style>
-          <a:lnRef idx="2">
-            <a:schemeClr val="accent1"/>
-          </a:lnRef>
-          <a:fillRef idx="0">
-            <a:schemeClr val="accent1"/>
-          </a:fillRef>
-          <a:effectRef idx="1">
-            <a:schemeClr val="accent1"/>
-          </a:effectRef>
-          <a:fontRef idx="minor">
-            <a:schemeClr val="tx1"/>
-          </a:fontRef>
-        </p:style>
-      </p:cxnSp>
-      <p:cxnSp>
-        <p:nvCxnSpPr>
-          <p:cNvPr id="50" name="直線單箭頭接點 49">
-            <a:extLst>
-              <a:ext uri="{FF2B5EF4-FFF2-40B4-BE49-F238E27FC236}">
-                <a16:creationId xmlns:a16="http://schemas.microsoft.com/office/drawing/2014/main" id="{EDAAC9F9-CDFD-4958-8514-E4FADD87582A}"/>
-              </a:ext>
-            </a:extLst>
-          </p:cNvPr>
-          <p:cNvCxnSpPr/>
-          <p:nvPr/>
-        </p:nvCxnSpPr>
-        <p:spPr>
-          <a:xfrm>
-            <a:off x="7463304" y="1961670"/>
-            <a:ext cx="701642" cy="0"/>
-          </a:xfrm>
-          <a:prstGeom prst="straightConnector1">
-            <a:avLst/>
-          </a:prstGeom>
-          <a:ln>
-            <a:solidFill>
-              <a:schemeClr val="accent1">
-                <a:lumMod val="20000"/>
-                <a:lumOff val="80000"/>
-              </a:schemeClr>
-            </a:solidFill>
-            <a:tailEnd type="triangle"/>
-          </a:ln>
-        </p:spPr>
-        <p:style>
-          <a:lnRef idx="2">
-            <a:schemeClr val="accent1"/>
-          </a:lnRef>
-          <a:fillRef idx="0">
-            <a:schemeClr val="accent1"/>
-          </a:fillRef>
-          <a:effectRef idx="1">
-            <a:schemeClr val="accent1"/>
-          </a:effectRef>
-          <a:fontRef idx="minor">
-            <a:schemeClr val="tx1"/>
-          </a:fontRef>
-        </p:style>
-      </p:cxnSp>
-      <p:cxnSp>
-        <p:nvCxnSpPr>
-          <p:cNvPr id="52" name="直線接點 51">
-            <a:extLst>
-              <a:ext uri="{FF2B5EF4-FFF2-40B4-BE49-F238E27FC236}">
-                <a16:creationId xmlns:a16="http://schemas.microsoft.com/office/drawing/2014/main" id="{4B50FD37-6118-46DB-809D-4310DA977521}"/>
-              </a:ext>
-            </a:extLst>
-          </p:cNvPr>
-          <p:cNvCxnSpPr/>
-          <p:nvPr/>
-        </p:nvCxnSpPr>
-        <p:spPr>
-          <a:xfrm>
-            <a:off x="8321951" y="1762351"/>
-            <a:ext cx="0" cy="323273"/>
-          </a:xfrm>
-          <a:prstGeom prst="line">
-            <a:avLst/>
-          </a:prstGeom>
-          <a:ln>
-            <a:solidFill>
-              <a:schemeClr val="bg2"/>
-            </a:solidFill>
-            <a:prstDash val="sysDash"/>
-          </a:ln>
-        </p:spPr>
-        <p:style>
-          <a:lnRef idx="2">
-            <a:schemeClr val="accent1"/>
-          </a:lnRef>
-          <a:fillRef idx="0">
-            <a:schemeClr val="accent1"/>
-          </a:fillRef>
-          <a:effectRef idx="1">
-            <a:schemeClr val="accent1"/>
-          </a:effectRef>
-          <a:fontRef idx="minor">
-            <a:schemeClr val="tx1"/>
-          </a:fontRef>
-        </p:style>
-      </p:cxnSp>
-      <p:cxnSp>
-        <p:nvCxnSpPr>
-          <p:cNvPr id="55" name="直線接點 54">
-            <a:extLst>
-              <a:ext uri="{FF2B5EF4-FFF2-40B4-BE49-F238E27FC236}">
-                <a16:creationId xmlns:a16="http://schemas.microsoft.com/office/drawing/2014/main" id="{55125779-A9DA-4EF8-92A8-B3990C505561}"/>
-              </a:ext>
-            </a:extLst>
-          </p:cNvPr>
-          <p:cNvCxnSpPr>
-            <a:cxnSpLocks/>
-          </p:cNvCxnSpPr>
-          <p:nvPr/>
-        </p:nvCxnSpPr>
-        <p:spPr>
-          <a:xfrm flipH="1">
-            <a:off x="8631375" y="1556892"/>
-            <a:ext cx="4605" cy="697786"/>
-          </a:xfrm>
-          <a:prstGeom prst="line">
-            <a:avLst/>
-          </a:prstGeom>
-          <a:ln>
-            <a:solidFill>
-              <a:schemeClr val="accent1">
-                <a:lumMod val="20000"/>
-                <a:lumOff val="80000"/>
-              </a:schemeClr>
-            </a:solidFill>
-            <a:prstDash val="sysDash"/>
-          </a:ln>
-        </p:spPr>
-        <p:style>
-          <a:lnRef idx="2">
-            <a:schemeClr val="accent1"/>
-          </a:lnRef>
-          <a:fillRef idx="0">
-            <a:schemeClr val="accent1"/>
-          </a:fillRef>
-          <a:effectRef idx="1">
-            <a:schemeClr val="accent1"/>
-          </a:effectRef>
-          <a:fontRef idx="minor">
-            <a:schemeClr val="tx1"/>
-          </a:fontRef>
-        </p:style>
-      </p:cxnSp>
-      <p:cxnSp>
-        <p:nvCxnSpPr>
-          <p:cNvPr id="58" name="直線接點 57">
-            <a:extLst>
-              <a:ext uri="{FF2B5EF4-FFF2-40B4-BE49-F238E27FC236}">
-                <a16:creationId xmlns:a16="http://schemas.microsoft.com/office/drawing/2014/main" id="{909104CF-AC02-48BA-B218-344963BFB7DA}"/>
-              </a:ext>
-            </a:extLst>
-          </p:cNvPr>
-          <p:cNvCxnSpPr>
-            <a:cxnSpLocks/>
-          </p:cNvCxnSpPr>
-          <p:nvPr/>
-        </p:nvCxnSpPr>
-        <p:spPr>
-          <a:xfrm>
-            <a:off x="9224634" y="1816391"/>
-            <a:ext cx="0" cy="223715"/>
-          </a:xfrm>
-          <a:prstGeom prst="line">
-            <a:avLst/>
-          </a:prstGeom>
-          <a:ln>
-            <a:solidFill>
-              <a:schemeClr val="accent1">
-                <a:lumMod val="20000"/>
-                <a:lumOff val="80000"/>
-              </a:schemeClr>
-            </a:solidFill>
-            <a:prstDash val="sysDash"/>
-          </a:ln>
-        </p:spPr>
-        <p:style>
-          <a:lnRef idx="2">
-            <a:schemeClr val="accent1"/>
-          </a:lnRef>
-          <a:fillRef idx="0">
-            <a:schemeClr val="accent1"/>
-          </a:fillRef>
-          <a:effectRef idx="1">
-            <a:schemeClr val="accent1"/>
-          </a:effectRef>
-          <a:fontRef idx="minor">
-            <a:schemeClr val="tx1"/>
-          </a:fontRef>
-        </p:style>
-      </p:cxnSp>
-      <p:sp>
-        <p:nvSpPr>
-          <p:cNvPr id="60" name="矩形 59">
-            <a:extLst>
-              <a:ext uri="{FF2B5EF4-FFF2-40B4-BE49-F238E27FC236}">
-                <a16:creationId xmlns:a16="http://schemas.microsoft.com/office/drawing/2014/main" id="{8999171D-1D72-4928-A13A-ED1449677D37}"/>
-              </a:ext>
-            </a:extLst>
-          </p:cNvPr>
-          <p:cNvSpPr/>
-          <p:nvPr/>
-        </p:nvSpPr>
-        <p:spPr>
-          <a:xfrm>
-            <a:off x="3663292" y="1631725"/>
-            <a:ext cx="652102" cy="369332"/>
-          </a:xfrm>
-          <a:prstGeom prst="rect">
-            <a:avLst/>
-          </a:prstGeom>
-        </p:spPr>
-        <p:txBody>
-          <a:bodyPr wrap="none">
-            <a:spAutoFit/>
-          </a:bodyPr>
-          <a:lstStyle/>
-          <a:p>
-            <a:r>
-              <a:rPr lang="en-US" altLang="zh-HK" dirty="0"/>
-              <a:t>Conv</a:t>
-            </a:r>
-            <a:endParaRPr lang="zh-HK" altLang="en-US" dirty="0"/>
-          </a:p>
-        </p:txBody>
-      </p:sp>
-      <p:sp>
-        <p:nvSpPr>
-          <p:cNvPr id="61" name="矩形 60">
-            <a:extLst>
-              <a:ext uri="{FF2B5EF4-FFF2-40B4-BE49-F238E27FC236}">
-                <a16:creationId xmlns:a16="http://schemas.microsoft.com/office/drawing/2014/main" id="{C4177E60-FF9A-4D56-9CC1-D588C4CD3168}"/>
-              </a:ext>
-            </a:extLst>
-          </p:cNvPr>
-          <p:cNvSpPr/>
-          <p:nvPr/>
-        </p:nvSpPr>
-        <p:spPr>
-          <a:xfrm>
-            <a:off x="5867481" y="1647427"/>
-            <a:ext cx="595228" cy="369332"/>
-          </a:xfrm>
-          <a:prstGeom prst="rect">
-            <a:avLst/>
-          </a:prstGeom>
-        </p:spPr>
-        <p:txBody>
-          <a:bodyPr wrap="none">
-            <a:spAutoFit/>
-          </a:bodyPr>
-          <a:lstStyle/>
-          <a:p>
-            <a:r>
-              <a:rPr lang="en-US" altLang="zh-HK" dirty="0"/>
-              <a:t>Pool</a:t>
-            </a:r>
-            <a:endParaRPr lang="zh-HK" altLang="en-US" dirty="0"/>
-          </a:p>
-        </p:txBody>
-      </p:sp>
-      <p:sp>
-        <p:nvSpPr>
-          <p:cNvPr id="62" name="矩形 61">
-            <a:extLst>
-              <a:ext uri="{FF2B5EF4-FFF2-40B4-BE49-F238E27FC236}">
-                <a16:creationId xmlns:a16="http://schemas.microsoft.com/office/drawing/2014/main" id="{B611DBAE-DFCB-43B7-8590-2C8B19B7187D}"/>
-              </a:ext>
-            </a:extLst>
-          </p:cNvPr>
-          <p:cNvSpPr/>
-          <p:nvPr/>
-        </p:nvSpPr>
-        <p:spPr>
-          <a:xfrm>
-            <a:off x="7392664" y="1647427"/>
-            <a:ext cx="837217" cy="369332"/>
-          </a:xfrm>
-          <a:prstGeom prst="rect">
-            <a:avLst/>
-          </a:prstGeom>
-        </p:spPr>
-        <p:txBody>
-          <a:bodyPr wrap="none">
-            <a:spAutoFit/>
-          </a:bodyPr>
-          <a:lstStyle/>
-          <a:p>
-            <a:r>
-              <a:rPr lang="en-US" altLang="zh-HK" dirty="0"/>
-              <a:t>Flatten</a:t>
-            </a:r>
-            <a:endParaRPr lang="zh-HK" altLang="en-US" dirty="0"/>
-          </a:p>
-        </p:txBody>
-      </p:sp>
-      <p:sp>
-        <p:nvSpPr>
-          <p:cNvPr id="63" name="矩形 62">
-            <a:extLst>
-              <a:ext uri="{FF2B5EF4-FFF2-40B4-BE49-F238E27FC236}">
-                <a16:creationId xmlns:a16="http://schemas.microsoft.com/office/drawing/2014/main" id="{00DAABA6-A061-4621-B471-03582849849B}"/>
-              </a:ext>
-            </a:extLst>
-          </p:cNvPr>
-          <p:cNvSpPr/>
-          <p:nvPr/>
-        </p:nvSpPr>
-        <p:spPr>
-          <a:xfrm>
-            <a:off x="8940800" y="1214728"/>
-            <a:ext cx="587020" cy="369332"/>
-          </a:xfrm>
-          <a:prstGeom prst="rect">
-            <a:avLst/>
-          </a:prstGeom>
-        </p:spPr>
-        <p:txBody>
-          <a:bodyPr wrap="none">
-            <a:spAutoFit/>
-          </a:bodyPr>
-          <a:lstStyle/>
-          <a:p>
-            <a:r>
-              <a:rPr lang="en-US" altLang="zh-HK" dirty="0"/>
-              <a:t>fully</a:t>
-            </a:r>
-            <a:endParaRPr lang="zh-HK" altLang="en-US" dirty="0"/>
-          </a:p>
-        </p:txBody>
-      </p:sp>
-      <p:sp>
-        <p:nvSpPr>
-          <p:cNvPr id="64" name="矩形 63">
-            <a:extLst>
-              <a:ext uri="{FF2B5EF4-FFF2-40B4-BE49-F238E27FC236}">
-                <a16:creationId xmlns:a16="http://schemas.microsoft.com/office/drawing/2014/main" id="{2E8E738F-70A4-47DC-99BE-30E1C345C15E}"/>
-              </a:ext>
-            </a:extLst>
-          </p:cNvPr>
-          <p:cNvSpPr/>
-          <p:nvPr/>
-        </p:nvSpPr>
-        <p:spPr>
-          <a:xfrm>
-            <a:off x="8639185" y="2325609"/>
-            <a:ext cx="1170898" cy="369332"/>
-          </a:xfrm>
-          <a:prstGeom prst="rect">
-            <a:avLst/>
-          </a:prstGeom>
-        </p:spPr>
-        <p:txBody>
-          <a:bodyPr wrap="none">
-            <a:spAutoFit/>
-          </a:bodyPr>
-          <a:lstStyle/>
-          <a:p>
-            <a:r>
-              <a:rPr lang="en-US" altLang="zh-HK" dirty="0"/>
-              <a:t>connected</a:t>
-            </a:r>
-            <a:endParaRPr lang="zh-HK" altLang="en-US" dirty="0"/>
-          </a:p>
-        </p:txBody>
-      </p:sp>
       <p:grpSp>
         <p:nvGrpSpPr>
           <p:cNvPr id="96" name="群組 95">
@@ -5108,7 +5129,7 @@
         </p:nvGrpSpPr>
         <p:grpSpPr>
           <a:xfrm>
-            <a:off x="2119568" y="3198587"/>
+            <a:off x="771593" y="2171382"/>
             <a:ext cx="5312604" cy="1807344"/>
             <a:chOff x="2119568" y="3198587"/>
             <a:chExt cx="5312604" cy="1807344"/>
@@ -6133,6 +6154,976 @@
             </a:fontRef>
           </p:style>
         </p:cxnSp>
+      </p:grpSp>
+      <p:grpSp>
+        <p:nvGrpSpPr>
+          <p:cNvPr id="54" name="群組 53">
+            <a:extLst>
+              <a:ext uri="{FF2B5EF4-FFF2-40B4-BE49-F238E27FC236}">
+                <a16:creationId xmlns:a16="http://schemas.microsoft.com/office/drawing/2014/main" id="{8409D2FB-5C9F-45CF-8656-A00DAA003C07}"/>
+              </a:ext>
+            </a:extLst>
+          </p:cNvPr>
+          <p:cNvGrpSpPr/>
+          <p:nvPr/>
+        </p:nvGrpSpPr>
+        <p:grpSpPr>
+          <a:xfrm>
+            <a:off x="3402845" y="4167402"/>
+            <a:ext cx="6682768" cy="2256501"/>
+            <a:chOff x="3402845" y="4167402"/>
+            <a:chExt cx="6682768" cy="2256501"/>
+          </a:xfrm>
+        </p:grpSpPr>
+        <p:sp>
+          <p:nvSpPr>
+            <p:cNvPr id="3" name="矩形 2">
+              <a:extLst>
+                <a:ext uri="{FF2B5EF4-FFF2-40B4-BE49-F238E27FC236}">
+                  <a16:creationId xmlns:a16="http://schemas.microsoft.com/office/drawing/2014/main" id="{D846CACC-4AF0-4AAE-B4D5-E6DCF62332B6}"/>
+                </a:ext>
+              </a:extLst>
+            </p:cNvPr>
+            <p:cNvSpPr/>
+            <p:nvPr/>
+          </p:nvSpPr>
+          <p:spPr>
+            <a:xfrm>
+              <a:off x="3402845" y="4509856"/>
+              <a:ext cx="1502644" cy="1265364"/>
+            </a:xfrm>
+            <a:prstGeom prst="rect">
+              <a:avLst/>
+            </a:prstGeom>
+          </p:spPr>
+          <p:style>
+            <a:lnRef idx="2">
+              <a:schemeClr val="accent1">
+                <a:shade val="50000"/>
+              </a:schemeClr>
+            </a:lnRef>
+            <a:fillRef idx="1">
+              <a:schemeClr val="accent1"/>
+            </a:fillRef>
+            <a:effectRef idx="0">
+              <a:schemeClr val="accent1"/>
+            </a:effectRef>
+            <a:fontRef idx="minor">
+              <a:schemeClr val="lt1"/>
+            </a:fontRef>
+          </p:style>
+          <p:txBody>
+            <a:bodyPr rtlCol="0" anchor="ctr"/>
+            <a:lstStyle/>
+            <a:p>
+              <a:pPr algn="ctr"/>
+              <a:endParaRPr lang="zh-HK" altLang="en-US"/>
+            </a:p>
+          </p:txBody>
+        </p:sp>
+        <p:pic>
+          <p:nvPicPr>
+            <p:cNvPr id="4" name="圖片 3">
+              <a:extLst>
+                <a:ext uri="{FF2B5EF4-FFF2-40B4-BE49-F238E27FC236}">
+                  <a16:creationId xmlns:a16="http://schemas.microsoft.com/office/drawing/2014/main" id="{DD86D3E5-F3F2-4108-A7D9-7D6273EF88B8}"/>
+                </a:ext>
+              </a:extLst>
+            </p:cNvPr>
+            <p:cNvPicPr>
+              <a:picLocks noChangeAspect="1"/>
+            </p:cNvPicPr>
+            <p:nvPr/>
+          </p:nvPicPr>
+          <p:blipFill>
+            <a:blip r:embed="rId5"/>
+            <a:stretch>
+              <a:fillRect/>
+            </a:stretch>
+          </p:blipFill>
+          <p:spPr>
+            <a:xfrm>
+              <a:off x="5804049" y="4621436"/>
+              <a:ext cx="670618" cy="670618"/>
+            </a:xfrm>
+            <a:prstGeom prst="rect">
+              <a:avLst/>
+            </a:prstGeom>
+          </p:spPr>
+        </p:pic>
+        <p:pic>
+          <p:nvPicPr>
+            <p:cNvPr id="5" name="圖片 4">
+              <a:extLst>
+                <a:ext uri="{FF2B5EF4-FFF2-40B4-BE49-F238E27FC236}">
+                  <a16:creationId xmlns:a16="http://schemas.microsoft.com/office/drawing/2014/main" id="{B455486C-A956-432E-AE71-BCAD4CA7D88D}"/>
+                </a:ext>
+              </a:extLst>
+            </p:cNvPr>
+            <p:cNvPicPr>
+              <a:picLocks noChangeAspect="1"/>
+            </p:cNvPicPr>
+            <p:nvPr/>
+          </p:nvPicPr>
+          <p:blipFill>
+            <a:blip r:embed="rId5"/>
+            <a:stretch>
+              <a:fillRect/>
+            </a:stretch>
+          </p:blipFill>
+          <p:spPr>
+            <a:xfrm>
+              <a:off x="5903194" y="4725902"/>
+              <a:ext cx="670618" cy="670618"/>
+            </a:xfrm>
+            <a:prstGeom prst="rect">
+              <a:avLst/>
+            </a:prstGeom>
+          </p:spPr>
+        </p:pic>
+        <p:pic>
+          <p:nvPicPr>
+            <p:cNvPr id="6" name="圖片 5">
+              <a:extLst>
+                <a:ext uri="{FF2B5EF4-FFF2-40B4-BE49-F238E27FC236}">
+                  <a16:creationId xmlns:a16="http://schemas.microsoft.com/office/drawing/2014/main" id="{BDBCD6B8-4108-44C2-AED7-5CF37DA09EAF}"/>
+                </a:ext>
+              </a:extLst>
+            </p:cNvPr>
+            <p:cNvPicPr>
+              <a:picLocks noChangeAspect="1"/>
+            </p:cNvPicPr>
+            <p:nvPr/>
+          </p:nvPicPr>
+          <p:blipFill>
+            <a:blip r:embed="rId5"/>
+            <a:stretch>
+              <a:fillRect/>
+            </a:stretch>
+          </p:blipFill>
+          <p:spPr>
+            <a:xfrm>
+              <a:off x="6002339" y="4830368"/>
+              <a:ext cx="670618" cy="670618"/>
+            </a:xfrm>
+            <a:prstGeom prst="rect">
+              <a:avLst/>
+            </a:prstGeom>
+          </p:spPr>
+        </p:pic>
+        <p:pic>
+          <p:nvPicPr>
+            <p:cNvPr id="7" name="圖片 6">
+              <a:extLst>
+                <a:ext uri="{FF2B5EF4-FFF2-40B4-BE49-F238E27FC236}">
+                  <a16:creationId xmlns:a16="http://schemas.microsoft.com/office/drawing/2014/main" id="{BA832F17-0450-4F26-8211-070503D23059}"/>
+                </a:ext>
+              </a:extLst>
+            </p:cNvPr>
+            <p:cNvPicPr>
+              <a:picLocks noChangeAspect="1"/>
+            </p:cNvPicPr>
+            <p:nvPr/>
+          </p:nvPicPr>
+          <p:blipFill>
+            <a:blip r:embed="rId5"/>
+            <a:stretch>
+              <a:fillRect/>
+            </a:stretch>
+          </p:blipFill>
+          <p:spPr>
+            <a:xfrm>
+              <a:off x="6108225" y="4936635"/>
+              <a:ext cx="670618" cy="670618"/>
+            </a:xfrm>
+            <a:prstGeom prst="rect">
+              <a:avLst/>
+            </a:prstGeom>
+          </p:spPr>
+        </p:pic>
+        <p:pic>
+          <p:nvPicPr>
+            <p:cNvPr id="8" name="圖片 7">
+              <a:extLst>
+                <a:ext uri="{FF2B5EF4-FFF2-40B4-BE49-F238E27FC236}">
+                  <a16:creationId xmlns:a16="http://schemas.microsoft.com/office/drawing/2014/main" id="{B0CED8F6-732E-4BD2-9AF0-3C57DE38691E}"/>
+                </a:ext>
+              </a:extLst>
+            </p:cNvPr>
+            <p:cNvPicPr>
+              <a:picLocks noChangeAspect="1"/>
+            </p:cNvPicPr>
+            <p:nvPr/>
+          </p:nvPicPr>
+          <p:blipFill>
+            <a:blip r:embed="rId5"/>
+            <a:stretch>
+              <a:fillRect/>
+            </a:stretch>
+          </p:blipFill>
+          <p:spPr>
+            <a:xfrm>
+              <a:off x="6223301" y="5042902"/>
+              <a:ext cx="670618" cy="670618"/>
+            </a:xfrm>
+            <a:prstGeom prst="rect">
+              <a:avLst/>
+            </a:prstGeom>
+          </p:spPr>
+        </p:pic>
+        <p:pic>
+          <p:nvPicPr>
+            <p:cNvPr id="10" name="圖片 9">
+              <a:extLst>
+                <a:ext uri="{FF2B5EF4-FFF2-40B4-BE49-F238E27FC236}">
+                  <a16:creationId xmlns:a16="http://schemas.microsoft.com/office/drawing/2014/main" id="{2DA74B12-61E6-4400-9098-8A710721265A}"/>
+                </a:ext>
+              </a:extLst>
+            </p:cNvPr>
+            <p:cNvPicPr>
+              <a:picLocks noChangeAspect="1"/>
+            </p:cNvPicPr>
+            <p:nvPr/>
+          </p:nvPicPr>
+          <p:blipFill>
+            <a:blip r:embed="rId5"/>
+            <a:stretch>
+              <a:fillRect/>
+            </a:stretch>
+          </p:blipFill>
+          <p:spPr>
+            <a:xfrm>
+              <a:off x="6337648" y="5138269"/>
+              <a:ext cx="670618" cy="670618"/>
+            </a:xfrm>
+            <a:prstGeom prst="rect">
+              <a:avLst/>
+            </a:prstGeom>
+          </p:spPr>
+        </p:pic>
+        <p:pic>
+          <p:nvPicPr>
+            <p:cNvPr id="18" name="圖片 17">
+              <a:extLst>
+                <a:ext uri="{FF2B5EF4-FFF2-40B4-BE49-F238E27FC236}">
+                  <a16:creationId xmlns:a16="http://schemas.microsoft.com/office/drawing/2014/main" id="{8708D514-2D75-4B6B-83CA-135FE8A1436F}"/>
+                </a:ext>
+              </a:extLst>
+            </p:cNvPr>
+            <p:cNvPicPr>
+              <a:picLocks noChangeAspect="1"/>
+            </p:cNvPicPr>
+            <p:nvPr/>
+          </p:nvPicPr>
+          <p:blipFill>
+            <a:blip r:embed="rId11"/>
+            <a:stretch>
+              <a:fillRect/>
+            </a:stretch>
+          </p:blipFill>
+          <p:spPr>
+            <a:xfrm>
+              <a:off x="8096655" y="4555751"/>
+              <a:ext cx="1019263" cy="856181"/>
+            </a:xfrm>
+            <a:prstGeom prst="rect">
+              <a:avLst/>
+            </a:prstGeom>
+          </p:spPr>
+        </p:pic>
+        <p:pic>
+          <p:nvPicPr>
+            <p:cNvPr id="35" name="圖片 34">
+              <a:extLst>
+                <a:ext uri="{FF2B5EF4-FFF2-40B4-BE49-F238E27FC236}">
+                  <a16:creationId xmlns:a16="http://schemas.microsoft.com/office/drawing/2014/main" id="{561EE4E3-C437-4747-91DE-D4F37536315E}"/>
+                </a:ext>
+              </a:extLst>
+            </p:cNvPr>
+            <p:cNvPicPr>
+              <a:picLocks noChangeAspect="1"/>
+            </p:cNvPicPr>
+            <p:nvPr/>
+          </p:nvPicPr>
+          <p:blipFill>
+            <a:blip r:embed="rId12"/>
+            <a:stretch>
+              <a:fillRect/>
+            </a:stretch>
+          </p:blipFill>
+          <p:spPr>
+            <a:xfrm>
+              <a:off x="8195800" y="4645250"/>
+              <a:ext cx="1018120" cy="859611"/>
+            </a:xfrm>
+            <a:prstGeom prst="rect">
+              <a:avLst/>
+            </a:prstGeom>
+          </p:spPr>
+        </p:pic>
+        <p:pic>
+          <p:nvPicPr>
+            <p:cNvPr id="37" name="圖片 36">
+              <a:extLst>
+                <a:ext uri="{FF2B5EF4-FFF2-40B4-BE49-F238E27FC236}">
+                  <a16:creationId xmlns:a16="http://schemas.microsoft.com/office/drawing/2014/main" id="{5BF33A54-7707-4A5F-AB43-AEBCA579E1C6}"/>
+                </a:ext>
+              </a:extLst>
+            </p:cNvPr>
+            <p:cNvPicPr>
+              <a:picLocks noChangeAspect="1"/>
+            </p:cNvPicPr>
+            <p:nvPr/>
+          </p:nvPicPr>
+          <p:blipFill>
+            <a:blip r:embed="rId12"/>
+            <a:stretch>
+              <a:fillRect/>
+            </a:stretch>
+          </p:blipFill>
+          <p:spPr>
+            <a:xfrm>
+              <a:off x="8294945" y="4740211"/>
+              <a:ext cx="1018120" cy="859611"/>
+            </a:xfrm>
+            <a:prstGeom prst="rect">
+              <a:avLst/>
+            </a:prstGeom>
+          </p:spPr>
+        </p:pic>
+        <p:pic>
+          <p:nvPicPr>
+            <p:cNvPr id="39" name="圖片 38">
+              <a:extLst>
+                <a:ext uri="{FF2B5EF4-FFF2-40B4-BE49-F238E27FC236}">
+                  <a16:creationId xmlns:a16="http://schemas.microsoft.com/office/drawing/2014/main" id="{4242788A-16E6-41A1-9A9A-04B3CCC35E38}"/>
+                </a:ext>
+              </a:extLst>
+            </p:cNvPr>
+            <p:cNvPicPr>
+              <a:picLocks noChangeAspect="1"/>
+            </p:cNvPicPr>
+            <p:nvPr/>
+          </p:nvPicPr>
+          <p:blipFill>
+            <a:blip r:embed="rId12"/>
+            <a:stretch>
+              <a:fillRect/>
+            </a:stretch>
+          </p:blipFill>
+          <p:spPr>
+            <a:xfrm>
+              <a:off x="8390981" y="4842138"/>
+              <a:ext cx="1018120" cy="859611"/>
+            </a:xfrm>
+            <a:prstGeom prst="rect">
+              <a:avLst/>
+            </a:prstGeom>
+          </p:spPr>
+        </p:pic>
+        <p:pic>
+          <p:nvPicPr>
+            <p:cNvPr id="41" name="圖片 40">
+              <a:extLst>
+                <a:ext uri="{FF2B5EF4-FFF2-40B4-BE49-F238E27FC236}">
+                  <a16:creationId xmlns:a16="http://schemas.microsoft.com/office/drawing/2014/main" id="{A8B060AE-9691-4B29-8E4C-0FB63878A29C}"/>
+                </a:ext>
+              </a:extLst>
+            </p:cNvPr>
+            <p:cNvPicPr>
+              <a:picLocks noChangeAspect="1"/>
+            </p:cNvPicPr>
+            <p:nvPr/>
+          </p:nvPicPr>
+          <p:blipFill>
+            <a:blip r:embed="rId12"/>
+            <a:stretch>
+              <a:fillRect/>
+            </a:stretch>
+          </p:blipFill>
+          <p:spPr>
+            <a:xfrm>
+              <a:off x="8508063" y="4944065"/>
+              <a:ext cx="1018120" cy="859611"/>
+            </a:xfrm>
+            <a:prstGeom prst="rect">
+              <a:avLst/>
+            </a:prstGeom>
+          </p:spPr>
+        </p:pic>
+        <p:pic>
+          <p:nvPicPr>
+            <p:cNvPr id="42" name="圖片 41">
+              <a:extLst>
+                <a:ext uri="{FF2B5EF4-FFF2-40B4-BE49-F238E27FC236}">
+                  <a16:creationId xmlns:a16="http://schemas.microsoft.com/office/drawing/2014/main" id="{ED28C492-6CC5-4D96-96B4-C80166F447F2}"/>
+                </a:ext>
+              </a:extLst>
+            </p:cNvPr>
+            <p:cNvPicPr>
+              <a:picLocks noChangeAspect="1"/>
+            </p:cNvPicPr>
+            <p:nvPr/>
+          </p:nvPicPr>
+          <p:blipFill>
+            <a:blip r:embed="rId12"/>
+            <a:stretch>
+              <a:fillRect/>
+            </a:stretch>
+          </p:blipFill>
+          <p:spPr>
+            <a:xfrm>
+              <a:off x="8630254" y="5042902"/>
+              <a:ext cx="1018120" cy="859611"/>
+            </a:xfrm>
+            <a:prstGeom prst="rect">
+              <a:avLst/>
+            </a:prstGeom>
+          </p:spPr>
+        </p:pic>
+        <p:sp>
+          <p:nvSpPr>
+            <p:cNvPr id="44" name="文字方塊 43">
+              <a:extLst>
+                <a:ext uri="{FF2B5EF4-FFF2-40B4-BE49-F238E27FC236}">
+                  <a16:creationId xmlns:a16="http://schemas.microsoft.com/office/drawing/2014/main" id="{F7FB2828-1970-4285-A288-1F8E61FF8F69}"/>
+                </a:ext>
+              </a:extLst>
+            </p:cNvPr>
+            <p:cNvSpPr txBox="1"/>
+            <p:nvPr/>
+          </p:nvSpPr>
+          <p:spPr>
+            <a:xfrm>
+              <a:off x="3719816" y="6054571"/>
+              <a:ext cx="793109" cy="369332"/>
+            </a:xfrm>
+            <a:prstGeom prst="rect">
+              <a:avLst/>
+            </a:prstGeom>
+            <a:noFill/>
+          </p:spPr>
+          <p:txBody>
+            <a:bodyPr wrap="square" rtlCol="0">
+              <a:spAutoFit/>
+            </a:bodyPr>
+            <a:lstStyle/>
+            <a:p>
+              <a:r>
+                <a:rPr lang="en-US" altLang="zh-HK" dirty="0"/>
+                <a:t>n, n, 1</a:t>
+              </a:r>
+              <a:endParaRPr lang="zh-HK" altLang="en-US" dirty="0"/>
+            </a:p>
+          </p:txBody>
+        </p:sp>
+        <p:sp>
+          <p:nvSpPr>
+            <p:cNvPr id="97" name="文字方塊 96">
+              <a:extLst>
+                <a:ext uri="{FF2B5EF4-FFF2-40B4-BE49-F238E27FC236}">
+                  <a16:creationId xmlns:a16="http://schemas.microsoft.com/office/drawing/2014/main" id="{A8B7461B-4B86-4C26-A8D8-5013D72454ED}"/>
+                </a:ext>
+              </a:extLst>
+            </p:cNvPr>
+            <p:cNvSpPr txBox="1"/>
+            <p:nvPr/>
+          </p:nvSpPr>
+          <p:spPr>
+            <a:xfrm>
+              <a:off x="6100810" y="6054571"/>
+              <a:ext cx="793109" cy="369332"/>
+            </a:xfrm>
+            <a:prstGeom prst="rect">
+              <a:avLst/>
+            </a:prstGeom>
+            <a:noFill/>
+          </p:spPr>
+          <p:txBody>
+            <a:bodyPr wrap="square" rtlCol="0">
+              <a:spAutoFit/>
+            </a:bodyPr>
+            <a:lstStyle/>
+            <a:p>
+              <a:r>
+                <a:rPr lang="en-US" altLang="zh-HK" dirty="0"/>
+                <a:t>k, k, f</a:t>
+              </a:r>
+              <a:endParaRPr lang="zh-HK" altLang="en-US" dirty="0"/>
+            </a:p>
+          </p:txBody>
+        </p:sp>
+        <p:sp>
+          <p:nvSpPr>
+            <p:cNvPr id="98" name="文字方塊 97">
+              <a:extLst>
+                <a:ext uri="{FF2B5EF4-FFF2-40B4-BE49-F238E27FC236}">
+                  <a16:creationId xmlns:a16="http://schemas.microsoft.com/office/drawing/2014/main" id="{9B5A0096-3668-4A1E-A7EA-369669293D48}"/>
+                </a:ext>
+              </a:extLst>
+            </p:cNvPr>
+            <p:cNvSpPr txBox="1"/>
+            <p:nvPr/>
+          </p:nvSpPr>
+          <p:spPr>
+            <a:xfrm>
+              <a:off x="8193220" y="6054571"/>
+              <a:ext cx="1845396" cy="369332"/>
+            </a:xfrm>
+            <a:prstGeom prst="rect">
+              <a:avLst/>
+            </a:prstGeom>
+            <a:noFill/>
+          </p:spPr>
+          <p:txBody>
+            <a:bodyPr wrap="square" rtlCol="0">
+              <a:spAutoFit/>
+            </a:bodyPr>
+            <a:lstStyle/>
+            <a:p>
+              <a:r>
+                <a:rPr lang="en-US" altLang="zh-HK" dirty="0"/>
+                <a:t>(n-k+1), (n-k+1), f</a:t>
+              </a:r>
+              <a:endParaRPr lang="zh-HK" altLang="en-US" dirty="0"/>
+            </a:p>
+          </p:txBody>
+        </p:sp>
+        <p:sp>
+          <p:nvSpPr>
+            <p:cNvPr id="46" name="文字方塊 45">
+              <a:extLst>
+                <a:ext uri="{FF2B5EF4-FFF2-40B4-BE49-F238E27FC236}">
+                  <a16:creationId xmlns:a16="http://schemas.microsoft.com/office/drawing/2014/main" id="{E78531B9-F8C5-4F3B-83CF-65BB08BB768D}"/>
+                </a:ext>
+              </a:extLst>
+            </p:cNvPr>
+            <p:cNvSpPr txBox="1"/>
+            <p:nvPr/>
+          </p:nvSpPr>
+          <p:spPr>
+            <a:xfrm>
+              <a:off x="5127662" y="5042902"/>
+              <a:ext cx="371086" cy="584775"/>
+            </a:xfrm>
+            <a:prstGeom prst="rect">
+              <a:avLst/>
+            </a:prstGeom>
+            <a:noFill/>
+          </p:spPr>
+          <p:txBody>
+            <a:bodyPr wrap="square" rtlCol="0">
+              <a:spAutoFit/>
+            </a:bodyPr>
+            <a:lstStyle/>
+            <a:p>
+              <a:r>
+                <a:rPr lang="en-US" altLang="zh-HK" sz="3200" dirty="0"/>
+                <a:t>*</a:t>
+              </a:r>
+              <a:endParaRPr lang="zh-HK" altLang="en-US" sz="3200" dirty="0"/>
+            </a:p>
+          </p:txBody>
+        </p:sp>
+        <p:sp>
+          <p:nvSpPr>
+            <p:cNvPr id="99" name="文字方塊 98">
+              <a:extLst>
+                <a:ext uri="{FF2B5EF4-FFF2-40B4-BE49-F238E27FC236}">
+                  <a16:creationId xmlns:a16="http://schemas.microsoft.com/office/drawing/2014/main" id="{757F40FB-EAF6-4663-9949-65B6A5C76C4C}"/>
+                </a:ext>
+              </a:extLst>
+            </p:cNvPr>
+            <p:cNvSpPr txBox="1"/>
+            <p:nvPr/>
+          </p:nvSpPr>
+          <p:spPr>
+            <a:xfrm>
+              <a:off x="7392735" y="4983841"/>
+              <a:ext cx="371086" cy="584775"/>
+            </a:xfrm>
+            <a:prstGeom prst="rect">
+              <a:avLst/>
+            </a:prstGeom>
+            <a:noFill/>
+          </p:spPr>
+          <p:txBody>
+            <a:bodyPr wrap="square" rtlCol="0">
+              <a:spAutoFit/>
+            </a:bodyPr>
+            <a:lstStyle/>
+            <a:p>
+              <a:r>
+                <a:rPr lang="en-US" altLang="zh-HK" sz="3200" dirty="0"/>
+                <a:t>=</a:t>
+              </a:r>
+              <a:endParaRPr lang="zh-HK" altLang="en-US" sz="3200" dirty="0"/>
+            </a:p>
+          </p:txBody>
+        </p:sp>
+        <p:cxnSp>
+          <p:nvCxnSpPr>
+            <p:cNvPr id="100" name="直線單箭頭接點 99">
+              <a:extLst>
+                <a:ext uri="{FF2B5EF4-FFF2-40B4-BE49-F238E27FC236}">
+                  <a16:creationId xmlns:a16="http://schemas.microsoft.com/office/drawing/2014/main" id="{29BD2765-6721-4F6A-94E8-B8FDEADAE25E}"/>
+                </a:ext>
+              </a:extLst>
+            </p:cNvPr>
+            <p:cNvCxnSpPr/>
+            <p:nvPr/>
+          </p:nvCxnSpPr>
+          <p:spPr>
+            <a:xfrm flipH="1">
+              <a:off x="7002007" y="4965471"/>
+              <a:ext cx="315756" cy="191479"/>
+            </a:xfrm>
+            <a:prstGeom prst="straightConnector1">
+              <a:avLst/>
+            </a:prstGeom>
+            <a:ln>
+              <a:tailEnd type="triangle"/>
+            </a:ln>
+          </p:spPr>
+          <p:style>
+            <a:lnRef idx="2">
+              <a:schemeClr val="accent1"/>
+            </a:lnRef>
+            <a:fillRef idx="0">
+              <a:schemeClr val="accent1"/>
+            </a:fillRef>
+            <a:effectRef idx="1">
+              <a:schemeClr val="accent1"/>
+            </a:effectRef>
+            <a:fontRef idx="minor">
+              <a:schemeClr val="tx1"/>
+            </a:fontRef>
+          </p:style>
+        </p:cxnSp>
+        <p:grpSp>
+          <p:nvGrpSpPr>
+            <p:cNvPr id="53" name="群組 52">
+              <a:extLst>
+                <a:ext uri="{FF2B5EF4-FFF2-40B4-BE49-F238E27FC236}">
+                  <a16:creationId xmlns:a16="http://schemas.microsoft.com/office/drawing/2014/main" id="{647C5896-09A4-4888-A878-BF9158B8285E}"/>
+                </a:ext>
+              </a:extLst>
+            </p:cNvPr>
+            <p:cNvGrpSpPr/>
+            <p:nvPr/>
+          </p:nvGrpSpPr>
+          <p:grpSpPr>
+            <a:xfrm>
+              <a:off x="6497364" y="4225038"/>
+              <a:ext cx="433222" cy="396398"/>
+              <a:chOff x="6497364" y="4225038"/>
+              <a:chExt cx="433222" cy="396398"/>
+            </a:xfrm>
+          </p:grpSpPr>
+          <p:cxnSp>
+            <p:nvCxnSpPr>
+              <p:cNvPr id="48" name="直線單箭頭接點 47">
+                <a:extLst>
+                  <a:ext uri="{FF2B5EF4-FFF2-40B4-BE49-F238E27FC236}">
+                    <a16:creationId xmlns:a16="http://schemas.microsoft.com/office/drawing/2014/main" id="{A7A38FB2-FD2E-4166-BB5E-E380EE9042CC}"/>
+                  </a:ext>
+                </a:extLst>
+              </p:cNvPr>
+              <p:cNvCxnSpPr/>
+              <p:nvPr/>
+            </p:nvCxnSpPr>
+            <p:spPr>
+              <a:xfrm flipH="1">
+                <a:off x="6497364" y="4429957"/>
+                <a:ext cx="315756" cy="191479"/>
+              </a:xfrm>
+              <a:prstGeom prst="straightConnector1">
+                <a:avLst/>
+              </a:prstGeom>
+              <a:ln>
+                <a:tailEnd type="triangle"/>
+              </a:ln>
+            </p:spPr>
+            <p:style>
+              <a:lnRef idx="2">
+                <a:schemeClr val="accent1"/>
+              </a:lnRef>
+              <a:fillRef idx="0">
+                <a:schemeClr val="accent1"/>
+              </a:fillRef>
+              <a:effectRef idx="1">
+                <a:schemeClr val="accent1"/>
+              </a:effectRef>
+              <a:fontRef idx="minor">
+                <a:schemeClr val="tx1"/>
+              </a:fontRef>
+            </p:style>
+          </p:cxnSp>
+          <p:sp>
+            <p:nvSpPr>
+              <p:cNvPr id="49" name="文字方塊 48">
+                <a:extLst>
+                  <a:ext uri="{FF2B5EF4-FFF2-40B4-BE49-F238E27FC236}">
+                    <a16:creationId xmlns:a16="http://schemas.microsoft.com/office/drawing/2014/main" id="{F965265F-29B6-4147-8CD0-0F64BEC9667B}"/>
+                  </a:ext>
+                </a:extLst>
+              </p:cNvPr>
+              <p:cNvSpPr txBox="1"/>
+              <p:nvPr/>
+            </p:nvSpPr>
+            <p:spPr>
+              <a:xfrm>
+                <a:off x="6776454" y="4225038"/>
+                <a:ext cx="154132" cy="369332"/>
+              </a:xfrm>
+              <a:prstGeom prst="rect">
+                <a:avLst/>
+              </a:prstGeom>
+              <a:noFill/>
+            </p:spPr>
+            <p:txBody>
+              <a:bodyPr wrap="square" rtlCol="0">
+                <a:spAutoFit/>
+              </a:bodyPr>
+              <a:lstStyle/>
+              <a:p>
+                <a:r>
+                  <a:rPr lang="en-US" altLang="zh-HK" dirty="0"/>
+                  <a:t>1</a:t>
+                </a:r>
+                <a:endParaRPr lang="zh-HK" altLang="en-US" dirty="0"/>
+              </a:p>
+            </p:txBody>
+          </p:sp>
+        </p:grpSp>
+        <p:sp>
+          <p:nvSpPr>
+            <p:cNvPr id="51" name="文字方塊 50">
+              <a:extLst>
+                <a:ext uri="{FF2B5EF4-FFF2-40B4-BE49-F238E27FC236}">
+                  <a16:creationId xmlns:a16="http://schemas.microsoft.com/office/drawing/2014/main" id="{BF35C227-A57A-4B17-9409-B9AAAC6DE85C}"/>
+                </a:ext>
+              </a:extLst>
+            </p:cNvPr>
+            <p:cNvSpPr txBox="1"/>
+            <p:nvPr/>
+          </p:nvSpPr>
+          <p:spPr>
+            <a:xfrm>
+              <a:off x="7275653" y="4751969"/>
+              <a:ext cx="164606" cy="369332"/>
+            </a:xfrm>
+            <a:prstGeom prst="rect">
+              <a:avLst/>
+            </a:prstGeom>
+            <a:noFill/>
+          </p:spPr>
+          <p:txBody>
+            <a:bodyPr wrap="square" rtlCol="0">
+              <a:spAutoFit/>
+            </a:bodyPr>
+            <a:lstStyle/>
+            <a:p>
+              <a:r>
+                <a:rPr lang="en-US" altLang="zh-HK" dirty="0"/>
+                <a:t>f</a:t>
+              </a:r>
+              <a:endParaRPr lang="zh-HK" altLang="en-US" dirty="0"/>
+            </a:p>
+          </p:txBody>
+        </p:sp>
+        <p:grpSp>
+          <p:nvGrpSpPr>
+            <p:cNvPr id="102" name="群組 101">
+              <a:extLst>
+                <a:ext uri="{FF2B5EF4-FFF2-40B4-BE49-F238E27FC236}">
+                  <a16:creationId xmlns:a16="http://schemas.microsoft.com/office/drawing/2014/main" id="{A6D08280-9385-4A2D-964A-B44B105C843B}"/>
+                </a:ext>
+              </a:extLst>
+            </p:cNvPr>
+            <p:cNvGrpSpPr/>
+            <p:nvPr/>
+          </p:nvGrpSpPr>
+          <p:grpSpPr>
+            <a:xfrm>
+              <a:off x="9115918" y="4167402"/>
+              <a:ext cx="433222" cy="396398"/>
+              <a:chOff x="6497364" y="4225038"/>
+              <a:chExt cx="433222" cy="396398"/>
+            </a:xfrm>
+          </p:grpSpPr>
+          <p:cxnSp>
+            <p:nvCxnSpPr>
+              <p:cNvPr id="103" name="直線單箭頭接點 102">
+                <a:extLst>
+                  <a:ext uri="{FF2B5EF4-FFF2-40B4-BE49-F238E27FC236}">
+                    <a16:creationId xmlns:a16="http://schemas.microsoft.com/office/drawing/2014/main" id="{DDC4EC55-B425-4C6C-B43B-B44285488F1C}"/>
+                  </a:ext>
+                </a:extLst>
+              </p:cNvPr>
+              <p:cNvCxnSpPr/>
+              <p:nvPr/>
+            </p:nvCxnSpPr>
+            <p:spPr>
+              <a:xfrm flipH="1">
+                <a:off x="6497364" y="4429957"/>
+                <a:ext cx="315756" cy="191479"/>
+              </a:xfrm>
+              <a:prstGeom prst="straightConnector1">
+                <a:avLst/>
+              </a:prstGeom>
+              <a:ln>
+                <a:tailEnd type="triangle"/>
+              </a:ln>
+            </p:spPr>
+            <p:style>
+              <a:lnRef idx="2">
+                <a:schemeClr val="accent1"/>
+              </a:lnRef>
+              <a:fillRef idx="0">
+                <a:schemeClr val="accent1"/>
+              </a:fillRef>
+              <a:effectRef idx="1">
+                <a:schemeClr val="accent1"/>
+              </a:effectRef>
+              <a:fontRef idx="minor">
+                <a:schemeClr val="tx1"/>
+              </a:fontRef>
+            </p:style>
+          </p:cxnSp>
+          <p:sp>
+            <p:nvSpPr>
+              <p:cNvPr id="104" name="文字方塊 103">
+                <a:extLst>
+                  <a:ext uri="{FF2B5EF4-FFF2-40B4-BE49-F238E27FC236}">
+                    <a16:creationId xmlns:a16="http://schemas.microsoft.com/office/drawing/2014/main" id="{99F3A210-B843-4292-86A7-86E968B1A077}"/>
+                  </a:ext>
+                </a:extLst>
+              </p:cNvPr>
+              <p:cNvSpPr txBox="1"/>
+              <p:nvPr/>
+            </p:nvSpPr>
+            <p:spPr>
+              <a:xfrm>
+                <a:off x="6776454" y="4225038"/>
+                <a:ext cx="154132" cy="369332"/>
+              </a:xfrm>
+              <a:prstGeom prst="rect">
+                <a:avLst/>
+              </a:prstGeom>
+              <a:noFill/>
+            </p:spPr>
+            <p:txBody>
+              <a:bodyPr wrap="square" rtlCol="0">
+                <a:spAutoFit/>
+              </a:bodyPr>
+              <a:lstStyle/>
+              <a:p>
+                <a:r>
+                  <a:rPr lang="en-US" altLang="zh-HK" dirty="0"/>
+                  <a:t>1</a:t>
+                </a:r>
+                <a:endParaRPr lang="zh-HK" altLang="en-US" dirty="0"/>
+              </a:p>
+            </p:txBody>
+          </p:sp>
+        </p:grpSp>
+        <p:grpSp>
+          <p:nvGrpSpPr>
+            <p:cNvPr id="105" name="群組 104">
+              <a:extLst>
+                <a:ext uri="{FF2B5EF4-FFF2-40B4-BE49-F238E27FC236}">
+                  <a16:creationId xmlns:a16="http://schemas.microsoft.com/office/drawing/2014/main" id="{88F3AF23-C369-4F33-950C-EA9A34918983}"/>
+                </a:ext>
+              </a:extLst>
+            </p:cNvPr>
+            <p:cNvGrpSpPr/>
+            <p:nvPr/>
+          </p:nvGrpSpPr>
+          <p:grpSpPr>
+            <a:xfrm>
+              <a:off x="9652391" y="4658401"/>
+              <a:ext cx="433222" cy="396398"/>
+              <a:chOff x="6497364" y="4225038"/>
+              <a:chExt cx="433222" cy="396398"/>
+            </a:xfrm>
+          </p:grpSpPr>
+          <p:cxnSp>
+            <p:nvCxnSpPr>
+              <p:cNvPr id="106" name="直線單箭頭接點 105">
+                <a:extLst>
+                  <a:ext uri="{FF2B5EF4-FFF2-40B4-BE49-F238E27FC236}">
+                    <a16:creationId xmlns:a16="http://schemas.microsoft.com/office/drawing/2014/main" id="{371CF24B-4282-4590-9241-E458C58BC1FD}"/>
+                  </a:ext>
+                </a:extLst>
+              </p:cNvPr>
+              <p:cNvCxnSpPr/>
+              <p:nvPr/>
+            </p:nvCxnSpPr>
+            <p:spPr>
+              <a:xfrm flipH="1">
+                <a:off x="6497364" y="4429957"/>
+                <a:ext cx="315756" cy="191479"/>
+              </a:xfrm>
+              <a:prstGeom prst="straightConnector1">
+                <a:avLst/>
+              </a:prstGeom>
+              <a:ln>
+                <a:tailEnd type="triangle"/>
+              </a:ln>
+            </p:spPr>
+            <p:style>
+              <a:lnRef idx="2">
+                <a:schemeClr val="accent1"/>
+              </a:lnRef>
+              <a:fillRef idx="0">
+                <a:schemeClr val="accent1"/>
+              </a:fillRef>
+              <a:effectRef idx="1">
+                <a:schemeClr val="accent1"/>
+              </a:effectRef>
+              <a:fontRef idx="minor">
+                <a:schemeClr val="tx1"/>
+              </a:fontRef>
+            </p:style>
+          </p:cxnSp>
+          <p:sp>
+            <p:nvSpPr>
+              <p:cNvPr id="107" name="文字方塊 106">
+                <a:extLst>
+                  <a:ext uri="{FF2B5EF4-FFF2-40B4-BE49-F238E27FC236}">
+                    <a16:creationId xmlns:a16="http://schemas.microsoft.com/office/drawing/2014/main" id="{E74F5F0B-D069-4328-B322-001A2DF7639C}"/>
+                  </a:ext>
+                </a:extLst>
+              </p:cNvPr>
+              <p:cNvSpPr txBox="1"/>
+              <p:nvPr/>
+            </p:nvSpPr>
+            <p:spPr>
+              <a:xfrm>
+                <a:off x="6776454" y="4225038"/>
+                <a:ext cx="154132" cy="369332"/>
+              </a:xfrm>
+              <a:prstGeom prst="rect">
+                <a:avLst/>
+              </a:prstGeom>
+              <a:noFill/>
+            </p:spPr>
+            <p:txBody>
+              <a:bodyPr wrap="square" rtlCol="0">
+                <a:spAutoFit/>
+              </a:bodyPr>
+              <a:lstStyle/>
+              <a:p>
+                <a:r>
+                  <a:rPr lang="en-US" altLang="zh-HK" dirty="0"/>
+                  <a:t>f</a:t>
+                </a:r>
+                <a:endParaRPr lang="zh-HK" altLang="en-US" dirty="0"/>
+              </a:p>
+            </p:txBody>
+          </p:sp>
+        </p:grpSp>
       </p:grpSp>
     </p:spTree>
     <p:extLst>

--- a/Presentation1.pptx
+++ b/Presentation1.pptx
@@ -8,6 +8,7 @@
     <p:sldId id="256" r:id="rId2"/>
     <p:sldId id="257" r:id="rId3"/>
     <p:sldId id="258" r:id="rId4"/>
+    <p:sldId id="259" r:id="rId5"/>
   </p:sldIdLst>
   <p:sldSz cx="12192000" cy="6858000"/>
   <p:notesSz cx="6858000" cy="9144000"/>
@@ -263,7 +264,7 @@
           <a:p>
             <a:fld id="{ED0FC01E-52E7-E248-9225-B6E184C589D0}" type="datetimeFigureOut">
               <a:rPr lang="en-US" smtClean="0"/>
-              <a:t>11/19/2024</a:t>
+              <a:t>11/21/2024</a:t>
             </a:fld>
             <a:endParaRPr lang="en-US"/>
           </a:p>
@@ -463,7 +464,7 @@
           <a:p>
             <a:fld id="{ED0FC01E-52E7-E248-9225-B6E184C589D0}" type="datetimeFigureOut">
               <a:rPr lang="en-US" smtClean="0"/>
-              <a:t>11/19/2024</a:t>
+              <a:t>11/21/2024</a:t>
             </a:fld>
             <a:endParaRPr lang="en-US"/>
           </a:p>
@@ -673,7 +674,7 @@
           <a:p>
             <a:fld id="{ED0FC01E-52E7-E248-9225-B6E184C589D0}" type="datetimeFigureOut">
               <a:rPr lang="en-US" smtClean="0"/>
-              <a:t>11/19/2024</a:t>
+              <a:t>11/21/2024</a:t>
             </a:fld>
             <a:endParaRPr lang="en-US"/>
           </a:p>
@@ -873,7 +874,7 @@
           <a:p>
             <a:fld id="{ED0FC01E-52E7-E248-9225-B6E184C589D0}" type="datetimeFigureOut">
               <a:rPr lang="en-US" smtClean="0"/>
-              <a:t>11/19/2024</a:t>
+              <a:t>11/21/2024</a:t>
             </a:fld>
             <a:endParaRPr lang="en-US"/>
           </a:p>
@@ -1149,7 +1150,7 @@
           <a:p>
             <a:fld id="{ED0FC01E-52E7-E248-9225-B6E184C589D0}" type="datetimeFigureOut">
               <a:rPr lang="en-US" smtClean="0"/>
-              <a:t>11/19/2024</a:t>
+              <a:t>11/21/2024</a:t>
             </a:fld>
             <a:endParaRPr lang="en-US"/>
           </a:p>
@@ -1417,7 +1418,7 @@
           <a:p>
             <a:fld id="{ED0FC01E-52E7-E248-9225-B6E184C589D0}" type="datetimeFigureOut">
               <a:rPr lang="en-US" smtClean="0"/>
-              <a:t>11/19/2024</a:t>
+              <a:t>11/21/2024</a:t>
             </a:fld>
             <a:endParaRPr lang="en-US"/>
           </a:p>
@@ -1832,7 +1833,7 @@
           <a:p>
             <a:fld id="{ED0FC01E-52E7-E248-9225-B6E184C589D0}" type="datetimeFigureOut">
               <a:rPr lang="en-US" smtClean="0"/>
-              <a:t>11/19/2024</a:t>
+              <a:t>11/21/2024</a:t>
             </a:fld>
             <a:endParaRPr lang="en-US"/>
           </a:p>
@@ -1974,7 +1975,7 @@
           <a:p>
             <a:fld id="{ED0FC01E-52E7-E248-9225-B6E184C589D0}" type="datetimeFigureOut">
               <a:rPr lang="en-US" smtClean="0"/>
-              <a:t>11/19/2024</a:t>
+              <a:t>11/21/2024</a:t>
             </a:fld>
             <a:endParaRPr lang="en-US"/>
           </a:p>
@@ -2087,7 +2088,7 @@
           <a:p>
             <a:fld id="{ED0FC01E-52E7-E248-9225-B6E184C589D0}" type="datetimeFigureOut">
               <a:rPr lang="en-US" smtClean="0"/>
-              <a:t>11/19/2024</a:t>
+              <a:t>11/21/2024</a:t>
             </a:fld>
             <a:endParaRPr lang="en-US"/>
           </a:p>
@@ -2400,7 +2401,7 @@
           <a:p>
             <a:fld id="{ED0FC01E-52E7-E248-9225-B6E184C589D0}" type="datetimeFigureOut">
               <a:rPr lang="en-US" smtClean="0"/>
-              <a:t>11/19/2024</a:t>
+              <a:t>11/21/2024</a:t>
             </a:fld>
             <a:endParaRPr lang="en-US"/>
           </a:p>
@@ -2689,7 +2690,7 @@
           <a:p>
             <a:fld id="{ED0FC01E-52E7-E248-9225-B6E184C589D0}" type="datetimeFigureOut">
               <a:rPr lang="en-US" smtClean="0"/>
-              <a:t>11/19/2024</a:t>
+              <a:t>11/21/2024</a:t>
             </a:fld>
             <a:endParaRPr lang="en-US"/>
           </a:p>
@@ -2932,7 +2933,7 @@
           <a:p>
             <a:fld id="{ED0FC01E-52E7-E248-9225-B6E184C589D0}" type="datetimeFigureOut">
               <a:rPr lang="en-US" smtClean="0"/>
-              <a:t>11/19/2024</a:t>
+              <a:t>11/21/2024</a:t>
             </a:fld>
             <a:endParaRPr lang="en-US"/>
           </a:p>
@@ -6157,10 +6158,10 @@
       </p:grpSp>
       <p:grpSp>
         <p:nvGrpSpPr>
-          <p:cNvPr id="54" name="群組 53">
+          <p:cNvPr id="56" name="群組 55">
             <a:extLst>
               <a:ext uri="{FF2B5EF4-FFF2-40B4-BE49-F238E27FC236}">
-                <a16:creationId xmlns:a16="http://schemas.microsoft.com/office/drawing/2014/main" id="{8409D2FB-5C9F-45CF-8656-A00DAA003C07}"/>
+                <a16:creationId xmlns:a16="http://schemas.microsoft.com/office/drawing/2014/main" id="{3E805B3C-EB09-4D22-810F-D8C6682CC0D4}"/>
               </a:ext>
             </a:extLst>
           </p:cNvPr>
@@ -6175,637 +6176,12 @@
             <a:chExt cx="6682768" cy="2256501"/>
           </a:xfrm>
         </p:grpSpPr>
-        <p:sp>
-          <p:nvSpPr>
-            <p:cNvPr id="3" name="矩形 2">
+        <p:grpSp>
+          <p:nvGrpSpPr>
+            <p:cNvPr id="54" name="群組 53">
               <a:extLst>
                 <a:ext uri="{FF2B5EF4-FFF2-40B4-BE49-F238E27FC236}">
-                  <a16:creationId xmlns:a16="http://schemas.microsoft.com/office/drawing/2014/main" id="{D846CACC-4AF0-4AAE-B4D5-E6DCF62332B6}"/>
-                </a:ext>
-              </a:extLst>
-            </p:cNvPr>
-            <p:cNvSpPr/>
-            <p:nvPr/>
-          </p:nvSpPr>
-          <p:spPr>
-            <a:xfrm>
-              <a:off x="3402845" y="4509856"/>
-              <a:ext cx="1502644" cy="1265364"/>
-            </a:xfrm>
-            <a:prstGeom prst="rect">
-              <a:avLst/>
-            </a:prstGeom>
-          </p:spPr>
-          <p:style>
-            <a:lnRef idx="2">
-              <a:schemeClr val="accent1">
-                <a:shade val="50000"/>
-              </a:schemeClr>
-            </a:lnRef>
-            <a:fillRef idx="1">
-              <a:schemeClr val="accent1"/>
-            </a:fillRef>
-            <a:effectRef idx="0">
-              <a:schemeClr val="accent1"/>
-            </a:effectRef>
-            <a:fontRef idx="minor">
-              <a:schemeClr val="lt1"/>
-            </a:fontRef>
-          </p:style>
-          <p:txBody>
-            <a:bodyPr rtlCol="0" anchor="ctr"/>
-            <a:lstStyle/>
-            <a:p>
-              <a:pPr algn="ctr"/>
-              <a:endParaRPr lang="zh-HK" altLang="en-US"/>
-            </a:p>
-          </p:txBody>
-        </p:sp>
-        <p:pic>
-          <p:nvPicPr>
-            <p:cNvPr id="4" name="圖片 3">
-              <a:extLst>
-                <a:ext uri="{FF2B5EF4-FFF2-40B4-BE49-F238E27FC236}">
-                  <a16:creationId xmlns:a16="http://schemas.microsoft.com/office/drawing/2014/main" id="{DD86D3E5-F3F2-4108-A7D9-7D6273EF88B8}"/>
-                </a:ext>
-              </a:extLst>
-            </p:cNvPr>
-            <p:cNvPicPr>
-              <a:picLocks noChangeAspect="1"/>
-            </p:cNvPicPr>
-            <p:nvPr/>
-          </p:nvPicPr>
-          <p:blipFill>
-            <a:blip r:embed="rId5"/>
-            <a:stretch>
-              <a:fillRect/>
-            </a:stretch>
-          </p:blipFill>
-          <p:spPr>
-            <a:xfrm>
-              <a:off x="5804049" y="4621436"/>
-              <a:ext cx="670618" cy="670618"/>
-            </a:xfrm>
-            <a:prstGeom prst="rect">
-              <a:avLst/>
-            </a:prstGeom>
-          </p:spPr>
-        </p:pic>
-        <p:pic>
-          <p:nvPicPr>
-            <p:cNvPr id="5" name="圖片 4">
-              <a:extLst>
-                <a:ext uri="{FF2B5EF4-FFF2-40B4-BE49-F238E27FC236}">
-                  <a16:creationId xmlns:a16="http://schemas.microsoft.com/office/drawing/2014/main" id="{B455486C-A956-432E-AE71-BCAD4CA7D88D}"/>
-                </a:ext>
-              </a:extLst>
-            </p:cNvPr>
-            <p:cNvPicPr>
-              <a:picLocks noChangeAspect="1"/>
-            </p:cNvPicPr>
-            <p:nvPr/>
-          </p:nvPicPr>
-          <p:blipFill>
-            <a:blip r:embed="rId5"/>
-            <a:stretch>
-              <a:fillRect/>
-            </a:stretch>
-          </p:blipFill>
-          <p:spPr>
-            <a:xfrm>
-              <a:off x="5903194" y="4725902"/>
-              <a:ext cx="670618" cy="670618"/>
-            </a:xfrm>
-            <a:prstGeom prst="rect">
-              <a:avLst/>
-            </a:prstGeom>
-          </p:spPr>
-        </p:pic>
-        <p:pic>
-          <p:nvPicPr>
-            <p:cNvPr id="6" name="圖片 5">
-              <a:extLst>
-                <a:ext uri="{FF2B5EF4-FFF2-40B4-BE49-F238E27FC236}">
-                  <a16:creationId xmlns:a16="http://schemas.microsoft.com/office/drawing/2014/main" id="{BDBCD6B8-4108-44C2-AED7-5CF37DA09EAF}"/>
-                </a:ext>
-              </a:extLst>
-            </p:cNvPr>
-            <p:cNvPicPr>
-              <a:picLocks noChangeAspect="1"/>
-            </p:cNvPicPr>
-            <p:nvPr/>
-          </p:nvPicPr>
-          <p:blipFill>
-            <a:blip r:embed="rId5"/>
-            <a:stretch>
-              <a:fillRect/>
-            </a:stretch>
-          </p:blipFill>
-          <p:spPr>
-            <a:xfrm>
-              <a:off x="6002339" y="4830368"/>
-              <a:ext cx="670618" cy="670618"/>
-            </a:xfrm>
-            <a:prstGeom prst="rect">
-              <a:avLst/>
-            </a:prstGeom>
-          </p:spPr>
-        </p:pic>
-        <p:pic>
-          <p:nvPicPr>
-            <p:cNvPr id="7" name="圖片 6">
-              <a:extLst>
-                <a:ext uri="{FF2B5EF4-FFF2-40B4-BE49-F238E27FC236}">
-                  <a16:creationId xmlns:a16="http://schemas.microsoft.com/office/drawing/2014/main" id="{BA832F17-0450-4F26-8211-070503D23059}"/>
-                </a:ext>
-              </a:extLst>
-            </p:cNvPr>
-            <p:cNvPicPr>
-              <a:picLocks noChangeAspect="1"/>
-            </p:cNvPicPr>
-            <p:nvPr/>
-          </p:nvPicPr>
-          <p:blipFill>
-            <a:blip r:embed="rId5"/>
-            <a:stretch>
-              <a:fillRect/>
-            </a:stretch>
-          </p:blipFill>
-          <p:spPr>
-            <a:xfrm>
-              <a:off x="6108225" y="4936635"/>
-              <a:ext cx="670618" cy="670618"/>
-            </a:xfrm>
-            <a:prstGeom prst="rect">
-              <a:avLst/>
-            </a:prstGeom>
-          </p:spPr>
-        </p:pic>
-        <p:pic>
-          <p:nvPicPr>
-            <p:cNvPr id="8" name="圖片 7">
-              <a:extLst>
-                <a:ext uri="{FF2B5EF4-FFF2-40B4-BE49-F238E27FC236}">
-                  <a16:creationId xmlns:a16="http://schemas.microsoft.com/office/drawing/2014/main" id="{B0CED8F6-732E-4BD2-9AF0-3C57DE38691E}"/>
-                </a:ext>
-              </a:extLst>
-            </p:cNvPr>
-            <p:cNvPicPr>
-              <a:picLocks noChangeAspect="1"/>
-            </p:cNvPicPr>
-            <p:nvPr/>
-          </p:nvPicPr>
-          <p:blipFill>
-            <a:blip r:embed="rId5"/>
-            <a:stretch>
-              <a:fillRect/>
-            </a:stretch>
-          </p:blipFill>
-          <p:spPr>
-            <a:xfrm>
-              <a:off x="6223301" y="5042902"/>
-              <a:ext cx="670618" cy="670618"/>
-            </a:xfrm>
-            <a:prstGeom prst="rect">
-              <a:avLst/>
-            </a:prstGeom>
-          </p:spPr>
-        </p:pic>
-        <p:pic>
-          <p:nvPicPr>
-            <p:cNvPr id="10" name="圖片 9">
-              <a:extLst>
-                <a:ext uri="{FF2B5EF4-FFF2-40B4-BE49-F238E27FC236}">
-                  <a16:creationId xmlns:a16="http://schemas.microsoft.com/office/drawing/2014/main" id="{2DA74B12-61E6-4400-9098-8A710721265A}"/>
-                </a:ext>
-              </a:extLst>
-            </p:cNvPr>
-            <p:cNvPicPr>
-              <a:picLocks noChangeAspect="1"/>
-            </p:cNvPicPr>
-            <p:nvPr/>
-          </p:nvPicPr>
-          <p:blipFill>
-            <a:blip r:embed="rId5"/>
-            <a:stretch>
-              <a:fillRect/>
-            </a:stretch>
-          </p:blipFill>
-          <p:spPr>
-            <a:xfrm>
-              <a:off x="6337648" y="5138269"/>
-              <a:ext cx="670618" cy="670618"/>
-            </a:xfrm>
-            <a:prstGeom prst="rect">
-              <a:avLst/>
-            </a:prstGeom>
-          </p:spPr>
-        </p:pic>
-        <p:pic>
-          <p:nvPicPr>
-            <p:cNvPr id="18" name="圖片 17">
-              <a:extLst>
-                <a:ext uri="{FF2B5EF4-FFF2-40B4-BE49-F238E27FC236}">
-                  <a16:creationId xmlns:a16="http://schemas.microsoft.com/office/drawing/2014/main" id="{8708D514-2D75-4B6B-83CA-135FE8A1436F}"/>
-                </a:ext>
-              </a:extLst>
-            </p:cNvPr>
-            <p:cNvPicPr>
-              <a:picLocks noChangeAspect="1"/>
-            </p:cNvPicPr>
-            <p:nvPr/>
-          </p:nvPicPr>
-          <p:blipFill>
-            <a:blip r:embed="rId11"/>
-            <a:stretch>
-              <a:fillRect/>
-            </a:stretch>
-          </p:blipFill>
-          <p:spPr>
-            <a:xfrm>
-              <a:off x="8096655" y="4555751"/>
-              <a:ext cx="1019263" cy="856181"/>
-            </a:xfrm>
-            <a:prstGeom prst="rect">
-              <a:avLst/>
-            </a:prstGeom>
-          </p:spPr>
-        </p:pic>
-        <p:pic>
-          <p:nvPicPr>
-            <p:cNvPr id="35" name="圖片 34">
-              <a:extLst>
-                <a:ext uri="{FF2B5EF4-FFF2-40B4-BE49-F238E27FC236}">
-                  <a16:creationId xmlns:a16="http://schemas.microsoft.com/office/drawing/2014/main" id="{561EE4E3-C437-4747-91DE-D4F37536315E}"/>
-                </a:ext>
-              </a:extLst>
-            </p:cNvPr>
-            <p:cNvPicPr>
-              <a:picLocks noChangeAspect="1"/>
-            </p:cNvPicPr>
-            <p:nvPr/>
-          </p:nvPicPr>
-          <p:blipFill>
-            <a:blip r:embed="rId12"/>
-            <a:stretch>
-              <a:fillRect/>
-            </a:stretch>
-          </p:blipFill>
-          <p:spPr>
-            <a:xfrm>
-              <a:off x="8195800" y="4645250"/>
-              <a:ext cx="1018120" cy="859611"/>
-            </a:xfrm>
-            <a:prstGeom prst="rect">
-              <a:avLst/>
-            </a:prstGeom>
-          </p:spPr>
-        </p:pic>
-        <p:pic>
-          <p:nvPicPr>
-            <p:cNvPr id="37" name="圖片 36">
-              <a:extLst>
-                <a:ext uri="{FF2B5EF4-FFF2-40B4-BE49-F238E27FC236}">
-                  <a16:creationId xmlns:a16="http://schemas.microsoft.com/office/drawing/2014/main" id="{5BF33A54-7707-4A5F-AB43-AEBCA579E1C6}"/>
-                </a:ext>
-              </a:extLst>
-            </p:cNvPr>
-            <p:cNvPicPr>
-              <a:picLocks noChangeAspect="1"/>
-            </p:cNvPicPr>
-            <p:nvPr/>
-          </p:nvPicPr>
-          <p:blipFill>
-            <a:blip r:embed="rId12"/>
-            <a:stretch>
-              <a:fillRect/>
-            </a:stretch>
-          </p:blipFill>
-          <p:spPr>
-            <a:xfrm>
-              <a:off x="8294945" y="4740211"/>
-              <a:ext cx="1018120" cy="859611"/>
-            </a:xfrm>
-            <a:prstGeom prst="rect">
-              <a:avLst/>
-            </a:prstGeom>
-          </p:spPr>
-        </p:pic>
-        <p:pic>
-          <p:nvPicPr>
-            <p:cNvPr id="39" name="圖片 38">
-              <a:extLst>
-                <a:ext uri="{FF2B5EF4-FFF2-40B4-BE49-F238E27FC236}">
-                  <a16:creationId xmlns:a16="http://schemas.microsoft.com/office/drawing/2014/main" id="{4242788A-16E6-41A1-9A9A-04B3CCC35E38}"/>
-                </a:ext>
-              </a:extLst>
-            </p:cNvPr>
-            <p:cNvPicPr>
-              <a:picLocks noChangeAspect="1"/>
-            </p:cNvPicPr>
-            <p:nvPr/>
-          </p:nvPicPr>
-          <p:blipFill>
-            <a:blip r:embed="rId12"/>
-            <a:stretch>
-              <a:fillRect/>
-            </a:stretch>
-          </p:blipFill>
-          <p:spPr>
-            <a:xfrm>
-              <a:off x="8390981" y="4842138"/>
-              <a:ext cx="1018120" cy="859611"/>
-            </a:xfrm>
-            <a:prstGeom prst="rect">
-              <a:avLst/>
-            </a:prstGeom>
-          </p:spPr>
-        </p:pic>
-        <p:pic>
-          <p:nvPicPr>
-            <p:cNvPr id="41" name="圖片 40">
-              <a:extLst>
-                <a:ext uri="{FF2B5EF4-FFF2-40B4-BE49-F238E27FC236}">
-                  <a16:creationId xmlns:a16="http://schemas.microsoft.com/office/drawing/2014/main" id="{A8B060AE-9691-4B29-8E4C-0FB63878A29C}"/>
-                </a:ext>
-              </a:extLst>
-            </p:cNvPr>
-            <p:cNvPicPr>
-              <a:picLocks noChangeAspect="1"/>
-            </p:cNvPicPr>
-            <p:nvPr/>
-          </p:nvPicPr>
-          <p:blipFill>
-            <a:blip r:embed="rId12"/>
-            <a:stretch>
-              <a:fillRect/>
-            </a:stretch>
-          </p:blipFill>
-          <p:spPr>
-            <a:xfrm>
-              <a:off x="8508063" y="4944065"/>
-              <a:ext cx="1018120" cy="859611"/>
-            </a:xfrm>
-            <a:prstGeom prst="rect">
-              <a:avLst/>
-            </a:prstGeom>
-          </p:spPr>
-        </p:pic>
-        <p:pic>
-          <p:nvPicPr>
-            <p:cNvPr id="42" name="圖片 41">
-              <a:extLst>
-                <a:ext uri="{FF2B5EF4-FFF2-40B4-BE49-F238E27FC236}">
-                  <a16:creationId xmlns:a16="http://schemas.microsoft.com/office/drawing/2014/main" id="{ED28C492-6CC5-4D96-96B4-C80166F447F2}"/>
-                </a:ext>
-              </a:extLst>
-            </p:cNvPr>
-            <p:cNvPicPr>
-              <a:picLocks noChangeAspect="1"/>
-            </p:cNvPicPr>
-            <p:nvPr/>
-          </p:nvPicPr>
-          <p:blipFill>
-            <a:blip r:embed="rId12"/>
-            <a:stretch>
-              <a:fillRect/>
-            </a:stretch>
-          </p:blipFill>
-          <p:spPr>
-            <a:xfrm>
-              <a:off x="8630254" y="5042902"/>
-              <a:ext cx="1018120" cy="859611"/>
-            </a:xfrm>
-            <a:prstGeom prst="rect">
-              <a:avLst/>
-            </a:prstGeom>
-          </p:spPr>
-        </p:pic>
-        <p:sp>
-          <p:nvSpPr>
-            <p:cNvPr id="44" name="文字方塊 43">
-              <a:extLst>
-                <a:ext uri="{FF2B5EF4-FFF2-40B4-BE49-F238E27FC236}">
-                  <a16:creationId xmlns:a16="http://schemas.microsoft.com/office/drawing/2014/main" id="{F7FB2828-1970-4285-A288-1F8E61FF8F69}"/>
-                </a:ext>
-              </a:extLst>
-            </p:cNvPr>
-            <p:cNvSpPr txBox="1"/>
-            <p:nvPr/>
-          </p:nvSpPr>
-          <p:spPr>
-            <a:xfrm>
-              <a:off x="3719816" y="6054571"/>
-              <a:ext cx="793109" cy="369332"/>
-            </a:xfrm>
-            <a:prstGeom prst="rect">
-              <a:avLst/>
-            </a:prstGeom>
-            <a:noFill/>
-          </p:spPr>
-          <p:txBody>
-            <a:bodyPr wrap="square" rtlCol="0">
-              <a:spAutoFit/>
-            </a:bodyPr>
-            <a:lstStyle/>
-            <a:p>
-              <a:r>
-                <a:rPr lang="en-US" altLang="zh-HK" dirty="0"/>
-                <a:t>n, n, 1</a:t>
-              </a:r>
-              <a:endParaRPr lang="zh-HK" altLang="en-US" dirty="0"/>
-            </a:p>
-          </p:txBody>
-        </p:sp>
-        <p:sp>
-          <p:nvSpPr>
-            <p:cNvPr id="97" name="文字方塊 96">
-              <a:extLst>
-                <a:ext uri="{FF2B5EF4-FFF2-40B4-BE49-F238E27FC236}">
-                  <a16:creationId xmlns:a16="http://schemas.microsoft.com/office/drawing/2014/main" id="{A8B7461B-4B86-4C26-A8D8-5013D72454ED}"/>
-                </a:ext>
-              </a:extLst>
-            </p:cNvPr>
-            <p:cNvSpPr txBox="1"/>
-            <p:nvPr/>
-          </p:nvSpPr>
-          <p:spPr>
-            <a:xfrm>
-              <a:off x="6100810" y="6054571"/>
-              <a:ext cx="793109" cy="369332"/>
-            </a:xfrm>
-            <a:prstGeom prst="rect">
-              <a:avLst/>
-            </a:prstGeom>
-            <a:noFill/>
-          </p:spPr>
-          <p:txBody>
-            <a:bodyPr wrap="square" rtlCol="0">
-              <a:spAutoFit/>
-            </a:bodyPr>
-            <a:lstStyle/>
-            <a:p>
-              <a:r>
-                <a:rPr lang="en-US" altLang="zh-HK" dirty="0"/>
-                <a:t>k, k, f</a:t>
-              </a:r>
-              <a:endParaRPr lang="zh-HK" altLang="en-US" dirty="0"/>
-            </a:p>
-          </p:txBody>
-        </p:sp>
-        <p:sp>
-          <p:nvSpPr>
-            <p:cNvPr id="98" name="文字方塊 97">
-              <a:extLst>
-                <a:ext uri="{FF2B5EF4-FFF2-40B4-BE49-F238E27FC236}">
-                  <a16:creationId xmlns:a16="http://schemas.microsoft.com/office/drawing/2014/main" id="{9B5A0096-3668-4A1E-A7EA-369669293D48}"/>
-                </a:ext>
-              </a:extLst>
-            </p:cNvPr>
-            <p:cNvSpPr txBox="1"/>
-            <p:nvPr/>
-          </p:nvSpPr>
-          <p:spPr>
-            <a:xfrm>
-              <a:off x="8193220" y="6054571"/>
-              <a:ext cx="1845396" cy="369332"/>
-            </a:xfrm>
-            <a:prstGeom prst="rect">
-              <a:avLst/>
-            </a:prstGeom>
-            <a:noFill/>
-          </p:spPr>
-          <p:txBody>
-            <a:bodyPr wrap="square" rtlCol="0">
-              <a:spAutoFit/>
-            </a:bodyPr>
-            <a:lstStyle/>
-            <a:p>
-              <a:r>
-                <a:rPr lang="en-US" altLang="zh-HK" dirty="0"/>
-                <a:t>(n-k+1), (n-k+1), f</a:t>
-              </a:r>
-              <a:endParaRPr lang="zh-HK" altLang="en-US" dirty="0"/>
-            </a:p>
-          </p:txBody>
-        </p:sp>
-        <p:sp>
-          <p:nvSpPr>
-            <p:cNvPr id="46" name="文字方塊 45">
-              <a:extLst>
-                <a:ext uri="{FF2B5EF4-FFF2-40B4-BE49-F238E27FC236}">
-                  <a16:creationId xmlns:a16="http://schemas.microsoft.com/office/drawing/2014/main" id="{E78531B9-F8C5-4F3B-83CF-65BB08BB768D}"/>
-                </a:ext>
-              </a:extLst>
-            </p:cNvPr>
-            <p:cNvSpPr txBox="1"/>
-            <p:nvPr/>
-          </p:nvSpPr>
-          <p:spPr>
-            <a:xfrm>
-              <a:off x="5127662" y="5042902"/>
-              <a:ext cx="371086" cy="584775"/>
-            </a:xfrm>
-            <a:prstGeom prst="rect">
-              <a:avLst/>
-            </a:prstGeom>
-            <a:noFill/>
-          </p:spPr>
-          <p:txBody>
-            <a:bodyPr wrap="square" rtlCol="0">
-              <a:spAutoFit/>
-            </a:bodyPr>
-            <a:lstStyle/>
-            <a:p>
-              <a:r>
-                <a:rPr lang="en-US" altLang="zh-HK" sz="3200" dirty="0"/>
-                <a:t>*</a:t>
-              </a:r>
-              <a:endParaRPr lang="zh-HK" altLang="en-US" sz="3200" dirty="0"/>
-            </a:p>
-          </p:txBody>
-        </p:sp>
-        <p:sp>
-          <p:nvSpPr>
-            <p:cNvPr id="99" name="文字方塊 98">
-              <a:extLst>
-                <a:ext uri="{FF2B5EF4-FFF2-40B4-BE49-F238E27FC236}">
-                  <a16:creationId xmlns:a16="http://schemas.microsoft.com/office/drawing/2014/main" id="{757F40FB-EAF6-4663-9949-65B6A5C76C4C}"/>
-                </a:ext>
-              </a:extLst>
-            </p:cNvPr>
-            <p:cNvSpPr txBox="1"/>
-            <p:nvPr/>
-          </p:nvSpPr>
-          <p:spPr>
-            <a:xfrm>
-              <a:off x="7392735" y="4983841"/>
-              <a:ext cx="371086" cy="584775"/>
-            </a:xfrm>
-            <a:prstGeom prst="rect">
-              <a:avLst/>
-            </a:prstGeom>
-            <a:noFill/>
-          </p:spPr>
-          <p:txBody>
-            <a:bodyPr wrap="square" rtlCol="0">
-              <a:spAutoFit/>
-            </a:bodyPr>
-            <a:lstStyle/>
-            <a:p>
-              <a:r>
-                <a:rPr lang="en-US" altLang="zh-HK" sz="3200" dirty="0"/>
-                <a:t>=</a:t>
-              </a:r>
-              <a:endParaRPr lang="zh-HK" altLang="en-US" sz="3200" dirty="0"/>
-            </a:p>
-          </p:txBody>
-        </p:sp>
-        <p:cxnSp>
-          <p:nvCxnSpPr>
-            <p:cNvPr id="100" name="直線單箭頭接點 99">
-              <a:extLst>
-                <a:ext uri="{FF2B5EF4-FFF2-40B4-BE49-F238E27FC236}">
-                  <a16:creationId xmlns:a16="http://schemas.microsoft.com/office/drawing/2014/main" id="{29BD2765-6721-4F6A-94E8-B8FDEADAE25E}"/>
-                </a:ext>
-              </a:extLst>
-            </p:cNvPr>
-            <p:cNvCxnSpPr/>
-            <p:nvPr/>
-          </p:nvCxnSpPr>
-          <p:spPr>
-            <a:xfrm flipH="1">
-              <a:off x="7002007" y="4965471"/>
-              <a:ext cx="315756" cy="191479"/>
-            </a:xfrm>
-            <a:prstGeom prst="straightConnector1">
-              <a:avLst/>
-            </a:prstGeom>
-            <a:ln>
-              <a:tailEnd type="triangle"/>
-            </a:ln>
-          </p:spPr>
-          <p:style>
-            <a:lnRef idx="2">
-              <a:schemeClr val="accent1"/>
-            </a:lnRef>
-            <a:fillRef idx="0">
-              <a:schemeClr val="accent1"/>
-            </a:fillRef>
-            <a:effectRef idx="1">
-              <a:schemeClr val="accent1"/>
-            </a:effectRef>
-            <a:fontRef idx="minor">
-              <a:schemeClr val="tx1"/>
-            </a:fontRef>
-          </p:style>
-        </p:cxnSp>
-        <p:grpSp>
-          <p:nvGrpSpPr>
-            <p:cNvPr id="53" name="群組 52">
-              <a:extLst>
-                <a:ext uri="{FF2B5EF4-FFF2-40B4-BE49-F238E27FC236}">
-                  <a16:creationId xmlns:a16="http://schemas.microsoft.com/office/drawing/2014/main" id="{647C5896-09A4-4888-A878-BF9158B8285E}"/>
+                  <a16:creationId xmlns:a16="http://schemas.microsoft.com/office/drawing/2014/main" id="{8409D2FB-5C9F-45CF-8656-A00DAA003C07}"/>
                 </a:ext>
               </a:extLst>
             </p:cNvPr>
@@ -6814,18 +6190,604 @@
           </p:nvGrpSpPr>
           <p:grpSpPr>
             <a:xfrm>
-              <a:off x="6497364" y="4225038"/>
-              <a:ext cx="433222" cy="396398"/>
-              <a:chOff x="6497364" y="4225038"/>
-              <a:chExt cx="433222" cy="396398"/>
+              <a:off x="3402845" y="4167402"/>
+              <a:ext cx="6682768" cy="2256501"/>
+              <a:chOff x="3402845" y="4167402"/>
+              <a:chExt cx="6682768" cy="2256501"/>
             </a:xfrm>
           </p:grpSpPr>
+          <p:sp>
+            <p:nvSpPr>
+              <p:cNvPr id="3" name="矩形 2">
+                <a:extLst>
+                  <a:ext uri="{FF2B5EF4-FFF2-40B4-BE49-F238E27FC236}">
+                    <a16:creationId xmlns:a16="http://schemas.microsoft.com/office/drawing/2014/main" id="{D846CACC-4AF0-4AAE-B4D5-E6DCF62332B6}"/>
+                  </a:ext>
+                </a:extLst>
+              </p:cNvPr>
+              <p:cNvSpPr/>
+              <p:nvPr/>
+            </p:nvSpPr>
+            <p:spPr>
+              <a:xfrm>
+                <a:off x="3402845" y="4509856"/>
+                <a:ext cx="1502644" cy="1265364"/>
+              </a:xfrm>
+              <a:prstGeom prst="rect">
+                <a:avLst/>
+              </a:prstGeom>
+            </p:spPr>
+            <p:style>
+              <a:lnRef idx="2">
+                <a:schemeClr val="accent1">
+                  <a:shade val="50000"/>
+                </a:schemeClr>
+              </a:lnRef>
+              <a:fillRef idx="1">
+                <a:schemeClr val="accent1"/>
+              </a:fillRef>
+              <a:effectRef idx="0">
+                <a:schemeClr val="accent1"/>
+              </a:effectRef>
+              <a:fontRef idx="minor">
+                <a:schemeClr val="lt1"/>
+              </a:fontRef>
+            </p:style>
+            <p:txBody>
+              <a:bodyPr rtlCol="0" anchor="ctr"/>
+              <a:lstStyle/>
+              <a:p>
+                <a:pPr algn="ctr"/>
+                <a:endParaRPr lang="zh-HK" altLang="en-US"/>
+              </a:p>
+            </p:txBody>
+          </p:sp>
+          <p:pic>
+            <p:nvPicPr>
+              <p:cNvPr id="4" name="圖片 3">
+                <a:extLst>
+                  <a:ext uri="{FF2B5EF4-FFF2-40B4-BE49-F238E27FC236}">
+                    <a16:creationId xmlns:a16="http://schemas.microsoft.com/office/drawing/2014/main" id="{DD86D3E5-F3F2-4108-A7D9-7D6273EF88B8}"/>
+                  </a:ext>
+                </a:extLst>
+              </p:cNvPr>
+              <p:cNvPicPr>
+                <a:picLocks noChangeAspect="1"/>
+              </p:cNvPicPr>
+              <p:nvPr/>
+            </p:nvPicPr>
+            <p:blipFill>
+              <a:blip r:embed="rId5"/>
+              <a:stretch>
+                <a:fillRect/>
+              </a:stretch>
+            </p:blipFill>
+            <p:spPr>
+              <a:xfrm>
+                <a:off x="5804049" y="4621436"/>
+                <a:ext cx="670618" cy="670618"/>
+              </a:xfrm>
+              <a:prstGeom prst="rect">
+                <a:avLst/>
+              </a:prstGeom>
+            </p:spPr>
+          </p:pic>
+          <p:pic>
+            <p:nvPicPr>
+              <p:cNvPr id="5" name="圖片 4">
+                <a:extLst>
+                  <a:ext uri="{FF2B5EF4-FFF2-40B4-BE49-F238E27FC236}">
+                    <a16:creationId xmlns:a16="http://schemas.microsoft.com/office/drawing/2014/main" id="{B455486C-A956-432E-AE71-BCAD4CA7D88D}"/>
+                  </a:ext>
+                </a:extLst>
+              </p:cNvPr>
+              <p:cNvPicPr>
+                <a:picLocks noChangeAspect="1"/>
+              </p:cNvPicPr>
+              <p:nvPr/>
+            </p:nvPicPr>
+            <p:blipFill>
+              <a:blip r:embed="rId5"/>
+              <a:stretch>
+                <a:fillRect/>
+              </a:stretch>
+            </p:blipFill>
+            <p:spPr>
+              <a:xfrm>
+                <a:off x="5903194" y="4725902"/>
+                <a:ext cx="670618" cy="670618"/>
+              </a:xfrm>
+              <a:prstGeom prst="rect">
+                <a:avLst/>
+              </a:prstGeom>
+            </p:spPr>
+          </p:pic>
+          <p:pic>
+            <p:nvPicPr>
+              <p:cNvPr id="6" name="圖片 5">
+                <a:extLst>
+                  <a:ext uri="{FF2B5EF4-FFF2-40B4-BE49-F238E27FC236}">
+                    <a16:creationId xmlns:a16="http://schemas.microsoft.com/office/drawing/2014/main" id="{BDBCD6B8-4108-44C2-AED7-5CF37DA09EAF}"/>
+                  </a:ext>
+                </a:extLst>
+              </p:cNvPr>
+              <p:cNvPicPr>
+                <a:picLocks noChangeAspect="1"/>
+              </p:cNvPicPr>
+              <p:nvPr/>
+            </p:nvPicPr>
+            <p:blipFill>
+              <a:blip r:embed="rId5"/>
+              <a:stretch>
+                <a:fillRect/>
+              </a:stretch>
+            </p:blipFill>
+            <p:spPr>
+              <a:xfrm>
+                <a:off x="6002339" y="4830368"/>
+                <a:ext cx="670618" cy="670618"/>
+              </a:xfrm>
+              <a:prstGeom prst="rect">
+                <a:avLst/>
+              </a:prstGeom>
+            </p:spPr>
+          </p:pic>
+          <p:pic>
+            <p:nvPicPr>
+              <p:cNvPr id="7" name="圖片 6">
+                <a:extLst>
+                  <a:ext uri="{FF2B5EF4-FFF2-40B4-BE49-F238E27FC236}">
+                    <a16:creationId xmlns:a16="http://schemas.microsoft.com/office/drawing/2014/main" id="{BA832F17-0450-4F26-8211-070503D23059}"/>
+                  </a:ext>
+                </a:extLst>
+              </p:cNvPr>
+              <p:cNvPicPr>
+                <a:picLocks noChangeAspect="1"/>
+              </p:cNvPicPr>
+              <p:nvPr/>
+            </p:nvPicPr>
+            <p:blipFill>
+              <a:blip r:embed="rId5"/>
+              <a:stretch>
+                <a:fillRect/>
+              </a:stretch>
+            </p:blipFill>
+            <p:spPr>
+              <a:xfrm>
+                <a:off x="6108225" y="4936635"/>
+                <a:ext cx="670618" cy="670618"/>
+              </a:xfrm>
+              <a:prstGeom prst="rect">
+                <a:avLst/>
+              </a:prstGeom>
+            </p:spPr>
+          </p:pic>
+          <p:pic>
+            <p:nvPicPr>
+              <p:cNvPr id="8" name="圖片 7">
+                <a:extLst>
+                  <a:ext uri="{FF2B5EF4-FFF2-40B4-BE49-F238E27FC236}">
+                    <a16:creationId xmlns:a16="http://schemas.microsoft.com/office/drawing/2014/main" id="{B0CED8F6-732E-4BD2-9AF0-3C57DE38691E}"/>
+                  </a:ext>
+                </a:extLst>
+              </p:cNvPr>
+              <p:cNvPicPr>
+                <a:picLocks noChangeAspect="1"/>
+              </p:cNvPicPr>
+              <p:nvPr/>
+            </p:nvPicPr>
+            <p:blipFill>
+              <a:blip r:embed="rId5"/>
+              <a:stretch>
+                <a:fillRect/>
+              </a:stretch>
+            </p:blipFill>
+            <p:spPr>
+              <a:xfrm>
+                <a:off x="6223301" y="5042902"/>
+                <a:ext cx="670618" cy="670618"/>
+              </a:xfrm>
+              <a:prstGeom prst="rect">
+                <a:avLst/>
+              </a:prstGeom>
+            </p:spPr>
+          </p:pic>
+          <p:pic>
+            <p:nvPicPr>
+              <p:cNvPr id="10" name="圖片 9">
+                <a:extLst>
+                  <a:ext uri="{FF2B5EF4-FFF2-40B4-BE49-F238E27FC236}">
+                    <a16:creationId xmlns:a16="http://schemas.microsoft.com/office/drawing/2014/main" id="{2DA74B12-61E6-4400-9098-8A710721265A}"/>
+                  </a:ext>
+                </a:extLst>
+              </p:cNvPr>
+              <p:cNvPicPr>
+                <a:picLocks noChangeAspect="1"/>
+              </p:cNvPicPr>
+              <p:nvPr/>
+            </p:nvPicPr>
+            <p:blipFill>
+              <a:blip r:embed="rId5"/>
+              <a:stretch>
+                <a:fillRect/>
+              </a:stretch>
+            </p:blipFill>
+            <p:spPr>
+              <a:xfrm>
+                <a:off x="6337648" y="5138269"/>
+                <a:ext cx="670618" cy="670618"/>
+              </a:xfrm>
+              <a:prstGeom prst="rect">
+                <a:avLst/>
+              </a:prstGeom>
+            </p:spPr>
+          </p:pic>
+          <p:pic>
+            <p:nvPicPr>
+              <p:cNvPr id="18" name="圖片 17">
+                <a:extLst>
+                  <a:ext uri="{FF2B5EF4-FFF2-40B4-BE49-F238E27FC236}">
+                    <a16:creationId xmlns:a16="http://schemas.microsoft.com/office/drawing/2014/main" id="{8708D514-2D75-4B6B-83CA-135FE8A1436F}"/>
+                  </a:ext>
+                </a:extLst>
+              </p:cNvPr>
+              <p:cNvPicPr>
+                <a:picLocks noChangeAspect="1"/>
+              </p:cNvPicPr>
+              <p:nvPr/>
+            </p:nvPicPr>
+            <p:blipFill>
+              <a:blip r:embed="rId11"/>
+              <a:stretch>
+                <a:fillRect/>
+              </a:stretch>
+            </p:blipFill>
+            <p:spPr>
+              <a:xfrm>
+                <a:off x="8096655" y="4555751"/>
+                <a:ext cx="1019263" cy="856181"/>
+              </a:xfrm>
+              <a:prstGeom prst="rect">
+                <a:avLst/>
+              </a:prstGeom>
+            </p:spPr>
+          </p:pic>
+          <p:pic>
+            <p:nvPicPr>
+              <p:cNvPr id="35" name="圖片 34">
+                <a:extLst>
+                  <a:ext uri="{FF2B5EF4-FFF2-40B4-BE49-F238E27FC236}">
+                    <a16:creationId xmlns:a16="http://schemas.microsoft.com/office/drawing/2014/main" id="{561EE4E3-C437-4747-91DE-D4F37536315E}"/>
+                  </a:ext>
+                </a:extLst>
+              </p:cNvPr>
+              <p:cNvPicPr>
+                <a:picLocks noChangeAspect="1"/>
+              </p:cNvPicPr>
+              <p:nvPr/>
+            </p:nvPicPr>
+            <p:blipFill>
+              <a:blip r:embed="rId12"/>
+              <a:stretch>
+                <a:fillRect/>
+              </a:stretch>
+            </p:blipFill>
+            <p:spPr>
+              <a:xfrm>
+                <a:off x="8195800" y="4645250"/>
+                <a:ext cx="1018120" cy="859611"/>
+              </a:xfrm>
+              <a:prstGeom prst="rect">
+                <a:avLst/>
+              </a:prstGeom>
+            </p:spPr>
+          </p:pic>
+          <p:pic>
+            <p:nvPicPr>
+              <p:cNvPr id="37" name="圖片 36">
+                <a:extLst>
+                  <a:ext uri="{FF2B5EF4-FFF2-40B4-BE49-F238E27FC236}">
+                    <a16:creationId xmlns:a16="http://schemas.microsoft.com/office/drawing/2014/main" id="{5BF33A54-7707-4A5F-AB43-AEBCA579E1C6}"/>
+                  </a:ext>
+                </a:extLst>
+              </p:cNvPr>
+              <p:cNvPicPr>
+                <a:picLocks noChangeAspect="1"/>
+              </p:cNvPicPr>
+              <p:nvPr/>
+            </p:nvPicPr>
+            <p:blipFill>
+              <a:blip r:embed="rId12"/>
+              <a:stretch>
+                <a:fillRect/>
+              </a:stretch>
+            </p:blipFill>
+            <p:spPr>
+              <a:xfrm>
+                <a:off x="8294945" y="4740211"/>
+                <a:ext cx="1018120" cy="859611"/>
+              </a:xfrm>
+              <a:prstGeom prst="rect">
+                <a:avLst/>
+              </a:prstGeom>
+            </p:spPr>
+          </p:pic>
+          <p:pic>
+            <p:nvPicPr>
+              <p:cNvPr id="39" name="圖片 38">
+                <a:extLst>
+                  <a:ext uri="{FF2B5EF4-FFF2-40B4-BE49-F238E27FC236}">
+                    <a16:creationId xmlns:a16="http://schemas.microsoft.com/office/drawing/2014/main" id="{4242788A-16E6-41A1-9A9A-04B3CCC35E38}"/>
+                  </a:ext>
+                </a:extLst>
+              </p:cNvPr>
+              <p:cNvPicPr>
+                <a:picLocks noChangeAspect="1"/>
+              </p:cNvPicPr>
+              <p:nvPr/>
+            </p:nvPicPr>
+            <p:blipFill>
+              <a:blip r:embed="rId12"/>
+              <a:stretch>
+                <a:fillRect/>
+              </a:stretch>
+            </p:blipFill>
+            <p:spPr>
+              <a:xfrm>
+                <a:off x="8390981" y="4842138"/>
+                <a:ext cx="1018120" cy="859611"/>
+              </a:xfrm>
+              <a:prstGeom prst="rect">
+                <a:avLst/>
+              </a:prstGeom>
+            </p:spPr>
+          </p:pic>
+          <p:pic>
+            <p:nvPicPr>
+              <p:cNvPr id="41" name="圖片 40">
+                <a:extLst>
+                  <a:ext uri="{FF2B5EF4-FFF2-40B4-BE49-F238E27FC236}">
+                    <a16:creationId xmlns:a16="http://schemas.microsoft.com/office/drawing/2014/main" id="{A8B060AE-9691-4B29-8E4C-0FB63878A29C}"/>
+                  </a:ext>
+                </a:extLst>
+              </p:cNvPr>
+              <p:cNvPicPr>
+                <a:picLocks noChangeAspect="1"/>
+              </p:cNvPicPr>
+              <p:nvPr/>
+            </p:nvPicPr>
+            <p:blipFill>
+              <a:blip r:embed="rId12"/>
+              <a:stretch>
+                <a:fillRect/>
+              </a:stretch>
+            </p:blipFill>
+            <p:spPr>
+              <a:xfrm>
+                <a:off x="8508063" y="4944065"/>
+                <a:ext cx="1018120" cy="859611"/>
+              </a:xfrm>
+              <a:prstGeom prst="rect">
+                <a:avLst/>
+              </a:prstGeom>
+            </p:spPr>
+          </p:pic>
+          <p:pic>
+            <p:nvPicPr>
+              <p:cNvPr id="42" name="圖片 41">
+                <a:extLst>
+                  <a:ext uri="{FF2B5EF4-FFF2-40B4-BE49-F238E27FC236}">
+                    <a16:creationId xmlns:a16="http://schemas.microsoft.com/office/drawing/2014/main" id="{ED28C492-6CC5-4D96-96B4-C80166F447F2}"/>
+                  </a:ext>
+                </a:extLst>
+              </p:cNvPr>
+              <p:cNvPicPr>
+                <a:picLocks noChangeAspect="1"/>
+              </p:cNvPicPr>
+              <p:nvPr/>
+            </p:nvPicPr>
+            <p:blipFill>
+              <a:blip r:embed="rId12"/>
+              <a:stretch>
+                <a:fillRect/>
+              </a:stretch>
+            </p:blipFill>
+            <p:spPr>
+              <a:xfrm>
+                <a:off x="8630254" y="5042902"/>
+                <a:ext cx="1018120" cy="859611"/>
+              </a:xfrm>
+              <a:prstGeom prst="rect">
+                <a:avLst/>
+              </a:prstGeom>
+            </p:spPr>
+          </p:pic>
+          <p:sp>
+            <p:nvSpPr>
+              <p:cNvPr id="44" name="文字方塊 43">
+                <a:extLst>
+                  <a:ext uri="{FF2B5EF4-FFF2-40B4-BE49-F238E27FC236}">
+                    <a16:creationId xmlns:a16="http://schemas.microsoft.com/office/drawing/2014/main" id="{F7FB2828-1970-4285-A288-1F8E61FF8F69}"/>
+                  </a:ext>
+                </a:extLst>
+              </p:cNvPr>
+              <p:cNvSpPr txBox="1"/>
+              <p:nvPr/>
+            </p:nvSpPr>
+            <p:spPr>
+              <a:xfrm>
+                <a:off x="3719816" y="6054571"/>
+                <a:ext cx="793109" cy="369332"/>
+              </a:xfrm>
+              <a:prstGeom prst="rect">
+                <a:avLst/>
+              </a:prstGeom>
+              <a:noFill/>
+            </p:spPr>
+            <p:txBody>
+              <a:bodyPr wrap="square" rtlCol="0">
+                <a:spAutoFit/>
+              </a:bodyPr>
+              <a:lstStyle/>
+              <a:p>
+                <a:r>
+                  <a:rPr lang="en-US" altLang="zh-HK" dirty="0"/>
+                  <a:t>n, n, 1</a:t>
+                </a:r>
+                <a:endParaRPr lang="zh-HK" altLang="en-US" dirty="0"/>
+              </a:p>
+            </p:txBody>
+          </p:sp>
+          <p:sp>
+            <p:nvSpPr>
+              <p:cNvPr id="97" name="文字方塊 96">
+                <a:extLst>
+                  <a:ext uri="{FF2B5EF4-FFF2-40B4-BE49-F238E27FC236}">
+                    <a16:creationId xmlns:a16="http://schemas.microsoft.com/office/drawing/2014/main" id="{A8B7461B-4B86-4C26-A8D8-5013D72454ED}"/>
+                  </a:ext>
+                </a:extLst>
+              </p:cNvPr>
+              <p:cNvSpPr txBox="1"/>
+              <p:nvPr/>
+            </p:nvSpPr>
+            <p:spPr>
+              <a:xfrm>
+                <a:off x="6100810" y="6054571"/>
+                <a:ext cx="793109" cy="369332"/>
+              </a:xfrm>
+              <a:prstGeom prst="rect">
+                <a:avLst/>
+              </a:prstGeom>
+              <a:noFill/>
+            </p:spPr>
+            <p:txBody>
+              <a:bodyPr wrap="square" rtlCol="0">
+                <a:spAutoFit/>
+              </a:bodyPr>
+              <a:lstStyle/>
+              <a:p>
+                <a:r>
+                  <a:rPr lang="en-US" altLang="zh-HK" dirty="0"/>
+                  <a:t>k, k, f</a:t>
+                </a:r>
+                <a:endParaRPr lang="zh-HK" altLang="en-US" dirty="0"/>
+              </a:p>
+            </p:txBody>
+          </p:sp>
+          <p:sp>
+            <p:nvSpPr>
+              <p:cNvPr id="98" name="文字方塊 97">
+                <a:extLst>
+                  <a:ext uri="{FF2B5EF4-FFF2-40B4-BE49-F238E27FC236}">
+                    <a16:creationId xmlns:a16="http://schemas.microsoft.com/office/drawing/2014/main" id="{9B5A0096-3668-4A1E-A7EA-369669293D48}"/>
+                  </a:ext>
+                </a:extLst>
+              </p:cNvPr>
+              <p:cNvSpPr txBox="1"/>
+              <p:nvPr/>
+            </p:nvSpPr>
+            <p:spPr>
+              <a:xfrm>
+                <a:off x="8193220" y="6054571"/>
+                <a:ext cx="1845396" cy="369332"/>
+              </a:xfrm>
+              <a:prstGeom prst="rect">
+                <a:avLst/>
+              </a:prstGeom>
+              <a:noFill/>
+            </p:spPr>
+            <p:txBody>
+              <a:bodyPr wrap="square" rtlCol="0">
+                <a:spAutoFit/>
+              </a:bodyPr>
+              <a:lstStyle/>
+              <a:p>
+                <a:r>
+                  <a:rPr lang="en-US" altLang="zh-HK" dirty="0"/>
+                  <a:t>(n-k+1), (n-k+1), f</a:t>
+                </a:r>
+                <a:endParaRPr lang="zh-HK" altLang="en-US" dirty="0"/>
+              </a:p>
+            </p:txBody>
+          </p:sp>
+          <p:sp>
+            <p:nvSpPr>
+              <p:cNvPr id="46" name="文字方塊 45">
+                <a:extLst>
+                  <a:ext uri="{FF2B5EF4-FFF2-40B4-BE49-F238E27FC236}">
+                    <a16:creationId xmlns:a16="http://schemas.microsoft.com/office/drawing/2014/main" id="{E78531B9-F8C5-4F3B-83CF-65BB08BB768D}"/>
+                  </a:ext>
+                </a:extLst>
+              </p:cNvPr>
+              <p:cNvSpPr txBox="1"/>
+              <p:nvPr/>
+            </p:nvSpPr>
+            <p:spPr>
+              <a:xfrm>
+                <a:off x="5127662" y="5042902"/>
+                <a:ext cx="371086" cy="584775"/>
+              </a:xfrm>
+              <a:prstGeom prst="rect">
+                <a:avLst/>
+              </a:prstGeom>
+              <a:noFill/>
+            </p:spPr>
+            <p:txBody>
+              <a:bodyPr wrap="square" rtlCol="0">
+                <a:spAutoFit/>
+              </a:bodyPr>
+              <a:lstStyle/>
+              <a:p>
+                <a:r>
+                  <a:rPr lang="en-US" altLang="zh-HK" sz="3200" dirty="0"/>
+                  <a:t>*</a:t>
+                </a:r>
+                <a:endParaRPr lang="zh-HK" altLang="en-US" sz="3200" dirty="0"/>
+              </a:p>
+            </p:txBody>
+          </p:sp>
+          <p:sp>
+            <p:nvSpPr>
+              <p:cNvPr id="99" name="文字方塊 98">
+                <a:extLst>
+                  <a:ext uri="{FF2B5EF4-FFF2-40B4-BE49-F238E27FC236}">
+                    <a16:creationId xmlns:a16="http://schemas.microsoft.com/office/drawing/2014/main" id="{757F40FB-EAF6-4663-9949-65B6A5C76C4C}"/>
+                  </a:ext>
+                </a:extLst>
+              </p:cNvPr>
+              <p:cNvSpPr txBox="1"/>
+              <p:nvPr/>
+            </p:nvSpPr>
+            <p:spPr>
+              <a:xfrm>
+                <a:off x="7392735" y="4983841"/>
+                <a:ext cx="371086" cy="584775"/>
+              </a:xfrm>
+              <a:prstGeom prst="rect">
+                <a:avLst/>
+              </a:prstGeom>
+              <a:noFill/>
+            </p:spPr>
+            <p:txBody>
+              <a:bodyPr wrap="square" rtlCol="0">
+                <a:spAutoFit/>
+              </a:bodyPr>
+              <a:lstStyle/>
+              <a:p>
+                <a:r>
+                  <a:rPr lang="en-US" altLang="zh-HK" sz="3200" dirty="0"/>
+                  <a:t>=</a:t>
+                </a:r>
+                <a:endParaRPr lang="zh-HK" altLang="en-US" sz="3200" dirty="0"/>
+              </a:p>
+            </p:txBody>
+          </p:sp>
           <p:cxnSp>
             <p:nvCxnSpPr>
-              <p:cNvPr id="48" name="直線單箭頭接點 47">
+              <p:cNvPr id="100" name="直線單箭頭接點 99">
                 <a:extLst>
                   <a:ext uri="{FF2B5EF4-FFF2-40B4-BE49-F238E27FC236}">
-                    <a16:creationId xmlns:a16="http://schemas.microsoft.com/office/drawing/2014/main" id="{A7A38FB2-FD2E-4166-BB5E-E380EE9042CC}"/>
+                    <a16:creationId xmlns:a16="http://schemas.microsoft.com/office/drawing/2014/main" id="{29BD2765-6721-4F6A-94E8-B8FDEADAE25E}"/>
                   </a:ext>
                 </a:extLst>
               </p:cNvPr>
@@ -6834,7 +6796,7 @@
             </p:nvCxnSpPr>
             <p:spPr>
               <a:xfrm flipH="1">
-                <a:off x="6497364" y="4429957"/>
+                <a:off x="7002007" y="4965471"/>
                 <a:ext cx="315756" cy="191479"/>
               </a:xfrm>
               <a:prstGeom prst="straightConnector1">
@@ -6859,12 +6821,108 @@
               </a:fontRef>
             </p:style>
           </p:cxnSp>
+          <p:grpSp>
+            <p:nvGrpSpPr>
+              <p:cNvPr id="53" name="群組 52">
+                <a:extLst>
+                  <a:ext uri="{FF2B5EF4-FFF2-40B4-BE49-F238E27FC236}">
+                    <a16:creationId xmlns:a16="http://schemas.microsoft.com/office/drawing/2014/main" id="{647C5896-09A4-4888-A878-BF9158B8285E}"/>
+                  </a:ext>
+                </a:extLst>
+              </p:cNvPr>
+              <p:cNvGrpSpPr/>
+              <p:nvPr/>
+            </p:nvGrpSpPr>
+            <p:grpSpPr>
+              <a:xfrm>
+                <a:off x="6497364" y="4225038"/>
+                <a:ext cx="433222" cy="396398"/>
+                <a:chOff x="6497364" y="4225038"/>
+                <a:chExt cx="433222" cy="396398"/>
+              </a:xfrm>
+            </p:grpSpPr>
+            <p:cxnSp>
+              <p:nvCxnSpPr>
+                <p:cNvPr id="48" name="直線單箭頭接點 47">
+                  <a:extLst>
+                    <a:ext uri="{FF2B5EF4-FFF2-40B4-BE49-F238E27FC236}">
+                      <a16:creationId xmlns:a16="http://schemas.microsoft.com/office/drawing/2014/main" id="{A7A38FB2-FD2E-4166-BB5E-E380EE9042CC}"/>
+                    </a:ext>
+                  </a:extLst>
+                </p:cNvPr>
+                <p:cNvCxnSpPr/>
+                <p:nvPr/>
+              </p:nvCxnSpPr>
+              <p:spPr>
+                <a:xfrm flipH="1">
+                  <a:off x="6497364" y="4429957"/>
+                  <a:ext cx="315756" cy="191479"/>
+                </a:xfrm>
+                <a:prstGeom prst="straightConnector1">
+                  <a:avLst/>
+                </a:prstGeom>
+                <a:ln>
+                  <a:tailEnd type="triangle"/>
+                </a:ln>
+              </p:spPr>
+              <p:style>
+                <a:lnRef idx="2">
+                  <a:schemeClr val="accent1"/>
+                </a:lnRef>
+                <a:fillRef idx="0">
+                  <a:schemeClr val="accent1"/>
+                </a:fillRef>
+                <a:effectRef idx="1">
+                  <a:schemeClr val="accent1"/>
+                </a:effectRef>
+                <a:fontRef idx="minor">
+                  <a:schemeClr val="tx1"/>
+                </a:fontRef>
+              </p:style>
+            </p:cxnSp>
+            <p:sp>
+              <p:nvSpPr>
+                <p:cNvPr id="49" name="文字方塊 48">
+                  <a:extLst>
+                    <a:ext uri="{FF2B5EF4-FFF2-40B4-BE49-F238E27FC236}">
+                      <a16:creationId xmlns:a16="http://schemas.microsoft.com/office/drawing/2014/main" id="{F965265F-29B6-4147-8CD0-0F64BEC9667B}"/>
+                    </a:ext>
+                  </a:extLst>
+                </p:cNvPr>
+                <p:cNvSpPr txBox="1"/>
+                <p:nvPr/>
+              </p:nvSpPr>
+              <p:spPr>
+                <a:xfrm>
+                  <a:off x="6776454" y="4225038"/>
+                  <a:ext cx="154132" cy="369332"/>
+                </a:xfrm>
+                <a:prstGeom prst="rect">
+                  <a:avLst/>
+                </a:prstGeom>
+                <a:noFill/>
+              </p:spPr>
+              <p:txBody>
+                <a:bodyPr wrap="square" rtlCol="0">
+                  <a:spAutoFit/>
+                </a:bodyPr>
+                <a:lstStyle/>
+                <a:p>
+                  <a:r>
+                    <a:rPr lang="en-US" altLang="zh-HK" dirty="0"/>
+                    <a:t>1</a:t>
+                  </a:r>
+                  <a:endParaRPr lang="zh-HK" altLang="en-US" dirty="0"/>
+                </a:p>
+              </p:txBody>
+            </p:sp>
+          </p:grpSp>
           <p:sp>
             <p:nvSpPr>
-              <p:cNvPr id="49" name="文字方塊 48">
+              <p:cNvPr id="51" name="文字方塊 50">
                 <a:extLst>
                   <a:ext uri="{FF2B5EF4-FFF2-40B4-BE49-F238E27FC236}">
-                    <a16:creationId xmlns:a16="http://schemas.microsoft.com/office/drawing/2014/main" id="{F965265F-29B6-4147-8CD0-0F64BEC9667B}"/>
+                    <a16:creationId xmlns:a16="http://schemas.microsoft.com/office/drawing/2014/main" id="{BF35C227-A57A-4B17-9409-B9AAAC6DE85C}"/>
                   </a:ext>
                 </a:extLst>
               </p:cNvPr>
@@ -6873,236 +6931,8 @@
             </p:nvSpPr>
             <p:spPr>
               <a:xfrm>
-                <a:off x="6776454" y="4225038"/>
-                <a:ext cx="154132" cy="369332"/>
-              </a:xfrm>
-              <a:prstGeom prst="rect">
-                <a:avLst/>
-              </a:prstGeom>
-              <a:noFill/>
-            </p:spPr>
-            <p:txBody>
-              <a:bodyPr wrap="square" rtlCol="0">
-                <a:spAutoFit/>
-              </a:bodyPr>
-              <a:lstStyle/>
-              <a:p>
-                <a:r>
-                  <a:rPr lang="en-US" altLang="zh-HK" dirty="0"/>
-                  <a:t>1</a:t>
-                </a:r>
-                <a:endParaRPr lang="zh-HK" altLang="en-US" dirty="0"/>
-              </a:p>
-            </p:txBody>
-          </p:sp>
-        </p:grpSp>
-        <p:sp>
-          <p:nvSpPr>
-            <p:cNvPr id="51" name="文字方塊 50">
-              <a:extLst>
-                <a:ext uri="{FF2B5EF4-FFF2-40B4-BE49-F238E27FC236}">
-                  <a16:creationId xmlns:a16="http://schemas.microsoft.com/office/drawing/2014/main" id="{BF35C227-A57A-4B17-9409-B9AAAC6DE85C}"/>
-                </a:ext>
-              </a:extLst>
-            </p:cNvPr>
-            <p:cNvSpPr txBox="1"/>
-            <p:nvPr/>
-          </p:nvSpPr>
-          <p:spPr>
-            <a:xfrm>
-              <a:off x="7275653" y="4751969"/>
-              <a:ext cx="164606" cy="369332"/>
-            </a:xfrm>
-            <a:prstGeom prst="rect">
-              <a:avLst/>
-            </a:prstGeom>
-            <a:noFill/>
-          </p:spPr>
-          <p:txBody>
-            <a:bodyPr wrap="square" rtlCol="0">
-              <a:spAutoFit/>
-            </a:bodyPr>
-            <a:lstStyle/>
-            <a:p>
-              <a:r>
-                <a:rPr lang="en-US" altLang="zh-HK" dirty="0"/>
-                <a:t>f</a:t>
-              </a:r>
-              <a:endParaRPr lang="zh-HK" altLang="en-US" dirty="0"/>
-            </a:p>
-          </p:txBody>
-        </p:sp>
-        <p:grpSp>
-          <p:nvGrpSpPr>
-            <p:cNvPr id="102" name="群組 101">
-              <a:extLst>
-                <a:ext uri="{FF2B5EF4-FFF2-40B4-BE49-F238E27FC236}">
-                  <a16:creationId xmlns:a16="http://schemas.microsoft.com/office/drawing/2014/main" id="{A6D08280-9385-4A2D-964A-B44B105C843B}"/>
-                </a:ext>
-              </a:extLst>
-            </p:cNvPr>
-            <p:cNvGrpSpPr/>
-            <p:nvPr/>
-          </p:nvGrpSpPr>
-          <p:grpSpPr>
-            <a:xfrm>
-              <a:off x="9115918" y="4167402"/>
-              <a:ext cx="433222" cy="396398"/>
-              <a:chOff x="6497364" y="4225038"/>
-              <a:chExt cx="433222" cy="396398"/>
-            </a:xfrm>
-          </p:grpSpPr>
-          <p:cxnSp>
-            <p:nvCxnSpPr>
-              <p:cNvPr id="103" name="直線單箭頭接點 102">
-                <a:extLst>
-                  <a:ext uri="{FF2B5EF4-FFF2-40B4-BE49-F238E27FC236}">
-                    <a16:creationId xmlns:a16="http://schemas.microsoft.com/office/drawing/2014/main" id="{DDC4EC55-B425-4C6C-B43B-B44285488F1C}"/>
-                  </a:ext>
-                </a:extLst>
-              </p:cNvPr>
-              <p:cNvCxnSpPr/>
-              <p:nvPr/>
-            </p:nvCxnSpPr>
-            <p:spPr>
-              <a:xfrm flipH="1">
-                <a:off x="6497364" y="4429957"/>
-                <a:ext cx="315756" cy="191479"/>
-              </a:xfrm>
-              <a:prstGeom prst="straightConnector1">
-                <a:avLst/>
-              </a:prstGeom>
-              <a:ln>
-                <a:tailEnd type="triangle"/>
-              </a:ln>
-            </p:spPr>
-            <p:style>
-              <a:lnRef idx="2">
-                <a:schemeClr val="accent1"/>
-              </a:lnRef>
-              <a:fillRef idx="0">
-                <a:schemeClr val="accent1"/>
-              </a:fillRef>
-              <a:effectRef idx="1">
-                <a:schemeClr val="accent1"/>
-              </a:effectRef>
-              <a:fontRef idx="minor">
-                <a:schemeClr val="tx1"/>
-              </a:fontRef>
-            </p:style>
-          </p:cxnSp>
-          <p:sp>
-            <p:nvSpPr>
-              <p:cNvPr id="104" name="文字方塊 103">
-                <a:extLst>
-                  <a:ext uri="{FF2B5EF4-FFF2-40B4-BE49-F238E27FC236}">
-                    <a16:creationId xmlns:a16="http://schemas.microsoft.com/office/drawing/2014/main" id="{99F3A210-B843-4292-86A7-86E968B1A077}"/>
-                  </a:ext>
-                </a:extLst>
-              </p:cNvPr>
-              <p:cNvSpPr txBox="1"/>
-              <p:nvPr/>
-            </p:nvSpPr>
-            <p:spPr>
-              <a:xfrm>
-                <a:off x="6776454" y="4225038"/>
-                <a:ext cx="154132" cy="369332"/>
-              </a:xfrm>
-              <a:prstGeom prst="rect">
-                <a:avLst/>
-              </a:prstGeom>
-              <a:noFill/>
-            </p:spPr>
-            <p:txBody>
-              <a:bodyPr wrap="square" rtlCol="0">
-                <a:spAutoFit/>
-              </a:bodyPr>
-              <a:lstStyle/>
-              <a:p>
-                <a:r>
-                  <a:rPr lang="en-US" altLang="zh-HK" dirty="0"/>
-                  <a:t>1</a:t>
-                </a:r>
-                <a:endParaRPr lang="zh-HK" altLang="en-US" dirty="0"/>
-              </a:p>
-            </p:txBody>
-          </p:sp>
-        </p:grpSp>
-        <p:grpSp>
-          <p:nvGrpSpPr>
-            <p:cNvPr id="105" name="群組 104">
-              <a:extLst>
-                <a:ext uri="{FF2B5EF4-FFF2-40B4-BE49-F238E27FC236}">
-                  <a16:creationId xmlns:a16="http://schemas.microsoft.com/office/drawing/2014/main" id="{88F3AF23-C369-4F33-950C-EA9A34918983}"/>
-                </a:ext>
-              </a:extLst>
-            </p:cNvPr>
-            <p:cNvGrpSpPr/>
-            <p:nvPr/>
-          </p:nvGrpSpPr>
-          <p:grpSpPr>
-            <a:xfrm>
-              <a:off x="9652391" y="4658401"/>
-              <a:ext cx="433222" cy="396398"/>
-              <a:chOff x="6497364" y="4225038"/>
-              <a:chExt cx="433222" cy="396398"/>
-            </a:xfrm>
-          </p:grpSpPr>
-          <p:cxnSp>
-            <p:nvCxnSpPr>
-              <p:cNvPr id="106" name="直線單箭頭接點 105">
-                <a:extLst>
-                  <a:ext uri="{FF2B5EF4-FFF2-40B4-BE49-F238E27FC236}">
-                    <a16:creationId xmlns:a16="http://schemas.microsoft.com/office/drawing/2014/main" id="{371CF24B-4282-4590-9241-E458C58BC1FD}"/>
-                  </a:ext>
-                </a:extLst>
-              </p:cNvPr>
-              <p:cNvCxnSpPr/>
-              <p:nvPr/>
-            </p:nvCxnSpPr>
-            <p:spPr>
-              <a:xfrm flipH="1">
-                <a:off x="6497364" y="4429957"/>
-                <a:ext cx="315756" cy="191479"/>
-              </a:xfrm>
-              <a:prstGeom prst="straightConnector1">
-                <a:avLst/>
-              </a:prstGeom>
-              <a:ln>
-                <a:tailEnd type="triangle"/>
-              </a:ln>
-            </p:spPr>
-            <p:style>
-              <a:lnRef idx="2">
-                <a:schemeClr val="accent1"/>
-              </a:lnRef>
-              <a:fillRef idx="0">
-                <a:schemeClr val="accent1"/>
-              </a:fillRef>
-              <a:effectRef idx="1">
-                <a:schemeClr val="accent1"/>
-              </a:effectRef>
-              <a:fontRef idx="minor">
-                <a:schemeClr val="tx1"/>
-              </a:fontRef>
-            </p:style>
-          </p:cxnSp>
-          <p:sp>
-            <p:nvSpPr>
-              <p:cNvPr id="107" name="文字方塊 106">
-                <a:extLst>
-                  <a:ext uri="{FF2B5EF4-FFF2-40B4-BE49-F238E27FC236}">
-                    <a16:creationId xmlns:a16="http://schemas.microsoft.com/office/drawing/2014/main" id="{E74F5F0B-D069-4328-B322-001A2DF7639C}"/>
-                  </a:ext>
-                </a:extLst>
-              </p:cNvPr>
-              <p:cNvSpPr txBox="1"/>
-              <p:nvPr/>
-            </p:nvSpPr>
-            <p:spPr>
-              <a:xfrm>
-                <a:off x="6776454" y="4225038"/>
-                <a:ext cx="154132" cy="369332"/>
+                <a:off x="7275653" y="4751969"/>
+                <a:ext cx="164606" cy="369332"/>
               </a:xfrm>
               <a:prstGeom prst="rect">
                 <a:avLst/>
@@ -7123,12 +6953,446 @@
               </a:p>
             </p:txBody>
           </p:sp>
+          <p:grpSp>
+            <p:nvGrpSpPr>
+              <p:cNvPr id="102" name="群組 101">
+                <a:extLst>
+                  <a:ext uri="{FF2B5EF4-FFF2-40B4-BE49-F238E27FC236}">
+                    <a16:creationId xmlns:a16="http://schemas.microsoft.com/office/drawing/2014/main" id="{A6D08280-9385-4A2D-964A-B44B105C843B}"/>
+                  </a:ext>
+                </a:extLst>
+              </p:cNvPr>
+              <p:cNvGrpSpPr/>
+              <p:nvPr/>
+            </p:nvGrpSpPr>
+            <p:grpSpPr>
+              <a:xfrm>
+                <a:off x="9115918" y="4167402"/>
+                <a:ext cx="433222" cy="396398"/>
+                <a:chOff x="6497364" y="4225038"/>
+                <a:chExt cx="433222" cy="396398"/>
+              </a:xfrm>
+            </p:grpSpPr>
+            <p:cxnSp>
+              <p:nvCxnSpPr>
+                <p:cNvPr id="103" name="直線單箭頭接點 102">
+                  <a:extLst>
+                    <a:ext uri="{FF2B5EF4-FFF2-40B4-BE49-F238E27FC236}">
+                      <a16:creationId xmlns:a16="http://schemas.microsoft.com/office/drawing/2014/main" id="{DDC4EC55-B425-4C6C-B43B-B44285488F1C}"/>
+                    </a:ext>
+                  </a:extLst>
+                </p:cNvPr>
+                <p:cNvCxnSpPr/>
+                <p:nvPr/>
+              </p:nvCxnSpPr>
+              <p:spPr>
+                <a:xfrm flipH="1">
+                  <a:off x="6497364" y="4429957"/>
+                  <a:ext cx="315756" cy="191479"/>
+                </a:xfrm>
+                <a:prstGeom prst="straightConnector1">
+                  <a:avLst/>
+                </a:prstGeom>
+                <a:ln>
+                  <a:tailEnd type="triangle"/>
+                </a:ln>
+              </p:spPr>
+              <p:style>
+                <a:lnRef idx="2">
+                  <a:schemeClr val="accent1"/>
+                </a:lnRef>
+                <a:fillRef idx="0">
+                  <a:schemeClr val="accent1"/>
+                </a:fillRef>
+                <a:effectRef idx="1">
+                  <a:schemeClr val="accent1"/>
+                </a:effectRef>
+                <a:fontRef idx="minor">
+                  <a:schemeClr val="tx1"/>
+                </a:fontRef>
+              </p:style>
+            </p:cxnSp>
+            <p:sp>
+              <p:nvSpPr>
+                <p:cNvPr id="104" name="文字方塊 103">
+                  <a:extLst>
+                    <a:ext uri="{FF2B5EF4-FFF2-40B4-BE49-F238E27FC236}">
+                      <a16:creationId xmlns:a16="http://schemas.microsoft.com/office/drawing/2014/main" id="{99F3A210-B843-4292-86A7-86E968B1A077}"/>
+                    </a:ext>
+                  </a:extLst>
+                </p:cNvPr>
+                <p:cNvSpPr txBox="1"/>
+                <p:nvPr/>
+              </p:nvSpPr>
+              <p:spPr>
+                <a:xfrm>
+                  <a:off x="6776454" y="4225038"/>
+                  <a:ext cx="154132" cy="369332"/>
+                </a:xfrm>
+                <a:prstGeom prst="rect">
+                  <a:avLst/>
+                </a:prstGeom>
+                <a:noFill/>
+              </p:spPr>
+              <p:txBody>
+                <a:bodyPr wrap="square" rtlCol="0">
+                  <a:spAutoFit/>
+                </a:bodyPr>
+                <a:lstStyle/>
+                <a:p>
+                  <a:r>
+                    <a:rPr lang="en-US" altLang="zh-HK" dirty="0"/>
+                    <a:t>1</a:t>
+                  </a:r>
+                  <a:endParaRPr lang="zh-HK" altLang="en-US" dirty="0"/>
+                </a:p>
+              </p:txBody>
+            </p:sp>
+          </p:grpSp>
+          <p:grpSp>
+            <p:nvGrpSpPr>
+              <p:cNvPr id="105" name="群組 104">
+                <a:extLst>
+                  <a:ext uri="{FF2B5EF4-FFF2-40B4-BE49-F238E27FC236}">
+                    <a16:creationId xmlns:a16="http://schemas.microsoft.com/office/drawing/2014/main" id="{88F3AF23-C369-4F33-950C-EA9A34918983}"/>
+                  </a:ext>
+                </a:extLst>
+              </p:cNvPr>
+              <p:cNvGrpSpPr/>
+              <p:nvPr/>
+            </p:nvGrpSpPr>
+            <p:grpSpPr>
+              <a:xfrm>
+                <a:off x="9652391" y="4658401"/>
+                <a:ext cx="433222" cy="396398"/>
+                <a:chOff x="6497364" y="4225038"/>
+                <a:chExt cx="433222" cy="396398"/>
+              </a:xfrm>
+            </p:grpSpPr>
+            <p:cxnSp>
+              <p:nvCxnSpPr>
+                <p:cNvPr id="106" name="直線單箭頭接點 105">
+                  <a:extLst>
+                    <a:ext uri="{FF2B5EF4-FFF2-40B4-BE49-F238E27FC236}">
+                      <a16:creationId xmlns:a16="http://schemas.microsoft.com/office/drawing/2014/main" id="{371CF24B-4282-4590-9241-E458C58BC1FD}"/>
+                    </a:ext>
+                  </a:extLst>
+                </p:cNvPr>
+                <p:cNvCxnSpPr/>
+                <p:nvPr/>
+              </p:nvCxnSpPr>
+              <p:spPr>
+                <a:xfrm flipH="1">
+                  <a:off x="6497364" y="4429957"/>
+                  <a:ext cx="315756" cy="191479"/>
+                </a:xfrm>
+                <a:prstGeom prst="straightConnector1">
+                  <a:avLst/>
+                </a:prstGeom>
+                <a:ln>
+                  <a:tailEnd type="triangle"/>
+                </a:ln>
+              </p:spPr>
+              <p:style>
+                <a:lnRef idx="2">
+                  <a:schemeClr val="accent1"/>
+                </a:lnRef>
+                <a:fillRef idx="0">
+                  <a:schemeClr val="accent1"/>
+                </a:fillRef>
+                <a:effectRef idx="1">
+                  <a:schemeClr val="accent1"/>
+                </a:effectRef>
+                <a:fontRef idx="minor">
+                  <a:schemeClr val="tx1"/>
+                </a:fontRef>
+              </p:style>
+            </p:cxnSp>
+            <p:sp>
+              <p:nvSpPr>
+                <p:cNvPr id="107" name="文字方塊 106">
+                  <a:extLst>
+                    <a:ext uri="{FF2B5EF4-FFF2-40B4-BE49-F238E27FC236}">
+                      <a16:creationId xmlns:a16="http://schemas.microsoft.com/office/drawing/2014/main" id="{E74F5F0B-D069-4328-B322-001A2DF7639C}"/>
+                    </a:ext>
+                  </a:extLst>
+                </p:cNvPr>
+                <p:cNvSpPr txBox="1"/>
+                <p:nvPr/>
+              </p:nvSpPr>
+              <p:spPr>
+                <a:xfrm>
+                  <a:off x="6776454" y="4225038"/>
+                  <a:ext cx="154132" cy="369332"/>
+                </a:xfrm>
+                <a:prstGeom prst="rect">
+                  <a:avLst/>
+                </a:prstGeom>
+                <a:noFill/>
+              </p:spPr>
+              <p:txBody>
+                <a:bodyPr wrap="square" rtlCol="0">
+                  <a:spAutoFit/>
+                </a:bodyPr>
+                <a:lstStyle/>
+                <a:p>
+                  <a:r>
+                    <a:rPr lang="en-US" altLang="zh-HK" dirty="0"/>
+                    <a:t>f</a:t>
+                  </a:r>
+                  <a:endParaRPr lang="zh-HK" altLang="en-US" dirty="0"/>
+                </a:p>
+              </p:txBody>
+            </p:sp>
+          </p:grpSp>
         </p:grpSp>
+        <p:cxnSp>
+          <p:nvCxnSpPr>
+            <p:cNvPr id="31" name="直線單箭頭接點 30">
+              <a:extLst>
+                <a:ext uri="{FF2B5EF4-FFF2-40B4-BE49-F238E27FC236}">
+                  <a16:creationId xmlns:a16="http://schemas.microsoft.com/office/drawing/2014/main" id="{57FA7EFB-E429-486E-B822-E2579A3C6C3F}"/>
+                </a:ext>
+              </a:extLst>
+            </p:cNvPr>
+            <p:cNvCxnSpPr/>
+            <p:nvPr/>
+          </p:nvCxnSpPr>
+          <p:spPr>
+            <a:xfrm>
+              <a:off x="6337648" y="5902513"/>
+              <a:ext cx="664359" cy="0"/>
+            </a:xfrm>
+            <a:prstGeom prst="straightConnector1">
+              <a:avLst/>
+            </a:prstGeom>
+            <a:ln>
+              <a:headEnd type="triangle"/>
+              <a:tailEnd type="triangle"/>
+            </a:ln>
+          </p:spPr>
+          <p:style>
+            <a:lnRef idx="2">
+              <a:schemeClr val="accent1"/>
+            </a:lnRef>
+            <a:fillRef idx="0">
+              <a:schemeClr val="accent1"/>
+            </a:fillRef>
+            <a:effectRef idx="1">
+              <a:schemeClr val="accent1"/>
+            </a:effectRef>
+            <a:fontRef idx="minor">
+              <a:schemeClr val="tx1"/>
+            </a:fontRef>
+          </p:style>
+        </p:cxnSp>
+        <p:sp>
+          <p:nvSpPr>
+            <p:cNvPr id="101" name="文字方塊 100">
+              <a:extLst>
+                <a:ext uri="{FF2B5EF4-FFF2-40B4-BE49-F238E27FC236}">
+                  <a16:creationId xmlns:a16="http://schemas.microsoft.com/office/drawing/2014/main" id="{DB5AC106-16A5-432C-B983-C78E486EF36B}"/>
+                </a:ext>
+              </a:extLst>
+            </p:cNvPr>
+            <p:cNvSpPr txBox="1"/>
+            <p:nvPr/>
+          </p:nvSpPr>
+          <p:spPr>
+            <a:xfrm>
+              <a:off x="6527477" y="5631519"/>
+              <a:ext cx="154132" cy="369332"/>
+            </a:xfrm>
+            <a:prstGeom prst="rect">
+              <a:avLst/>
+            </a:prstGeom>
+            <a:noFill/>
+          </p:spPr>
+          <p:txBody>
+            <a:bodyPr wrap="square" rtlCol="0">
+              <a:spAutoFit/>
+            </a:bodyPr>
+            <a:lstStyle/>
+            <a:p>
+              <a:r>
+                <a:rPr lang="en-US" altLang="zh-CN" dirty="0"/>
+                <a:t>k</a:t>
+              </a:r>
+              <a:endParaRPr lang="zh-HK" altLang="en-US" dirty="0"/>
+            </a:p>
+          </p:txBody>
+        </p:sp>
+        <p:cxnSp>
+          <p:nvCxnSpPr>
+            <p:cNvPr id="108" name="直線單箭頭接點 107">
+              <a:extLst>
+                <a:ext uri="{FF2B5EF4-FFF2-40B4-BE49-F238E27FC236}">
+                  <a16:creationId xmlns:a16="http://schemas.microsoft.com/office/drawing/2014/main" id="{E4C0EC7F-175F-4EEF-AB9E-58B5768DD9C7}"/>
+                </a:ext>
+              </a:extLst>
+            </p:cNvPr>
+            <p:cNvCxnSpPr>
+              <a:cxnSpLocks/>
+            </p:cNvCxnSpPr>
+            <p:nvPr/>
+          </p:nvCxnSpPr>
+          <p:spPr>
+            <a:xfrm flipV="1">
+              <a:off x="7111359" y="5151216"/>
+              <a:ext cx="7316" cy="642981"/>
+            </a:xfrm>
+            <a:prstGeom prst="straightConnector1">
+              <a:avLst/>
+            </a:prstGeom>
+            <a:ln>
+              <a:headEnd type="triangle"/>
+              <a:tailEnd type="triangle"/>
+            </a:ln>
+          </p:spPr>
+          <p:style>
+            <a:lnRef idx="2">
+              <a:schemeClr val="accent1"/>
+            </a:lnRef>
+            <a:fillRef idx="0">
+              <a:schemeClr val="accent1"/>
+            </a:fillRef>
+            <a:effectRef idx="1">
+              <a:schemeClr val="accent1"/>
+            </a:effectRef>
+            <a:fontRef idx="minor">
+              <a:schemeClr val="tx1"/>
+            </a:fontRef>
+          </p:style>
+        </p:cxnSp>
+        <p:sp>
+          <p:nvSpPr>
+            <p:cNvPr id="109" name="文字方塊 108">
+              <a:extLst>
+                <a:ext uri="{FF2B5EF4-FFF2-40B4-BE49-F238E27FC236}">
+                  <a16:creationId xmlns:a16="http://schemas.microsoft.com/office/drawing/2014/main" id="{6C2B88BA-897D-45AA-BE10-DCAD5CF7A04D}"/>
+                </a:ext>
+              </a:extLst>
+            </p:cNvPr>
+            <p:cNvSpPr txBox="1"/>
+            <p:nvPr/>
+          </p:nvSpPr>
+          <p:spPr>
+            <a:xfrm>
+              <a:off x="7060074" y="5296543"/>
+              <a:ext cx="154132" cy="369332"/>
+            </a:xfrm>
+            <a:prstGeom prst="rect">
+              <a:avLst/>
+            </a:prstGeom>
+            <a:noFill/>
+          </p:spPr>
+          <p:txBody>
+            <a:bodyPr wrap="square" rtlCol="0">
+              <a:spAutoFit/>
+            </a:bodyPr>
+            <a:lstStyle/>
+            <a:p>
+              <a:r>
+                <a:rPr lang="en-US" altLang="zh-CN" dirty="0"/>
+                <a:t>k</a:t>
+              </a:r>
+              <a:endParaRPr lang="zh-HK" altLang="en-US" dirty="0"/>
+            </a:p>
+          </p:txBody>
+        </p:sp>
       </p:grpSp>
     </p:spTree>
     <p:extLst>
       <p:ext uri="{BB962C8B-B14F-4D97-AF65-F5344CB8AC3E}">
         <p14:creationId xmlns:p14="http://schemas.microsoft.com/office/powerpoint/2010/main" val="2813082791"/>
+      </p:ext>
+    </p:extLst>
+  </p:cSld>
+  <p:clrMapOvr>
+    <a:masterClrMapping/>
+  </p:clrMapOvr>
+</p:sld>
+</file>
+
+<file path=ppt/slides/slide4.xml><?xml version="1.0" encoding="utf-8"?>
+<p:sld xmlns:a="http://schemas.openxmlformats.org/drawingml/2006/main" xmlns:r="http://schemas.openxmlformats.org/officeDocument/2006/relationships" xmlns:p="http://schemas.openxmlformats.org/presentationml/2006/main">
+  <p:cSld>
+    <p:spTree>
+      <p:nvGrpSpPr>
+        <p:cNvPr id="1" name=""/>
+        <p:cNvGrpSpPr/>
+        <p:nvPr/>
+      </p:nvGrpSpPr>
+      <p:grpSpPr>
+        <a:xfrm>
+          <a:off x="0" y="0"/>
+          <a:ext cx="0" cy="0"/>
+          <a:chOff x="0" y="0"/>
+          <a:chExt cx="0" cy="0"/>
+        </a:xfrm>
+      </p:grpSpPr>
+      <p:pic>
+        <p:nvPicPr>
+          <p:cNvPr id="4" name="圖片 3">
+            <a:extLst>
+              <a:ext uri="{FF2B5EF4-FFF2-40B4-BE49-F238E27FC236}">
+                <a16:creationId xmlns:a16="http://schemas.microsoft.com/office/drawing/2014/main" id="{BA94E214-257B-4CA1-B599-4519D6EBA854}"/>
+              </a:ext>
+            </a:extLst>
+          </p:cNvPr>
+          <p:cNvPicPr>
+            <a:picLocks noChangeAspect="1"/>
+          </p:cNvPicPr>
+          <p:nvPr/>
+        </p:nvPicPr>
+        <p:blipFill rotWithShape="1">
+          <a:blip r:embed="rId2"/>
+          <a:srcRect b="85502"/>
+          <a:stretch/>
+        </p:blipFill>
+        <p:spPr>
+          <a:xfrm>
+            <a:off x="1156306" y="346229"/>
+            <a:ext cx="6934734" cy="1997476"/>
+          </a:xfrm>
+          <a:prstGeom prst="rect">
+            <a:avLst/>
+          </a:prstGeom>
+        </p:spPr>
+      </p:pic>
+      <p:pic>
+        <p:nvPicPr>
+          <p:cNvPr id="5" name="圖片 4">
+            <a:extLst>
+              <a:ext uri="{FF2B5EF4-FFF2-40B4-BE49-F238E27FC236}">
+                <a16:creationId xmlns:a16="http://schemas.microsoft.com/office/drawing/2014/main" id="{E49474A0-EEF4-40B6-B8DB-0D7864F1352B}"/>
+              </a:ext>
+            </a:extLst>
+          </p:cNvPr>
+          <p:cNvPicPr>
+            <a:picLocks noChangeAspect="1"/>
+          </p:cNvPicPr>
+          <p:nvPr/>
+        </p:nvPicPr>
+        <p:blipFill rotWithShape="1">
+          <a:blip r:embed="rId3"/>
+          <a:srcRect b="88867"/>
+          <a:stretch/>
+        </p:blipFill>
+        <p:spPr>
+          <a:xfrm>
+            <a:off x="3264348" y="3630966"/>
+            <a:ext cx="7569354" cy="1686757"/>
+          </a:xfrm>
+          <a:prstGeom prst="rect">
+            <a:avLst/>
+          </a:prstGeom>
+        </p:spPr>
+      </p:pic>
+    </p:spTree>
+    <p:extLst>
+      <p:ext uri="{BB962C8B-B14F-4D97-AF65-F5344CB8AC3E}">
+        <p14:creationId xmlns:p14="http://schemas.microsoft.com/office/powerpoint/2010/main" val="1557905876"/>
       </p:ext>
     </p:extLst>
   </p:cSld>

--- a/Presentation1.pptx
+++ b/Presentation1.pptx
@@ -9,6 +9,8 @@
     <p:sldId id="257" r:id="rId3"/>
     <p:sldId id="258" r:id="rId4"/>
     <p:sldId id="259" r:id="rId5"/>
+    <p:sldId id="260" r:id="rId6"/>
+    <p:sldId id="261" r:id="rId7"/>
   </p:sldIdLst>
   <p:sldSz cx="12192000" cy="6858000"/>
   <p:notesSz cx="6858000" cy="9144000"/>
@@ -115,6 +117,830 @@
 </p:presentation>
 </file>
 
+<file path=ppt/charts/chart1.xml><?xml version="1.0" encoding="utf-8"?>
+<c:chartSpace xmlns:c="http://schemas.openxmlformats.org/drawingml/2006/chart" xmlns:a="http://schemas.openxmlformats.org/drawingml/2006/main" xmlns:r="http://schemas.openxmlformats.org/officeDocument/2006/relationships" xmlns:c16r2="http://schemas.microsoft.com/office/drawing/2015/06/chart">
+  <c:date1904 val="0"/>
+  <c:lang val="zh-TW"/>
+  <c:roundedCorners val="0"/>
+  <mc:AlternateContent xmlns:mc="http://schemas.openxmlformats.org/markup-compatibility/2006">
+    <mc:Choice xmlns:c14="http://schemas.microsoft.com/office/drawing/2007/8/2/chart" Requires="c14">
+      <c14:style val="102"/>
+    </mc:Choice>
+    <mc:Fallback>
+      <c:style val="2"/>
+    </mc:Fallback>
+  </mc:AlternateContent>
+  <c:chart>
+    <c:title>
+      <c:overlay val="0"/>
+      <c:spPr>
+        <a:noFill/>
+        <a:ln>
+          <a:noFill/>
+        </a:ln>
+        <a:effectLst/>
+      </c:spPr>
+      <c:txPr>
+        <a:bodyPr rot="0" spcFirstLastPara="1" vertOverflow="ellipsis" vert="horz" wrap="square" anchor="ctr" anchorCtr="1"/>
+        <a:lstStyle/>
+        <a:p>
+          <a:pPr>
+            <a:defRPr sz="2128" b="0" i="0" u="none" strike="noStrike" kern="1200" cap="none" spc="50" normalizeH="0" baseline="0">
+              <a:solidFill>
+                <a:schemeClr val="tx1">
+                  <a:lumMod val="65000"/>
+                  <a:lumOff val="35000"/>
+                </a:schemeClr>
+              </a:solidFill>
+              <a:latin typeface="+mj-lt"/>
+              <a:ea typeface="+mj-ea"/>
+              <a:cs typeface="+mj-cs"/>
+            </a:defRPr>
+          </a:pPr>
+          <a:endParaRPr lang="zh-HK"/>
+        </a:p>
+      </c:txPr>
+    </c:title>
+    <c:autoTitleDeleted val="0"/>
+    <c:plotArea>
+      <c:layout/>
+      <c:barChart>
+        <c:barDir val="col"/>
+        <c:grouping val="clustered"/>
+        <c:varyColors val="0"/>
+        <c:ser>
+          <c:idx val="0"/>
+          <c:order val="0"/>
+          <c:tx>
+            <c:strRef>
+              <c:f>工作表1!$B$1</c:f>
+              <c:strCache>
+                <c:ptCount val="1"/>
+                <c:pt idx="0">
+                  <c:v>Accuracy</c:v>
+                </c:pt>
+              </c:strCache>
+            </c:strRef>
+          </c:tx>
+          <c:spPr>
+            <a:solidFill>
+              <a:schemeClr val="accent1">
+                <a:alpha val="70000"/>
+              </a:schemeClr>
+            </a:solidFill>
+            <a:ln>
+              <a:noFill/>
+            </a:ln>
+            <a:effectLst/>
+          </c:spPr>
+          <c:invertIfNegative val="0"/>
+          <c:cat>
+            <c:strRef>
+              <c:f>工作表1!$A$2:$A$6</c:f>
+              <c:strCache>
+                <c:ptCount val="5"/>
+                <c:pt idx="0">
+                  <c:v>3NN</c:v>
+                </c:pt>
+                <c:pt idx="1">
+                  <c:v>10NN</c:v>
+                </c:pt>
+                <c:pt idx="2">
+                  <c:v>SVM</c:v>
+                </c:pt>
+                <c:pt idx="3">
+                  <c:v>DT</c:v>
+                </c:pt>
+                <c:pt idx="4">
+                  <c:v>1D-CNN</c:v>
+                </c:pt>
+              </c:strCache>
+            </c:strRef>
+          </c:cat>
+          <c:val>
+            <c:numRef>
+              <c:f>工作表1!$B$2:$B$6</c:f>
+              <c:numCache>
+                <c:formatCode>General</c:formatCode>
+                <c:ptCount val="5"/>
+                <c:pt idx="0">
+                  <c:v>94.3</c:v>
+                </c:pt>
+                <c:pt idx="1">
+                  <c:v>92.5</c:v>
+                </c:pt>
+                <c:pt idx="2">
+                  <c:v>92</c:v>
+                </c:pt>
+                <c:pt idx="3">
+                  <c:v>88.6</c:v>
+                </c:pt>
+                <c:pt idx="4">
+                  <c:v>94</c:v>
+                </c:pt>
+              </c:numCache>
+            </c:numRef>
+          </c:val>
+          <c:extLst>
+            <c:ext xmlns:c16="http://schemas.microsoft.com/office/drawing/2014/chart" uri="{C3380CC4-5D6E-409C-BE32-E72D297353CC}">
+              <c16:uniqueId val="{00000000-E139-44E9-965D-78CD5DE198C3}"/>
+            </c:ext>
+          </c:extLst>
+        </c:ser>
+        <c:dLbls>
+          <c:showLegendKey val="0"/>
+          <c:showVal val="0"/>
+          <c:showCatName val="0"/>
+          <c:showSerName val="0"/>
+          <c:showPercent val="0"/>
+          <c:showBubbleSize val="0"/>
+        </c:dLbls>
+        <c:gapWidth val="80"/>
+        <c:overlap val="25"/>
+        <c:axId val="78695231"/>
+        <c:axId val="1860358415"/>
+      </c:barChart>
+      <c:catAx>
+        <c:axId val="78695231"/>
+        <c:scaling>
+          <c:orientation val="minMax"/>
+        </c:scaling>
+        <c:delete val="0"/>
+        <c:axPos val="b"/>
+        <c:numFmt formatCode="General" sourceLinked="1"/>
+        <c:majorTickMark val="none"/>
+        <c:minorTickMark val="none"/>
+        <c:tickLblPos val="nextTo"/>
+        <c:spPr>
+          <a:noFill/>
+          <a:ln w="15875" cap="flat" cmpd="sng" algn="ctr">
+            <a:solidFill>
+              <a:schemeClr val="tx1">
+                <a:lumMod val="25000"/>
+                <a:lumOff val="75000"/>
+              </a:schemeClr>
+            </a:solidFill>
+            <a:round/>
+          </a:ln>
+          <a:effectLst/>
+        </c:spPr>
+        <c:txPr>
+          <a:bodyPr rot="-60000000" spcFirstLastPara="1" vertOverflow="ellipsis" vert="horz" wrap="square" anchor="ctr" anchorCtr="1"/>
+          <a:lstStyle/>
+          <a:p>
+            <a:pPr>
+              <a:defRPr sz="1197" b="0" i="0" u="none" strike="noStrike" kern="1200" cap="none" spc="20" normalizeH="0" baseline="0">
+                <a:solidFill>
+                  <a:schemeClr val="tx1">
+                    <a:lumMod val="65000"/>
+                    <a:lumOff val="35000"/>
+                  </a:schemeClr>
+                </a:solidFill>
+                <a:latin typeface="+mn-lt"/>
+                <a:ea typeface="+mn-ea"/>
+                <a:cs typeface="+mn-cs"/>
+              </a:defRPr>
+            </a:pPr>
+            <a:endParaRPr lang="zh-HK"/>
+          </a:p>
+        </c:txPr>
+        <c:crossAx val="1860358415"/>
+        <c:crosses val="autoZero"/>
+        <c:auto val="1"/>
+        <c:lblAlgn val="ctr"/>
+        <c:lblOffset val="100"/>
+        <c:noMultiLvlLbl val="0"/>
+      </c:catAx>
+      <c:valAx>
+        <c:axId val="1860358415"/>
+        <c:scaling>
+          <c:orientation val="minMax"/>
+        </c:scaling>
+        <c:delete val="0"/>
+        <c:axPos val="l"/>
+        <c:majorGridlines>
+          <c:spPr>
+            <a:ln w="9525" cap="flat" cmpd="sng" algn="ctr">
+              <a:solidFill>
+                <a:schemeClr val="tx1">
+                  <a:lumMod val="5000"/>
+                  <a:lumOff val="95000"/>
+                </a:schemeClr>
+              </a:solidFill>
+              <a:round/>
+            </a:ln>
+            <a:effectLst/>
+          </c:spPr>
+        </c:majorGridlines>
+        <c:numFmt formatCode="General" sourceLinked="1"/>
+        <c:majorTickMark val="none"/>
+        <c:minorTickMark val="none"/>
+        <c:tickLblPos val="nextTo"/>
+        <c:spPr>
+          <a:noFill/>
+          <a:ln>
+            <a:noFill/>
+          </a:ln>
+          <a:effectLst/>
+        </c:spPr>
+        <c:txPr>
+          <a:bodyPr rot="-60000000" spcFirstLastPara="1" vertOverflow="ellipsis" vert="horz" wrap="square" anchor="ctr" anchorCtr="1"/>
+          <a:lstStyle/>
+          <a:p>
+            <a:pPr>
+              <a:defRPr sz="1197" b="0" i="0" u="none" strike="noStrike" kern="1200" spc="20" baseline="0">
+                <a:solidFill>
+                  <a:schemeClr val="tx1">
+                    <a:lumMod val="65000"/>
+                    <a:lumOff val="35000"/>
+                  </a:schemeClr>
+                </a:solidFill>
+                <a:latin typeface="+mn-lt"/>
+                <a:ea typeface="+mn-ea"/>
+                <a:cs typeface="+mn-cs"/>
+              </a:defRPr>
+            </a:pPr>
+            <a:endParaRPr lang="zh-HK"/>
+          </a:p>
+        </c:txPr>
+        <c:crossAx val="78695231"/>
+        <c:crosses val="autoZero"/>
+        <c:crossBetween val="between"/>
+      </c:valAx>
+      <c:spPr>
+        <a:noFill/>
+        <a:ln>
+          <a:noFill/>
+        </a:ln>
+        <a:effectLst/>
+      </c:spPr>
+    </c:plotArea>
+    <c:plotVisOnly val="1"/>
+    <c:dispBlanksAs val="gap"/>
+    <c:extLst>
+      <c:ext xmlns:c16r3="http://schemas.microsoft.com/office/drawing/2017/03/chart" uri="{56B9EC1D-385E-4148-901F-78D8002777C0}">
+        <c16r3:dataDisplayOptions16>
+          <c16r3:dispNaAsBlank val="1"/>
+        </c16r3:dataDisplayOptions16>
+      </c:ext>
+    </c:extLst>
+    <c:showDLblsOverMax val="0"/>
+  </c:chart>
+  <c:spPr>
+    <a:noFill/>
+    <a:ln>
+      <a:noFill/>
+    </a:ln>
+    <a:effectLst/>
+  </c:spPr>
+  <c:txPr>
+    <a:bodyPr/>
+    <a:lstStyle/>
+    <a:p>
+      <a:pPr>
+        <a:defRPr/>
+      </a:pPr>
+      <a:endParaRPr lang="zh-HK"/>
+    </a:p>
+  </c:txPr>
+  <c:externalData r:id="rId3">
+    <c:autoUpdate val="0"/>
+  </c:externalData>
+</c:chartSpace>
+</file>
+
+<file path=ppt/charts/colors1.xml><?xml version="1.0" encoding="utf-8"?>
+<cs:colorStyle xmlns:cs="http://schemas.microsoft.com/office/drawing/2012/chartStyle" xmlns:a="http://schemas.openxmlformats.org/drawingml/2006/main" meth="cycle" id="10">
+  <a:schemeClr val="accent1"/>
+  <a:schemeClr val="accent2"/>
+  <a:schemeClr val="accent3"/>
+  <a:schemeClr val="accent4"/>
+  <a:schemeClr val="accent5"/>
+  <a:schemeClr val="accent6"/>
+  <cs:variation/>
+  <cs:variation>
+    <a:lumMod val="60000"/>
+  </cs:variation>
+  <cs:variation>
+    <a:lumMod val="80000"/>
+    <a:lumOff val="20000"/>
+  </cs:variation>
+  <cs:variation>
+    <a:lumMod val="80000"/>
+  </cs:variation>
+  <cs:variation>
+    <a:lumMod val="60000"/>
+    <a:lumOff val="40000"/>
+  </cs:variation>
+  <cs:variation>
+    <a:lumMod val="50000"/>
+  </cs:variation>
+  <cs:variation>
+    <a:lumMod val="70000"/>
+    <a:lumOff val="30000"/>
+  </cs:variation>
+  <cs:variation>
+    <a:lumMod val="70000"/>
+  </cs:variation>
+  <cs:variation>
+    <a:lumMod val="50000"/>
+    <a:lumOff val="50000"/>
+  </cs:variation>
+</cs:colorStyle>
+</file>
+
+<file path=ppt/charts/style1.xml><?xml version="1.0" encoding="utf-8"?>
+<cs:chartStyle xmlns:cs="http://schemas.microsoft.com/office/drawing/2012/chartStyle" xmlns:a="http://schemas.openxmlformats.org/drawingml/2006/main" id="215">
+  <cs:axisTitle>
+    <cs:lnRef idx="0"/>
+    <cs:fillRef idx="0"/>
+    <cs:effectRef idx="0"/>
+    <cs:fontRef idx="minor">
+      <a:schemeClr val="tx1">
+        <a:lumMod val="65000"/>
+        <a:lumOff val="35000"/>
+      </a:schemeClr>
+    </cs:fontRef>
+    <cs:defRPr sz="1197" kern="1200" cap="all"/>
+  </cs:axisTitle>
+  <cs:categoryAxis>
+    <cs:lnRef idx="0"/>
+    <cs:fillRef idx="0"/>
+    <cs:effectRef idx="0"/>
+    <cs:fontRef idx="minor">
+      <a:schemeClr val="tx1">
+        <a:lumMod val="65000"/>
+        <a:lumOff val="35000"/>
+      </a:schemeClr>
+    </cs:fontRef>
+    <cs:spPr>
+      <a:ln w="15875" cap="flat" cmpd="sng" algn="ctr">
+        <a:solidFill>
+          <a:schemeClr val="tx1">
+            <a:lumMod val="25000"/>
+            <a:lumOff val="75000"/>
+          </a:schemeClr>
+        </a:solidFill>
+        <a:round/>
+      </a:ln>
+    </cs:spPr>
+    <cs:defRPr sz="1197" kern="1200" cap="none" spc="20" normalizeH="0" baseline="0"/>
+  </cs:categoryAxis>
+  <cs:chartArea mods="allowNoFillOverride allowNoLineOverride">
+    <cs:lnRef idx="0"/>
+    <cs:fillRef idx="0"/>
+    <cs:effectRef idx="0"/>
+    <cs:fontRef idx="minor">
+      <a:schemeClr val="dk1"/>
+    </cs:fontRef>
+    <cs:spPr>
+      <a:solidFill>
+        <a:schemeClr val="lt1"/>
+      </a:solidFill>
+      <a:ln w="9525" cap="flat" cmpd="sng" algn="ctr">
+        <a:solidFill>
+          <a:schemeClr val="tx1">
+            <a:lumMod val="15000"/>
+            <a:lumOff val="85000"/>
+          </a:schemeClr>
+        </a:solidFill>
+        <a:round/>
+      </a:ln>
+    </cs:spPr>
+    <cs:defRPr sz="1197" kern="1200"/>
+  </cs:chartArea>
+  <cs:dataLabel>
+    <cs:lnRef idx="0"/>
+    <cs:fillRef idx="0"/>
+    <cs:effectRef idx="0"/>
+    <cs:fontRef idx="minor">
+      <a:schemeClr val="tx1">
+        <a:lumMod val="75000"/>
+        <a:lumOff val="25000"/>
+      </a:schemeClr>
+    </cs:fontRef>
+    <cs:defRPr sz="1197" kern="1200"/>
+  </cs:dataLabel>
+  <cs:dataLabelCallout>
+    <cs:lnRef idx="0"/>
+    <cs:fillRef idx="0"/>
+    <cs:effectRef idx="0"/>
+    <cs:fontRef idx="minor">
+      <a:schemeClr val="bg1"/>
+    </cs:fontRef>
+    <cs:spPr>
+      <a:solidFill>
+        <a:schemeClr val="tx1">
+          <a:lumMod val="50000"/>
+          <a:lumOff val="50000"/>
+        </a:schemeClr>
+      </a:solidFill>
+    </cs:spPr>
+    <cs:defRPr sz="1197" kern="1200"/>
+    <cs:bodyPr rot="0" spcFirstLastPara="1" vertOverflow="clip" horzOverflow="clip" vert="horz" wrap="square" lIns="36576" tIns="18288" rIns="36576" bIns="18288" anchor="ctr" anchorCtr="1">
+      <a:spAutoFit/>
+    </cs:bodyPr>
+  </cs:dataLabelCallout>
+  <cs:dataPoint>
+    <cs:lnRef idx="0"/>
+    <cs:fillRef idx="0">
+      <cs:styleClr val="auto"/>
+    </cs:fillRef>
+    <cs:effectRef idx="0"/>
+    <cs:fontRef idx="minor">
+      <a:schemeClr val="dk1"/>
+    </cs:fontRef>
+    <cs:spPr>
+      <a:solidFill>
+        <a:schemeClr val="phClr">
+          <a:alpha val="70000"/>
+        </a:schemeClr>
+      </a:solidFill>
+    </cs:spPr>
+  </cs:dataPoint>
+  <cs:dataPoint3D>
+    <cs:lnRef idx="0"/>
+    <cs:fillRef idx="0">
+      <cs:styleClr val="auto"/>
+    </cs:fillRef>
+    <cs:effectRef idx="0"/>
+    <cs:fontRef idx="minor">
+      <a:schemeClr val="dk1"/>
+    </cs:fontRef>
+    <cs:spPr>
+      <a:solidFill>
+        <a:schemeClr val="phClr">
+          <a:alpha val="70000"/>
+        </a:schemeClr>
+      </a:solidFill>
+    </cs:spPr>
+  </cs:dataPoint3D>
+  <cs:dataPointLine>
+    <cs:lnRef idx="0">
+      <cs:styleClr val="auto"/>
+    </cs:lnRef>
+    <cs:fillRef idx="0"/>
+    <cs:effectRef idx="0"/>
+    <cs:fontRef idx="minor">
+      <a:schemeClr val="dk1"/>
+    </cs:fontRef>
+    <cs:spPr>
+      <a:ln w="28575" cap="rnd">
+        <a:solidFill>
+          <a:schemeClr val="phClr">
+            <a:alpha val="70000"/>
+          </a:schemeClr>
+        </a:solidFill>
+        <a:round/>
+      </a:ln>
+    </cs:spPr>
+  </cs:dataPointLine>
+  <cs:dataPointMarker>
+    <cs:lnRef idx="0"/>
+    <cs:fillRef idx="0">
+      <cs:styleClr val="auto"/>
+    </cs:fillRef>
+    <cs:effectRef idx="0"/>
+    <cs:fontRef idx="minor">
+      <a:schemeClr val="dk1"/>
+    </cs:fontRef>
+    <cs:spPr>
+      <a:solidFill>
+        <a:schemeClr val="phClr">
+          <a:alpha val="70000"/>
+        </a:schemeClr>
+      </a:solidFill>
+    </cs:spPr>
+  </cs:dataPointMarker>
+  <cs:dataPointMarkerLayout symbol="circle" size="6"/>
+  <cs:dataPointWireframe>
+    <cs:lnRef idx="0">
+      <cs:styleClr val="auto"/>
+    </cs:lnRef>
+    <cs:fillRef idx="0"/>
+    <cs:effectRef idx="0"/>
+    <cs:fontRef idx="minor">
+      <a:schemeClr val="dk1"/>
+    </cs:fontRef>
+    <cs:spPr>
+      <a:ln w="9525" cap="rnd">
+        <a:solidFill>
+          <a:schemeClr val="phClr"/>
+        </a:solidFill>
+        <a:round/>
+      </a:ln>
+    </cs:spPr>
+  </cs:dataPointWireframe>
+  <cs:dataTable>
+    <cs:lnRef idx="0"/>
+    <cs:fillRef idx="0"/>
+    <cs:effectRef idx="0"/>
+    <cs:fontRef idx="minor">
+      <a:schemeClr val="tx1">
+        <a:lumMod val="65000"/>
+        <a:lumOff val="35000"/>
+      </a:schemeClr>
+    </cs:fontRef>
+    <cs:spPr>
+      <a:ln w="9525">
+        <a:solidFill>
+          <a:schemeClr val="tx1">
+            <a:lumMod val="15000"/>
+            <a:lumOff val="85000"/>
+          </a:schemeClr>
+        </a:solidFill>
+      </a:ln>
+    </cs:spPr>
+    <cs:defRPr sz="1197" kern="1200"/>
+  </cs:dataTable>
+  <cs:downBar>
+    <cs:lnRef idx="0"/>
+    <cs:fillRef idx="0"/>
+    <cs:effectRef idx="0"/>
+    <cs:fontRef idx="minor">
+      <a:schemeClr val="dk1"/>
+    </cs:fontRef>
+    <cs:spPr>
+      <a:solidFill>
+        <a:schemeClr val="dk1">
+          <a:lumMod val="75000"/>
+          <a:lumOff val="25000"/>
+        </a:schemeClr>
+      </a:solidFill>
+      <a:ln w="9525">
+        <a:solidFill>
+          <a:schemeClr val="tx1">
+            <a:lumMod val="65000"/>
+            <a:lumOff val="35000"/>
+          </a:schemeClr>
+        </a:solidFill>
+      </a:ln>
+    </cs:spPr>
+  </cs:downBar>
+  <cs:dropLine>
+    <cs:lnRef idx="0"/>
+    <cs:fillRef idx="0"/>
+    <cs:effectRef idx="0"/>
+    <cs:fontRef idx="minor">
+      <a:schemeClr val="dk1"/>
+    </cs:fontRef>
+    <cs:spPr>
+      <a:ln w="9525">
+        <a:solidFill>
+          <a:schemeClr val="tx1">
+            <a:lumMod val="35000"/>
+            <a:lumOff val="65000"/>
+          </a:schemeClr>
+        </a:solidFill>
+        <a:round/>
+      </a:ln>
+    </cs:spPr>
+  </cs:dropLine>
+  <cs:errorBar>
+    <cs:lnRef idx="0"/>
+    <cs:fillRef idx="0"/>
+    <cs:effectRef idx="0"/>
+    <cs:fontRef idx="minor">
+      <a:schemeClr val="dk1"/>
+    </cs:fontRef>
+    <cs:spPr>
+      <a:ln w="9525">
+        <a:solidFill>
+          <a:schemeClr val="tx1">
+            <a:lumMod val="65000"/>
+            <a:lumOff val="35000"/>
+          </a:schemeClr>
+        </a:solidFill>
+        <a:round/>
+      </a:ln>
+    </cs:spPr>
+  </cs:errorBar>
+  <cs:floor>
+    <cs:lnRef idx="0"/>
+    <cs:fillRef idx="0"/>
+    <cs:effectRef idx="0"/>
+    <cs:fontRef idx="minor">
+      <a:schemeClr val="dk1"/>
+    </cs:fontRef>
+  </cs:floor>
+  <cs:gridlineMajor>
+    <cs:lnRef idx="0"/>
+    <cs:fillRef idx="0"/>
+    <cs:effectRef idx="0"/>
+    <cs:fontRef idx="minor">
+      <a:schemeClr val="dk1"/>
+    </cs:fontRef>
+    <cs:spPr>
+      <a:ln w="9525" cap="flat" cmpd="sng" algn="ctr">
+        <a:solidFill>
+          <a:schemeClr val="tx1">
+            <a:lumMod val="5000"/>
+            <a:lumOff val="95000"/>
+          </a:schemeClr>
+        </a:solidFill>
+        <a:round/>
+      </a:ln>
+    </cs:spPr>
+  </cs:gridlineMajor>
+  <cs:gridlineMinor>
+    <cs:lnRef idx="0"/>
+    <cs:fillRef idx="0"/>
+    <cs:effectRef idx="0"/>
+    <cs:fontRef idx="minor">
+      <a:schemeClr val="dk1"/>
+    </cs:fontRef>
+    <cs:spPr>
+      <a:ln>
+        <a:solidFill>
+          <a:schemeClr val="tx1">
+            <a:lumMod val="5000"/>
+            <a:lumOff val="95000"/>
+          </a:schemeClr>
+        </a:solidFill>
+      </a:ln>
+    </cs:spPr>
+  </cs:gridlineMinor>
+  <cs:hiLoLine>
+    <cs:lnRef idx="0"/>
+    <cs:fillRef idx="0"/>
+    <cs:effectRef idx="0"/>
+    <cs:fontRef idx="minor">
+      <a:schemeClr val="dk1"/>
+    </cs:fontRef>
+    <cs:spPr>
+      <a:ln w="9525">
+        <a:solidFill>
+          <a:schemeClr val="tx1">
+            <a:lumMod val="35000"/>
+            <a:lumOff val="65000"/>
+          </a:schemeClr>
+        </a:solidFill>
+        <a:round/>
+      </a:ln>
+    </cs:spPr>
+  </cs:hiLoLine>
+  <cs:leaderLine>
+    <cs:lnRef idx="0"/>
+    <cs:fillRef idx="0"/>
+    <cs:effectRef idx="0"/>
+    <cs:fontRef idx="minor">
+      <a:schemeClr val="dk1"/>
+    </cs:fontRef>
+    <cs:spPr>
+      <a:ln w="9525">
+        <a:solidFill>
+          <a:schemeClr val="tx1">
+            <a:lumMod val="35000"/>
+            <a:lumOff val="65000"/>
+          </a:schemeClr>
+        </a:solidFill>
+      </a:ln>
+    </cs:spPr>
+  </cs:leaderLine>
+  <cs:legend>
+    <cs:lnRef idx="0"/>
+    <cs:fillRef idx="0"/>
+    <cs:effectRef idx="0"/>
+    <cs:fontRef idx="minor">
+      <a:schemeClr val="tx1">
+        <a:lumMod val="65000"/>
+        <a:lumOff val="35000"/>
+      </a:schemeClr>
+    </cs:fontRef>
+    <cs:defRPr sz="1197" kern="1200" baseline="0"/>
+  </cs:legend>
+  <cs:plotArea mods="allowNoFillOverride allowNoLineOverride">
+    <cs:lnRef idx="0"/>
+    <cs:fillRef idx="0"/>
+    <cs:effectRef idx="0"/>
+    <cs:fontRef idx="minor">
+      <a:schemeClr val="dk1"/>
+    </cs:fontRef>
+  </cs:plotArea>
+  <cs:plotArea3D mods="allowNoFillOverride allowNoLineOverride">
+    <cs:lnRef idx="0"/>
+    <cs:fillRef idx="0"/>
+    <cs:effectRef idx="0"/>
+    <cs:fontRef idx="minor">
+      <a:schemeClr val="dk1"/>
+    </cs:fontRef>
+  </cs:plotArea3D>
+  <cs:seriesAxis>
+    <cs:lnRef idx="0"/>
+    <cs:fillRef idx="0"/>
+    <cs:effectRef idx="0"/>
+    <cs:fontRef idx="minor">
+      <a:schemeClr val="tx1">
+        <a:lumMod val="65000"/>
+        <a:lumOff val="35000"/>
+      </a:schemeClr>
+    </cs:fontRef>
+    <cs:defRPr sz="1197" kern="1200"/>
+  </cs:seriesAxis>
+  <cs:seriesLine>
+    <cs:lnRef idx="0"/>
+    <cs:fillRef idx="0"/>
+    <cs:effectRef idx="0"/>
+    <cs:fontRef idx="minor">
+      <a:schemeClr val="dk1"/>
+    </cs:fontRef>
+    <cs:spPr>
+      <a:ln w="9525">
+        <a:solidFill>
+          <a:schemeClr val="tx1">
+            <a:lumMod val="35000"/>
+            <a:lumOff val="65000"/>
+          </a:schemeClr>
+        </a:solidFill>
+        <a:round/>
+      </a:ln>
+    </cs:spPr>
+  </cs:seriesLine>
+  <cs:title>
+    <cs:lnRef idx="0"/>
+    <cs:fillRef idx="0"/>
+    <cs:effectRef idx="0"/>
+    <cs:fontRef idx="major">
+      <a:schemeClr val="tx1">
+        <a:lumMod val="65000"/>
+        <a:lumOff val="35000"/>
+      </a:schemeClr>
+    </cs:fontRef>
+    <cs:defRPr sz="2128" b="0" i="0" kern="1200" cap="none" spc="50" normalizeH="0" baseline="0"/>
+  </cs:title>
+  <cs:trendline>
+    <cs:lnRef idx="0">
+      <cs:styleClr val="auto"/>
+    </cs:lnRef>
+    <cs:fillRef idx="0"/>
+    <cs:effectRef idx="0"/>
+    <cs:fontRef idx="minor">
+      <a:schemeClr val="dk1"/>
+    </cs:fontRef>
+    <cs:spPr>
+      <a:ln w="15875" cap="rnd">
+        <a:solidFill>
+          <a:schemeClr val="phClr"/>
+        </a:solidFill>
+      </a:ln>
+    </cs:spPr>
+  </cs:trendline>
+  <cs:trendlineLabel>
+    <cs:lnRef idx="0"/>
+    <cs:fillRef idx="0"/>
+    <cs:effectRef idx="0"/>
+    <cs:fontRef idx="minor">
+      <a:schemeClr val="tx1">
+        <a:lumMod val="65000"/>
+        <a:lumOff val="35000"/>
+      </a:schemeClr>
+    </cs:fontRef>
+    <cs:defRPr sz="1197" kern="1200"/>
+  </cs:trendlineLabel>
+  <cs:upBar>
+    <cs:lnRef idx="0"/>
+    <cs:fillRef idx="0"/>
+    <cs:effectRef idx="0"/>
+    <cs:fontRef idx="minor">
+      <a:schemeClr val="dk1"/>
+    </cs:fontRef>
+    <cs:spPr>
+      <a:solidFill>
+        <a:schemeClr val="lt1"/>
+      </a:solidFill>
+      <a:ln w="9525">
+        <a:solidFill>
+          <a:schemeClr val="tx1">
+            <a:lumMod val="65000"/>
+            <a:lumOff val="35000"/>
+          </a:schemeClr>
+        </a:solidFill>
+      </a:ln>
+    </cs:spPr>
+  </cs:upBar>
+  <cs:valueAxis>
+    <cs:lnRef idx="0"/>
+    <cs:fillRef idx="0"/>
+    <cs:effectRef idx="0"/>
+    <cs:fontRef idx="minor">
+      <a:schemeClr val="tx1">
+        <a:lumMod val="65000"/>
+        <a:lumOff val="35000"/>
+      </a:schemeClr>
+    </cs:fontRef>
+    <cs:defRPr sz="1197" kern="1200" spc="20" baseline="0"/>
+  </cs:valueAxis>
+  <cs:wall>
+    <cs:lnRef idx="0"/>
+    <cs:fillRef idx="0"/>
+    <cs:effectRef idx="0"/>
+    <cs:fontRef idx="minor">
+      <a:schemeClr val="dk1"/>
+    </cs:fontRef>
+  </cs:wall>
+</cs:chartStyle>
+</file>
+
 <file path=ppt/slideLayouts/slideLayout1.xml><?xml version="1.0" encoding="utf-8"?>
 <p:sldLayout xmlns:a="http://schemas.openxmlformats.org/drawingml/2006/main" xmlns:r="http://schemas.openxmlformats.org/officeDocument/2006/relationships" xmlns:p="http://schemas.openxmlformats.org/presentationml/2006/main" type="title" preserve="1">
   <p:cSld name="Title Slide">
@@ -264,7 +1090,7 @@
           <a:p>
             <a:fld id="{ED0FC01E-52E7-E248-9225-B6E184C589D0}" type="datetimeFigureOut">
               <a:rPr lang="en-US" smtClean="0"/>
-              <a:t>11/21/2024</a:t>
+              <a:t>11/22/2024</a:t>
             </a:fld>
             <a:endParaRPr lang="en-US"/>
           </a:p>
@@ -464,7 +1290,7 @@
           <a:p>
             <a:fld id="{ED0FC01E-52E7-E248-9225-B6E184C589D0}" type="datetimeFigureOut">
               <a:rPr lang="en-US" smtClean="0"/>
-              <a:t>11/21/2024</a:t>
+              <a:t>11/22/2024</a:t>
             </a:fld>
             <a:endParaRPr lang="en-US"/>
           </a:p>
@@ -674,7 +1500,7 @@
           <a:p>
             <a:fld id="{ED0FC01E-52E7-E248-9225-B6E184C589D0}" type="datetimeFigureOut">
               <a:rPr lang="en-US" smtClean="0"/>
-              <a:t>11/21/2024</a:t>
+              <a:t>11/22/2024</a:t>
             </a:fld>
             <a:endParaRPr lang="en-US"/>
           </a:p>
@@ -874,7 +1700,7 @@
           <a:p>
             <a:fld id="{ED0FC01E-52E7-E248-9225-B6E184C589D0}" type="datetimeFigureOut">
               <a:rPr lang="en-US" smtClean="0"/>
-              <a:t>11/21/2024</a:t>
+              <a:t>11/22/2024</a:t>
             </a:fld>
             <a:endParaRPr lang="en-US"/>
           </a:p>
@@ -1150,7 +1976,7 @@
           <a:p>
             <a:fld id="{ED0FC01E-52E7-E248-9225-B6E184C589D0}" type="datetimeFigureOut">
               <a:rPr lang="en-US" smtClean="0"/>
-              <a:t>11/21/2024</a:t>
+              <a:t>11/22/2024</a:t>
             </a:fld>
             <a:endParaRPr lang="en-US"/>
           </a:p>
@@ -1418,7 +2244,7 @@
           <a:p>
             <a:fld id="{ED0FC01E-52E7-E248-9225-B6E184C589D0}" type="datetimeFigureOut">
               <a:rPr lang="en-US" smtClean="0"/>
-              <a:t>11/21/2024</a:t>
+              <a:t>11/22/2024</a:t>
             </a:fld>
             <a:endParaRPr lang="en-US"/>
           </a:p>
@@ -1833,7 +2659,7 @@
           <a:p>
             <a:fld id="{ED0FC01E-52E7-E248-9225-B6E184C589D0}" type="datetimeFigureOut">
               <a:rPr lang="en-US" smtClean="0"/>
-              <a:t>11/21/2024</a:t>
+              <a:t>11/22/2024</a:t>
             </a:fld>
             <a:endParaRPr lang="en-US"/>
           </a:p>
@@ -1975,7 +2801,7 @@
           <a:p>
             <a:fld id="{ED0FC01E-52E7-E248-9225-B6E184C589D0}" type="datetimeFigureOut">
               <a:rPr lang="en-US" smtClean="0"/>
-              <a:t>11/21/2024</a:t>
+              <a:t>11/22/2024</a:t>
             </a:fld>
             <a:endParaRPr lang="en-US"/>
           </a:p>
@@ -2088,7 +2914,7 @@
           <a:p>
             <a:fld id="{ED0FC01E-52E7-E248-9225-B6E184C589D0}" type="datetimeFigureOut">
               <a:rPr lang="en-US" smtClean="0"/>
-              <a:t>11/21/2024</a:t>
+              <a:t>11/22/2024</a:t>
             </a:fld>
             <a:endParaRPr lang="en-US"/>
           </a:p>
@@ -2401,7 +3227,7 @@
           <a:p>
             <a:fld id="{ED0FC01E-52E7-E248-9225-B6E184C589D0}" type="datetimeFigureOut">
               <a:rPr lang="en-US" smtClean="0"/>
-              <a:t>11/21/2024</a:t>
+              <a:t>11/22/2024</a:t>
             </a:fld>
             <a:endParaRPr lang="en-US"/>
           </a:p>
@@ -2690,7 +3516,7 @@
           <a:p>
             <a:fld id="{ED0FC01E-52E7-E248-9225-B6E184C589D0}" type="datetimeFigureOut">
               <a:rPr lang="en-US" smtClean="0"/>
-              <a:t>11/21/2024</a:t>
+              <a:t>11/22/2024</a:t>
             </a:fld>
             <a:endParaRPr lang="en-US"/>
           </a:p>
@@ -2933,7 +3759,7 @@
           <a:p>
             <a:fld id="{ED0FC01E-52E7-E248-9225-B6E184C589D0}" type="datetimeFigureOut">
               <a:rPr lang="en-US" smtClean="0"/>
-              <a:t>11/21/2024</a:t>
+              <a:t>11/22/2024</a:t>
             </a:fld>
             <a:endParaRPr lang="en-US"/>
           </a:p>
@@ -7402,6 +8228,905 @@
 </p:sld>
 </file>
 
+<file path=ppt/slides/slide5.xml><?xml version="1.0" encoding="utf-8"?>
+<p:sld xmlns:a="http://schemas.openxmlformats.org/drawingml/2006/main" xmlns:r="http://schemas.openxmlformats.org/officeDocument/2006/relationships" xmlns:p="http://schemas.openxmlformats.org/presentationml/2006/main">
+  <p:cSld>
+    <p:spTree>
+      <p:nvGrpSpPr>
+        <p:cNvPr id="1" name=""/>
+        <p:cNvGrpSpPr/>
+        <p:nvPr/>
+      </p:nvGrpSpPr>
+      <p:grpSpPr>
+        <a:xfrm>
+          <a:off x="0" y="0"/>
+          <a:ext cx="0" cy="0"/>
+          <a:chOff x="0" y="0"/>
+          <a:chExt cx="0" cy="0"/>
+        </a:xfrm>
+      </p:grpSpPr>
+      <p:grpSp>
+        <p:nvGrpSpPr>
+          <p:cNvPr id="70" name="群組 69">
+            <a:extLst>
+              <a:ext uri="{FF2B5EF4-FFF2-40B4-BE49-F238E27FC236}">
+                <a16:creationId xmlns:a16="http://schemas.microsoft.com/office/drawing/2014/main" id="{33C1C22A-FA65-48FA-8972-60FEB5BC3D04}"/>
+              </a:ext>
+            </a:extLst>
+          </p:cNvPr>
+          <p:cNvGrpSpPr/>
+          <p:nvPr/>
+        </p:nvGrpSpPr>
+        <p:grpSpPr>
+          <a:xfrm>
+            <a:off x="1735582" y="1265808"/>
+            <a:ext cx="6103397" cy="2803868"/>
+            <a:chOff x="1735582" y="1265808"/>
+            <a:chExt cx="6103397" cy="2803868"/>
+          </a:xfrm>
+        </p:grpSpPr>
+        <p:sp>
+          <p:nvSpPr>
+            <p:cNvPr id="4" name="流程圖: 程序 3">
+              <a:extLst>
+                <a:ext uri="{FF2B5EF4-FFF2-40B4-BE49-F238E27FC236}">
+                  <a16:creationId xmlns:a16="http://schemas.microsoft.com/office/drawing/2014/main" id="{D81F3E0D-61E2-4DA4-894B-2F8FA3BE06CF}"/>
+                </a:ext>
+              </a:extLst>
+            </p:cNvPr>
+            <p:cNvSpPr/>
+            <p:nvPr/>
+          </p:nvSpPr>
+          <p:spPr>
+            <a:xfrm>
+              <a:off x="4136991" y="1310197"/>
+              <a:ext cx="1624616" cy="514904"/>
+            </a:xfrm>
+            <a:prstGeom prst="flowChartProcess">
+              <a:avLst/>
+            </a:prstGeom>
+          </p:spPr>
+          <p:style>
+            <a:lnRef idx="2">
+              <a:schemeClr val="accent1">
+                <a:shade val="50000"/>
+              </a:schemeClr>
+            </a:lnRef>
+            <a:fillRef idx="1">
+              <a:schemeClr val="accent1"/>
+            </a:fillRef>
+            <a:effectRef idx="0">
+              <a:schemeClr val="accent1"/>
+            </a:effectRef>
+            <a:fontRef idx="minor">
+              <a:schemeClr val="lt1"/>
+            </a:fontRef>
+          </p:style>
+          <p:txBody>
+            <a:bodyPr rtlCol="0" anchor="ctr"/>
+            <a:lstStyle/>
+            <a:p>
+              <a:r>
+                <a:rPr lang="en-US" altLang="zh-HK" dirty="0" err="1"/>
+                <a:t>Train_test_split</a:t>
+              </a:r>
+              <a:endParaRPr lang="en-US" altLang="zh-HK" dirty="0"/>
+            </a:p>
+          </p:txBody>
+        </p:sp>
+        <p:sp>
+          <p:nvSpPr>
+            <p:cNvPr id="5" name="流程圖: 準備作業 4">
+              <a:extLst>
+                <a:ext uri="{FF2B5EF4-FFF2-40B4-BE49-F238E27FC236}">
+                  <a16:creationId xmlns:a16="http://schemas.microsoft.com/office/drawing/2014/main" id="{7DAF94ED-C063-47DA-915A-A49496032CE0}"/>
+                </a:ext>
+              </a:extLst>
+            </p:cNvPr>
+            <p:cNvSpPr/>
+            <p:nvPr/>
+          </p:nvSpPr>
+          <p:spPr>
+            <a:xfrm>
+              <a:off x="1735582" y="1274686"/>
+              <a:ext cx="2130641" cy="585927"/>
+            </a:xfrm>
+            <a:prstGeom prst="flowChartPreparation">
+              <a:avLst/>
+            </a:prstGeom>
+          </p:spPr>
+          <p:style>
+            <a:lnRef idx="2">
+              <a:schemeClr val="accent1">
+                <a:shade val="50000"/>
+              </a:schemeClr>
+            </a:lnRef>
+            <a:fillRef idx="1">
+              <a:schemeClr val="accent1"/>
+            </a:fillRef>
+            <a:effectRef idx="0">
+              <a:schemeClr val="accent1"/>
+            </a:effectRef>
+            <a:fontRef idx="minor">
+              <a:schemeClr val="lt1"/>
+            </a:fontRef>
+          </p:style>
+          <p:txBody>
+            <a:bodyPr rtlCol="0" anchor="ctr"/>
+            <a:lstStyle/>
+            <a:p>
+              <a:pPr algn="ctr"/>
+              <a:r>
+                <a:rPr lang="en-US" altLang="zh-CN" dirty="0"/>
+                <a:t>Data preparation</a:t>
+              </a:r>
+              <a:endParaRPr lang="zh-HK" altLang="en-US" dirty="0"/>
+            </a:p>
+          </p:txBody>
+        </p:sp>
+        <p:sp>
+          <p:nvSpPr>
+            <p:cNvPr id="6" name="流程圖: 程序 5">
+              <a:extLst>
+                <a:ext uri="{FF2B5EF4-FFF2-40B4-BE49-F238E27FC236}">
+                  <a16:creationId xmlns:a16="http://schemas.microsoft.com/office/drawing/2014/main" id="{229CA4F9-0CE0-44FE-A9FC-B6B67C2154C8}"/>
+                </a:ext>
+              </a:extLst>
+            </p:cNvPr>
+            <p:cNvSpPr/>
+            <p:nvPr/>
+          </p:nvSpPr>
+          <p:spPr>
+            <a:xfrm>
+              <a:off x="6476511" y="2367383"/>
+              <a:ext cx="1244104" cy="603682"/>
+            </a:xfrm>
+            <a:prstGeom prst="flowChartProcess">
+              <a:avLst/>
+            </a:prstGeom>
+          </p:spPr>
+          <p:style>
+            <a:lnRef idx="2">
+              <a:schemeClr val="accent1">
+                <a:shade val="50000"/>
+              </a:schemeClr>
+            </a:lnRef>
+            <a:fillRef idx="1">
+              <a:schemeClr val="accent1"/>
+            </a:fillRef>
+            <a:effectRef idx="0">
+              <a:schemeClr val="accent1"/>
+            </a:effectRef>
+            <a:fontRef idx="minor">
+              <a:schemeClr val="lt1"/>
+            </a:fontRef>
+          </p:style>
+          <p:txBody>
+            <a:bodyPr rtlCol="0" anchor="ctr"/>
+            <a:lstStyle/>
+            <a:p>
+              <a:pPr algn="ctr"/>
+              <a:r>
+                <a:rPr lang="en-US" altLang="zh-HK" dirty="0"/>
+                <a:t>Conv1D*2</a:t>
+              </a:r>
+            </a:p>
+          </p:txBody>
+        </p:sp>
+        <p:sp>
+          <p:nvSpPr>
+            <p:cNvPr id="7" name="流程圖: 程序 6">
+              <a:extLst>
+                <a:ext uri="{FF2B5EF4-FFF2-40B4-BE49-F238E27FC236}">
+                  <a16:creationId xmlns:a16="http://schemas.microsoft.com/office/drawing/2014/main" id="{E5D6EB03-B72F-45E6-82CE-C40DC0CC5AB3}"/>
+                </a:ext>
+              </a:extLst>
+            </p:cNvPr>
+            <p:cNvSpPr/>
+            <p:nvPr/>
+          </p:nvSpPr>
+          <p:spPr>
+            <a:xfrm>
+              <a:off x="4287297" y="2367382"/>
+              <a:ext cx="1203542" cy="603682"/>
+            </a:xfrm>
+            <a:prstGeom prst="flowChartProcess">
+              <a:avLst/>
+            </a:prstGeom>
+          </p:spPr>
+          <p:style>
+            <a:lnRef idx="2">
+              <a:schemeClr val="accent1">
+                <a:shade val="50000"/>
+              </a:schemeClr>
+            </a:lnRef>
+            <a:fillRef idx="1">
+              <a:schemeClr val="accent1"/>
+            </a:fillRef>
+            <a:effectRef idx="0">
+              <a:schemeClr val="accent1"/>
+            </a:effectRef>
+            <a:fontRef idx="minor">
+              <a:schemeClr val="lt1"/>
+            </a:fontRef>
+          </p:style>
+          <p:txBody>
+            <a:bodyPr rtlCol="0" anchor="ctr"/>
+            <a:lstStyle/>
+            <a:p>
+              <a:pPr algn="ctr"/>
+              <a:r>
+                <a:rPr lang="en-US" altLang="zh-HK" dirty="0"/>
+                <a:t>Dropout</a:t>
+              </a:r>
+            </a:p>
+          </p:txBody>
+        </p:sp>
+        <p:sp>
+          <p:nvSpPr>
+            <p:cNvPr id="8" name="流程圖: 程序 7">
+              <a:extLst>
+                <a:ext uri="{FF2B5EF4-FFF2-40B4-BE49-F238E27FC236}">
+                  <a16:creationId xmlns:a16="http://schemas.microsoft.com/office/drawing/2014/main" id="{24BD5543-8D84-44F6-AA65-83E5BC86C0B8}"/>
+                </a:ext>
+              </a:extLst>
+            </p:cNvPr>
+            <p:cNvSpPr/>
+            <p:nvPr/>
+          </p:nvSpPr>
+          <p:spPr>
+            <a:xfrm>
+              <a:off x="1988594" y="2367383"/>
+              <a:ext cx="1624616" cy="603682"/>
+            </a:xfrm>
+            <a:prstGeom prst="flowChartProcess">
+              <a:avLst/>
+            </a:prstGeom>
+          </p:spPr>
+          <p:style>
+            <a:lnRef idx="2">
+              <a:schemeClr val="accent1">
+                <a:shade val="50000"/>
+              </a:schemeClr>
+            </a:lnRef>
+            <a:fillRef idx="1">
+              <a:schemeClr val="accent1"/>
+            </a:fillRef>
+            <a:effectRef idx="0">
+              <a:schemeClr val="accent1"/>
+            </a:effectRef>
+            <a:fontRef idx="minor">
+              <a:schemeClr val="lt1"/>
+            </a:fontRef>
+          </p:style>
+          <p:txBody>
+            <a:bodyPr rtlCol="0" anchor="ctr"/>
+            <a:lstStyle/>
+            <a:p>
+              <a:pPr algn="ctr"/>
+              <a:r>
+                <a:rPr lang="en-US" altLang="zh-HK" dirty="0"/>
+                <a:t>MaxPooling1D</a:t>
+              </a:r>
+            </a:p>
+          </p:txBody>
+        </p:sp>
+        <p:sp>
+          <p:nvSpPr>
+            <p:cNvPr id="9" name="流程圖: 程序 8">
+              <a:extLst>
+                <a:ext uri="{FF2B5EF4-FFF2-40B4-BE49-F238E27FC236}">
+                  <a16:creationId xmlns:a16="http://schemas.microsoft.com/office/drawing/2014/main" id="{62B1CE1A-C933-4555-B647-3C1DBAF2AC3B}"/>
+                </a:ext>
+              </a:extLst>
+            </p:cNvPr>
+            <p:cNvSpPr/>
+            <p:nvPr/>
+          </p:nvSpPr>
+          <p:spPr>
+            <a:xfrm>
+              <a:off x="2334826" y="3465994"/>
+              <a:ext cx="1112669" cy="603682"/>
+            </a:xfrm>
+            <a:prstGeom prst="flowChartProcess">
+              <a:avLst/>
+            </a:prstGeom>
+          </p:spPr>
+          <p:style>
+            <a:lnRef idx="2">
+              <a:schemeClr val="accent1">
+                <a:shade val="50000"/>
+              </a:schemeClr>
+            </a:lnRef>
+            <a:fillRef idx="1">
+              <a:schemeClr val="accent1"/>
+            </a:fillRef>
+            <a:effectRef idx="0">
+              <a:schemeClr val="accent1"/>
+            </a:effectRef>
+            <a:fontRef idx="minor">
+              <a:schemeClr val="lt1"/>
+            </a:fontRef>
+          </p:style>
+          <p:txBody>
+            <a:bodyPr rtlCol="0" anchor="ctr"/>
+            <a:lstStyle/>
+            <a:p>
+              <a:pPr algn="ctr"/>
+              <a:r>
+                <a:rPr lang="en-US" altLang="zh-HK" dirty="0"/>
+                <a:t>Flatten</a:t>
+              </a:r>
+            </a:p>
+          </p:txBody>
+        </p:sp>
+        <p:sp>
+          <p:nvSpPr>
+            <p:cNvPr id="10" name="流程圖: 程序 9">
+              <a:extLst>
+                <a:ext uri="{FF2B5EF4-FFF2-40B4-BE49-F238E27FC236}">
+                  <a16:creationId xmlns:a16="http://schemas.microsoft.com/office/drawing/2014/main" id="{726C333B-E778-469C-BAC9-35FADC542127}"/>
+                </a:ext>
+              </a:extLst>
+            </p:cNvPr>
+            <p:cNvSpPr/>
+            <p:nvPr/>
+          </p:nvSpPr>
+          <p:spPr>
+            <a:xfrm>
+              <a:off x="3866223" y="3465994"/>
+              <a:ext cx="1203542" cy="603682"/>
+            </a:xfrm>
+            <a:prstGeom prst="flowChartProcess">
+              <a:avLst/>
+            </a:prstGeom>
+          </p:spPr>
+          <p:style>
+            <a:lnRef idx="2">
+              <a:schemeClr val="accent1">
+                <a:shade val="50000"/>
+              </a:schemeClr>
+            </a:lnRef>
+            <a:fillRef idx="1">
+              <a:schemeClr val="accent1"/>
+            </a:fillRef>
+            <a:effectRef idx="0">
+              <a:schemeClr val="accent1"/>
+            </a:effectRef>
+            <a:fontRef idx="minor">
+              <a:schemeClr val="lt1"/>
+            </a:fontRef>
+          </p:style>
+          <p:txBody>
+            <a:bodyPr rtlCol="0" anchor="ctr"/>
+            <a:lstStyle/>
+            <a:p>
+              <a:pPr algn="ctr"/>
+              <a:r>
+                <a:rPr lang="en-US" altLang="zh-HK" dirty="0"/>
+                <a:t>Neural Network</a:t>
+              </a:r>
+              <a:endParaRPr lang="zh-HK" altLang="en-US" dirty="0"/>
+            </a:p>
+          </p:txBody>
+        </p:sp>
+        <p:sp>
+          <p:nvSpPr>
+            <p:cNvPr id="11" name="流程圖: 結束點 10">
+              <a:extLst>
+                <a:ext uri="{FF2B5EF4-FFF2-40B4-BE49-F238E27FC236}">
+                  <a16:creationId xmlns:a16="http://schemas.microsoft.com/office/drawing/2014/main" id="{284BFB31-0D2D-4A73-B99A-D521D96B9593}"/>
+                </a:ext>
+              </a:extLst>
+            </p:cNvPr>
+            <p:cNvSpPr/>
+            <p:nvPr/>
+          </p:nvSpPr>
+          <p:spPr>
+            <a:xfrm>
+              <a:off x="5664203" y="3550332"/>
+              <a:ext cx="1624615" cy="435006"/>
+            </a:xfrm>
+            <a:prstGeom prst="flowChartTerminator">
+              <a:avLst/>
+            </a:prstGeom>
+          </p:spPr>
+          <p:style>
+            <a:lnRef idx="2">
+              <a:schemeClr val="accent1">
+                <a:shade val="50000"/>
+              </a:schemeClr>
+            </a:lnRef>
+            <a:fillRef idx="1">
+              <a:schemeClr val="accent1"/>
+            </a:fillRef>
+            <a:effectRef idx="0">
+              <a:schemeClr val="accent1"/>
+            </a:effectRef>
+            <a:fontRef idx="minor">
+              <a:schemeClr val="lt1"/>
+            </a:fontRef>
+          </p:style>
+          <p:txBody>
+            <a:bodyPr rtlCol="0" anchor="ctr"/>
+            <a:lstStyle/>
+            <a:p>
+              <a:pPr algn="ctr"/>
+              <a:r>
+                <a:rPr lang="en-US" altLang="zh-HK" dirty="0"/>
+                <a:t>Binary output</a:t>
+              </a:r>
+            </a:p>
+          </p:txBody>
+        </p:sp>
+        <p:sp>
+          <p:nvSpPr>
+            <p:cNvPr id="12" name="流程圖: 程序 11">
+              <a:extLst>
+                <a:ext uri="{FF2B5EF4-FFF2-40B4-BE49-F238E27FC236}">
+                  <a16:creationId xmlns:a16="http://schemas.microsoft.com/office/drawing/2014/main" id="{EBE82A59-7D79-426E-8B8C-2054D92848ED}"/>
+                </a:ext>
+              </a:extLst>
+            </p:cNvPr>
+            <p:cNvSpPr/>
+            <p:nvPr/>
+          </p:nvSpPr>
+          <p:spPr>
+            <a:xfrm>
+              <a:off x="6476511" y="1265808"/>
+              <a:ext cx="1362468" cy="603682"/>
+            </a:xfrm>
+            <a:prstGeom prst="flowChartProcess">
+              <a:avLst/>
+            </a:prstGeom>
+          </p:spPr>
+          <p:style>
+            <a:lnRef idx="2">
+              <a:schemeClr val="accent1">
+                <a:shade val="50000"/>
+              </a:schemeClr>
+            </a:lnRef>
+            <a:fillRef idx="1">
+              <a:schemeClr val="accent1"/>
+            </a:fillRef>
+            <a:effectRef idx="0">
+              <a:schemeClr val="accent1"/>
+            </a:effectRef>
+            <a:fontRef idx="minor">
+              <a:schemeClr val="lt1"/>
+            </a:fontRef>
+          </p:style>
+          <p:txBody>
+            <a:bodyPr rtlCol="0" anchor="ctr"/>
+            <a:lstStyle/>
+            <a:p>
+              <a:pPr algn="ctr"/>
+              <a:r>
+                <a:rPr lang="en-US" altLang="zh-HK" dirty="0"/>
+                <a:t>Standardize</a:t>
+              </a:r>
+            </a:p>
+          </p:txBody>
+        </p:sp>
+        <p:cxnSp>
+          <p:nvCxnSpPr>
+            <p:cNvPr id="14" name="直線單箭頭接點 13">
+              <a:extLst>
+                <a:ext uri="{FF2B5EF4-FFF2-40B4-BE49-F238E27FC236}">
+                  <a16:creationId xmlns:a16="http://schemas.microsoft.com/office/drawing/2014/main" id="{72AA2002-A5E3-412F-82FB-4404B8E55160}"/>
+                </a:ext>
+              </a:extLst>
+            </p:cNvPr>
+            <p:cNvCxnSpPr>
+              <a:stCxn id="5" idx="3"/>
+              <a:endCxn id="4" idx="1"/>
+            </p:cNvCxnSpPr>
+            <p:nvPr/>
+          </p:nvCxnSpPr>
+          <p:spPr>
+            <a:xfrm flipV="1">
+              <a:off x="3866223" y="1567649"/>
+              <a:ext cx="270768" cy="1"/>
+            </a:xfrm>
+            <a:prstGeom prst="straightConnector1">
+              <a:avLst/>
+            </a:prstGeom>
+            <a:ln>
+              <a:tailEnd type="triangle"/>
+            </a:ln>
+          </p:spPr>
+          <p:style>
+            <a:lnRef idx="2">
+              <a:schemeClr val="accent1"/>
+            </a:lnRef>
+            <a:fillRef idx="0">
+              <a:schemeClr val="accent1"/>
+            </a:fillRef>
+            <a:effectRef idx="1">
+              <a:schemeClr val="accent1"/>
+            </a:effectRef>
+            <a:fontRef idx="minor">
+              <a:schemeClr val="tx1"/>
+            </a:fontRef>
+          </p:style>
+        </p:cxnSp>
+        <p:cxnSp>
+          <p:nvCxnSpPr>
+            <p:cNvPr id="16" name="直線單箭頭接點 15">
+              <a:extLst>
+                <a:ext uri="{FF2B5EF4-FFF2-40B4-BE49-F238E27FC236}">
+                  <a16:creationId xmlns:a16="http://schemas.microsoft.com/office/drawing/2014/main" id="{1DFDD7F6-1E39-4F3A-8327-0C9543F92EB5}"/>
+                </a:ext>
+              </a:extLst>
+            </p:cNvPr>
+            <p:cNvCxnSpPr>
+              <a:cxnSpLocks/>
+              <a:stCxn id="4" idx="3"/>
+              <a:endCxn id="12" idx="1"/>
+            </p:cNvCxnSpPr>
+            <p:nvPr/>
+          </p:nvCxnSpPr>
+          <p:spPr>
+            <a:xfrm>
+              <a:off x="5761607" y="1567649"/>
+              <a:ext cx="714904" cy="0"/>
+            </a:xfrm>
+            <a:prstGeom prst="straightConnector1">
+              <a:avLst/>
+            </a:prstGeom>
+            <a:ln>
+              <a:tailEnd type="triangle"/>
+            </a:ln>
+          </p:spPr>
+          <p:style>
+            <a:lnRef idx="2">
+              <a:schemeClr val="accent1"/>
+            </a:lnRef>
+            <a:fillRef idx="0">
+              <a:schemeClr val="accent1"/>
+            </a:fillRef>
+            <a:effectRef idx="1">
+              <a:schemeClr val="accent1"/>
+            </a:effectRef>
+            <a:fontRef idx="minor">
+              <a:schemeClr val="tx1"/>
+            </a:fontRef>
+          </p:style>
+        </p:cxnSp>
+        <p:cxnSp>
+          <p:nvCxnSpPr>
+            <p:cNvPr id="18" name="接點: 肘形 17">
+              <a:extLst>
+                <a:ext uri="{FF2B5EF4-FFF2-40B4-BE49-F238E27FC236}">
+                  <a16:creationId xmlns:a16="http://schemas.microsoft.com/office/drawing/2014/main" id="{B5F89CCD-AE99-4616-9BA0-FCCCCC6971A5}"/>
+                </a:ext>
+              </a:extLst>
+            </p:cNvPr>
+            <p:cNvCxnSpPr>
+              <a:cxnSpLocks/>
+              <a:stCxn id="12" idx="3"/>
+              <a:endCxn id="6" idx="3"/>
+            </p:cNvCxnSpPr>
+            <p:nvPr/>
+          </p:nvCxnSpPr>
+          <p:spPr>
+            <a:xfrm flipH="1">
+              <a:off x="7720615" y="1567649"/>
+              <a:ext cx="118364" cy="1101575"/>
+            </a:xfrm>
+            <a:prstGeom prst="bentConnector3">
+              <a:avLst>
+                <a:gd name="adj1" fmla="val -193133"/>
+              </a:avLst>
+            </a:prstGeom>
+            <a:ln>
+              <a:tailEnd type="triangle"/>
+            </a:ln>
+          </p:spPr>
+          <p:style>
+            <a:lnRef idx="2">
+              <a:schemeClr val="accent1"/>
+            </a:lnRef>
+            <a:fillRef idx="0">
+              <a:schemeClr val="accent1"/>
+            </a:fillRef>
+            <a:effectRef idx="1">
+              <a:schemeClr val="accent1"/>
+            </a:effectRef>
+            <a:fontRef idx="minor">
+              <a:schemeClr val="tx1"/>
+            </a:fontRef>
+          </p:style>
+        </p:cxnSp>
+        <p:cxnSp>
+          <p:nvCxnSpPr>
+            <p:cNvPr id="20" name="直線單箭頭接點 19">
+              <a:extLst>
+                <a:ext uri="{FF2B5EF4-FFF2-40B4-BE49-F238E27FC236}">
+                  <a16:creationId xmlns:a16="http://schemas.microsoft.com/office/drawing/2014/main" id="{9E215FBD-16D0-48BA-8EE3-EB489F81CF53}"/>
+                </a:ext>
+              </a:extLst>
+            </p:cNvPr>
+            <p:cNvCxnSpPr>
+              <a:cxnSpLocks/>
+              <a:stCxn id="6" idx="1"/>
+              <a:endCxn id="7" idx="3"/>
+            </p:cNvCxnSpPr>
+            <p:nvPr/>
+          </p:nvCxnSpPr>
+          <p:spPr>
+            <a:xfrm flipH="1" flipV="1">
+              <a:off x="5490839" y="2669223"/>
+              <a:ext cx="985672" cy="1"/>
+            </a:xfrm>
+            <a:prstGeom prst="straightConnector1">
+              <a:avLst/>
+            </a:prstGeom>
+            <a:ln>
+              <a:tailEnd type="triangle"/>
+            </a:ln>
+          </p:spPr>
+          <p:style>
+            <a:lnRef idx="2">
+              <a:schemeClr val="accent1"/>
+            </a:lnRef>
+            <a:fillRef idx="0">
+              <a:schemeClr val="accent1"/>
+            </a:fillRef>
+            <a:effectRef idx="1">
+              <a:schemeClr val="accent1"/>
+            </a:effectRef>
+            <a:fontRef idx="minor">
+              <a:schemeClr val="tx1"/>
+            </a:fontRef>
+          </p:style>
+        </p:cxnSp>
+        <p:cxnSp>
+          <p:nvCxnSpPr>
+            <p:cNvPr id="22" name="直線單箭頭接點 21">
+              <a:extLst>
+                <a:ext uri="{FF2B5EF4-FFF2-40B4-BE49-F238E27FC236}">
+                  <a16:creationId xmlns:a16="http://schemas.microsoft.com/office/drawing/2014/main" id="{DBF335E8-250F-4E91-9FFB-283331AF2720}"/>
+                </a:ext>
+              </a:extLst>
+            </p:cNvPr>
+            <p:cNvCxnSpPr>
+              <a:cxnSpLocks/>
+              <a:stCxn id="7" idx="1"/>
+              <a:endCxn id="8" idx="3"/>
+            </p:cNvCxnSpPr>
+            <p:nvPr/>
+          </p:nvCxnSpPr>
+          <p:spPr>
+            <a:xfrm flipH="1">
+              <a:off x="3613210" y="2669223"/>
+              <a:ext cx="674087" cy="1"/>
+            </a:xfrm>
+            <a:prstGeom prst="straightConnector1">
+              <a:avLst/>
+            </a:prstGeom>
+            <a:ln>
+              <a:tailEnd type="triangle"/>
+            </a:ln>
+          </p:spPr>
+          <p:style>
+            <a:lnRef idx="2">
+              <a:schemeClr val="accent1"/>
+            </a:lnRef>
+            <a:fillRef idx="0">
+              <a:schemeClr val="accent1"/>
+            </a:fillRef>
+            <a:effectRef idx="1">
+              <a:schemeClr val="accent1"/>
+            </a:effectRef>
+            <a:fontRef idx="minor">
+              <a:schemeClr val="tx1"/>
+            </a:fontRef>
+          </p:style>
+        </p:cxnSp>
+        <p:cxnSp>
+          <p:nvCxnSpPr>
+            <p:cNvPr id="24" name="直線單箭頭接點 23">
+              <a:extLst>
+                <a:ext uri="{FF2B5EF4-FFF2-40B4-BE49-F238E27FC236}">
+                  <a16:creationId xmlns:a16="http://schemas.microsoft.com/office/drawing/2014/main" id="{00D13F79-5CA5-40AD-B4FC-C5C4F097F364}"/>
+                </a:ext>
+              </a:extLst>
+            </p:cNvPr>
+            <p:cNvCxnSpPr>
+              <a:cxnSpLocks/>
+              <a:stCxn id="9" idx="3"/>
+              <a:endCxn id="10" idx="1"/>
+            </p:cNvCxnSpPr>
+            <p:nvPr/>
+          </p:nvCxnSpPr>
+          <p:spPr>
+            <a:xfrm>
+              <a:off x="3447495" y="3767835"/>
+              <a:ext cx="418728" cy="0"/>
+            </a:xfrm>
+            <a:prstGeom prst="straightConnector1">
+              <a:avLst/>
+            </a:prstGeom>
+            <a:ln>
+              <a:tailEnd type="triangle"/>
+            </a:ln>
+          </p:spPr>
+          <p:style>
+            <a:lnRef idx="2">
+              <a:schemeClr val="accent1"/>
+            </a:lnRef>
+            <a:fillRef idx="0">
+              <a:schemeClr val="accent1"/>
+            </a:fillRef>
+            <a:effectRef idx="1">
+              <a:schemeClr val="accent1"/>
+            </a:effectRef>
+            <a:fontRef idx="minor">
+              <a:schemeClr val="tx1"/>
+            </a:fontRef>
+          </p:style>
+        </p:cxnSp>
+        <p:cxnSp>
+          <p:nvCxnSpPr>
+            <p:cNvPr id="26" name="接點: 肘形 25">
+              <a:extLst>
+                <a:ext uri="{FF2B5EF4-FFF2-40B4-BE49-F238E27FC236}">
+                  <a16:creationId xmlns:a16="http://schemas.microsoft.com/office/drawing/2014/main" id="{D56964AC-F80A-4F55-858D-60F4BB55923B}"/>
+                </a:ext>
+              </a:extLst>
+            </p:cNvPr>
+            <p:cNvCxnSpPr>
+              <a:cxnSpLocks/>
+              <a:stCxn id="8" idx="1"/>
+              <a:endCxn id="9" idx="1"/>
+            </p:cNvCxnSpPr>
+            <p:nvPr/>
+          </p:nvCxnSpPr>
+          <p:spPr>
+            <a:xfrm rot="10800000" flipH="1" flipV="1">
+              <a:off x="1988594" y="2669223"/>
+              <a:ext cx="346232" cy="1098611"/>
+            </a:xfrm>
+            <a:prstGeom prst="bentConnector3">
+              <a:avLst>
+                <a:gd name="adj1" fmla="val -66025"/>
+              </a:avLst>
+            </a:prstGeom>
+            <a:ln>
+              <a:tailEnd type="triangle"/>
+            </a:ln>
+          </p:spPr>
+          <p:style>
+            <a:lnRef idx="2">
+              <a:schemeClr val="accent1"/>
+            </a:lnRef>
+            <a:fillRef idx="0">
+              <a:schemeClr val="accent1"/>
+            </a:fillRef>
+            <a:effectRef idx="1">
+              <a:schemeClr val="accent1"/>
+            </a:effectRef>
+            <a:fontRef idx="minor">
+              <a:schemeClr val="tx1"/>
+            </a:fontRef>
+          </p:style>
+        </p:cxnSp>
+        <p:cxnSp>
+          <p:nvCxnSpPr>
+            <p:cNvPr id="28" name="直線單箭頭接點 27">
+              <a:extLst>
+                <a:ext uri="{FF2B5EF4-FFF2-40B4-BE49-F238E27FC236}">
+                  <a16:creationId xmlns:a16="http://schemas.microsoft.com/office/drawing/2014/main" id="{E6E4E422-E877-4B00-A122-3935C69FD8C2}"/>
+                </a:ext>
+              </a:extLst>
+            </p:cNvPr>
+            <p:cNvCxnSpPr>
+              <a:cxnSpLocks/>
+              <a:stCxn id="10" idx="3"/>
+              <a:endCxn id="11" idx="1"/>
+            </p:cNvCxnSpPr>
+            <p:nvPr/>
+          </p:nvCxnSpPr>
+          <p:spPr>
+            <a:xfrm>
+              <a:off x="5069765" y="3767835"/>
+              <a:ext cx="594438" cy="0"/>
+            </a:xfrm>
+            <a:prstGeom prst="straightConnector1">
+              <a:avLst/>
+            </a:prstGeom>
+            <a:ln>
+              <a:tailEnd type="triangle"/>
+            </a:ln>
+          </p:spPr>
+          <p:style>
+            <a:lnRef idx="2">
+              <a:schemeClr val="accent1"/>
+            </a:lnRef>
+            <a:fillRef idx="0">
+              <a:schemeClr val="accent1"/>
+            </a:fillRef>
+            <a:effectRef idx="1">
+              <a:schemeClr val="accent1"/>
+            </a:effectRef>
+            <a:fontRef idx="minor">
+              <a:schemeClr val="tx1"/>
+            </a:fontRef>
+          </p:style>
+        </p:cxnSp>
+      </p:grpSp>
+    </p:spTree>
+    <p:extLst>
+      <p:ext uri="{BB962C8B-B14F-4D97-AF65-F5344CB8AC3E}">
+        <p14:creationId xmlns:p14="http://schemas.microsoft.com/office/powerpoint/2010/main" val="3558460061"/>
+      </p:ext>
+    </p:extLst>
+  </p:cSld>
+  <p:clrMapOvr>
+    <a:masterClrMapping/>
+  </p:clrMapOvr>
+</p:sld>
+</file>
+
+<file path=ppt/slides/slide6.xml><?xml version="1.0" encoding="utf-8"?>
+<p:sld xmlns:a="http://schemas.openxmlformats.org/drawingml/2006/main" xmlns:r="http://schemas.openxmlformats.org/officeDocument/2006/relationships" xmlns:p="http://schemas.openxmlformats.org/presentationml/2006/main">
+  <p:cSld>
+    <p:spTree>
+      <p:nvGrpSpPr>
+        <p:cNvPr id="1" name=""/>
+        <p:cNvGrpSpPr/>
+        <p:nvPr/>
+      </p:nvGrpSpPr>
+      <p:grpSpPr>
+        <a:xfrm>
+          <a:off x="0" y="0"/>
+          <a:ext cx="0" cy="0"/>
+          <a:chOff x="0" y="0"/>
+          <a:chExt cx="0" cy="0"/>
+        </a:xfrm>
+      </p:grpSpPr>
+      <p:graphicFrame>
+        <p:nvGraphicFramePr>
+          <p:cNvPr id="6" name="圖表 5">
+            <a:extLst>
+              <a:ext uri="{FF2B5EF4-FFF2-40B4-BE49-F238E27FC236}">
+                <a16:creationId xmlns:a16="http://schemas.microsoft.com/office/drawing/2014/main" id="{2108EA61-0D3A-4990-83DC-32BE1BCC712D}"/>
+              </a:ext>
+            </a:extLst>
+          </p:cNvPr>
+          <p:cNvGraphicFramePr/>
+          <p:nvPr>
+            <p:extLst>
+              <p:ext uri="{D42A27DB-BD31-4B8C-83A1-F6EECF244321}">
+                <p14:modId xmlns:p14="http://schemas.microsoft.com/office/powerpoint/2010/main" val="3626057367"/>
+              </p:ext>
+            </p:extLst>
+          </p:nvPr>
+        </p:nvGraphicFramePr>
+        <p:xfrm>
+          <a:off x="2032000" y="719666"/>
+          <a:ext cx="8128000" cy="5418667"/>
+        </p:xfrm>
+        <a:graphic>
+          <a:graphicData uri="http://schemas.openxmlformats.org/drawingml/2006/chart">
+            <c:chart xmlns:c="http://schemas.openxmlformats.org/drawingml/2006/chart" xmlns:r="http://schemas.openxmlformats.org/officeDocument/2006/relationships" r:id="rId2"/>
+          </a:graphicData>
+        </a:graphic>
+      </p:graphicFrame>
+    </p:spTree>
+    <p:extLst>
+      <p:ext uri="{BB962C8B-B14F-4D97-AF65-F5344CB8AC3E}">
+        <p14:creationId xmlns:p14="http://schemas.microsoft.com/office/powerpoint/2010/main" val="1423079732"/>
+      </p:ext>
+    </p:extLst>
+  </p:cSld>
+  <p:clrMapOvr>
+    <a:masterClrMapping/>
+  </p:clrMapOvr>
+</p:sld>
+</file>
+
 <file path=ppt/theme/theme1.xml><?xml version="1.0" encoding="utf-8"?>
 <a:theme xmlns:a="http://schemas.openxmlformats.org/drawingml/2006/main" name="Office Theme">
   <a:themeElements>

--- a/Presentation1.pptx
+++ b/Presentation1.pptx
@@ -11,6 +11,9 @@
     <p:sldId id="259" r:id="rId5"/>
     <p:sldId id="260" r:id="rId6"/>
     <p:sldId id="261" r:id="rId7"/>
+    <p:sldId id="262" r:id="rId8"/>
+    <p:sldId id="263" r:id="rId9"/>
+    <p:sldId id="264" r:id="rId10"/>
   </p:sldIdLst>
   <p:sldSz cx="12192000" cy="6858000"/>
   <p:notesSz cx="6858000" cy="9144000"/>
@@ -131,37 +134,7 @@
     </mc:Fallback>
   </mc:AlternateContent>
   <c:chart>
-    <c:title>
-      <c:overlay val="0"/>
-      <c:spPr>
-        <a:noFill/>
-        <a:ln>
-          <a:noFill/>
-        </a:ln>
-        <a:effectLst/>
-      </c:spPr>
-      <c:txPr>
-        <a:bodyPr rot="0" spcFirstLastPara="1" vertOverflow="ellipsis" vert="horz" wrap="square" anchor="ctr" anchorCtr="1"/>
-        <a:lstStyle/>
-        <a:p>
-          <a:pPr>
-            <a:defRPr sz="2128" b="0" i="0" u="none" strike="noStrike" kern="1200" cap="none" spc="50" normalizeH="0" baseline="0">
-              <a:solidFill>
-                <a:schemeClr val="tx1">
-                  <a:lumMod val="65000"/>
-                  <a:lumOff val="35000"/>
-                </a:schemeClr>
-              </a:solidFill>
-              <a:latin typeface="+mj-lt"/>
-              <a:ea typeface="+mj-ea"/>
-              <a:cs typeface="+mj-cs"/>
-            </a:defRPr>
-          </a:pPr>
-          <a:endParaRPr lang="zh-HK"/>
-        </a:p>
-      </c:txPr>
-    </c:title>
-    <c:autoTitleDeleted val="0"/>
+    <c:autoTitleDeleted val="1"/>
     <c:plotArea>
       <c:layout/>
       <c:barChart>
@@ -1090,7 +1063,7 @@
           <a:p>
             <a:fld id="{ED0FC01E-52E7-E248-9225-B6E184C589D0}" type="datetimeFigureOut">
               <a:rPr lang="en-US" smtClean="0"/>
-              <a:t>11/22/2024</a:t>
+              <a:t>12/3/2024</a:t>
             </a:fld>
             <a:endParaRPr lang="en-US"/>
           </a:p>
@@ -1290,7 +1263,7 @@
           <a:p>
             <a:fld id="{ED0FC01E-52E7-E248-9225-B6E184C589D0}" type="datetimeFigureOut">
               <a:rPr lang="en-US" smtClean="0"/>
-              <a:t>11/22/2024</a:t>
+              <a:t>12/3/2024</a:t>
             </a:fld>
             <a:endParaRPr lang="en-US"/>
           </a:p>
@@ -1500,7 +1473,7 @@
           <a:p>
             <a:fld id="{ED0FC01E-52E7-E248-9225-B6E184C589D0}" type="datetimeFigureOut">
               <a:rPr lang="en-US" smtClean="0"/>
-              <a:t>11/22/2024</a:t>
+              <a:t>12/3/2024</a:t>
             </a:fld>
             <a:endParaRPr lang="en-US"/>
           </a:p>
@@ -1700,7 +1673,7 @@
           <a:p>
             <a:fld id="{ED0FC01E-52E7-E248-9225-B6E184C589D0}" type="datetimeFigureOut">
               <a:rPr lang="en-US" smtClean="0"/>
-              <a:t>11/22/2024</a:t>
+              <a:t>12/3/2024</a:t>
             </a:fld>
             <a:endParaRPr lang="en-US"/>
           </a:p>
@@ -1976,7 +1949,7 @@
           <a:p>
             <a:fld id="{ED0FC01E-52E7-E248-9225-B6E184C589D0}" type="datetimeFigureOut">
               <a:rPr lang="en-US" smtClean="0"/>
-              <a:t>11/22/2024</a:t>
+              <a:t>12/3/2024</a:t>
             </a:fld>
             <a:endParaRPr lang="en-US"/>
           </a:p>
@@ -2244,7 +2217,7 @@
           <a:p>
             <a:fld id="{ED0FC01E-52E7-E248-9225-B6E184C589D0}" type="datetimeFigureOut">
               <a:rPr lang="en-US" smtClean="0"/>
-              <a:t>11/22/2024</a:t>
+              <a:t>12/3/2024</a:t>
             </a:fld>
             <a:endParaRPr lang="en-US"/>
           </a:p>
@@ -2659,7 +2632,7 @@
           <a:p>
             <a:fld id="{ED0FC01E-52E7-E248-9225-B6E184C589D0}" type="datetimeFigureOut">
               <a:rPr lang="en-US" smtClean="0"/>
-              <a:t>11/22/2024</a:t>
+              <a:t>12/3/2024</a:t>
             </a:fld>
             <a:endParaRPr lang="en-US"/>
           </a:p>
@@ -2801,7 +2774,7 @@
           <a:p>
             <a:fld id="{ED0FC01E-52E7-E248-9225-B6E184C589D0}" type="datetimeFigureOut">
               <a:rPr lang="en-US" smtClean="0"/>
-              <a:t>11/22/2024</a:t>
+              <a:t>12/3/2024</a:t>
             </a:fld>
             <a:endParaRPr lang="en-US"/>
           </a:p>
@@ -2914,7 +2887,7 @@
           <a:p>
             <a:fld id="{ED0FC01E-52E7-E248-9225-B6E184C589D0}" type="datetimeFigureOut">
               <a:rPr lang="en-US" smtClean="0"/>
-              <a:t>11/22/2024</a:t>
+              <a:t>12/3/2024</a:t>
             </a:fld>
             <a:endParaRPr lang="en-US"/>
           </a:p>
@@ -3227,7 +3200,7 @@
           <a:p>
             <a:fld id="{ED0FC01E-52E7-E248-9225-B6E184C589D0}" type="datetimeFigureOut">
               <a:rPr lang="en-US" smtClean="0"/>
-              <a:t>11/22/2024</a:t>
+              <a:t>12/3/2024</a:t>
             </a:fld>
             <a:endParaRPr lang="en-US"/>
           </a:p>
@@ -3516,7 +3489,7 @@
           <a:p>
             <a:fld id="{ED0FC01E-52E7-E248-9225-B6E184C589D0}" type="datetimeFigureOut">
               <a:rPr lang="en-US" smtClean="0"/>
-              <a:t>11/22/2024</a:t>
+              <a:t>12/3/2024</a:t>
             </a:fld>
             <a:endParaRPr lang="en-US"/>
           </a:p>
@@ -3759,7 +3732,7 @@
           <a:p>
             <a:fld id="{ED0FC01E-52E7-E248-9225-B6E184C589D0}" type="datetimeFigureOut">
               <a:rPr lang="en-US" smtClean="0"/>
-              <a:t>11/22/2024</a:t>
+              <a:t>12/3/2024</a:t>
             </a:fld>
             <a:endParaRPr lang="en-US"/>
           </a:p>
@@ -4270,7 +4243,7 @@
         </p:nvGrpSpPr>
         <p:grpSpPr>
           <a:xfrm>
-            <a:off x="570614" y="1061631"/>
+            <a:off x="-1757779" y="-754602"/>
             <a:ext cx="6096000" cy="3416300"/>
             <a:chOff x="3048000" y="1720850"/>
             <a:chExt cx="6096000" cy="3416300"/>
@@ -4453,10 +4426,10 @@
       </p:grpSp>
       <p:grpSp>
         <p:nvGrpSpPr>
-          <p:cNvPr id="19" name="Group 18">
+          <p:cNvPr id="9" name="群組 8">
             <a:extLst>
               <a:ext uri="{FF2B5EF4-FFF2-40B4-BE49-F238E27FC236}">
-                <a16:creationId xmlns:a16="http://schemas.microsoft.com/office/drawing/2014/main" id="{986A11F2-80B7-206C-040C-E4C88F2C4F7A}"/>
+                <a16:creationId xmlns:a16="http://schemas.microsoft.com/office/drawing/2014/main" id="{4D61F233-A7AC-4F89-8FA6-3925CE116C15}"/>
               </a:ext>
             </a:extLst>
           </p:cNvPr>
@@ -4465,10 +4438,10 @@
         </p:nvGrpSpPr>
         <p:grpSpPr>
           <a:xfrm>
-            <a:off x="4729863" y="3296093"/>
-            <a:ext cx="6007100" cy="3416300"/>
-            <a:chOff x="4729863" y="3296093"/>
-            <a:chExt cx="6007100" cy="3416300"/>
+            <a:off x="4440430" y="3386295"/>
+            <a:ext cx="6269900" cy="3349135"/>
+            <a:chOff x="4440430" y="3386295"/>
+            <a:chExt cx="6269900" cy="3349135"/>
           </a:xfrm>
         </p:grpSpPr>
         <p:pic>
@@ -4485,16 +4458,15 @@
             </p:cNvPicPr>
             <p:nvPr/>
           </p:nvPicPr>
-          <p:blipFill>
+          <p:blipFill rotWithShape="1">
             <a:blip r:embed="rId3"/>
-            <a:stretch>
-              <a:fillRect/>
-            </a:stretch>
+            <a:srcRect t="7569"/>
+            <a:stretch/>
           </p:blipFill>
           <p:spPr>
             <a:xfrm>
-              <a:off x="4729863" y="3296093"/>
-              <a:ext cx="6007100" cy="3416300"/>
+              <a:off x="4703230" y="3386295"/>
+              <a:ext cx="6007100" cy="3157749"/>
             </a:xfrm>
             <a:prstGeom prst="rect">
               <a:avLst/>
@@ -4515,7 +4487,7 @@
           </p:nvSpPr>
           <p:spPr>
             <a:xfrm>
-              <a:off x="7329377" y="6170428"/>
+              <a:off x="7302744" y="6002080"/>
               <a:ext cx="202018" cy="170121"/>
             </a:xfrm>
             <a:prstGeom prst="ellipse">
@@ -4569,7 +4541,7 @@
           </p:nvSpPr>
           <p:spPr>
             <a:xfrm>
-              <a:off x="7712147" y="3627328"/>
+              <a:off x="7685514" y="3458980"/>
               <a:ext cx="202018" cy="170121"/>
             </a:xfrm>
             <a:prstGeom prst="ellipse">
@@ -4623,7 +4595,7 @@
           </p:nvCxnSpPr>
           <p:spPr>
             <a:xfrm>
-              <a:off x="5107170" y="5979042"/>
+              <a:off x="5080537" y="5810694"/>
               <a:ext cx="5411972" cy="0"/>
             </a:xfrm>
             <a:prstGeom prst="line">
@@ -4645,6 +4617,78 @@
             </a:fontRef>
           </p:style>
         </p:cxnSp>
+        <p:sp>
+          <p:nvSpPr>
+            <p:cNvPr id="3" name="文字方塊 2">
+              <a:extLst>
+                <a:ext uri="{FF2B5EF4-FFF2-40B4-BE49-F238E27FC236}">
+                  <a16:creationId xmlns:a16="http://schemas.microsoft.com/office/drawing/2014/main" id="{0B487015-9FAE-4842-ADDB-EA361A7761B0}"/>
+                </a:ext>
+              </a:extLst>
+            </p:cNvPr>
+            <p:cNvSpPr txBox="1"/>
+            <p:nvPr/>
+          </p:nvSpPr>
+          <p:spPr>
+            <a:xfrm>
+              <a:off x="7302744" y="6458431"/>
+              <a:ext cx="900223" cy="276999"/>
+            </a:xfrm>
+            <a:prstGeom prst="rect">
+              <a:avLst/>
+            </a:prstGeom>
+            <a:noFill/>
+          </p:spPr>
+          <p:txBody>
+            <a:bodyPr wrap="square" rtlCol="0">
+              <a:spAutoFit/>
+            </a:bodyPr>
+            <a:lstStyle/>
+            <a:p>
+              <a:r>
+                <a:rPr lang="en-US" altLang="zh-HK" sz="1200" dirty="0"/>
+                <a:t>Time(1/10s)</a:t>
+              </a:r>
+              <a:endParaRPr lang="zh-HK" altLang="en-US" sz="1200" dirty="0"/>
+            </a:p>
+          </p:txBody>
+        </p:sp>
+        <p:sp>
+          <p:nvSpPr>
+            <p:cNvPr id="4" name="文字方塊 3">
+              <a:extLst>
+                <a:ext uri="{FF2B5EF4-FFF2-40B4-BE49-F238E27FC236}">
+                  <a16:creationId xmlns:a16="http://schemas.microsoft.com/office/drawing/2014/main" id="{B641B07A-3A73-465D-87E7-17854648675F}"/>
+                </a:ext>
+              </a:extLst>
+            </p:cNvPr>
+            <p:cNvSpPr txBox="1"/>
+            <p:nvPr/>
+          </p:nvSpPr>
+          <p:spPr>
+            <a:xfrm>
+              <a:off x="4440430" y="4252404"/>
+              <a:ext cx="369332" cy="1038688"/>
+            </a:xfrm>
+            <a:prstGeom prst="rect">
+              <a:avLst/>
+            </a:prstGeom>
+            <a:noFill/>
+          </p:spPr>
+          <p:txBody>
+            <a:bodyPr vert="eaVert" wrap="square" rtlCol="0">
+              <a:spAutoFit/>
+            </a:bodyPr>
+            <a:lstStyle/>
+            <a:p>
+              <a:r>
+                <a:rPr lang="en-US" altLang="zh-HK" sz="1200" dirty="0"/>
+                <a:t>Acceleration(g)</a:t>
+              </a:r>
+              <a:endParaRPr lang="zh-HK" altLang="en-US" sz="1200" dirty="0"/>
+            </a:p>
+          </p:txBody>
+        </p:sp>
       </p:grpSp>
     </p:spTree>
     <p:extLst>
@@ -9086,38 +9130,834 @@
           <a:chExt cx="0" cy="0"/>
         </a:xfrm>
       </p:grpSpPr>
-      <p:graphicFrame>
-        <p:nvGraphicFramePr>
-          <p:cNvPr id="6" name="圖表 5">
+      <p:grpSp>
+        <p:nvGrpSpPr>
+          <p:cNvPr id="4" name="群組 3">
             <a:extLst>
               <a:ext uri="{FF2B5EF4-FFF2-40B4-BE49-F238E27FC236}">
-                <a16:creationId xmlns:a16="http://schemas.microsoft.com/office/drawing/2014/main" id="{2108EA61-0D3A-4990-83DC-32BE1BCC712D}"/>
+                <a16:creationId xmlns:a16="http://schemas.microsoft.com/office/drawing/2014/main" id="{73767722-A51D-4EC3-9CD1-3C4960F3F611}"/>
               </a:ext>
             </a:extLst>
           </p:cNvPr>
-          <p:cNvGraphicFramePr/>
-          <p:nvPr>
-            <p:extLst>
-              <p:ext uri="{D42A27DB-BD31-4B8C-83A1-F6EECF244321}">
-                <p14:modId xmlns:p14="http://schemas.microsoft.com/office/powerpoint/2010/main" val="3626057367"/>
-              </p:ext>
-            </p:extLst>
-          </p:nvPr>
-        </p:nvGraphicFramePr>
-        <p:xfrm>
-          <a:off x="2032000" y="719666"/>
-          <a:ext cx="8128000" cy="5418667"/>
-        </p:xfrm>
-        <a:graphic>
-          <a:graphicData uri="http://schemas.openxmlformats.org/drawingml/2006/chart">
-            <c:chart xmlns:c="http://schemas.openxmlformats.org/drawingml/2006/chart" xmlns:r="http://schemas.openxmlformats.org/officeDocument/2006/relationships" r:id="rId2"/>
-          </a:graphicData>
-        </a:graphic>
-      </p:graphicFrame>
+          <p:cNvGrpSpPr/>
+          <p:nvPr/>
+        </p:nvGrpSpPr>
+        <p:grpSpPr>
+          <a:xfrm>
+            <a:off x="1570335" y="719666"/>
+            <a:ext cx="8589665" cy="5787999"/>
+            <a:chOff x="1570335" y="719666"/>
+            <a:chExt cx="8589665" cy="5787999"/>
+          </a:xfrm>
+        </p:grpSpPr>
+        <p:graphicFrame>
+          <p:nvGraphicFramePr>
+            <p:cNvPr id="6" name="圖表 5">
+              <a:extLst>
+                <a:ext uri="{FF2B5EF4-FFF2-40B4-BE49-F238E27FC236}">
+                  <a16:creationId xmlns:a16="http://schemas.microsoft.com/office/drawing/2014/main" id="{2108EA61-0D3A-4990-83DC-32BE1BCC712D}"/>
+                </a:ext>
+              </a:extLst>
+            </p:cNvPr>
+            <p:cNvGraphicFramePr/>
+            <p:nvPr>
+              <p:extLst>
+                <p:ext uri="{D42A27DB-BD31-4B8C-83A1-F6EECF244321}">
+                  <p14:modId xmlns:p14="http://schemas.microsoft.com/office/powerpoint/2010/main" val="1603789551"/>
+                </p:ext>
+              </p:extLst>
+            </p:nvPr>
+          </p:nvGraphicFramePr>
+          <p:xfrm>
+            <a:off x="2032000" y="719666"/>
+            <a:ext cx="8128000" cy="5418667"/>
+          </p:xfrm>
+          <a:graphic>
+            <a:graphicData uri="http://schemas.openxmlformats.org/drawingml/2006/chart">
+              <c:chart xmlns:c="http://schemas.openxmlformats.org/drawingml/2006/chart" xmlns:r="http://schemas.openxmlformats.org/officeDocument/2006/relationships" r:id="rId2"/>
+            </a:graphicData>
+          </a:graphic>
+        </p:graphicFrame>
+        <p:sp>
+          <p:nvSpPr>
+            <p:cNvPr id="2" name="文字方塊 1">
+              <a:extLst>
+                <a:ext uri="{FF2B5EF4-FFF2-40B4-BE49-F238E27FC236}">
+                  <a16:creationId xmlns:a16="http://schemas.microsoft.com/office/drawing/2014/main" id="{E9FC0C9D-E4B8-46D1-824B-A75ABEA42528}"/>
+                </a:ext>
+              </a:extLst>
+            </p:cNvPr>
+            <p:cNvSpPr txBox="1"/>
+            <p:nvPr/>
+          </p:nvSpPr>
+          <p:spPr>
+            <a:xfrm>
+              <a:off x="5487880" y="6138333"/>
+              <a:ext cx="1216240" cy="369332"/>
+            </a:xfrm>
+            <a:prstGeom prst="rect">
+              <a:avLst/>
+            </a:prstGeom>
+            <a:noFill/>
+          </p:spPr>
+          <p:txBody>
+            <a:bodyPr wrap="square" rtlCol="0">
+              <a:spAutoFit/>
+            </a:bodyPr>
+            <a:lstStyle/>
+            <a:p>
+              <a:r>
+                <a:rPr lang="en-US" altLang="zh-HK" dirty="0"/>
+                <a:t>Algorithms</a:t>
+              </a:r>
+              <a:endParaRPr lang="zh-HK" altLang="en-US" dirty="0"/>
+            </a:p>
+          </p:txBody>
+        </p:sp>
+        <p:sp>
+          <p:nvSpPr>
+            <p:cNvPr id="3" name="文字方塊 2">
+              <a:extLst>
+                <a:ext uri="{FF2B5EF4-FFF2-40B4-BE49-F238E27FC236}">
+                  <a16:creationId xmlns:a16="http://schemas.microsoft.com/office/drawing/2014/main" id="{85550FA5-E675-49FE-8C06-BE610953A812}"/>
+                </a:ext>
+              </a:extLst>
+            </p:cNvPr>
+            <p:cNvSpPr txBox="1"/>
+            <p:nvPr/>
+          </p:nvSpPr>
+          <p:spPr>
+            <a:xfrm>
+              <a:off x="1570335" y="2494625"/>
+              <a:ext cx="461665" cy="2032987"/>
+            </a:xfrm>
+            <a:prstGeom prst="rect">
+              <a:avLst/>
+            </a:prstGeom>
+            <a:noFill/>
+          </p:spPr>
+          <p:txBody>
+            <a:bodyPr vert="eaVert" wrap="square" rtlCol="0">
+              <a:spAutoFit/>
+            </a:bodyPr>
+            <a:lstStyle/>
+            <a:p>
+              <a:r>
+                <a:rPr lang="en-US" altLang="zh-HK" dirty="0"/>
+                <a:t>Accuracy(%)</a:t>
+              </a:r>
+              <a:endParaRPr lang="zh-HK" altLang="en-US" dirty="0"/>
+            </a:p>
+          </p:txBody>
+        </p:sp>
+      </p:grpSp>
     </p:spTree>
     <p:extLst>
       <p:ext uri="{BB962C8B-B14F-4D97-AF65-F5344CB8AC3E}">
         <p14:creationId xmlns:p14="http://schemas.microsoft.com/office/powerpoint/2010/main" val="1423079732"/>
+      </p:ext>
+    </p:extLst>
+  </p:cSld>
+  <p:clrMapOvr>
+    <a:masterClrMapping/>
+  </p:clrMapOvr>
+</p:sld>
+</file>
+
+<file path=ppt/slides/slide7.xml><?xml version="1.0" encoding="utf-8"?>
+<p:sld xmlns:a="http://schemas.openxmlformats.org/drawingml/2006/main" xmlns:r="http://schemas.openxmlformats.org/officeDocument/2006/relationships" xmlns:p="http://schemas.openxmlformats.org/presentationml/2006/main">
+  <p:cSld>
+    <p:spTree>
+      <p:nvGrpSpPr>
+        <p:cNvPr id="1" name=""/>
+        <p:cNvGrpSpPr/>
+        <p:nvPr/>
+      </p:nvGrpSpPr>
+      <p:grpSpPr>
+        <a:xfrm>
+          <a:off x="0" y="0"/>
+          <a:ext cx="0" cy="0"/>
+          <a:chOff x="0" y="0"/>
+          <a:chExt cx="0" cy="0"/>
+        </a:xfrm>
+      </p:grpSpPr>
+      <p:grpSp>
+        <p:nvGrpSpPr>
+          <p:cNvPr id="7" name="群組 6">
+            <a:extLst>
+              <a:ext uri="{FF2B5EF4-FFF2-40B4-BE49-F238E27FC236}">
+                <a16:creationId xmlns:a16="http://schemas.microsoft.com/office/drawing/2014/main" id="{5DA84A78-6B4F-403B-9D78-C79053D052E5}"/>
+              </a:ext>
+            </a:extLst>
+          </p:cNvPr>
+          <p:cNvGrpSpPr/>
+          <p:nvPr/>
+        </p:nvGrpSpPr>
+        <p:grpSpPr>
+          <a:xfrm>
+            <a:off x="569707" y="406400"/>
+            <a:ext cx="6615461" cy="3442899"/>
+            <a:chOff x="2657126" y="1921163"/>
+            <a:chExt cx="6615461" cy="3442899"/>
+          </a:xfrm>
+        </p:grpSpPr>
+        <p:pic>
+          <p:nvPicPr>
+            <p:cNvPr id="4" name="圖片 3">
+              <a:extLst>
+                <a:ext uri="{FF2B5EF4-FFF2-40B4-BE49-F238E27FC236}">
+                  <a16:creationId xmlns:a16="http://schemas.microsoft.com/office/drawing/2014/main" id="{0E83FE50-7C4D-48D0-B39A-8729C5A0DF66}"/>
+                </a:ext>
+              </a:extLst>
+            </p:cNvPr>
+            <p:cNvPicPr>
+              <a:picLocks noChangeAspect="1"/>
+            </p:cNvPicPr>
+            <p:nvPr/>
+          </p:nvPicPr>
+          <p:blipFill rotWithShape="1">
+            <a:blip r:embed="rId2"/>
+            <a:srcRect t="7673"/>
+            <a:stretch/>
+          </p:blipFill>
+          <p:spPr>
+            <a:xfrm>
+              <a:off x="2919412" y="1921163"/>
+              <a:ext cx="6353175" cy="3289011"/>
+            </a:xfrm>
+            <a:prstGeom prst="rect">
+              <a:avLst/>
+            </a:prstGeom>
+          </p:spPr>
+        </p:pic>
+        <p:sp>
+          <p:nvSpPr>
+            <p:cNvPr id="5" name="文字方塊 4">
+              <a:extLst>
+                <a:ext uri="{FF2B5EF4-FFF2-40B4-BE49-F238E27FC236}">
+                  <a16:creationId xmlns:a16="http://schemas.microsoft.com/office/drawing/2014/main" id="{341540DE-C941-40D8-B6B7-C65D61379FCE}"/>
+                </a:ext>
+              </a:extLst>
+            </p:cNvPr>
+            <p:cNvSpPr txBox="1"/>
+            <p:nvPr/>
+          </p:nvSpPr>
+          <p:spPr>
+            <a:xfrm>
+              <a:off x="5557980" y="5056285"/>
+              <a:ext cx="1076038" cy="307777"/>
+            </a:xfrm>
+            <a:prstGeom prst="rect">
+              <a:avLst/>
+            </a:prstGeom>
+            <a:noFill/>
+          </p:spPr>
+          <p:txBody>
+            <a:bodyPr wrap="square" rtlCol="0">
+              <a:spAutoFit/>
+            </a:bodyPr>
+            <a:lstStyle/>
+            <a:p>
+              <a:r>
+                <a:rPr lang="en-US" altLang="zh-HK" sz="1400" dirty="0"/>
+                <a:t>Time(1/10s)</a:t>
+              </a:r>
+              <a:endParaRPr lang="zh-HK" altLang="en-US" sz="1400" dirty="0"/>
+            </a:p>
+          </p:txBody>
+        </p:sp>
+        <p:sp>
+          <p:nvSpPr>
+            <p:cNvPr id="6" name="文字方塊 5">
+              <a:extLst>
+                <a:ext uri="{FF2B5EF4-FFF2-40B4-BE49-F238E27FC236}">
+                  <a16:creationId xmlns:a16="http://schemas.microsoft.com/office/drawing/2014/main" id="{89683AA1-3924-473B-91C4-BDA2BD582835}"/>
+                </a:ext>
+              </a:extLst>
+            </p:cNvPr>
+            <p:cNvSpPr txBox="1"/>
+            <p:nvPr/>
+          </p:nvSpPr>
+          <p:spPr>
+            <a:xfrm>
+              <a:off x="2657126" y="2642031"/>
+              <a:ext cx="400110" cy="1320369"/>
+            </a:xfrm>
+            <a:prstGeom prst="rect">
+              <a:avLst/>
+            </a:prstGeom>
+            <a:noFill/>
+          </p:spPr>
+          <p:txBody>
+            <a:bodyPr vert="eaVert" wrap="square" rtlCol="0">
+              <a:spAutoFit/>
+            </a:bodyPr>
+            <a:lstStyle/>
+            <a:p>
+              <a:r>
+                <a:rPr lang="en-US" altLang="zh-HK" sz="1400" dirty="0"/>
+                <a:t>Acceleration(1/g)</a:t>
+              </a:r>
+              <a:endParaRPr lang="zh-HK" altLang="en-US" sz="1400" dirty="0"/>
+            </a:p>
+          </p:txBody>
+        </p:sp>
+      </p:grpSp>
+      <p:grpSp>
+        <p:nvGrpSpPr>
+          <p:cNvPr id="12" name="群組 11">
+            <a:extLst>
+              <a:ext uri="{FF2B5EF4-FFF2-40B4-BE49-F238E27FC236}">
+                <a16:creationId xmlns:a16="http://schemas.microsoft.com/office/drawing/2014/main" id="{E7D951E7-E96C-487C-8FD0-0E3466AB9856}"/>
+              </a:ext>
+            </a:extLst>
+          </p:cNvPr>
+          <p:cNvGrpSpPr/>
+          <p:nvPr/>
+        </p:nvGrpSpPr>
+        <p:grpSpPr>
+          <a:xfrm>
+            <a:off x="5514945" y="2957899"/>
+            <a:ext cx="6677055" cy="3522898"/>
+            <a:chOff x="5514945" y="2957899"/>
+            <a:chExt cx="6677055" cy="3522898"/>
+          </a:xfrm>
+        </p:grpSpPr>
+        <p:sp>
+          <p:nvSpPr>
+            <p:cNvPr id="9" name="文字方塊 8">
+              <a:extLst>
+                <a:ext uri="{FF2B5EF4-FFF2-40B4-BE49-F238E27FC236}">
+                  <a16:creationId xmlns:a16="http://schemas.microsoft.com/office/drawing/2014/main" id="{2F003DE3-9352-46D4-B101-AD038DCC7674}"/>
+                </a:ext>
+              </a:extLst>
+            </p:cNvPr>
+            <p:cNvSpPr txBox="1"/>
+            <p:nvPr/>
+          </p:nvSpPr>
+          <p:spPr>
+            <a:xfrm>
+              <a:off x="8776852" y="6173020"/>
+              <a:ext cx="1076038" cy="307777"/>
+            </a:xfrm>
+            <a:prstGeom prst="rect">
+              <a:avLst/>
+            </a:prstGeom>
+            <a:noFill/>
+          </p:spPr>
+          <p:txBody>
+            <a:bodyPr wrap="square" rtlCol="0">
+              <a:spAutoFit/>
+            </a:bodyPr>
+            <a:lstStyle/>
+            <a:p>
+              <a:r>
+                <a:rPr lang="en-US" altLang="zh-HK" sz="1400" dirty="0"/>
+                <a:t>Time(1/10s)</a:t>
+              </a:r>
+              <a:endParaRPr lang="zh-HK" altLang="en-US" sz="1400" dirty="0"/>
+            </a:p>
+          </p:txBody>
+        </p:sp>
+        <p:pic>
+          <p:nvPicPr>
+            <p:cNvPr id="10" name="圖片 9">
+              <a:extLst>
+                <a:ext uri="{FF2B5EF4-FFF2-40B4-BE49-F238E27FC236}">
+                  <a16:creationId xmlns:a16="http://schemas.microsoft.com/office/drawing/2014/main" id="{B1F3F39C-DBCF-4D72-8A24-72032EF24942}"/>
+                </a:ext>
+              </a:extLst>
+            </p:cNvPr>
+            <p:cNvPicPr>
+              <a:picLocks noChangeAspect="1"/>
+            </p:cNvPicPr>
+            <p:nvPr/>
+          </p:nvPicPr>
+          <p:blipFill rotWithShape="1">
+            <a:blip r:embed="rId3"/>
+            <a:srcRect t="7673"/>
+            <a:stretch/>
+          </p:blipFill>
+          <p:spPr>
+            <a:xfrm>
+              <a:off x="5715000" y="2957899"/>
+              <a:ext cx="6477000" cy="3289012"/>
+            </a:xfrm>
+            <a:prstGeom prst="rect">
+              <a:avLst/>
+            </a:prstGeom>
+          </p:spPr>
+        </p:pic>
+        <p:sp>
+          <p:nvSpPr>
+            <p:cNvPr id="11" name="文字方塊 10">
+              <a:extLst>
+                <a:ext uri="{FF2B5EF4-FFF2-40B4-BE49-F238E27FC236}">
+                  <a16:creationId xmlns:a16="http://schemas.microsoft.com/office/drawing/2014/main" id="{FC2009F4-DF45-4E64-97CF-026BB840B029}"/>
+                </a:ext>
+              </a:extLst>
+            </p:cNvPr>
+            <p:cNvSpPr txBox="1"/>
+            <p:nvPr/>
+          </p:nvSpPr>
+          <p:spPr>
+            <a:xfrm>
+              <a:off x="5514945" y="3849299"/>
+              <a:ext cx="400110" cy="1320369"/>
+            </a:xfrm>
+            <a:prstGeom prst="rect">
+              <a:avLst/>
+            </a:prstGeom>
+            <a:noFill/>
+          </p:spPr>
+          <p:txBody>
+            <a:bodyPr vert="eaVert" wrap="square" rtlCol="0">
+              <a:spAutoFit/>
+            </a:bodyPr>
+            <a:lstStyle/>
+            <a:p>
+              <a:r>
+                <a:rPr lang="en-US" altLang="zh-HK" sz="1400" dirty="0"/>
+                <a:t>Acceleration(1/g)</a:t>
+              </a:r>
+              <a:endParaRPr lang="zh-HK" altLang="en-US" sz="1400" dirty="0"/>
+            </a:p>
+          </p:txBody>
+        </p:sp>
+      </p:grpSp>
+    </p:spTree>
+    <p:extLst>
+      <p:ext uri="{BB962C8B-B14F-4D97-AF65-F5344CB8AC3E}">
+        <p14:creationId xmlns:p14="http://schemas.microsoft.com/office/powerpoint/2010/main" val="2907043001"/>
+      </p:ext>
+    </p:extLst>
+  </p:cSld>
+  <p:clrMapOvr>
+    <a:masterClrMapping/>
+  </p:clrMapOvr>
+</p:sld>
+</file>
+
+<file path=ppt/slides/slide8.xml><?xml version="1.0" encoding="utf-8"?>
+<p:sld xmlns:a="http://schemas.openxmlformats.org/drawingml/2006/main" xmlns:r="http://schemas.openxmlformats.org/officeDocument/2006/relationships" xmlns:p="http://schemas.openxmlformats.org/presentationml/2006/main">
+  <p:cSld>
+    <p:spTree>
+      <p:nvGrpSpPr>
+        <p:cNvPr id="1" name=""/>
+        <p:cNvGrpSpPr/>
+        <p:nvPr/>
+      </p:nvGrpSpPr>
+      <p:grpSpPr>
+        <a:xfrm>
+          <a:off x="0" y="0"/>
+          <a:ext cx="0" cy="0"/>
+          <a:chOff x="0" y="0"/>
+          <a:chExt cx="0" cy="0"/>
+        </a:xfrm>
+      </p:grpSpPr>
+      <p:grpSp>
+        <p:nvGrpSpPr>
+          <p:cNvPr id="7" name="群組 6">
+            <a:extLst>
+              <a:ext uri="{FF2B5EF4-FFF2-40B4-BE49-F238E27FC236}">
+                <a16:creationId xmlns:a16="http://schemas.microsoft.com/office/drawing/2014/main" id="{8AE0818C-734B-47E8-9C2C-6D15CB2E831C}"/>
+              </a:ext>
+            </a:extLst>
+          </p:cNvPr>
+          <p:cNvGrpSpPr/>
+          <p:nvPr/>
+        </p:nvGrpSpPr>
+        <p:grpSpPr>
+          <a:xfrm>
+            <a:off x="178780" y="104342"/>
+            <a:ext cx="5372130" cy="4087713"/>
+            <a:chOff x="3309907" y="1462087"/>
+            <a:chExt cx="5372130" cy="4087713"/>
+          </a:xfrm>
+        </p:grpSpPr>
+        <p:pic>
+          <p:nvPicPr>
+            <p:cNvPr id="4" name="圖片 3">
+              <a:extLst>
+                <a:ext uri="{FF2B5EF4-FFF2-40B4-BE49-F238E27FC236}">
+                  <a16:creationId xmlns:a16="http://schemas.microsoft.com/office/drawing/2014/main" id="{221B217D-2909-4F7E-9AB2-8A62A6150AB0}"/>
+                </a:ext>
+              </a:extLst>
+            </p:cNvPr>
+            <p:cNvPicPr>
+              <a:picLocks noChangeAspect="1"/>
+            </p:cNvPicPr>
+            <p:nvPr/>
+          </p:nvPicPr>
+          <p:blipFill>
+            <a:blip r:embed="rId2"/>
+            <a:stretch>
+              <a:fillRect/>
+            </a:stretch>
+          </p:blipFill>
+          <p:spPr>
+            <a:xfrm>
+              <a:off x="3509962" y="1462087"/>
+              <a:ext cx="5172075" cy="3933825"/>
+            </a:xfrm>
+            <a:prstGeom prst="rect">
+              <a:avLst/>
+            </a:prstGeom>
+          </p:spPr>
+        </p:pic>
+        <p:sp>
+          <p:nvSpPr>
+            <p:cNvPr id="5" name="文字方塊 4">
+              <a:extLst>
+                <a:ext uri="{FF2B5EF4-FFF2-40B4-BE49-F238E27FC236}">
+                  <a16:creationId xmlns:a16="http://schemas.microsoft.com/office/drawing/2014/main" id="{C5F6A19F-AC75-4A7E-8B07-8B8A301B7848}"/>
+                </a:ext>
+              </a:extLst>
+            </p:cNvPr>
+            <p:cNvSpPr txBox="1"/>
+            <p:nvPr/>
+          </p:nvSpPr>
+          <p:spPr>
+            <a:xfrm>
+              <a:off x="5560293" y="5242023"/>
+              <a:ext cx="1440872" cy="307777"/>
+            </a:xfrm>
+            <a:prstGeom prst="rect">
+              <a:avLst/>
+            </a:prstGeom>
+            <a:noFill/>
+          </p:spPr>
+          <p:txBody>
+            <a:bodyPr wrap="square" rtlCol="0">
+              <a:spAutoFit/>
+            </a:bodyPr>
+            <a:lstStyle/>
+            <a:p>
+              <a:r>
+                <a:rPr lang="en-US" altLang="zh-HK" sz="1400" dirty="0"/>
+                <a:t>Number of filters</a:t>
+              </a:r>
+              <a:endParaRPr lang="zh-HK" altLang="en-US" sz="1400" dirty="0"/>
+            </a:p>
+          </p:txBody>
+        </p:sp>
+        <p:sp>
+          <p:nvSpPr>
+            <p:cNvPr id="6" name="文字方塊 5">
+              <a:extLst>
+                <a:ext uri="{FF2B5EF4-FFF2-40B4-BE49-F238E27FC236}">
+                  <a16:creationId xmlns:a16="http://schemas.microsoft.com/office/drawing/2014/main" id="{C68E79B8-E8A8-4B1C-8A50-1816759AF011}"/>
+                </a:ext>
+              </a:extLst>
+            </p:cNvPr>
+            <p:cNvSpPr txBox="1"/>
+            <p:nvPr/>
+          </p:nvSpPr>
+          <p:spPr>
+            <a:xfrm>
+              <a:off x="3309907" y="2715493"/>
+              <a:ext cx="400110" cy="1046018"/>
+            </a:xfrm>
+            <a:prstGeom prst="rect">
+              <a:avLst/>
+            </a:prstGeom>
+            <a:noFill/>
+          </p:spPr>
+          <p:txBody>
+            <a:bodyPr vert="eaVert" wrap="square" rtlCol="0">
+              <a:spAutoFit/>
+            </a:bodyPr>
+            <a:lstStyle/>
+            <a:p>
+              <a:r>
+                <a:rPr lang="en-US" altLang="zh-HK" sz="1400" dirty="0"/>
+                <a:t>Accuracy(%)</a:t>
+              </a:r>
+              <a:endParaRPr lang="zh-HK" altLang="en-US" sz="1400" dirty="0"/>
+            </a:p>
+          </p:txBody>
+        </p:sp>
+      </p:grpSp>
+      <p:grpSp>
+        <p:nvGrpSpPr>
+          <p:cNvPr id="11" name="群組 10">
+            <a:extLst>
+              <a:ext uri="{FF2B5EF4-FFF2-40B4-BE49-F238E27FC236}">
+                <a16:creationId xmlns:a16="http://schemas.microsoft.com/office/drawing/2014/main" id="{7EB1AFE6-222B-467B-B15B-79BAEDE93780}"/>
+              </a:ext>
+            </a:extLst>
+          </p:cNvPr>
+          <p:cNvGrpSpPr/>
+          <p:nvPr/>
+        </p:nvGrpSpPr>
+        <p:grpSpPr>
+          <a:xfrm>
+            <a:off x="6240982" y="2403766"/>
+            <a:ext cx="5415164" cy="4087713"/>
+            <a:chOff x="6240982" y="2403766"/>
+            <a:chExt cx="5415164" cy="4087713"/>
+          </a:xfrm>
+        </p:grpSpPr>
+        <p:pic>
+          <p:nvPicPr>
+            <p:cNvPr id="8" name="圖片 7">
+              <a:extLst>
+                <a:ext uri="{FF2B5EF4-FFF2-40B4-BE49-F238E27FC236}">
+                  <a16:creationId xmlns:a16="http://schemas.microsoft.com/office/drawing/2014/main" id="{595A9C41-F578-46E7-BB55-2A35375DEEA3}"/>
+                </a:ext>
+              </a:extLst>
+            </p:cNvPr>
+            <p:cNvPicPr>
+              <a:picLocks noChangeAspect="1"/>
+            </p:cNvPicPr>
+            <p:nvPr/>
+          </p:nvPicPr>
+          <p:blipFill>
+            <a:blip r:embed="rId3"/>
+            <a:stretch>
+              <a:fillRect/>
+            </a:stretch>
+          </p:blipFill>
+          <p:spPr>
+            <a:xfrm>
+              <a:off x="6484071" y="2403766"/>
+              <a:ext cx="5172075" cy="3933825"/>
+            </a:xfrm>
+            <a:prstGeom prst="rect">
+              <a:avLst/>
+            </a:prstGeom>
+          </p:spPr>
+        </p:pic>
+        <p:sp>
+          <p:nvSpPr>
+            <p:cNvPr id="9" name="文字方塊 8">
+              <a:extLst>
+                <a:ext uri="{FF2B5EF4-FFF2-40B4-BE49-F238E27FC236}">
+                  <a16:creationId xmlns:a16="http://schemas.microsoft.com/office/drawing/2014/main" id="{4F56B807-4AC1-4591-87B0-BBA2DC116425}"/>
+                </a:ext>
+              </a:extLst>
+            </p:cNvPr>
+            <p:cNvSpPr txBox="1"/>
+            <p:nvPr/>
+          </p:nvSpPr>
+          <p:spPr>
+            <a:xfrm>
+              <a:off x="8723748" y="6183702"/>
+              <a:ext cx="1177634" cy="307777"/>
+            </a:xfrm>
+            <a:prstGeom prst="rect">
+              <a:avLst/>
+            </a:prstGeom>
+            <a:noFill/>
+          </p:spPr>
+          <p:txBody>
+            <a:bodyPr wrap="square" rtlCol="0">
+              <a:spAutoFit/>
+            </a:bodyPr>
+            <a:lstStyle/>
+            <a:p>
+              <a:r>
+                <a:rPr lang="en-US" altLang="zh-HK" sz="1400" dirty="0"/>
+                <a:t>Standardized</a:t>
+              </a:r>
+              <a:endParaRPr lang="zh-HK" altLang="en-US" sz="1400" dirty="0"/>
+            </a:p>
+          </p:txBody>
+        </p:sp>
+        <p:sp>
+          <p:nvSpPr>
+            <p:cNvPr id="10" name="文字方塊 9">
+              <a:extLst>
+                <a:ext uri="{FF2B5EF4-FFF2-40B4-BE49-F238E27FC236}">
+                  <a16:creationId xmlns:a16="http://schemas.microsoft.com/office/drawing/2014/main" id="{C0561424-0F8A-4FB2-AAE2-B45FBE37BD17}"/>
+                </a:ext>
+              </a:extLst>
+            </p:cNvPr>
+            <p:cNvSpPr txBox="1"/>
+            <p:nvPr/>
+          </p:nvSpPr>
+          <p:spPr>
+            <a:xfrm>
+              <a:off x="6240982" y="3736112"/>
+              <a:ext cx="400110" cy="1046018"/>
+            </a:xfrm>
+            <a:prstGeom prst="rect">
+              <a:avLst/>
+            </a:prstGeom>
+            <a:noFill/>
+          </p:spPr>
+          <p:txBody>
+            <a:bodyPr vert="eaVert" wrap="square" rtlCol="0">
+              <a:spAutoFit/>
+            </a:bodyPr>
+            <a:lstStyle/>
+            <a:p>
+              <a:r>
+                <a:rPr lang="en-US" altLang="zh-HK" sz="1400" dirty="0"/>
+                <a:t>Accuracy(%)</a:t>
+              </a:r>
+              <a:endParaRPr lang="zh-HK" altLang="en-US" sz="1400" dirty="0"/>
+            </a:p>
+          </p:txBody>
+        </p:sp>
+      </p:grpSp>
+    </p:spTree>
+    <p:extLst>
+      <p:ext uri="{BB962C8B-B14F-4D97-AF65-F5344CB8AC3E}">
+        <p14:creationId xmlns:p14="http://schemas.microsoft.com/office/powerpoint/2010/main" val="2467813089"/>
+      </p:ext>
+    </p:extLst>
+  </p:cSld>
+  <p:clrMapOvr>
+    <a:masterClrMapping/>
+  </p:clrMapOvr>
+</p:sld>
+</file>
+
+<file path=ppt/slides/slide9.xml><?xml version="1.0" encoding="utf-8"?>
+<p:sld xmlns:a="http://schemas.openxmlformats.org/drawingml/2006/main" xmlns:r="http://schemas.openxmlformats.org/officeDocument/2006/relationships" xmlns:p="http://schemas.openxmlformats.org/presentationml/2006/main">
+  <p:cSld>
+    <p:spTree>
+      <p:nvGrpSpPr>
+        <p:cNvPr id="1" name=""/>
+        <p:cNvGrpSpPr/>
+        <p:nvPr/>
+      </p:nvGrpSpPr>
+      <p:grpSpPr>
+        <a:xfrm>
+          <a:off x="0" y="0"/>
+          <a:ext cx="0" cy="0"/>
+          <a:chOff x="0" y="0"/>
+          <a:chExt cx="0" cy="0"/>
+        </a:xfrm>
+      </p:grpSpPr>
+      <p:grpSp>
+        <p:nvGrpSpPr>
+          <p:cNvPr id="7" name="群組 6">
+            <a:extLst>
+              <a:ext uri="{FF2B5EF4-FFF2-40B4-BE49-F238E27FC236}">
+                <a16:creationId xmlns:a16="http://schemas.microsoft.com/office/drawing/2014/main" id="{DDB39503-944A-46D3-9EC7-6274ECAEAF03}"/>
+              </a:ext>
+            </a:extLst>
+          </p:cNvPr>
+          <p:cNvGrpSpPr/>
+          <p:nvPr/>
+        </p:nvGrpSpPr>
+        <p:grpSpPr>
+          <a:xfrm>
+            <a:off x="3217544" y="1462087"/>
+            <a:ext cx="5464493" cy="4087713"/>
+            <a:chOff x="3217544" y="1462087"/>
+            <a:chExt cx="5464493" cy="4087713"/>
+          </a:xfrm>
+        </p:grpSpPr>
+        <p:pic>
+          <p:nvPicPr>
+            <p:cNvPr id="4" name="圖片 3">
+              <a:extLst>
+                <a:ext uri="{FF2B5EF4-FFF2-40B4-BE49-F238E27FC236}">
+                  <a16:creationId xmlns:a16="http://schemas.microsoft.com/office/drawing/2014/main" id="{101FE4E6-81D0-4B77-A1A7-C5BEEA578FBB}"/>
+                </a:ext>
+              </a:extLst>
+            </p:cNvPr>
+            <p:cNvPicPr>
+              <a:picLocks noChangeAspect="1"/>
+            </p:cNvPicPr>
+            <p:nvPr/>
+          </p:nvPicPr>
+          <p:blipFill>
+            <a:blip r:embed="rId2"/>
+            <a:stretch>
+              <a:fillRect/>
+            </a:stretch>
+          </p:blipFill>
+          <p:spPr>
+            <a:xfrm>
+              <a:off x="3509962" y="1462087"/>
+              <a:ext cx="5172075" cy="3933825"/>
+            </a:xfrm>
+            <a:prstGeom prst="rect">
+              <a:avLst/>
+            </a:prstGeom>
+          </p:spPr>
+        </p:pic>
+        <p:sp>
+          <p:nvSpPr>
+            <p:cNvPr id="5" name="文字方塊 4">
+              <a:extLst>
+                <a:ext uri="{FF2B5EF4-FFF2-40B4-BE49-F238E27FC236}">
+                  <a16:creationId xmlns:a16="http://schemas.microsoft.com/office/drawing/2014/main" id="{D743A502-87B4-490E-ABF5-711A8902F81F}"/>
+                </a:ext>
+              </a:extLst>
+            </p:cNvPr>
+            <p:cNvSpPr txBox="1"/>
+            <p:nvPr/>
+          </p:nvSpPr>
+          <p:spPr>
+            <a:xfrm>
+              <a:off x="5754255" y="5242023"/>
+              <a:ext cx="1034472" cy="307777"/>
+            </a:xfrm>
+            <a:prstGeom prst="rect">
+              <a:avLst/>
+            </a:prstGeom>
+            <a:noFill/>
+          </p:spPr>
+          <p:txBody>
+            <a:bodyPr wrap="square" rtlCol="0">
+              <a:spAutoFit/>
+            </a:bodyPr>
+            <a:lstStyle/>
+            <a:p>
+              <a:r>
+                <a:rPr lang="en-US" altLang="zh-HK" sz="1400" dirty="0"/>
+                <a:t>Kernel size</a:t>
+              </a:r>
+              <a:endParaRPr lang="zh-HK" altLang="en-US" sz="1400" dirty="0"/>
+            </a:p>
+          </p:txBody>
+        </p:sp>
+        <p:sp>
+          <p:nvSpPr>
+            <p:cNvPr id="6" name="文字方塊 5">
+              <a:extLst>
+                <a:ext uri="{FF2B5EF4-FFF2-40B4-BE49-F238E27FC236}">
+                  <a16:creationId xmlns:a16="http://schemas.microsoft.com/office/drawing/2014/main" id="{0E46AD6B-29C2-4780-B218-B2C9D2C9C3A5}"/>
+                </a:ext>
+              </a:extLst>
+            </p:cNvPr>
+            <p:cNvSpPr txBox="1"/>
+            <p:nvPr/>
+          </p:nvSpPr>
+          <p:spPr>
+            <a:xfrm>
+              <a:off x="3217544" y="2641603"/>
+              <a:ext cx="400110" cy="1046018"/>
+            </a:xfrm>
+            <a:prstGeom prst="rect">
+              <a:avLst/>
+            </a:prstGeom>
+            <a:noFill/>
+          </p:spPr>
+          <p:txBody>
+            <a:bodyPr vert="eaVert" wrap="square" rtlCol="0">
+              <a:spAutoFit/>
+            </a:bodyPr>
+            <a:lstStyle/>
+            <a:p>
+              <a:r>
+                <a:rPr lang="en-US" altLang="zh-HK" sz="1400" dirty="0"/>
+                <a:t>Accuracy(%)</a:t>
+              </a:r>
+              <a:endParaRPr lang="zh-HK" altLang="en-US" sz="1400" dirty="0"/>
+            </a:p>
+          </p:txBody>
+        </p:sp>
+      </p:grpSp>
+    </p:spTree>
+    <p:extLst>
+      <p:ext uri="{BB962C8B-B14F-4D97-AF65-F5344CB8AC3E}">
+        <p14:creationId xmlns:p14="http://schemas.microsoft.com/office/powerpoint/2010/main" val="1523492452"/>
       </p:ext>
     </p:extLst>
   </p:cSld>
